--- a/prog-diller/yazilim-sunum/Yazilim-Programlama-Dilleri-Giris.pptx
+++ b/prog-diller/yazilim-sunum/Yazilim-Programlama-Dilleri-Giris.pptx
@@ -5,56 +5,55 @@
     <p:sldMasterId id="2147483648" r:id="rId1"/>
   </p:sldMasterIdLst>
   <p:notesMasterIdLst>
-    <p:notesMasterId r:id="rId49"/>
+    <p:notesMasterId r:id="rId48"/>
   </p:notesMasterIdLst>
   <p:sldIdLst>
     <p:sldId id="256" r:id="rId2"/>
-    <p:sldId id="309" r:id="rId3"/>
-    <p:sldId id="310" r:id="rId4"/>
-    <p:sldId id="257" r:id="rId5"/>
-    <p:sldId id="305" r:id="rId6"/>
-    <p:sldId id="259" r:id="rId7"/>
-    <p:sldId id="319" r:id="rId8"/>
-    <p:sldId id="311" r:id="rId9"/>
-    <p:sldId id="314" r:id="rId10"/>
-    <p:sldId id="313" r:id="rId11"/>
-    <p:sldId id="312" r:id="rId12"/>
-    <p:sldId id="303" r:id="rId13"/>
-    <p:sldId id="260" r:id="rId14"/>
-    <p:sldId id="261" r:id="rId15"/>
-    <p:sldId id="262" r:id="rId16"/>
-    <p:sldId id="263" r:id="rId17"/>
-    <p:sldId id="264" r:id="rId18"/>
-    <p:sldId id="288" r:id="rId19"/>
-    <p:sldId id="287" r:id="rId20"/>
-    <p:sldId id="286" r:id="rId21"/>
-    <p:sldId id="289" r:id="rId22"/>
-    <p:sldId id="285" r:id="rId23"/>
-    <p:sldId id="265" r:id="rId24"/>
-    <p:sldId id="306" r:id="rId25"/>
-    <p:sldId id="307" r:id="rId26"/>
-    <p:sldId id="304" r:id="rId27"/>
-    <p:sldId id="266" r:id="rId28"/>
-    <p:sldId id="293" r:id="rId29"/>
-    <p:sldId id="294" r:id="rId30"/>
-    <p:sldId id="300" r:id="rId31"/>
-    <p:sldId id="267" r:id="rId32"/>
-    <p:sldId id="268" r:id="rId33"/>
-    <p:sldId id="269" r:id="rId34"/>
-    <p:sldId id="290" r:id="rId35"/>
-    <p:sldId id="291" r:id="rId36"/>
-    <p:sldId id="292" r:id="rId37"/>
-    <p:sldId id="302" r:id="rId38"/>
-    <p:sldId id="271" r:id="rId39"/>
-    <p:sldId id="317" r:id="rId40"/>
-    <p:sldId id="295" r:id="rId41"/>
-    <p:sldId id="296" r:id="rId42"/>
-    <p:sldId id="297" r:id="rId43"/>
-    <p:sldId id="298" r:id="rId44"/>
-    <p:sldId id="316" r:id="rId45"/>
-    <p:sldId id="272" r:id="rId46"/>
-    <p:sldId id="301" r:id="rId47"/>
-    <p:sldId id="318" r:id="rId48"/>
+    <p:sldId id="259" r:id="rId3"/>
+    <p:sldId id="303" r:id="rId4"/>
+    <p:sldId id="309" r:id="rId5"/>
+    <p:sldId id="310" r:id="rId6"/>
+    <p:sldId id="257" r:id="rId7"/>
+    <p:sldId id="305" r:id="rId8"/>
+    <p:sldId id="319" r:id="rId9"/>
+    <p:sldId id="311" r:id="rId10"/>
+    <p:sldId id="314" r:id="rId11"/>
+    <p:sldId id="313" r:id="rId12"/>
+    <p:sldId id="312" r:id="rId13"/>
+    <p:sldId id="261" r:id="rId14"/>
+    <p:sldId id="262" r:id="rId15"/>
+    <p:sldId id="263" r:id="rId16"/>
+    <p:sldId id="264" r:id="rId17"/>
+    <p:sldId id="288" r:id="rId18"/>
+    <p:sldId id="287" r:id="rId19"/>
+    <p:sldId id="286" r:id="rId20"/>
+    <p:sldId id="289" r:id="rId21"/>
+    <p:sldId id="285" r:id="rId22"/>
+    <p:sldId id="265" r:id="rId23"/>
+    <p:sldId id="306" r:id="rId24"/>
+    <p:sldId id="307" r:id="rId25"/>
+    <p:sldId id="304" r:id="rId26"/>
+    <p:sldId id="266" r:id="rId27"/>
+    <p:sldId id="293" r:id="rId28"/>
+    <p:sldId id="294" r:id="rId29"/>
+    <p:sldId id="300" r:id="rId30"/>
+    <p:sldId id="267" r:id="rId31"/>
+    <p:sldId id="268" r:id="rId32"/>
+    <p:sldId id="269" r:id="rId33"/>
+    <p:sldId id="290" r:id="rId34"/>
+    <p:sldId id="291" r:id="rId35"/>
+    <p:sldId id="292" r:id="rId36"/>
+    <p:sldId id="302" r:id="rId37"/>
+    <p:sldId id="271" r:id="rId38"/>
+    <p:sldId id="317" r:id="rId39"/>
+    <p:sldId id="295" r:id="rId40"/>
+    <p:sldId id="296" r:id="rId41"/>
+    <p:sldId id="297" r:id="rId42"/>
+    <p:sldId id="298" r:id="rId43"/>
+    <p:sldId id="316" r:id="rId44"/>
+    <p:sldId id="272" r:id="rId45"/>
+    <p:sldId id="301" r:id="rId46"/>
+    <p:sldId id="318" r:id="rId47"/>
   </p:sldIdLst>
   <p:sldSz cx="12192000" cy="6858000"/>
   <p:notesSz cx="6858000" cy="9144000"/>
@@ -1758,7 +1757,7 @@
           <a:p>
             <a:fld id="{C1588F4E-3675-40DB-9220-26466038BC35}" type="datetimeFigureOut">
               <a:rPr lang="tr-TR" smtClean="0"/>
-              <a:t>25.09.2026</a:t>
+              <a:t>3.10.2026</a:t>
             </a:fld>
             <a:endParaRPr lang="tr-TR"/>
           </a:p>
@@ -2256,7 +2255,7 @@
           <a:p>
             <a:fld id="{B341F49D-51DC-4353-AA5E-05FE8786A758}" type="datetime1">
               <a:rPr lang="tr-TR" smtClean="0"/>
-              <a:t>25.09.2026</a:t>
+              <a:t>3.10.2026</a:t>
             </a:fld>
             <a:endParaRPr lang="tr-TR"/>
           </a:p>
@@ -2457,7 +2456,7 @@
           <a:p>
             <a:fld id="{E62381A7-30B7-42F3-9FAA-B0CA7D840D09}" type="datetime1">
               <a:rPr lang="tr-TR" smtClean="0"/>
-              <a:t>25.09.2026</a:t>
+              <a:t>3.10.2026</a:t>
             </a:fld>
             <a:endParaRPr lang="tr-TR"/>
           </a:p>
@@ -2668,7 +2667,7 @@
           <a:p>
             <a:fld id="{59DB5FF5-A25E-4962-9109-204BA4BAC34F}" type="datetime1">
               <a:rPr lang="tr-TR" smtClean="0"/>
-              <a:t>25.09.2026</a:t>
+              <a:t>3.10.2026</a:t>
             </a:fld>
             <a:endParaRPr lang="tr-TR"/>
           </a:p>
@@ -2869,7 +2868,7 @@
           <a:p>
             <a:fld id="{E5A72F27-F128-4B68-926B-C496DC38618F}" type="datetime1">
               <a:rPr lang="tr-TR" smtClean="0"/>
-              <a:t>25.09.2026</a:t>
+              <a:t>3.10.2026</a:t>
             </a:fld>
             <a:endParaRPr lang="tr-TR"/>
           </a:p>
@@ -3147,7 +3146,7 @@
           <a:p>
             <a:fld id="{296B5E9F-399B-4CBC-87EE-198C34067A1D}" type="datetime1">
               <a:rPr lang="tr-TR" smtClean="0"/>
-              <a:t>25.09.2026</a:t>
+              <a:t>3.10.2026</a:t>
             </a:fld>
             <a:endParaRPr lang="tr-TR"/>
           </a:p>
@@ -3415,7 +3414,7 @@
           <a:p>
             <a:fld id="{9AEEAF4F-0C2D-439E-BD32-BCCB7DCDA994}" type="datetime1">
               <a:rPr lang="tr-TR" smtClean="0"/>
-              <a:t>25.09.2026</a:t>
+              <a:t>3.10.2026</a:t>
             </a:fld>
             <a:endParaRPr lang="tr-TR"/>
           </a:p>
@@ -3830,7 +3829,7 @@
           <a:p>
             <a:fld id="{0A76AC57-E932-4B31-8A8B-90137E7295CB}" type="datetime1">
               <a:rPr lang="tr-TR" smtClean="0"/>
-              <a:t>25.09.2026</a:t>
+              <a:t>3.10.2026</a:t>
             </a:fld>
             <a:endParaRPr lang="tr-TR"/>
           </a:p>
@@ -3974,7 +3973,7 @@
           <a:p>
             <a:fld id="{53BFBF74-6E94-4323-A735-12508C54A430}" type="datetime1">
               <a:rPr lang="tr-TR" smtClean="0"/>
-              <a:t>25.09.2026</a:t>
+              <a:t>3.10.2026</a:t>
             </a:fld>
             <a:endParaRPr lang="tr-TR"/>
           </a:p>
@@ -4090,7 +4089,7 @@
           <a:p>
             <a:fld id="{8872924C-4DA0-4B68-B1C3-68ED2F1D36BB}" type="datetime1">
               <a:rPr lang="tr-TR" smtClean="0"/>
-              <a:t>25.09.2026</a:t>
+              <a:t>3.10.2026</a:t>
             </a:fld>
             <a:endParaRPr lang="tr-TR"/>
           </a:p>
@@ -4404,7 +4403,7 @@
           <a:p>
             <a:fld id="{A4145484-6478-4CA1-986F-3503D418C519}" type="datetime1">
               <a:rPr lang="tr-TR" smtClean="0"/>
-              <a:t>25.09.2026</a:t>
+              <a:t>3.10.2026</a:t>
             </a:fld>
             <a:endParaRPr lang="tr-TR"/>
           </a:p>
@@ -4695,7 +4694,7 @@
           <a:p>
             <a:fld id="{8EECA174-3F35-4EC9-8602-0BE460802ABF}" type="datetime1">
               <a:rPr lang="tr-TR" smtClean="0"/>
-              <a:t>25.09.2026</a:t>
+              <a:t>3.10.2026</a:t>
             </a:fld>
             <a:endParaRPr lang="tr-TR"/>
           </a:p>
@@ -4939,7 +4938,7 @@
           <a:p>
             <a:fld id="{A8191261-EC42-4438-8A8B-1E35F059B980}" type="datetime1">
               <a:rPr lang="tr-TR" smtClean="0"/>
-              <a:t>25.09.2026</a:t>
+              <a:t>3.10.2026</a:t>
             </a:fld>
             <a:endParaRPr lang="tr-TR"/>
           </a:p>
@@ -5360,6 +5359,42 @@
           <a:chExt cx="0" cy="0"/>
         </a:xfrm>
       </p:grpSpPr>
+      <p:pic>
+        <p:nvPicPr>
+          <p:cNvPr id="6" name="Resim 5">
+            <a:extLst>
+              <a:ext uri="{FF2B5EF4-FFF2-40B4-BE49-F238E27FC236}">
+                <a16:creationId xmlns:a16="http://schemas.microsoft.com/office/drawing/2014/main" id="{0FDA4948-69C5-C5E9-DFBE-933049391CCD}"/>
+              </a:ext>
+            </a:extLst>
+          </p:cNvPr>
+          <p:cNvPicPr>
+            <a:picLocks noChangeAspect="1"/>
+          </p:cNvPicPr>
+          <p:nvPr/>
+        </p:nvPicPr>
+        <p:blipFill>
+          <a:blip r:embed="rId3">
+            <a:extLst>
+              <a:ext uri="{28A0092B-C50C-407E-A947-70E740481C1C}">
+                <a14:useLocalDpi xmlns:a14="http://schemas.microsoft.com/office/drawing/2010/main" val="0"/>
+              </a:ext>
+            </a:extLst>
+          </a:blip>
+          <a:stretch>
+            <a:fillRect/>
+          </a:stretch>
+        </p:blipFill>
+        <p:spPr>
+          <a:xfrm>
+            <a:off x="5809394" y="2026241"/>
+            <a:ext cx="5708727" cy="2481660"/>
+          </a:xfrm>
+          <a:prstGeom prst="rect">
+            <a:avLst/>
+          </a:prstGeom>
+        </p:spPr>
+      </p:pic>
       <p:sp>
         <p:nvSpPr>
           <p:cNvPr id="2" name="Başlık 1">
@@ -5378,8 +5413,8 @@
         </p:nvSpPr>
         <p:spPr>
           <a:xfrm>
-            <a:off x="1524000" y="541188"/>
-            <a:ext cx="9144000" cy="825909"/>
+            <a:off x="1524000" y="439268"/>
+            <a:ext cx="9144000" cy="623026"/>
           </a:xfrm>
         </p:spPr>
         <p:txBody>
@@ -5420,7 +5455,7 @@
         </p:spPr>
         <p:txBody>
           <a:bodyPr>
-            <a:normAutofit/>
+            <a:normAutofit fontScale="92500" lnSpcReduction="20000"/>
           </a:bodyPr>
           <a:lstStyle/>
           <a:p>
@@ -5431,7 +5466,7 @@
             </a:r>
             <a:r>
               <a:rPr lang="tr-TR" dirty="0">
-                <a:hlinkClick r:id="rId3"/>
+                <a:hlinkClick r:id="rId4"/>
               </a:rPr>
               <a:t>h.altay@gmail.com</a:t>
             </a:r>
@@ -5461,19 +5496,37 @@
           </a:p>
           <a:p>
             <a:pPr algn="l"/>
+            <a:endParaRPr lang="tr-TR" dirty="0">
+              <a:hlinkClick r:id="rId5"/>
+            </a:endParaRPr>
+          </a:p>
+          <a:p>
+            <a:pPr algn="l"/>
+            <a:r>
+              <a:rPr lang="tr-TR" dirty="0">
+                <a:hlinkClick r:id="rId5"/>
+              </a:rPr>
+              <a:t>https://harunaltay.github.io</a:t>
+            </a:r>
+            <a:r>
+              <a:rPr lang="tr-TR" dirty="0"/>
+              <a:t> </a:t>
+            </a:r>
+          </a:p>
+          <a:p>
+            <a:pPr algn="l"/>
             <a:endParaRPr lang="tr-TR" dirty="0"/>
           </a:p>
           <a:p>
             <a:pPr algn="l"/>
             <a:r>
+              <a:rPr lang="tr-TR"/>
+              <a:t>2026 10 02 </a:t>
+            </a:r>
+            <a:r>
               <a:rPr lang="tr-TR" dirty="0"/>
-              <a:t>2026 09 </a:t>
-            </a:r>
-            <a:r>
-              <a:rPr lang="tr-TR"/>
-              <a:t>25 Cuma</a:t>
-            </a:r>
-            <a:endParaRPr lang="tr-TR" dirty="0"/>
+              <a:t>Cuma</a:t>
+            </a:r>
           </a:p>
         </p:txBody>
       </p:sp>
@@ -5491,8 +5544,8 @@
         </p:nvSpPr>
         <p:spPr>
           <a:xfrm>
-            <a:off x="1838634" y="1411555"/>
-            <a:ext cx="7964129" cy="461665"/>
+            <a:off x="1524000" y="1088822"/>
+            <a:ext cx="8884024" cy="830997"/>
           </a:xfrm>
           <a:prstGeom prst="rect">
             <a:avLst/>
@@ -5508,47 +5561,26 @@
             <a:pPr algn="ctr"/>
             <a:r>
               <a:rPr lang="tr-TR" sz="2400" dirty="0"/>
-              <a:t>Seminer, Sıfırdan, Hiç Bilmeyenlere</a:t>
+              <a:t>Seminer, Brifing, Yönetici Özeti (Management </a:t>
+            </a:r>
+            <a:r>
+              <a:rPr lang="tr-TR" sz="2400" dirty="0" err="1"/>
+              <a:t>Summary</a:t>
+            </a:r>
+            <a:r>
+              <a:rPr lang="tr-TR" sz="2400" dirty="0"/>
+              <a:t>), Eğitim</a:t>
+            </a:r>
+          </a:p>
+          <a:p>
+            <a:pPr algn="ctr"/>
+            <a:r>
+              <a:rPr lang="tr-TR" sz="2400" dirty="0"/>
+              <a:t> Sıfırdan, Hiç Bilmeyenlere</a:t>
             </a:r>
           </a:p>
         </p:txBody>
       </p:sp>
-      <p:pic>
-        <p:nvPicPr>
-          <p:cNvPr id="6" name="Resim 5">
-            <a:extLst>
-              <a:ext uri="{FF2B5EF4-FFF2-40B4-BE49-F238E27FC236}">
-                <a16:creationId xmlns:a16="http://schemas.microsoft.com/office/drawing/2014/main" id="{0FDA4948-69C5-C5E9-DFBE-933049391CCD}"/>
-              </a:ext>
-            </a:extLst>
-          </p:cNvPr>
-          <p:cNvPicPr>
-            <a:picLocks noChangeAspect="1"/>
-          </p:cNvPicPr>
-          <p:nvPr/>
-        </p:nvPicPr>
-        <p:blipFill>
-          <a:blip r:embed="rId4">
-            <a:extLst>
-              <a:ext uri="{28A0092B-C50C-407E-A947-70E740481C1C}">
-                <a14:useLocalDpi xmlns:a14="http://schemas.microsoft.com/office/drawing/2010/main" val="0"/>
-              </a:ext>
-            </a:extLst>
-          </a:blip>
-          <a:stretch>
-            <a:fillRect/>
-          </a:stretch>
-        </p:blipFill>
-        <p:spPr>
-          <a:xfrm>
-            <a:off x="5809394" y="2026241"/>
-            <a:ext cx="5708727" cy="2481660"/>
-          </a:xfrm>
-          <a:prstGeom prst="rect">
-            <a:avLst/>
-          </a:prstGeom>
-        </p:spPr>
-      </p:pic>
     </p:spTree>
     <p:extLst>
       <p:ext uri="{BB962C8B-B14F-4D97-AF65-F5344CB8AC3E}">
@@ -5563,6 +5595,260 @@
 </file>
 
 <file path=ppt/slides/slide10.xml><?xml version="1.0" encoding="utf-8"?>
+<p:sld xmlns:a="http://schemas.openxmlformats.org/drawingml/2006/main" xmlns:r="http://schemas.openxmlformats.org/officeDocument/2006/relationships" xmlns:p="http://schemas.openxmlformats.org/presentationml/2006/main">
+  <p:cSld>
+    <p:spTree>
+      <p:nvGrpSpPr>
+        <p:cNvPr id="1" name="">
+          <a:extLst>
+            <a:ext uri="{FF2B5EF4-FFF2-40B4-BE49-F238E27FC236}">
+              <a16:creationId xmlns:a16="http://schemas.microsoft.com/office/drawing/2014/main" id="{F66C4B87-0194-DE33-1678-0AC4A6CFC256}"/>
+            </a:ext>
+          </a:extLst>
+        </p:cNvPr>
+        <p:cNvGrpSpPr/>
+        <p:nvPr/>
+      </p:nvGrpSpPr>
+      <p:grpSpPr>
+        <a:xfrm>
+          <a:off x="0" y="0"/>
+          <a:ext cx="0" cy="0"/>
+          <a:chOff x="0" y="0"/>
+          <a:chExt cx="0" cy="0"/>
+        </a:xfrm>
+      </p:grpSpPr>
+      <p:pic>
+        <p:nvPicPr>
+          <p:cNvPr id="4" name="Resim 3">
+            <a:extLst>
+              <a:ext uri="{FF2B5EF4-FFF2-40B4-BE49-F238E27FC236}">
+                <a16:creationId xmlns:a16="http://schemas.microsoft.com/office/drawing/2014/main" id="{31BF3C76-AC2B-E01D-120A-745F2D108F8F}"/>
+              </a:ext>
+            </a:extLst>
+          </p:cNvPr>
+          <p:cNvPicPr>
+            <a:picLocks noChangeAspect="1"/>
+          </p:cNvPicPr>
+          <p:nvPr/>
+        </p:nvPicPr>
+        <p:blipFill>
+          <a:blip r:embed="rId2">
+            <a:extLst>
+              <a:ext uri="{28A0092B-C50C-407E-A947-70E740481C1C}">
+                <a14:useLocalDpi xmlns:a14="http://schemas.microsoft.com/office/drawing/2010/main" val="0"/>
+              </a:ext>
+            </a:extLst>
+          </a:blip>
+          <a:stretch>
+            <a:fillRect/>
+          </a:stretch>
+        </p:blipFill>
+        <p:spPr>
+          <a:xfrm>
+            <a:off x="349521" y="509395"/>
+            <a:ext cx="7606963" cy="4278916"/>
+          </a:xfrm>
+          <a:prstGeom prst="rect">
+            <a:avLst/>
+          </a:prstGeom>
+        </p:spPr>
+      </p:pic>
+      <p:sp>
+        <p:nvSpPr>
+          <p:cNvPr id="3" name="Metin kutusu 2">
+            <a:extLst>
+              <a:ext uri="{FF2B5EF4-FFF2-40B4-BE49-F238E27FC236}">
+                <a16:creationId xmlns:a16="http://schemas.microsoft.com/office/drawing/2014/main" id="{A5CB9D32-66E2-73EB-2B9E-C177A703916B}"/>
+              </a:ext>
+            </a:extLst>
+          </p:cNvPr>
+          <p:cNvSpPr txBox="1"/>
+          <p:nvPr/>
+        </p:nvSpPr>
+        <p:spPr>
+          <a:xfrm>
+            <a:off x="8192361" y="827194"/>
+            <a:ext cx="3764595" cy="1815882"/>
+          </a:xfrm>
+          <a:prstGeom prst="rect">
+            <a:avLst/>
+          </a:prstGeom>
+          <a:noFill/>
+        </p:spPr>
+        <p:txBody>
+          <a:bodyPr wrap="square" rtlCol="0">
+            <a:spAutoFit/>
+          </a:bodyPr>
+          <a:lstStyle/>
+          <a:p>
+            <a:r>
+              <a:rPr lang="tr-TR" sz="2800" dirty="0"/>
+              <a:t>Bilgisayar çeşitlerine örnek olarak, sadece «</a:t>
+            </a:r>
+            <a:r>
+              <a:rPr lang="tr-TR" sz="2800" dirty="0" err="1"/>
+              <a:t>iot</a:t>
+            </a:r>
+            <a:r>
+              <a:rPr lang="tr-TR" sz="2800" dirty="0"/>
+              <a:t>» cihazlarının bazı çeşitleri</a:t>
+            </a:r>
+          </a:p>
+        </p:txBody>
+      </p:sp>
+      <p:sp>
+        <p:nvSpPr>
+          <p:cNvPr id="6" name="Metin kutusu 5">
+            <a:extLst>
+              <a:ext uri="{FF2B5EF4-FFF2-40B4-BE49-F238E27FC236}">
+                <a16:creationId xmlns:a16="http://schemas.microsoft.com/office/drawing/2014/main" id="{DCE0AEC4-2002-1FC9-A168-BBF68E5DB4C0}"/>
+              </a:ext>
+            </a:extLst>
+          </p:cNvPr>
+          <p:cNvSpPr txBox="1"/>
+          <p:nvPr/>
+        </p:nvSpPr>
+        <p:spPr>
+          <a:xfrm>
+            <a:off x="8192361" y="2841523"/>
+            <a:ext cx="3411793" cy="1477328"/>
+          </a:xfrm>
+          <a:prstGeom prst="rect">
+            <a:avLst/>
+          </a:prstGeom>
+          <a:noFill/>
+        </p:spPr>
+        <p:txBody>
+          <a:bodyPr wrap="square" rtlCol="0">
+            <a:spAutoFit/>
+          </a:bodyPr>
+          <a:lstStyle/>
+          <a:p>
+            <a:r>
+              <a:rPr lang="tr-TR" dirty="0" err="1"/>
+              <a:t>İot</a:t>
+            </a:r>
+            <a:r>
+              <a:rPr lang="tr-TR" dirty="0"/>
+              <a:t>: (internet of </a:t>
+            </a:r>
+            <a:r>
+              <a:rPr lang="tr-TR" dirty="0" err="1"/>
+              <a:t>things</a:t>
+            </a:r>
+            <a:r>
+              <a:rPr lang="tr-TR" dirty="0"/>
+              <a:t>):</a:t>
+            </a:r>
+          </a:p>
+          <a:p>
+            <a:r>
+              <a:rPr lang="tr-TR" dirty="0"/>
+              <a:t>Birbirine internet ve benzeri bir bağ ile bağlanmış, küçüklü büyüklü cihazlar, donanımı ile yazılımı ile beraber</a:t>
+            </a:r>
+          </a:p>
+        </p:txBody>
+      </p:sp>
+      <p:sp>
+        <p:nvSpPr>
+          <p:cNvPr id="2" name="Veri Yer Tutucusu 1">
+            <a:extLst>
+              <a:ext uri="{FF2B5EF4-FFF2-40B4-BE49-F238E27FC236}">
+                <a16:creationId xmlns:a16="http://schemas.microsoft.com/office/drawing/2014/main" id="{CEE04E5D-A0DE-B3F0-E359-A42AD0AC578F}"/>
+              </a:ext>
+            </a:extLst>
+          </p:cNvPr>
+          <p:cNvSpPr>
+            <a:spLocks noGrp="1"/>
+          </p:cNvSpPr>
+          <p:nvPr>
+            <p:ph type="dt" sz="half" idx="10"/>
+          </p:nvPr>
+        </p:nvSpPr>
+        <p:spPr/>
+        <p:txBody>
+          <a:bodyPr/>
+          <a:lstStyle/>
+          <a:p>
+            <a:fld id="{D91DE6A9-2411-46E2-B574-284264D3EA73}" type="datetime1">
+              <a:rPr lang="tr-TR" smtClean="0"/>
+              <a:t>3.10.2026</a:t>
+            </a:fld>
+            <a:endParaRPr lang="tr-TR"/>
+          </a:p>
+        </p:txBody>
+      </p:sp>
+      <p:sp>
+        <p:nvSpPr>
+          <p:cNvPr id="5" name="Alt Bilgi Yer Tutucusu 4">
+            <a:extLst>
+              <a:ext uri="{FF2B5EF4-FFF2-40B4-BE49-F238E27FC236}">
+                <a16:creationId xmlns:a16="http://schemas.microsoft.com/office/drawing/2014/main" id="{D11EB380-22FE-F038-7F3F-4408A52B8CE7}"/>
+              </a:ext>
+            </a:extLst>
+          </p:cNvPr>
+          <p:cNvSpPr>
+            <a:spLocks noGrp="1"/>
+          </p:cNvSpPr>
+          <p:nvPr>
+            <p:ph type="ftr" sz="quarter" idx="11"/>
+          </p:nvPr>
+        </p:nvSpPr>
+        <p:spPr/>
+        <p:txBody>
+          <a:bodyPr/>
+          <a:lstStyle/>
+          <a:p>
+            <a:r>
+              <a:rPr lang="tr-TR"/>
+              <a:t>Copyright: Harun Altay</a:t>
+            </a:r>
+          </a:p>
+        </p:txBody>
+      </p:sp>
+      <p:sp>
+        <p:nvSpPr>
+          <p:cNvPr id="7" name="Slayt Numarası Yer Tutucusu 6">
+            <a:extLst>
+              <a:ext uri="{FF2B5EF4-FFF2-40B4-BE49-F238E27FC236}">
+                <a16:creationId xmlns:a16="http://schemas.microsoft.com/office/drawing/2014/main" id="{77043C78-A403-9F94-E41B-A607C2FDE2D7}"/>
+              </a:ext>
+            </a:extLst>
+          </p:cNvPr>
+          <p:cNvSpPr>
+            <a:spLocks noGrp="1"/>
+          </p:cNvSpPr>
+          <p:nvPr>
+            <p:ph type="sldNum" sz="quarter" idx="12"/>
+          </p:nvPr>
+        </p:nvSpPr>
+        <p:spPr/>
+        <p:txBody>
+          <a:bodyPr/>
+          <a:lstStyle/>
+          <a:p>
+            <a:fld id="{556A583B-49D3-4431-A76E-53060577655C}" type="slidenum">
+              <a:rPr lang="tr-TR" smtClean="0"/>
+              <a:t>10</a:t>
+            </a:fld>
+            <a:endParaRPr lang="tr-TR"/>
+          </a:p>
+        </p:txBody>
+      </p:sp>
+    </p:spTree>
+    <p:extLst>
+      <p:ext uri="{BB962C8B-B14F-4D97-AF65-F5344CB8AC3E}">
+        <p14:creationId xmlns:p14="http://schemas.microsoft.com/office/powerpoint/2010/main" val="348304317"/>
+      </p:ext>
+    </p:extLst>
+  </p:cSld>
+  <p:clrMapOvr>
+    <a:masterClrMapping/>
+  </p:clrMapOvr>
+</p:sld>
+</file>
+
+<file path=ppt/slides/slide11.xml><?xml version="1.0" encoding="utf-8"?>
 <p:sld xmlns:a="http://schemas.openxmlformats.org/drawingml/2006/main" xmlns:r="http://schemas.openxmlformats.org/officeDocument/2006/relationships" xmlns:p="http://schemas.openxmlformats.org/presentationml/2006/main">
   <p:cSld>
     <p:spTree>
@@ -5679,7 +5965,7 @@
           <a:p>
             <a:fld id="{C0AA646A-5437-49DA-951A-D7D791F9EE00}" type="datetime1">
               <a:rPr lang="tr-TR" smtClean="0"/>
-              <a:t>25.09.2026</a:t>
+              <a:t>3.10.2026</a:t>
             </a:fld>
             <a:endParaRPr lang="tr-TR"/>
           </a:p>
@@ -5736,7 +6022,7 @@
           <a:p>
             <a:fld id="{556A583B-49D3-4431-A76E-53060577655C}" type="slidenum">
               <a:rPr lang="tr-TR" smtClean="0"/>
-              <a:t>10</a:t>
+              <a:t>11</a:t>
             </a:fld>
             <a:endParaRPr lang="tr-TR"/>
           </a:p>
@@ -5755,7 +6041,7 @@
 </p:sld>
 </file>
 
-<file path=ppt/slides/slide11.xml><?xml version="1.0" encoding="utf-8"?>
+<file path=ppt/slides/slide12.xml><?xml version="1.0" encoding="utf-8"?>
 <p:sld xmlns:a="http://schemas.openxmlformats.org/drawingml/2006/main" xmlns:r="http://schemas.openxmlformats.org/officeDocument/2006/relationships" xmlns:p="http://schemas.openxmlformats.org/presentationml/2006/main">
   <p:cSld>
     <p:spTree>
@@ -5872,7 +6158,7 @@
           <a:p>
             <a:fld id="{3DCC6A6F-D769-4D7D-90A6-54BF9D528B41}" type="datetime1">
               <a:rPr lang="tr-TR" smtClean="0"/>
-              <a:t>25.09.2026</a:t>
+              <a:t>3.10.2026</a:t>
             </a:fld>
             <a:endParaRPr lang="tr-TR"/>
           </a:p>
@@ -5929,7 +6215,7 @@
           <a:p>
             <a:fld id="{556A583B-49D3-4431-A76E-53060577655C}" type="slidenum">
               <a:rPr lang="tr-TR" smtClean="0"/>
-              <a:t>11</a:t>
+              <a:t>12</a:t>
             </a:fld>
             <a:endParaRPr lang="tr-TR"/>
           </a:p>
@@ -5948,502 +6234,7 @@
 </p:sld>
 </file>
 
-<file path=ppt/slides/slide12.xml><?xml version="1.0" encoding="utf-8"?>
-<p:sld xmlns:a="http://schemas.openxmlformats.org/drawingml/2006/main" xmlns:r="http://schemas.openxmlformats.org/officeDocument/2006/relationships" xmlns:p="http://schemas.openxmlformats.org/presentationml/2006/main">
-  <p:cSld>
-    <p:spTree>
-      <p:nvGrpSpPr>
-        <p:cNvPr id="1" name="">
-          <a:extLst>
-            <a:ext uri="{FF2B5EF4-FFF2-40B4-BE49-F238E27FC236}">
-              <a16:creationId xmlns:a16="http://schemas.microsoft.com/office/drawing/2014/main" id="{9AA1B344-9BD0-FF69-9013-86B10D14D368}"/>
-            </a:ext>
-          </a:extLst>
-        </p:cNvPr>
-        <p:cNvGrpSpPr/>
-        <p:nvPr/>
-      </p:nvGrpSpPr>
-      <p:grpSpPr>
-        <a:xfrm>
-          <a:off x="0" y="0"/>
-          <a:ext cx="0" cy="0"/>
-          <a:chOff x="0" y="0"/>
-          <a:chExt cx="0" cy="0"/>
-        </a:xfrm>
-      </p:grpSpPr>
-      <p:sp>
-        <p:nvSpPr>
-          <p:cNvPr id="2" name="Başlık 1">
-            <a:extLst>
-              <a:ext uri="{FF2B5EF4-FFF2-40B4-BE49-F238E27FC236}">
-                <a16:creationId xmlns:a16="http://schemas.microsoft.com/office/drawing/2014/main" id="{87A23293-5DDD-F2F0-DDC8-D0D00F91217C}"/>
-              </a:ext>
-            </a:extLst>
-          </p:cNvPr>
-          <p:cNvSpPr>
-            <a:spLocks noGrp="1"/>
-          </p:cNvSpPr>
-          <p:nvPr>
-            <p:ph type="title"/>
-          </p:nvPr>
-        </p:nvSpPr>
-        <p:spPr>
-          <a:xfrm>
-            <a:off x="838200" y="365126"/>
-            <a:ext cx="10515600" cy="726256"/>
-          </a:xfrm>
-        </p:spPr>
-        <p:txBody>
-          <a:bodyPr>
-            <a:normAutofit/>
-          </a:bodyPr>
-          <a:lstStyle/>
-          <a:p>
-            <a:r>
-              <a:rPr lang="tr-TR" sz="3600" dirty="0"/>
-              <a:t>Yazılıma ve Programlama Dillerine Giriş</a:t>
-            </a:r>
-          </a:p>
-        </p:txBody>
-      </p:sp>
-      <p:sp>
-        <p:nvSpPr>
-          <p:cNvPr id="3" name="İçerik Yer Tutucusu 2">
-            <a:extLst>
-              <a:ext uri="{FF2B5EF4-FFF2-40B4-BE49-F238E27FC236}">
-                <a16:creationId xmlns:a16="http://schemas.microsoft.com/office/drawing/2014/main" id="{3B276425-024C-3BFD-A1A3-C9AA6AFEDECC}"/>
-              </a:ext>
-            </a:extLst>
-          </p:cNvPr>
-          <p:cNvSpPr>
-            <a:spLocks noGrp="1"/>
-          </p:cNvSpPr>
-          <p:nvPr>
-            <p:ph idx="1"/>
-          </p:nvPr>
-        </p:nvSpPr>
-        <p:spPr>
-          <a:xfrm>
-            <a:off x="838200" y="1091382"/>
-            <a:ext cx="10515600" cy="5220928"/>
-          </a:xfrm>
-        </p:spPr>
-        <p:txBody>
-          <a:bodyPr>
-            <a:normAutofit fontScale="85000" lnSpcReduction="20000"/>
-          </a:bodyPr>
-          <a:lstStyle/>
-          <a:p>
-            <a:r>
-              <a:rPr lang="tr-TR" dirty="0"/>
-              <a:t>Bu eğitim kimin içindir?</a:t>
-            </a:r>
-          </a:p>
-          <a:p>
-            <a:r>
-              <a:rPr lang="tr-TR" dirty="0"/>
-              <a:t>Bu eğitimin/seminerin web sayfası </a:t>
-            </a:r>
-          </a:p>
-          <a:p>
-            <a:r>
-              <a:rPr lang="tr-TR" dirty="0"/>
-              <a:t>Öğrenme kaynaklarımız nelerdir? </a:t>
-            </a:r>
-          </a:p>
-          <a:p>
-            <a:r>
-              <a:rPr lang="tr-TR" dirty="0"/>
-              <a:t>Yazılım nerelerde ve nasıl kullanılır?</a:t>
-            </a:r>
-          </a:p>
-          <a:p>
-            <a:r>
-              <a:rPr lang="tr-TR" dirty="0"/>
-              <a:t>Hangi programlama dili, hangi alanlarda, ne için kullanılır?</a:t>
-            </a:r>
-          </a:p>
-          <a:p>
-            <a:r>
-              <a:rPr lang="tr-TR" dirty="0"/>
-              <a:t>Popüler Programlama dilleri hangileridir? </a:t>
-            </a:r>
-          </a:p>
-          <a:p>
-            <a:r>
-              <a:rPr lang="tr-TR" dirty="0"/>
-              <a:t>Bir program nasıl ve nerede çalıştırılır?</a:t>
-            </a:r>
-          </a:p>
-          <a:p>
-            <a:r>
-              <a:rPr lang="tr-TR" dirty="0"/>
-              <a:t>Merhaba Dünya programı ne demektir?</a:t>
-            </a:r>
-          </a:p>
-          <a:p>
-            <a:r>
-              <a:rPr lang="tr-TR" dirty="0"/>
-              <a:t>Bilgisayarımızda yapmamız gereken ayarlar. </a:t>
-            </a:r>
-          </a:p>
-          <a:p>
-            <a:r>
-              <a:rPr lang="tr-TR" dirty="0"/>
-              <a:t>Bu eğitimde hangi programlama dillerini göreceğiz? </a:t>
-            </a:r>
-          </a:p>
-          <a:p>
-            <a:pPr lvl="1"/>
-            <a:r>
-              <a:rPr lang="tr-TR" dirty="0"/>
-              <a:t>Python</a:t>
-            </a:r>
-          </a:p>
-          <a:p>
-            <a:pPr lvl="1"/>
-            <a:r>
-              <a:rPr lang="tr-TR" dirty="0"/>
-              <a:t>C# (.NET)</a:t>
-            </a:r>
-          </a:p>
-          <a:p>
-            <a:r>
-              <a:rPr lang="tr-TR" dirty="0"/>
-              <a:t>Örnek Giriş Programları</a:t>
-            </a:r>
-          </a:p>
-          <a:p>
-            <a:r>
-              <a:rPr lang="tr-TR" dirty="0"/>
-              <a:t>Bu seminerde neler yoktur?</a:t>
-            </a:r>
-          </a:p>
-          <a:p>
-            <a:endParaRPr lang="tr-TR" dirty="0"/>
-          </a:p>
-        </p:txBody>
-      </p:sp>
-      <p:sp>
-        <p:nvSpPr>
-          <p:cNvPr id="4" name="Veri Yer Tutucusu 3">
-            <a:extLst>
-              <a:ext uri="{FF2B5EF4-FFF2-40B4-BE49-F238E27FC236}">
-                <a16:creationId xmlns:a16="http://schemas.microsoft.com/office/drawing/2014/main" id="{5937DCAD-63DA-ABDB-20B5-39864956D7D4}"/>
-              </a:ext>
-            </a:extLst>
-          </p:cNvPr>
-          <p:cNvSpPr>
-            <a:spLocks noGrp="1"/>
-          </p:cNvSpPr>
-          <p:nvPr>
-            <p:ph type="dt" sz="half" idx="10"/>
-          </p:nvPr>
-        </p:nvSpPr>
-        <p:spPr/>
-        <p:txBody>
-          <a:bodyPr/>
-          <a:lstStyle/>
-          <a:p>
-            <a:fld id="{EC2B6ACD-0C76-4F71-96B9-0FCA794ADD48}" type="datetime1">
-              <a:rPr lang="tr-TR" smtClean="0"/>
-              <a:t>25.09.2026</a:t>
-            </a:fld>
-            <a:endParaRPr lang="tr-TR"/>
-          </a:p>
-        </p:txBody>
-      </p:sp>
-      <p:sp>
-        <p:nvSpPr>
-          <p:cNvPr id="5" name="Alt Bilgi Yer Tutucusu 4">
-            <a:extLst>
-              <a:ext uri="{FF2B5EF4-FFF2-40B4-BE49-F238E27FC236}">
-                <a16:creationId xmlns:a16="http://schemas.microsoft.com/office/drawing/2014/main" id="{61463C24-5356-7329-9ED8-C875BC997A60}"/>
-              </a:ext>
-            </a:extLst>
-          </p:cNvPr>
-          <p:cNvSpPr>
-            <a:spLocks noGrp="1"/>
-          </p:cNvSpPr>
-          <p:nvPr>
-            <p:ph type="ftr" sz="quarter" idx="11"/>
-          </p:nvPr>
-        </p:nvSpPr>
-        <p:spPr/>
-        <p:txBody>
-          <a:bodyPr/>
-          <a:lstStyle/>
-          <a:p>
-            <a:r>
-              <a:rPr lang="tr-TR"/>
-              <a:t>Copyright: Harun Altay</a:t>
-            </a:r>
-          </a:p>
-        </p:txBody>
-      </p:sp>
-      <p:sp>
-        <p:nvSpPr>
-          <p:cNvPr id="6" name="Slayt Numarası Yer Tutucusu 5">
-            <a:extLst>
-              <a:ext uri="{FF2B5EF4-FFF2-40B4-BE49-F238E27FC236}">
-                <a16:creationId xmlns:a16="http://schemas.microsoft.com/office/drawing/2014/main" id="{F08D76BF-F4A3-66DD-651E-301E4C7EC7EB}"/>
-              </a:ext>
-            </a:extLst>
-          </p:cNvPr>
-          <p:cNvSpPr>
-            <a:spLocks noGrp="1"/>
-          </p:cNvSpPr>
-          <p:nvPr>
-            <p:ph type="sldNum" sz="quarter" idx="12"/>
-          </p:nvPr>
-        </p:nvSpPr>
-        <p:spPr/>
-        <p:txBody>
-          <a:bodyPr/>
-          <a:lstStyle/>
-          <a:p>
-            <a:fld id="{556A583B-49D3-4431-A76E-53060577655C}" type="slidenum">
-              <a:rPr lang="tr-TR" smtClean="0"/>
-              <a:t>12</a:t>
-            </a:fld>
-            <a:endParaRPr lang="tr-TR"/>
-          </a:p>
-        </p:txBody>
-      </p:sp>
-    </p:spTree>
-    <p:extLst>
-      <p:ext uri="{BB962C8B-B14F-4D97-AF65-F5344CB8AC3E}">
-        <p14:creationId xmlns:p14="http://schemas.microsoft.com/office/powerpoint/2010/main" val="527220079"/>
-      </p:ext>
-    </p:extLst>
-  </p:cSld>
-  <p:clrMapOvr>
-    <a:masterClrMapping/>
-  </p:clrMapOvr>
-</p:sld>
-</file>
-
 <file path=ppt/slides/slide13.xml><?xml version="1.0" encoding="utf-8"?>
-<p:sld xmlns:a="http://schemas.openxmlformats.org/drawingml/2006/main" xmlns:r="http://schemas.openxmlformats.org/officeDocument/2006/relationships" xmlns:p="http://schemas.openxmlformats.org/presentationml/2006/main">
-  <p:cSld>
-    <p:spTree>
-      <p:nvGrpSpPr>
-        <p:cNvPr id="1" name="">
-          <a:extLst>
-            <a:ext uri="{FF2B5EF4-FFF2-40B4-BE49-F238E27FC236}">
-              <a16:creationId xmlns:a16="http://schemas.microsoft.com/office/drawing/2014/main" id="{FA859118-4C67-1807-4325-558CB83899FA}"/>
-            </a:ext>
-          </a:extLst>
-        </p:cNvPr>
-        <p:cNvGrpSpPr/>
-        <p:nvPr/>
-      </p:nvGrpSpPr>
-      <p:grpSpPr>
-        <a:xfrm>
-          <a:off x="0" y="0"/>
-          <a:ext cx="0" cy="0"/>
-          <a:chOff x="0" y="0"/>
-          <a:chExt cx="0" cy="0"/>
-        </a:xfrm>
-      </p:grpSpPr>
-      <p:sp>
-        <p:nvSpPr>
-          <p:cNvPr id="2" name="Başlık 1">
-            <a:extLst>
-              <a:ext uri="{FF2B5EF4-FFF2-40B4-BE49-F238E27FC236}">
-                <a16:creationId xmlns:a16="http://schemas.microsoft.com/office/drawing/2014/main" id="{B98B078F-EBC7-4941-1C56-F3A34E7E5EC1}"/>
-              </a:ext>
-            </a:extLst>
-          </p:cNvPr>
-          <p:cNvSpPr>
-            <a:spLocks noGrp="1"/>
-          </p:cNvSpPr>
-          <p:nvPr>
-            <p:ph type="title"/>
-          </p:nvPr>
-        </p:nvSpPr>
-        <p:spPr>
-          <a:xfrm>
-            <a:off x="838200" y="365126"/>
-            <a:ext cx="10515600" cy="726256"/>
-          </a:xfrm>
-        </p:spPr>
-        <p:txBody>
-          <a:bodyPr>
-            <a:normAutofit/>
-          </a:bodyPr>
-          <a:lstStyle/>
-          <a:p>
-            <a:r>
-              <a:rPr lang="tr-TR" sz="3600" dirty="0"/>
-              <a:t>Bu eğitimin/seminerin web sayfası</a:t>
-            </a:r>
-          </a:p>
-        </p:txBody>
-      </p:sp>
-      <p:sp>
-        <p:nvSpPr>
-          <p:cNvPr id="3" name="İçerik Yer Tutucusu 2">
-            <a:extLst>
-              <a:ext uri="{FF2B5EF4-FFF2-40B4-BE49-F238E27FC236}">
-                <a16:creationId xmlns:a16="http://schemas.microsoft.com/office/drawing/2014/main" id="{C146C788-6FA4-FE25-FA52-8733CEB76085}"/>
-              </a:ext>
-            </a:extLst>
-          </p:cNvPr>
-          <p:cNvSpPr>
-            <a:spLocks noGrp="1"/>
-          </p:cNvSpPr>
-          <p:nvPr>
-            <p:ph idx="1"/>
-          </p:nvPr>
-        </p:nvSpPr>
-        <p:spPr>
-          <a:xfrm>
-            <a:off x="838200" y="1091382"/>
-            <a:ext cx="10515600" cy="5220928"/>
-          </a:xfrm>
-        </p:spPr>
-        <p:txBody>
-          <a:bodyPr>
-            <a:normAutofit/>
-          </a:bodyPr>
-          <a:lstStyle/>
-          <a:p>
-            <a:endParaRPr lang="tr-TR" dirty="0"/>
-          </a:p>
-          <a:p>
-            <a:r>
-              <a:rPr lang="tr-TR" dirty="0">
-                <a:hlinkClick r:id="rId2"/>
-              </a:rPr>
-              <a:t>https://harunaltay.github.io/</a:t>
-            </a:r>
-            <a:r>
-              <a:rPr lang="tr-TR" dirty="0"/>
-              <a:t> </a:t>
-            </a:r>
-          </a:p>
-          <a:p>
-            <a:r>
-              <a:rPr lang="tr-TR" dirty="0">
-                <a:hlinkClick r:id="rId3"/>
-              </a:rPr>
-              <a:t>https://harunaltay.github.io/python/index</a:t>
-            </a:r>
-            <a:r>
-              <a:rPr lang="tr-TR">
-                <a:hlinkClick r:id="rId3"/>
-              </a:rPr>
-              <a:t>.html</a:t>
-            </a:r>
-            <a:r>
-              <a:rPr lang="tr-TR"/>
-              <a:t> </a:t>
-            </a:r>
-            <a:endParaRPr lang="tr-TR" dirty="0"/>
-          </a:p>
-        </p:txBody>
-      </p:sp>
-      <p:sp>
-        <p:nvSpPr>
-          <p:cNvPr id="4" name="Veri Yer Tutucusu 3">
-            <a:extLst>
-              <a:ext uri="{FF2B5EF4-FFF2-40B4-BE49-F238E27FC236}">
-                <a16:creationId xmlns:a16="http://schemas.microsoft.com/office/drawing/2014/main" id="{9ED1D63A-B736-26BC-AADF-ABEDCD0FFA32}"/>
-              </a:ext>
-            </a:extLst>
-          </p:cNvPr>
-          <p:cNvSpPr>
-            <a:spLocks noGrp="1"/>
-          </p:cNvSpPr>
-          <p:nvPr>
-            <p:ph type="dt" sz="half" idx="10"/>
-          </p:nvPr>
-        </p:nvSpPr>
-        <p:spPr/>
-        <p:txBody>
-          <a:bodyPr/>
-          <a:lstStyle/>
-          <a:p>
-            <a:fld id="{45550C3B-26BB-4CD6-9309-642C6F15448D}" type="datetime1">
-              <a:rPr lang="tr-TR" smtClean="0"/>
-              <a:t>25.09.2026</a:t>
-            </a:fld>
-            <a:endParaRPr lang="tr-TR"/>
-          </a:p>
-        </p:txBody>
-      </p:sp>
-      <p:sp>
-        <p:nvSpPr>
-          <p:cNvPr id="5" name="Alt Bilgi Yer Tutucusu 4">
-            <a:extLst>
-              <a:ext uri="{FF2B5EF4-FFF2-40B4-BE49-F238E27FC236}">
-                <a16:creationId xmlns:a16="http://schemas.microsoft.com/office/drawing/2014/main" id="{69D8A4CC-2BAB-5FDE-552C-DCBE0E5394CE}"/>
-              </a:ext>
-            </a:extLst>
-          </p:cNvPr>
-          <p:cNvSpPr>
-            <a:spLocks noGrp="1"/>
-          </p:cNvSpPr>
-          <p:nvPr>
-            <p:ph type="ftr" sz="quarter" idx="11"/>
-          </p:nvPr>
-        </p:nvSpPr>
-        <p:spPr/>
-        <p:txBody>
-          <a:bodyPr/>
-          <a:lstStyle/>
-          <a:p>
-            <a:r>
-              <a:rPr lang="tr-TR"/>
-              <a:t>Copyright: Harun Altay</a:t>
-            </a:r>
-          </a:p>
-        </p:txBody>
-      </p:sp>
-      <p:sp>
-        <p:nvSpPr>
-          <p:cNvPr id="6" name="Slayt Numarası Yer Tutucusu 5">
-            <a:extLst>
-              <a:ext uri="{FF2B5EF4-FFF2-40B4-BE49-F238E27FC236}">
-                <a16:creationId xmlns:a16="http://schemas.microsoft.com/office/drawing/2014/main" id="{DBA55823-4AA1-2ED1-902D-DEBDB24395E4}"/>
-              </a:ext>
-            </a:extLst>
-          </p:cNvPr>
-          <p:cNvSpPr>
-            <a:spLocks noGrp="1"/>
-          </p:cNvSpPr>
-          <p:nvPr>
-            <p:ph type="sldNum" sz="quarter" idx="12"/>
-          </p:nvPr>
-        </p:nvSpPr>
-        <p:spPr/>
-        <p:txBody>
-          <a:bodyPr/>
-          <a:lstStyle/>
-          <a:p>
-            <a:fld id="{556A583B-49D3-4431-A76E-53060577655C}" type="slidenum">
-              <a:rPr lang="tr-TR" smtClean="0"/>
-              <a:t>13</a:t>
-            </a:fld>
-            <a:endParaRPr lang="tr-TR"/>
-          </a:p>
-        </p:txBody>
-      </p:sp>
-    </p:spTree>
-    <p:extLst>
-      <p:ext uri="{BB962C8B-B14F-4D97-AF65-F5344CB8AC3E}">
-        <p14:creationId xmlns:p14="http://schemas.microsoft.com/office/powerpoint/2010/main" val="2801110564"/>
-      </p:ext>
-    </p:extLst>
-  </p:cSld>
-  <p:clrMapOvr>
-    <a:masterClrMapping/>
-  </p:clrMapOvr>
-</p:sld>
-</file>
-
-<file path=ppt/slides/slide14.xml><?xml version="1.0" encoding="utf-8"?>
 <p:sld xmlns:a="http://schemas.openxmlformats.org/drawingml/2006/main" xmlns:r="http://schemas.openxmlformats.org/officeDocument/2006/relationships" xmlns:p="http://schemas.openxmlformats.org/presentationml/2006/main">
   <p:cSld>
     <p:spTree>
@@ -6671,7 +6462,7 @@
           <a:p>
             <a:fld id="{620F5416-4C6E-4457-8D8E-988B56C31E5E}" type="datetime1">
               <a:rPr lang="tr-TR" smtClean="0"/>
-              <a:t>25.09.2026</a:t>
+              <a:t>3.10.2026</a:t>
             </a:fld>
             <a:endParaRPr lang="tr-TR"/>
           </a:p>
@@ -6728,7 +6519,7 @@
           <a:p>
             <a:fld id="{556A583B-49D3-4431-A76E-53060577655C}" type="slidenum">
               <a:rPr lang="tr-TR" smtClean="0"/>
-              <a:t>14</a:t>
+              <a:t>13</a:t>
             </a:fld>
             <a:endParaRPr lang="tr-TR"/>
           </a:p>
@@ -6747,7 +6538,7 @@
 </p:sld>
 </file>
 
-<file path=ppt/slides/slide15.xml><?xml version="1.0" encoding="utf-8"?>
+<file path=ppt/slides/slide14.xml><?xml version="1.0" encoding="utf-8"?>
 <p:sld xmlns:a="http://schemas.openxmlformats.org/drawingml/2006/main" xmlns:r="http://schemas.openxmlformats.org/officeDocument/2006/relationships" xmlns:p="http://schemas.openxmlformats.org/presentationml/2006/main">
   <p:cSld>
     <p:spTree>
@@ -7060,7 +6851,7 @@
           <a:p>
             <a:fld id="{23005A21-DB29-43B5-9F7A-E7F4EEE107FC}" type="datetime1">
               <a:rPr lang="tr-TR" smtClean="0"/>
-              <a:t>25.09.2026</a:t>
+              <a:t>3.10.2026</a:t>
             </a:fld>
             <a:endParaRPr lang="tr-TR"/>
           </a:p>
@@ -7117,7 +6908,7 @@
           <a:p>
             <a:fld id="{556A583B-49D3-4431-A76E-53060577655C}" type="slidenum">
               <a:rPr lang="tr-TR" smtClean="0"/>
-              <a:t>15</a:t>
+              <a:t>14</a:t>
             </a:fld>
             <a:endParaRPr lang="tr-TR"/>
           </a:p>
@@ -7136,7 +6927,7 @@
 </p:sld>
 </file>
 
-<file path=ppt/slides/slide16.xml><?xml version="1.0" encoding="utf-8"?>
+<file path=ppt/slides/slide15.xml><?xml version="1.0" encoding="utf-8"?>
 <p:sld xmlns:a="http://schemas.openxmlformats.org/drawingml/2006/main" xmlns:r="http://schemas.openxmlformats.org/officeDocument/2006/relationships" xmlns:p="http://schemas.openxmlformats.org/presentationml/2006/main">
   <p:cSld>
     <p:spTree>
@@ -7339,7 +7130,7 @@
           <a:p>
             <a:fld id="{CF224AFF-D660-4DD8-B4F6-674FF8433224}" type="datetime1">
               <a:rPr lang="tr-TR" smtClean="0"/>
-              <a:t>25.09.2026</a:t>
+              <a:t>3.10.2026</a:t>
             </a:fld>
             <a:endParaRPr lang="tr-TR"/>
           </a:p>
@@ -7396,7 +7187,7 @@
           <a:p>
             <a:fld id="{556A583B-49D3-4431-A76E-53060577655C}" type="slidenum">
               <a:rPr lang="tr-TR" smtClean="0"/>
-              <a:t>16</a:t>
+              <a:t>15</a:t>
             </a:fld>
             <a:endParaRPr lang="tr-TR"/>
           </a:p>
@@ -7415,7 +7206,7 @@
 </p:sld>
 </file>
 
-<file path=ppt/slides/slide17.xml><?xml version="1.0" encoding="utf-8"?>
+<file path=ppt/slides/slide16.xml><?xml version="1.0" encoding="utf-8"?>
 <p:sld xmlns:a="http://schemas.openxmlformats.org/drawingml/2006/main" xmlns:r="http://schemas.openxmlformats.org/officeDocument/2006/relationships" xmlns:p="http://schemas.openxmlformats.org/presentationml/2006/main">
   <p:cSld>
     <p:spTree>
@@ -7688,7 +7479,7 @@
           <a:p>
             <a:fld id="{B6BBD6E4-FB31-4A52-9DFC-A484A65B3457}" type="datetime1">
               <a:rPr lang="tr-TR" smtClean="0"/>
-              <a:t>25.09.2026</a:t>
+              <a:t>3.10.2026</a:t>
             </a:fld>
             <a:endParaRPr lang="tr-TR"/>
           </a:p>
@@ -7745,7 +7536,7 @@
           <a:p>
             <a:fld id="{556A583B-49D3-4431-A76E-53060577655C}" type="slidenum">
               <a:rPr lang="tr-TR" smtClean="0"/>
-              <a:t>17</a:t>
+              <a:t>16</a:t>
             </a:fld>
             <a:endParaRPr lang="tr-TR"/>
           </a:p>
@@ -7764,7 +7555,7 @@
 </p:sld>
 </file>
 
-<file path=ppt/slides/slide18.xml><?xml version="1.0" encoding="utf-8"?>
+<file path=ppt/slides/slide17.xml><?xml version="1.0" encoding="utf-8"?>
 <p:sld xmlns:a="http://schemas.openxmlformats.org/drawingml/2006/main" xmlns:r="http://schemas.openxmlformats.org/officeDocument/2006/relationships" xmlns:p="http://schemas.openxmlformats.org/presentationml/2006/main">
   <p:cSld>
     <p:spTree>
@@ -8166,7 +7957,7 @@
           <a:p>
             <a:fld id="{EAC09926-1D10-4811-A13B-CDB95D2B1C1B}" type="datetime1">
               <a:rPr lang="tr-TR" smtClean="0"/>
-              <a:t>25.09.2026</a:t>
+              <a:t>3.10.2026</a:t>
             </a:fld>
             <a:endParaRPr lang="tr-TR"/>
           </a:p>
@@ -8223,7 +8014,7 @@
           <a:p>
             <a:fld id="{556A583B-49D3-4431-A76E-53060577655C}" type="slidenum">
               <a:rPr lang="tr-TR" smtClean="0"/>
-              <a:t>18</a:t>
+              <a:t>17</a:t>
             </a:fld>
             <a:endParaRPr lang="tr-TR"/>
           </a:p>
@@ -8242,7 +8033,7 @@
 </p:sld>
 </file>
 
-<file path=ppt/slides/slide19.xml><?xml version="1.0" encoding="utf-8"?>
+<file path=ppt/slides/slide18.xml><?xml version="1.0" encoding="utf-8"?>
 <p:sld xmlns:a="http://schemas.openxmlformats.org/drawingml/2006/main" xmlns:r="http://schemas.openxmlformats.org/officeDocument/2006/relationships" xmlns:p="http://schemas.openxmlformats.org/presentationml/2006/main">
   <p:cSld>
     <p:bg>
@@ -8779,7 +8570,7 @@
           <a:p>
             <a:fld id="{EC2C1FF6-8E02-4E65-991D-10B055A5B89D}" type="datetime1">
               <a:rPr lang="tr-TR" smtClean="0"/>
-              <a:t>25.09.2026</a:t>
+              <a:t>3.10.2026</a:t>
             </a:fld>
             <a:endParaRPr lang="tr-TR"/>
           </a:p>
@@ -8836,7 +8627,7 @@
           <a:p>
             <a:fld id="{556A583B-49D3-4431-A76E-53060577655C}" type="slidenum">
               <a:rPr lang="tr-TR" smtClean="0"/>
-              <a:t>19</a:t>
+              <a:t>18</a:t>
             </a:fld>
             <a:endParaRPr lang="tr-TR"/>
           </a:p>
@@ -8855,205 +8646,7 @@
 </p:sld>
 </file>
 
-<file path=ppt/slides/slide2.xml><?xml version="1.0" encoding="utf-8"?>
-<p:sld xmlns:a="http://schemas.openxmlformats.org/drawingml/2006/main" xmlns:r="http://schemas.openxmlformats.org/officeDocument/2006/relationships" xmlns:p="http://schemas.openxmlformats.org/presentationml/2006/main">
-  <p:cSld>
-    <p:spTree>
-      <p:nvGrpSpPr>
-        <p:cNvPr id="1" name="">
-          <a:extLst>
-            <a:ext uri="{FF2B5EF4-FFF2-40B4-BE49-F238E27FC236}">
-              <a16:creationId xmlns:a16="http://schemas.microsoft.com/office/drawing/2014/main" id="{1CABAE07-294C-F097-A42D-EDF9268C1565}"/>
-            </a:ext>
-          </a:extLst>
-        </p:cNvPr>
-        <p:cNvGrpSpPr/>
-        <p:nvPr/>
-      </p:nvGrpSpPr>
-      <p:grpSpPr>
-        <a:xfrm>
-          <a:off x="0" y="0"/>
-          <a:ext cx="0" cy="0"/>
-          <a:chOff x="0" y="0"/>
-          <a:chExt cx="0" cy="0"/>
-        </a:xfrm>
-      </p:grpSpPr>
-      <p:sp>
-        <p:nvSpPr>
-          <p:cNvPr id="3" name="Metin kutusu 2">
-            <a:extLst>
-              <a:ext uri="{FF2B5EF4-FFF2-40B4-BE49-F238E27FC236}">
-                <a16:creationId xmlns:a16="http://schemas.microsoft.com/office/drawing/2014/main" id="{AD1CFB61-EA21-4355-182E-8B560C34852C}"/>
-              </a:ext>
-            </a:extLst>
-          </p:cNvPr>
-          <p:cNvSpPr txBox="1"/>
-          <p:nvPr/>
-        </p:nvSpPr>
-        <p:spPr>
-          <a:xfrm>
-            <a:off x="7541342" y="400664"/>
-            <a:ext cx="3764595" cy="1384995"/>
-          </a:xfrm>
-          <a:prstGeom prst="rect">
-            <a:avLst/>
-          </a:prstGeom>
-          <a:noFill/>
-        </p:spPr>
-        <p:txBody>
-          <a:bodyPr wrap="square" rtlCol="0">
-            <a:spAutoFit/>
-          </a:bodyPr>
-          <a:lstStyle/>
-          <a:p>
-            <a:r>
-              <a:rPr lang="tr-TR" sz="2800" dirty="0"/>
-              <a:t>Google: </a:t>
-            </a:r>
-            <a:r>
-              <a:rPr lang="en-US" sz="2800" dirty="0"/>
-              <a:t>what are the 10 richest companies in the world</a:t>
-            </a:r>
-            <a:endParaRPr lang="tr-TR" sz="2800" dirty="0"/>
-          </a:p>
-        </p:txBody>
-      </p:sp>
-      <p:pic>
-        <p:nvPicPr>
-          <p:cNvPr id="8" name="Resim 7">
-            <a:extLst>
-              <a:ext uri="{FF2B5EF4-FFF2-40B4-BE49-F238E27FC236}">
-                <a16:creationId xmlns:a16="http://schemas.microsoft.com/office/drawing/2014/main" id="{EA8D7916-682F-DBCA-3FFF-766555EC290C}"/>
-              </a:ext>
-            </a:extLst>
-          </p:cNvPr>
-          <p:cNvPicPr>
-            <a:picLocks noChangeAspect="1"/>
-          </p:cNvPicPr>
-          <p:nvPr/>
-        </p:nvPicPr>
-        <p:blipFill>
-          <a:blip r:embed="rId2">
-            <a:extLst>
-              <a:ext uri="{28A0092B-C50C-407E-A947-70E740481C1C}">
-                <a14:useLocalDpi xmlns:a14="http://schemas.microsoft.com/office/drawing/2010/main" val="0"/>
-              </a:ext>
-            </a:extLst>
-          </a:blip>
-          <a:stretch>
-            <a:fillRect/>
-          </a:stretch>
-        </p:blipFill>
-        <p:spPr>
-          <a:xfrm>
-            <a:off x="886063" y="0"/>
-            <a:ext cx="5482114" cy="6858000"/>
-          </a:xfrm>
-          <a:prstGeom prst="rect">
-            <a:avLst/>
-          </a:prstGeom>
-        </p:spPr>
-      </p:pic>
-      <p:sp>
-        <p:nvSpPr>
-          <p:cNvPr id="2" name="Veri Yer Tutucusu 1">
-            <a:extLst>
-              <a:ext uri="{FF2B5EF4-FFF2-40B4-BE49-F238E27FC236}">
-                <a16:creationId xmlns:a16="http://schemas.microsoft.com/office/drawing/2014/main" id="{54D03920-07D5-DC2C-EC22-F2CEBBE393BC}"/>
-              </a:ext>
-            </a:extLst>
-          </p:cNvPr>
-          <p:cNvSpPr>
-            <a:spLocks noGrp="1"/>
-          </p:cNvSpPr>
-          <p:nvPr>
-            <p:ph type="dt" sz="half" idx="10"/>
-          </p:nvPr>
-        </p:nvSpPr>
-        <p:spPr/>
-        <p:txBody>
-          <a:bodyPr/>
-          <a:lstStyle/>
-          <a:p>
-            <a:fld id="{7B1B89AA-5FB4-493D-B316-F46593A9A95F}" type="datetime1">
-              <a:rPr lang="tr-TR" smtClean="0"/>
-              <a:t>25.09.2026</a:t>
-            </a:fld>
-            <a:endParaRPr lang="tr-TR"/>
-          </a:p>
-        </p:txBody>
-      </p:sp>
-      <p:sp>
-        <p:nvSpPr>
-          <p:cNvPr id="4" name="Alt Bilgi Yer Tutucusu 3">
-            <a:extLst>
-              <a:ext uri="{FF2B5EF4-FFF2-40B4-BE49-F238E27FC236}">
-                <a16:creationId xmlns:a16="http://schemas.microsoft.com/office/drawing/2014/main" id="{A77591FE-4584-A809-E335-3D17B66CFE84}"/>
-              </a:ext>
-            </a:extLst>
-          </p:cNvPr>
-          <p:cNvSpPr>
-            <a:spLocks noGrp="1"/>
-          </p:cNvSpPr>
-          <p:nvPr>
-            <p:ph type="ftr" sz="quarter" idx="11"/>
-          </p:nvPr>
-        </p:nvSpPr>
-        <p:spPr/>
-        <p:txBody>
-          <a:bodyPr/>
-          <a:lstStyle/>
-          <a:p>
-            <a:r>
-              <a:rPr lang="tr-TR"/>
-              <a:t>Copyright: Harun Altay</a:t>
-            </a:r>
-          </a:p>
-        </p:txBody>
-      </p:sp>
-      <p:sp>
-        <p:nvSpPr>
-          <p:cNvPr id="5" name="Slayt Numarası Yer Tutucusu 4">
-            <a:extLst>
-              <a:ext uri="{FF2B5EF4-FFF2-40B4-BE49-F238E27FC236}">
-                <a16:creationId xmlns:a16="http://schemas.microsoft.com/office/drawing/2014/main" id="{25592B3D-83CF-A7BB-220D-A0494BA4B63F}"/>
-              </a:ext>
-            </a:extLst>
-          </p:cNvPr>
-          <p:cNvSpPr>
-            <a:spLocks noGrp="1"/>
-          </p:cNvSpPr>
-          <p:nvPr>
-            <p:ph type="sldNum" sz="quarter" idx="12"/>
-          </p:nvPr>
-        </p:nvSpPr>
-        <p:spPr/>
-        <p:txBody>
-          <a:bodyPr/>
-          <a:lstStyle/>
-          <a:p>
-            <a:fld id="{556A583B-49D3-4431-A76E-53060577655C}" type="slidenum">
-              <a:rPr lang="tr-TR" smtClean="0"/>
-              <a:t>2</a:t>
-            </a:fld>
-            <a:endParaRPr lang="tr-TR"/>
-          </a:p>
-        </p:txBody>
-      </p:sp>
-    </p:spTree>
-    <p:extLst>
-      <p:ext uri="{BB962C8B-B14F-4D97-AF65-F5344CB8AC3E}">
-        <p14:creationId xmlns:p14="http://schemas.microsoft.com/office/powerpoint/2010/main" val="219443333"/>
-      </p:ext>
-    </p:extLst>
-  </p:cSld>
-  <p:clrMapOvr>
-    <a:masterClrMapping/>
-  </p:clrMapOvr>
-</p:sld>
-</file>
-
-<file path=ppt/slides/slide20.xml><?xml version="1.0" encoding="utf-8"?>
+<file path=ppt/slides/slide19.xml><?xml version="1.0" encoding="utf-8"?>
 <p:sld xmlns:a="http://schemas.openxmlformats.org/drawingml/2006/main" xmlns:r="http://schemas.openxmlformats.org/officeDocument/2006/relationships" xmlns:p="http://schemas.openxmlformats.org/presentationml/2006/main">
   <p:cSld>
     <p:spTree>
@@ -9226,7 +8819,7 @@
           <a:p>
             <a:fld id="{6F810ABF-9C50-4724-8918-9A528197358E}" type="datetime1">
               <a:rPr lang="tr-TR" smtClean="0"/>
-              <a:t>25.09.2026</a:t>
+              <a:t>3.10.2026</a:t>
             </a:fld>
             <a:endParaRPr lang="tr-TR"/>
           </a:p>
@@ -9283,7 +8876,7 @@
           <a:p>
             <a:fld id="{556A583B-49D3-4431-A76E-53060577655C}" type="slidenum">
               <a:rPr lang="tr-TR" smtClean="0"/>
-              <a:t>20</a:t>
+              <a:t>19</a:t>
             </a:fld>
             <a:endParaRPr lang="tr-TR"/>
           </a:p>
@@ -9302,7 +8895,243 @@
 </p:sld>
 </file>
 
-<file path=ppt/slides/slide21.xml><?xml version="1.0" encoding="utf-8"?>
+<file path=ppt/slides/slide2.xml><?xml version="1.0" encoding="utf-8"?>
+<p:sld xmlns:a="http://schemas.openxmlformats.org/drawingml/2006/main" xmlns:r="http://schemas.openxmlformats.org/officeDocument/2006/relationships" xmlns:p="http://schemas.openxmlformats.org/presentationml/2006/main">
+  <p:cSld>
+    <p:spTree>
+      <p:nvGrpSpPr>
+        <p:cNvPr id="1" name="">
+          <a:extLst>
+            <a:ext uri="{FF2B5EF4-FFF2-40B4-BE49-F238E27FC236}">
+              <a16:creationId xmlns:a16="http://schemas.microsoft.com/office/drawing/2014/main" id="{74D4869C-62F0-A023-3A79-1F036E269253}"/>
+            </a:ext>
+          </a:extLst>
+        </p:cNvPr>
+        <p:cNvGrpSpPr/>
+        <p:nvPr/>
+      </p:nvGrpSpPr>
+      <p:grpSpPr>
+        <a:xfrm>
+          <a:off x="0" y="0"/>
+          <a:ext cx="0" cy="0"/>
+          <a:chOff x="0" y="0"/>
+          <a:chExt cx="0" cy="0"/>
+        </a:xfrm>
+      </p:grpSpPr>
+      <p:sp>
+        <p:nvSpPr>
+          <p:cNvPr id="2" name="Başlık 1">
+            <a:extLst>
+              <a:ext uri="{FF2B5EF4-FFF2-40B4-BE49-F238E27FC236}">
+                <a16:creationId xmlns:a16="http://schemas.microsoft.com/office/drawing/2014/main" id="{4F7F74FF-0458-4A70-9889-9A301B1D2A0C}"/>
+              </a:ext>
+            </a:extLst>
+          </p:cNvPr>
+          <p:cNvSpPr>
+            <a:spLocks noGrp="1"/>
+          </p:cNvSpPr>
+          <p:nvPr>
+            <p:ph type="title"/>
+          </p:nvPr>
+        </p:nvSpPr>
+        <p:spPr>
+          <a:xfrm>
+            <a:off x="838200" y="365126"/>
+            <a:ext cx="10515600" cy="726256"/>
+          </a:xfrm>
+        </p:spPr>
+        <p:txBody>
+          <a:bodyPr>
+            <a:normAutofit/>
+          </a:bodyPr>
+          <a:lstStyle/>
+          <a:p>
+            <a:r>
+              <a:rPr lang="tr-TR" sz="3600" dirty="0"/>
+              <a:t>Bu eğitim kimin içindir?</a:t>
+            </a:r>
+          </a:p>
+        </p:txBody>
+      </p:sp>
+      <p:sp>
+        <p:nvSpPr>
+          <p:cNvPr id="3" name="İçerik Yer Tutucusu 2">
+            <a:extLst>
+              <a:ext uri="{FF2B5EF4-FFF2-40B4-BE49-F238E27FC236}">
+                <a16:creationId xmlns:a16="http://schemas.microsoft.com/office/drawing/2014/main" id="{FF481CC2-0E24-822C-166F-C0A82E72999D}"/>
+              </a:ext>
+            </a:extLst>
+          </p:cNvPr>
+          <p:cNvSpPr>
+            <a:spLocks noGrp="1"/>
+          </p:cNvSpPr>
+          <p:nvPr>
+            <p:ph idx="1"/>
+          </p:nvPr>
+        </p:nvSpPr>
+        <p:spPr>
+          <a:xfrm>
+            <a:off x="838200" y="1091382"/>
+            <a:ext cx="10515600" cy="5220928"/>
+          </a:xfrm>
+        </p:spPr>
+        <p:txBody>
+          <a:bodyPr>
+            <a:normAutofit/>
+          </a:bodyPr>
+          <a:lstStyle/>
+          <a:p>
+            <a:r>
+              <a:rPr lang="tr-TR" dirty="0"/>
+              <a:t>Yazılımı geliştirmeyi ve programcılığı hiç bilmeyenler içindir</a:t>
+            </a:r>
+          </a:p>
+          <a:p>
+            <a:r>
+              <a:rPr lang="tr-TR" dirty="0"/>
+              <a:t>İlkokul, orta okul, lise ve üniversite öğrencileri içindir</a:t>
+            </a:r>
+          </a:p>
+          <a:p>
+            <a:r>
+              <a:rPr lang="tr-TR" dirty="0"/>
+              <a:t>Hobi arayan emekliler, ev hanımları ve herkes içindir</a:t>
+            </a:r>
+          </a:p>
+          <a:p>
+            <a:r>
+              <a:rPr lang="tr-TR" dirty="0" err="1"/>
+              <a:t>Yazılımcılık</a:t>
+            </a:r>
+            <a:r>
+              <a:rPr lang="tr-TR" dirty="0"/>
+              <a:t> acaba bana meslek olur mu diyenler içindir</a:t>
+            </a:r>
+          </a:p>
+          <a:p>
+            <a:r>
+              <a:rPr lang="tr-TR" dirty="0" err="1"/>
+              <a:t>Yazılımcılığın</a:t>
+            </a:r>
+            <a:r>
+              <a:rPr lang="tr-TR" dirty="0"/>
+              <a:t> «Yönetici Özetini (</a:t>
+            </a:r>
+            <a:r>
+              <a:rPr lang="tr-TR"/>
+              <a:t>management </a:t>
+            </a:r>
+            <a:r>
+              <a:rPr lang="tr-TR" dirty="0" err="1"/>
+              <a:t>summary</a:t>
+            </a:r>
+            <a:r>
+              <a:rPr lang="tr-TR" dirty="0"/>
+              <a:t>)» görmek isteyenler içindir</a:t>
+            </a:r>
+          </a:p>
+        </p:txBody>
+      </p:sp>
+      <p:sp>
+        <p:nvSpPr>
+          <p:cNvPr id="4" name="Veri Yer Tutucusu 3">
+            <a:extLst>
+              <a:ext uri="{FF2B5EF4-FFF2-40B4-BE49-F238E27FC236}">
+                <a16:creationId xmlns:a16="http://schemas.microsoft.com/office/drawing/2014/main" id="{C2EF1EEE-BF97-7861-D880-10B5DAEA83E5}"/>
+              </a:ext>
+            </a:extLst>
+          </p:cNvPr>
+          <p:cNvSpPr>
+            <a:spLocks noGrp="1"/>
+          </p:cNvSpPr>
+          <p:nvPr>
+            <p:ph type="dt" sz="half" idx="10"/>
+          </p:nvPr>
+        </p:nvSpPr>
+        <p:spPr/>
+        <p:txBody>
+          <a:bodyPr/>
+          <a:lstStyle/>
+          <a:p>
+            <a:fld id="{E9290591-5B3F-4E6A-A4B5-910A3B0B03FF}" type="datetime1">
+              <a:rPr lang="tr-TR" smtClean="0"/>
+              <a:t>3.10.2026</a:t>
+            </a:fld>
+            <a:endParaRPr lang="tr-TR"/>
+          </a:p>
+        </p:txBody>
+      </p:sp>
+      <p:sp>
+        <p:nvSpPr>
+          <p:cNvPr id="5" name="Alt Bilgi Yer Tutucusu 4">
+            <a:extLst>
+              <a:ext uri="{FF2B5EF4-FFF2-40B4-BE49-F238E27FC236}">
+                <a16:creationId xmlns:a16="http://schemas.microsoft.com/office/drawing/2014/main" id="{FD7ABFEB-FCFD-D25C-ABA3-39ECD85546E6}"/>
+              </a:ext>
+            </a:extLst>
+          </p:cNvPr>
+          <p:cNvSpPr>
+            <a:spLocks noGrp="1"/>
+          </p:cNvSpPr>
+          <p:nvPr>
+            <p:ph type="ftr" sz="quarter" idx="11"/>
+          </p:nvPr>
+        </p:nvSpPr>
+        <p:spPr/>
+        <p:txBody>
+          <a:bodyPr/>
+          <a:lstStyle/>
+          <a:p>
+            <a:r>
+              <a:rPr lang="tr-TR"/>
+              <a:t>Copyright: Harun Altay</a:t>
+            </a:r>
+          </a:p>
+        </p:txBody>
+      </p:sp>
+      <p:sp>
+        <p:nvSpPr>
+          <p:cNvPr id="6" name="Slayt Numarası Yer Tutucusu 5">
+            <a:extLst>
+              <a:ext uri="{FF2B5EF4-FFF2-40B4-BE49-F238E27FC236}">
+                <a16:creationId xmlns:a16="http://schemas.microsoft.com/office/drawing/2014/main" id="{CA7BEB0C-B7F1-F1A0-F63A-BDE9E4DE1568}"/>
+              </a:ext>
+            </a:extLst>
+          </p:cNvPr>
+          <p:cNvSpPr>
+            <a:spLocks noGrp="1"/>
+          </p:cNvSpPr>
+          <p:nvPr>
+            <p:ph type="sldNum" sz="quarter" idx="12"/>
+          </p:nvPr>
+        </p:nvSpPr>
+        <p:spPr/>
+        <p:txBody>
+          <a:bodyPr/>
+          <a:lstStyle/>
+          <a:p>
+            <a:fld id="{556A583B-49D3-4431-A76E-53060577655C}" type="slidenum">
+              <a:rPr lang="tr-TR" smtClean="0"/>
+              <a:t>2</a:t>
+            </a:fld>
+            <a:endParaRPr lang="tr-TR"/>
+          </a:p>
+        </p:txBody>
+      </p:sp>
+    </p:spTree>
+    <p:extLst>
+      <p:ext uri="{BB962C8B-B14F-4D97-AF65-F5344CB8AC3E}">
+        <p14:creationId xmlns:p14="http://schemas.microsoft.com/office/powerpoint/2010/main" val="1790205340"/>
+      </p:ext>
+    </p:extLst>
+  </p:cSld>
+  <p:clrMapOvr>
+    <a:masterClrMapping/>
+  </p:clrMapOvr>
+</p:sld>
+</file>
+
+<file path=ppt/slides/slide20.xml><?xml version="1.0" encoding="utf-8"?>
 <p:sld xmlns:a="http://schemas.openxmlformats.org/drawingml/2006/main" xmlns:r="http://schemas.openxmlformats.org/officeDocument/2006/relationships" xmlns:p="http://schemas.openxmlformats.org/presentationml/2006/main">
   <p:cSld>
     <p:spTree>
@@ -9617,7 +9446,7 @@
           <a:p>
             <a:fld id="{D30B0625-DE47-4D45-9D3F-083BD941E2E4}" type="datetime1">
               <a:rPr lang="tr-TR" smtClean="0"/>
-              <a:t>25.09.2026</a:t>
+              <a:t>3.10.2026</a:t>
             </a:fld>
             <a:endParaRPr lang="tr-TR"/>
           </a:p>
@@ -9674,7 +9503,7 @@
           <a:p>
             <a:fld id="{556A583B-49D3-4431-A76E-53060577655C}" type="slidenum">
               <a:rPr lang="tr-TR" smtClean="0"/>
-              <a:t>21</a:t>
+              <a:t>20</a:t>
             </a:fld>
             <a:endParaRPr lang="tr-TR"/>
           </a:p>
@@ -9693,7 +9522,7 @@
 </p:sld>
 </file>
 
-<file path=ppt/slides/slide22.xml><?xml version="1.0" encoding="utf-8"?>
+<file path=ppt/slides/slide21.xml><?xml version="1.0" encoding="utf-8"?>
 <p:sld xmlns:a="http://schemas.openxmlformats.org/drawingml/2006/main" xmlns:r="http://schemas.openxmlformats.org/officeDocument/2006/relationships" xmlns:p="http://schemas.openxmlformats.org/presentationml/2006/main">
   <p:cSld>
     <p:spTree>
@@ -10052,7 +9881,7 @@
           <a:p>
             <a:fld id="{D8E885D9-CB74-4EAA-94AA-376736753B75}" type="datetime1">
               <a:rPr lang="tr-TR" smtClean="0"/>
-              <a:t>25.09.2026</a:t>
+              <a:t>3.10.2026</a:t>
             </a:fld>
             <a:endParaRPr lang="tr-TR"/>
           </a:p>
@@ -10109,7 +9938,7 @@
           <a:p>
             <a:fld id="{556A583B-49D3-4431-A76E-53060577655C}" type="slidenum">
               <a:rPr lang="tr-TR" smtClean="0"/>
-              <a:t>22</a:t>
+              <a:t>21</a:t>
             </a:fld>
             <a:endParaRPr lang="tr-TR"/>
           </a:p>
@@ -10128,7 +9957,7 @@
 </p:sld>
 </file>
 
-<file path=ppt/slides/slide23.xml><?xml version="1.0" encoding="utf-8"?>
+<file path=ppt/slides/slide22.xml><?xml version="1.0" encoding="utf-8"?>
 <p:sld xmlns:a="http://schemas.openxmlformats.org/drawingml/2006/main" xmlns:r="http://schemas.openxmlformats.org/officeDocument/2006/relationships" xmlns:p="http://schemas.openxmlformats.org/presentationml/2006/main">
   <p:cSld>
     <p:spTree>
@@ -10275,7 +10104,7 @@
           <a:p>
             <a:fld id="{9DFE37CF-9389-4D95-A5A4-8ABF62880B6D}" type="datetime1">
               <a:rPr lang="tr-TR" smtClean="0"/>
-              <a:t>25.09.2026</a:t>
+              <a:t>3.10.2026</a:t>
             </a:fld>
             <a:endParaRPr lang="tr-TR"/>
           </a:p>
@@ -10332,7 +10161,7 @@
           <a:p>
             <a:fld id="{556A583B-49D3-4431-A76E-53060577655C}" type="slidenum">
               <a:rPr lang="tr-TR" smtClean="0"/>
-              <a:t>23</a:t>
+              <a:t>22</a:t>
             </a:fld>
             <a:endParaRPr lang="tr-TR"/>
           </a:p>
@@ -10351,7 +10180,7 @@
 </p:sld>
 </file>
 
-<file path=ppt/slides/slide24.xml><?xml version="1.0" encoding="utf-8"?>
+<file path=ppt/slides/slide23.xml><?xml version="1.0" encoding="utf-8"?>
 <p:sld xmlns:a="http://schemas.openxmlformats.org/drawingml/2006/main" xmlns:r="http://schemas.openxmlformats.org/officeDocument/2006/relationships" xmlns:p="http://schemas.openxmlformats.org/presentationml/2006/main">
   <p:cSld>
     <p:spTree>
@@ -10498,7 +10327,7 @@
           <a:p>
             <a:fld id="{3CD0A053-38B2-4B21-AD22-D37FE0373FB2}" type="datetime1">
               <a:rPr lang="tr-TR" smtClean="0"/>
-              <a:t>25.09.2026</a:t>
+              <a:t>3.10.2026</a:t>
             </a:fld>
             <a:endParaRPr lang="tr-TR"/>
           </a:p>
@@ -10555,7 +10384,7 @@
           <a:p>
             <a:fld id="{556A583B-49D3-4431-A76E-53060577655C}" type="slidenum">
               <a:rPr lang="tr-TR" smtClean="0"/>
-              <a:t>24</a:t>
+              <a:t>23</a:t>
             </a:fld>
             <a:endParaRPr lang="tr-TR"/>
           </a:p>
@@ -10574,7 +10403,7 @@
 </p:sld>
 </file>
 
-<file path=ppt/slides/slide25.xml><?xml version="1.0" encoding="utf-8"?>
+<file path=ppt/slides/slide24.xml><?xml version="1.0" encoding="utf-8"?>
 <p:sld xmlns:a="http://schemas.openxmlformats.org/drawingml/2006/main" xmlns:r="http://schemas.openxmlformats.org/officeDocument/2006/relationships" xmlns:p="http://schemas.openxmlformats.org/presentationml/2006/main">
   <p:cSld>
     <p:spTree>
@@ -10721,7 +10550,7 @@
           <a:p>
             <a:fld id="{0998C81F-67F8-419F-98BA-11B5239DC92E}" type="datetime1">
               <a:rPr lang="tr-TR" smtClean="0"/>
-              <a:t>25.09.2026</a:t>
+              <a:t>3.10.2026</a:t>
             </a:fld>
             <a:endParaRPr lang="tr-TR"/>
           </a:p>
@@ -10778,7 +10607,7 @@
           <a:p>
             <a:fld id="{556A583B-49D3-4431-A76E-53060577655C}" type="slidenum">
               <a:rPr lang="tr-TR" smtClean="0"/>
-              <a:t>25</a:t>
+              <a:t>24</a:t>
             </a:fld>
             <a:endParaRPr lang="tr-TR"/>
           </a:p>
@@ -10797,7 +10626,7 @@
 </p:sld>
 </file>
 
-<file path=ppt/slides/slide26.xml><?xml version="1.0" encoding="utf-8"?>
+<file path=ppt/slides/slide25.xml><?xml version="1.0" encoding="utf-8"?>
 <p:sld xmlns:a="http://schemas.openxmlformats.org/drawingml/2006/main" xmlns:r="http://schemas.openxmlformats.org/officeDocument/2006/relationships" xmlns:p="http://schemas.openxmlformats.org/presentationml/2006/main">
   <p:cSld>
     <p:spTree>
@@ -11204,7 +11033,7 @@
           <a:p>
             <a:fld id="{F56E870C-C0BF-4C65-BD7A-20752F252FB9}" type="datetime1">
               <a:rPr lang="tr-TR" smtClean="0"/>
-              <a:t>25.09.2026</a:t>
+              <a:t>3.10.2026</a:t>
             </a:fld>
             <a:endParaRPr lang="tr-TR"/>
           </a:p>
@@ -11261,7 +11090,7 @@
           <a:p>
             <a:fld id="{556A583B-49D3-4431-A76E-53060577655C}" type="slidenum">
               <a:rPr lang="tr-TR" smtClean="0"/>
-              <a:t>26</a:t>
+              <a:t>25</a:t>
             </a:fld>
             <a:endParaRPr lang="tr-TR"/>
           </a:p>
@@ -11280,7 +11109,7 @@
 </p:sld>
 </file>
 
-<file path=ppt/slides/slide27.xml><?xml version="1.0" encoding="utf-8"?>
+<file path=ppt/slides/slide26.xml><?xml version="1.0" encoding="utf-8"?>
 <p:sld xmlns:a="http://schemas.openxmlformats.org/drawingml/2006/main" xmlns:r="http://schemas.openxmlformats.org/officeDocument/2006/relationships" xmlns:p="http://schemas.openxmlformats.org/presentationml/2006/main">
   <p:cSld>
     <p:spTree>
@@ -13180,7 +13009,7 @@
           <a:p>
             <a:fld id="{4CCF6595-5809-4331-A82F-8ECD7B658D5D}" type="datetime1">
               <a:rPr lang="tr-TR" smtClean="0"/>
-              <a:t>25.09.2026</a:t>
+              <a:t>3.10.2026</a:t>
             </a:fld>
             <a:endParaRPr lang="tr-TR"/>
           </a:p>
@@ -13237,7 +13066,7 @@
           <a:p>
             <a:fld id="{556A583B-49D3-4431-A76E-53060577655C}" type="slidenum">
               <a:rPr lang="tr-TR" smtClean="0"/>
-              <a:t>27</a:t>
+              <a:t>26</a:t>
             </a:fld>
             <a:endParaRPr lang="tr-TR"/>
           </a:p>
@@ -13256,7 +13085,7 @@
 </p:sld>
 </file>
 
-<file path=ppt/slides/slide28.xml><?xml version="1.0" encoding="utf-8"?>
+<file path=ppt/slides/slide27.xml><?xml version="1.0" encoding="utf-8"?>
 <p:sld xmlns:a="http://schemas.openxmlformats.org/drawingml/2006/main" xmlns:r="http://schemas.openxmlformats.org/officeDocument/2006/relationships" xmlns:p="http://schemas.openxmlformats.org/presentationml/2006/main">
   <p:cSld>
     <p:spTree>
@@ -14124,7 +13953,7 @@
           <a:p>
             <a:fld id="{141FD688-8E0B-4917-93B2-78EE6D6B57D6}" type="datetime1">
               <a:rPr lang="tr-TR" smtClean="0"/>
-              <a:t>25.09.2026</a:t>
+              <a:t>3.10.2026</a:t>
             </a:fld>
             <a:endParaRPr lang="tr-TR"/>
           </a:p>
@@ -14181,7 +14010,7 @@
           <a:p>
             <a:fld id="{556A583B-49D3-4431-A76E-53060577655C}" type="slidenum">
               <a:rPr lang="tr-TR" smtClean="0"/>
-              <a:t>28</a:t>
+              <a:t>27</a:t>
             </a:fld>
             <a:endParaRPr lang="tr-TR"/>
           </a:p>
@@ -14200,7 +14029,7 @@
 </p:sld>
 </file>
 
-<file path=ppt/slides/slide29.xml><?xml version="1.0" encoding="utf-8"?>
+<file path=ppt/slides/slide28.xml><?xml version="1.0" encoding="utf-8"?>
 <p:sld xmlns:a="http://schemas.openxmlformats.org/drawingml/2006/main" xmlns:r="http://schemas.openxmlformats.org/officeDocument/2006/relationships" xmlns:p="http://schemas.openxmlformats.org/presentationml/2006/main">
   <p:cSld>
     <p:spTree>
@@ -15533,7 +15362,7 @@
           <a:p>
             <a:fld id="{9177C320-059E-4DC3-8059-CCDED2AD416A}" type="datetime1">
               <a:rPr lang="tr-TR" smtClean="0"/>
-              <a:t>25.09.2026</a:t>
+              <a:t>3.10.2026</a:t>
             </a:fld>
             <a:endParaRPr lang="tr-TR"/>
           </a:p>
@@ -15590,7 +15419,7 @@
           <a:p>
             <a:fld id="{556A583B-49D3-4431-A76E-53060577655C}" type="slidenum">
               <a:rPr lang="tr-TR" smtClean="0"/>
-              <a:t>29</a:t>
+              <a:t>28</a:t>
             </a:fld>
             <a:endParaRPr lang="tr-TR"/>
           </a:p>
@@ -15609,205 +15438,7 @@
 </p:sld>
 </file>
 
-<file path=ppt/slides/slide3.xml><?xml version="1.0" encoding="utf-8"?>
-<p:sld xmlns:a="http://schemas.openxmlformats.org/drawingml/2006/main" xmlns:r="http://schemas.openxmlformats.org/officeDocument/2006/relationships" xmlns:p="http://schemas.openxmlformats.org/presentationml/2006/main">
-  <p:cSld>
-    <p:spTree>
-      <p:nvGrpSpPr>
-        <p:cNvPr id="1" name="">
-          <a:extLst>
-            <a:ext uri="{FF2B5EF4-FFF2-40B4-BE49-F238E27FC236}">
-              <a16:creationId xmlns:a16="http://schemas.microsoft.com/office/drawing/2014/main" id="{3B365EDF-939C-1F94-7DC8-C0AE82A3AAD8}"/>
-            </a:ext>
-          </a:extLst>
-        </p:cNvPr>
-        <p:cNvGrpSpPr/>
-        <p:nvPr/>
-      </p:nvGrpSpPr>
-      <p:grpSpPr>
-        <a:xfrm>
-          <a:off x="0" y="0"/>
-          <a:ext cx="0" cy="0"/>
-          <a:chOff x="0" y="0"/>
-          <a:chExt cx="0" cy="0"/>
-        </a:xfrm>
-      </p:grpSpPr>
-      <p:sp>
-        <p:nvSpPr>
-          <p:cNvPr id="3" name="Metin kutusu 2">
-            <a:extLst>
-              <a:ext uri="{FF2B5EF4-FFF2-40B4-BE49-F238E27FC236}">
-                <a16:creationId xmlns:a16="http://schemas.microsoft.com/office/drawing/2014/main" id="{E3A07CAE-0C70-0016-2AF1-C9C0E8C49C49}"/>
-              </a:ext>
-            </a:extLst>
-          </p:cNvPr>
-          <p:cNvSpPr txBox="1"/>
-          <p:nvPr/>
-        </p:nvSpPr>
-        <p:spPr>
-          <a:xfrm>
-            <a:off x="7129862" y="400664"/>
-            <a:ext cx="3764595" cy="1384995"/>
-          </a:xfrm>
-          <a:prstGeom prst="rect">
-            <a:avLst/>
-          </a:prstGeom>
-          <a:noFill/>
-        </p:spPr>
-        <p:txBody>
-          <a:bodyPr wrap="square" rtlCol="0">
-            <a:spAutoFit/>
-          </a:bodyPr>
-          <a:lstStyle/>
-          <a:p>
-            <a:r>
-              <a:rPr lang="tr-TR" sz="2800" dirty="0"/>
-              <a:t>Google: </a:t>
-            </a:r>
-            <a:r>
-              <a:rPr lang="en-US" sz="2800" dirty="0"/>
-              <a:t>what are the 10 richest companies in the world</a:t>
-            </a:r>
-            <a:endParaRPr lang="tr-TR" sz="2800" dirty="0"/>
-          </a:p>
-        </p:txBody>
-      </p:sp>
-      <p:pic>
-        <p:nvPicPr>
-          <p:cNvPr id="4" name="Resim 3">
-            <a:extLst>
-              <a:ext uri="{FF2B5EF4-FFF2-40B4-BE49-F238E27FC236}">
-                <a16:creationId xmlns:a16="http://schemas.microsoft.com/office/drawing/2014/main" id="{08BADC85-7D7D-7F36-3D3E-38A0B1A99766}"/>
-              </a:ext>
-            </a:extLst>
-          </p:cNvPr>
-          <p:cNvPicPr>
-            <a:picLocks noChangeAspect="1"/>
-          </p:cNvPicPr>
-          <p:nvPr/>
-        </p:nvPicPr>
-        <p:blipFill>
-          <a:blip r:embed="rId2">
-            <a:extLst>
-              <a:ext uri="{28A0092B-C50C-407E-A947-70E740481C1C}">
-                <a14:useLocalDpi xmlns:a14="http://schemas.microsoft.com/office/drawing/2010/main" val="0"/>
-              </a:ext>
-            </a:extLst>
-          </a:blip>
-          <a:stretch>
-            <a:fillRect/>
-          </a:stretch>
-        </p:blipFill>
-        <p:spPr>
-          <a:xfrm>
-            <a:off x="750051" y="0"/>
-            <a:ext cx="4999757" cy="6858000"/>
-          </a:xfrm>
-          <a:prstGeom prst="rect">
-            <a:avLst/>
-          </a:prstGeom>
-        </p:spPr>
-      </p:pic>
-      <p:sp>
-        <p:nvSpPr>
-          <p:cNvPr id="2" name="Veri Yer Tutucusu 1">
-            <a:extLst>
-              <a:ext uri="{FF2B5EF4-FFF2-40B4-BE49-F238E27FC236}">
-                <a16:creationId xmlns:a16="http://schemas.microsoft.com/office/drawing/2014/main" id="{B2BFD690-FD86-7349-6B92-0CE024150347}"/>
-              </a:ext>
-            </a:extLst>
-          </p:cNvPr>
-          <p:cNvSpPr>
-            <a:spLocks noGrp="1"/>
-          </p:cNvSpPr>
-          <p:nvPr>
-            <p:ph type="dt" sz="half" idx="10"/>
-          </p:nvPr>
-        </p:nvSpPr>
-        <p:spPr/>
-        <p:txBody>
-          <a:bodyPr/>
-          <a:lstStyle/>
-          <a:p>
-            <a:fld id="{1FCC30DB-9A9A-407B-8F85-2EF59053FD42}" type="datetime1">
-              <a:rPr lang="tr-TR" smtClean="0"/>
-              <a:t>25.09.2026</a:t>
-            </a:fld>
-            <a:endParaRPr lang="tr-TR"/>
-          </a:p>
-        </p:txBody>
-      </p:sp>
-      <p:sp>
-        <p:nvSpPr>
-          <p:cNvPr id="5" name="Alt Bilgi Yer Tutucusu 4">
-            <a:extLst>
-              <a:ext uri="{FF2B5EF4-FFF2-40B4-BE49-F238E27FC236}">
-                <a16:creationId xmlns:a16="http://schemas.microsoft.com/office/drawing/2014/main" id="{AAAB063A-1018-7624-CA5B-DD16E323EB58}"/>
-              </a:ext>
-            </a:extLst>
-          </p:cNvPr>
-          <p:cNvSpPr>
-            <a:spLocks noGrp="1"/>
-          </p:cNvSpPr>
-          <p:nvPr>
-            <p:ph type="ftr" sz="quarter" idx="11"/>
-          </p:nvPr>
-        </p:nvSpPr>
-        <p:spPr/>
-        <p:txBody>
-          <a:bodyPr/>
-          <a:lstStyle/>
-          <a:p>
-            <a:r>
-              <a:rPr lang="tr-TR"/>
-              <a:t>Copyright: Harun Altay</a:t>
-            </a:r>
-          </a:p>
-        </p:txBody>
-      </p:sp>
-      <p:sp>
-        <p:nvSpPr>
-          <p:cNvPr id="6" name="Slayt Numarası Yer Tutucusu 5">
-            <a:extLst>
-              <a:ext uri="{FF2B5EF4-FFF2-40B4-BE49-F238E27FC236}">
-                <a16:creationId xmlns:a16="http://schemas.microsoft.com/office/drawing/2014/main" id="{EE6D7181-3435-96C6-165E-35CCB614C997}"/>
-              </a:ext>
-            </a:extLst>
-          </p:cNvPr>
-          <p:cNvSpPr>
-            <a:spLocks noGrp="1"/>
-          </p:cNvSpPr>
-          <p:nvPr>
-            <p:ph type="sldNum" sz="quarter" idx="12"/>
-          </p:nvPr>
-        </p:nvSpPr>
-        <p:spPr/>
-        <p:txBody>
-          <a:bodyPr/>
-          <a:lstStyle/>
-          <a:p>
-            <a:fld id="{556A583B-49D3-4431-A76E-53060577655C}" type="slidenum">
-              <a:rPr lang="tr-TR" smtClean="0"/>
-              <a:t>3</a:t>
-            </a:fld>
-            <a:endParaRPr lang="tr-TR"/>
-          </a:p>
-        </p:txBody>
-      </p:sp>
-    </p:spTree>
-    <p:extLst>
-      <p:ext uri="{BB962C8B-B14F-4D97-AF65-F5344CB8AC3E}">
-        <p14:creationId xmlns:p14="http://schemas.microsoft.com/office/powerpoint/2010/main" val="3066286309"/>
-      </p:ext>
-    </p:extLst>
-  </p:cSld>
-  <p:clrMapOvr>
-    <a:masterClrMapping/>
-  </p:clrMapOvr>
-</p:sld>
-</file>
-
-<file path=ppt/slides/slide30.xml><?xml version="1.0" encoding="utf-8"?>
+<file path=ppt/slides/slide29.xml><?xml version="1.0" encoding="utf-8"?>
 <p:sld xmlns:a="http://schemas.openxmlformats.org/drawingml/2006/main" xmlns:r="http://schemas.openxmlformats.org/officeDocument/2006/relationships" xmlns:p="http://schemas.openxmlformats.org/presentationml/2006/main">
   <p:cSld>
     <p:spTree>
@@ -15924,7 +15555,7 @@
           <a:p>
             <a:fld id="{8473EE66-3B5B-40DD-8C05-2B867A749528}" type="datetime1">
               <a:rPr lang="tr-TR" smtClean="0"/>
-              <a:t>25.09.2026</a:t>
+              <a:t>3.10.2026</a:t>
             </a:fld>
             <a:endParaRPr lang="tr-TR"/>
           </a:p>
@@ -15981,7 +15612,7 @@
           <a:p>
             <a:fld id="{556A583B-49D3-4431-A76E-53060577655C}" type="slidenum">
               <a:rPr lang="tr-TR" smtClean="0"/>
-              <a:t>30</a:t>
+              <a:t>29</a:t>
             </a:fld>
             <a:endParaRPr lang="tr-TR"/>
           </a:p>
@@ -16000,7 +15631,319 @@
 </p:sld>
 </file>
 
-<file path=ppt/slides/slide31.xml><?xml version="1.0" encoding="utf-8"?>
+<file path=ppt/slides/slide3.xml><?xml version="1.0" encoding="utf-8"?>
+<p:sld xmlns:a="http://schemas.openxmlformats.org/drawingml/2006/main" xmlns:r="http://schemas.openxmlformats.org/officeDocument/2006/relationships" xmlns:p="http://schemas.openxmlformats.org/presentationml/2006/main">
+  <p:cSld>
+    <p:spTree>
+      <p:nvGrpSpPr>
+        <p:cNvPr id="1" name="">
+          <a:extLst>
+            <a:ext uri="{FF2B5EF4-FFF2-40B4-BE49-F238E27FC236}">
+              <a16:creationId xmlns:a16="http://schemas.microsoft.com/office/drawing/2014/main" id="{9AA1B344-9BD0-FF69-9013-86B10D14D368}"/>
+            </a:ext>
+          </a:extLst>
+        </p:cNvPr>
+        <p:cNvGrpSpPr/>
+        <p:nvPr/>
+      </p:nvGrpSpPr>
+      <p:grpSpPr>
+        <a:xfrm>
+          <a:off x="0" y="0"/>
+          <a:ext cx="0" cy="0"/>
+          <a:chOff x="0" y="0"/>
+          <a:chExt cx="0" cy="0"/>
+        </a:xfrm>
+      </p:grpSpPr>
+      <p:sp>
+        <p:nvSpPr>
+          <p:cNvPr id="2" name="Başlık 1">
+            <a:extLst>
+              <a:ext uri="{FF2B5EF4-FFF2-40B4-BE49-F238E27FC236}">
+                <a16:creationId xmlns:a16="http://schemas.microsoft.com/office/drawing/2014/main" id="{87A23293-5DDD-F2F0-DDC8-D0D00F91217C}"/>
+              </a:ext>
+            </a:extLst>
+          </p:cNvPr>
+          <p:cNvSpPr>
+            <a:spLocks noGrp="1"/>
+          </p:cNvSpPr>
+          <p:nvPr>
+            <p:ph type="title"/>
+          </p:nvPr>
+        </p:nvSpPr>
+        <p:spPr>
+          <a:xfrm>
+            <a:off x="838200" y="365126"/>
+            <a:ext cx="10515600" cy="726256"/>
+          </a:xfrm>
+        </p:spPr>
+        <p:txBody>
+          <a:bodyPr>
+            <a:normAutofit/>
+          </a:bodyPr>
+          <a:lstStyle/>
+          <a:p>
+            <a:r>
+              <a:rPr lang="tr-TR" sz="3600" dirty="0"/>
+              <a:t>Yazılıma ve Programlama Dillerine Giriş</a:t>
+            </a:r>
+          </a:p>
+        </p:txBody>
+      </p:sp>
+      <p:sp>
+        <p:nvSpPr>
+          <p:cNvPr id="3" name="İçerik Yer Tutucusu 2">
+            <a:extLst>
+              <a:ext uri="{FF2B5EF4-FFF2-40B4-BE49-F238E27FC236}">
+                <a16:creationId xmlns:a16="http://schemas.microsoft.com/office/drawing/2014/main" id="{3B276425-024C-3BFD-A1A3-C9AA6AFEDECC}"/>
+              </a:ext>
+            </a:extLst>
+          </p:cNvPr>
+          <p:cNvSpPr>
+            <a:spLocks noGrp="1"/>
+          </p:cNvSpPr>
+          <p:nvPr>
+            <p:ph idx="1"/>
+          </p:nvPr>
+        </p:nvSpPr>
+        <p:spPr>
+          <a:xfrm>
+            <a:off x="838200" y="1091382"/>
+            <a:ext cx="10515600" cy="5220928"/>
+          </a:xfrm>
+        </p:spPr>
+        <p:txBody>
+          <a:bodyPr>
+            <a:normAutofit fontScale="70000" lnSpcReduction="20000"/>
+          </a:bodyPr>
+          <a:lstStyle/>
+          <a:p>
+            <a:r>
+              <a:rPr lang="tr-TR" dirty="0"/>
+              <a:t>Bu eğitim kimin içindir?</a:t>
+            </a:r>
+          </a:p>
+          <a:p>
+            <a:r>
+              <a:rPr lang="tr-TR" dirty="0"/>
+              <a:t>Bu eğitimin/seminerin web sayfası </a:t>
+            </a:r>
+          </a:p>
+          <a:p>
+            <a:r>
+              <a:rPr lang="tr-TR" dirty="0"/>
+              <a:t>Öğrenme kaynaklarımız nelerdir? </a:t>
+            </a:r>
+          </a:p>
+          <a:p>
+            <a:r>
+              <a:rPr lang="tr-TR" dirty="0"/>
+              <a:t>Yazılım nerelerde ve nasıl kullanılır?</a:t>
+            </a:r>
+          </a:p>
+          <a:p>
+            <a:r>
+              <a:rPr lang="tr-TR" dirty="0"/>
+              <a:t>Hangi programlama dili, hangi alanlarda, ne için kullanılır?</a:t>
+            </a:r>
+          </a:p>
+          <a:p>
+            <a:r>
+              <a:rPr lang="tr-TR" dirty="0"/>
+              <a:t>Popüler Programlama dilleri hangileridir? </a:t>
+            </a:r>
+          </a:p>
+          <a:p>
+            <a:r>
+              <a:rPr lang="tr-TR" dirty="0"/>
+              <a:t>Bir program nasıl ve nerede çalıştırılır?</a:t>
+            </a:r>
+          </a:p>
+          <a:p>
+            <a:r>
+              <a:rPr lang="tr-TR" dirty="0"/>
+              <a:t>Merhaba Dünya programı ne demektir?</a:t>
+            </a:r>
+          </a:p>
+          <a:p>
+            <a:r>
+              <a:rPr lang="tr-TR" dirty="0"/>
+              <a:t>Bilgisayarımızda yapmamız gereken ayarlar. </a:t>
+            </a:r>
+          </a:p>
+          <a:p>
+            <a:r>
+              <a:rPr lang="tr-TR" dirty="0"/>
+              <a:t>Bu eğitimde hangi programlama dillerini göreceğiz? </a:t>
+            </a:r>
+          </a:p>
+          <a:p>
+            <a:pPr lvl="1"/>
+            <a:r>
+              <a:rPr lang="tr-TR" dirty="0"/>
+              <a:t>Python</a:t>
+            </a:r>
+          </a:p>
+          <a:p>
+            <a:pPr lvl="1"/>
+            <a:r>
+              <a:rPr lang="tr-TR" dirty="0"/>
+              <a:t>Java</a:t>
+            </a:r>
+          </a:p>
+          <a:p>
+            <a:pPr lvl="1"/>
+            <a:r>
+              <a:rPr lang="tr-TR" dirty="0"/>
+              <a:t>C# (.NET)</a:t>
+            </a:r>
+          </a:p>
+          <a:p>
+            <a:r>
+              <a:rPr lang="tr-TR" dirty="0"/>
+              <a:t>Örnek Giriş Programları (</a:t>
+            </a:r>
+            <a:r>
+              <a:rPr lang="tr-TR" dirty="0" err="1"/>
+              <a:t>if</a:t>
+            </a:r>
+            <a:r>
+              <a:rPr lang="tr-TR" dirty="0"/>
+              <a:t>, </a:t>
+            </a:r>
+            <a:r>
+              <a:rPr lang="tr-TR" dirty="0" err="1"/>
+              <a:t>for</a:t>
+            </a:r>
+            <a:r>
+              <a:rPr lang="tr-TR" dirty="0"/>
+              <a:t>, </a:t>
+            </a:r>
+            <a:r>
+              <a:rPr lang="tr-TR" dirty="0" err="1"/>
+              <a:t>while</a:t>
+            </a:r>
+            <a:r>
+              <a:rPr lang="tr-TR" dirty="0"/>
+              <a:t>)</a:t>
+            </a:r>
+          </a:p>
+          <a:p>
+            <a:r>
+              <a:rPr lang="tr-TR" dirty="0"/>
+              <a:t>Bu seminerde neler yoktur?</a:t>
+            </a:r>
+          </a:p>
+          <a:p>
+            <a:r>
+              <a:rPr lang="tr-TR" dirty="0"/>
+              <a:t>Bir sonraki adım</a:t>
+            </a:r>
+          </a:p>
+          <a:p>
+            <a:endParaRPr lang="tr-TR" dirty="0"/>
+          </a:p>
+        </p:txBody>
+      </p:sp>
+      <p:sp>
+        <p:nvSpPr>
+          <p:cNvPr id="4" name="Veri Yer Tutucusu 3">
+            <a:extLst>
+              <a:ext uri="{FF2B5EF4-FFF2-40B4-BE49-F238E27FC236}">
+                <a16:creationId xmlns:a16="http://schemas.microsoft.com/office/drawing/2014/main" id="{5937DCAD-63DA-ABDB-20B5-39864956D7D4}"/>
+              </a:ext>
+            </a:extLst>
+          </p:cNvPr>
+          <p:cNvSpPr>
+            <a:spLocks noGrp="1"/>
+          </p:cNvSpPr>
+          <p:nvPr>
+            <p:ph type="dt" sz="half" idx="10"/>
+          </p:nvPr>
+        </p:nvSpPr>
+        <p:spPr/>
+        <p:txBody>
+          <a:bodyPr/>
+          <a:lstStyle/>
+          <a:p>
+            <a:fld id="{EC2B6ACD-0C76-4F71-96B9-0FCA794ADD48}" type="datetime1">
+              <a:rPr lang="tr-TR" smtClean="0"/>
+              <a:t>3.10.2026</a:t>
+            </a:fld>
+            <a:endParaRPr lang="tr-TR"/>
+          </a:p>
+        </p:txBody>
+      </p:sp>
+      <p:sp>
+        <p:nvSpPr>
+          <p:cNvPr id="5" name="Alt Bilgi Yer Tutucusu 4">
+            <a:extLst>
+              <a:ext uri="{FF2B5EF4-FFF2-40B4-BE49-F238E27FC236}">
+                <a16:creationId xmlns:a16="http://schemas.microsoft.com/office/drawing/2014/main" id="{61463C24-5356-7329-9ED8-C875BC997A60}"/>
+              </a:ext>
+            </a:extLst>
+          </p:cNvPr>
+          <p:cNvSpPr>
+            <a:spLocks noGrp="1"/>
+          </p:cNvSpPr>
+          <p:nvPr>
+            <p:ph type="ftr" sz="quarter" idx="11"/>
+          </p:nvPr>
+        </p:nvSpPr>
+        <p:spPr/>
+        <p:txBody>
+          <a:bodyPr/>
+          <a:lstStyle/>
+          <a:p>
+            <a:r>
+              <a:rPr lang="tr-TR"/>
+              <a:t>Copyright: Harun Altay</a:t>
+            </a:r>
+          </a:p>
+        </p:txBody>
+      </p:sp>
+      <p:sp>
+        <p:nvSpPr>
+          <p:cNvPr id="6" name="Slayt Numarası Yer Tutucusu 5">
+            <a:extLst>
+              <a:ext uri="{FF2B5EF4-FFF2-40B4-BE49-F238E27FC236}">
+                <a16:creationId xmlns:a16="http://schemas.microsoft.com/office/drawing/2014/main" id="{F08D76BF-F4A3-66DD-651E-301E4C7EC7EB}"/>
+              </a:ext>
+            </a:extLst>
+          </p:cNvPr>
+          <p:cNvSpPr>
+            <a:spLocks noGrp="1"/>
+          </p:cNvSpPr>
+          <p:nvPr>
+            <p:ph type="sldNum" sz="quarter" idx="12"/>
+          </p:nvPr>
+        </p:nvSpPr>
+        <p:spPr/>
+        <p:txBody>
+          <a:bodyPr/>
+          <a:lstStyle/>
+          <a:p>
+            <a:fld id="{556A583B-49D3-4431-A76E-53060577655C}" type="slidenum">
+              <a:rPr lang="tr-TR" smtClean="0"/>
+              <a:t>3</a:t>
+            </a:fld>
+            <a:endParaRPr lang="tr-TR"/>
+          </a:p>
+        </p:txBody>
+      </p:sp>
+    </p:spTree>
+    <p:extLst>
+      <p:ext uri="{BB962C8B-B14F-4D97-AF65-F5344CB8AC3E}">
+        <p14:creationId xmlns:p14="http://schemas.microsoft.com/office/powerpoint/2010/main" val="527220079"/>
+      </p:ext>
+    </p:extLst>
+  </p:cSld>
+  <p:clrMapOvr>
+    <a:masterClrMapping/>
+  </p:clrMapOvr>
+</p:sld>
+</file>
+
+<file path=ppt/slides/slide30.xml><?xml version="1.0" encoding="utf-8"?>
 <p:sld xmlns:a="http://schemas.openxmlformats.org/drawingml/2006/main" xmlns:r="http://schemas.openxmlformats.org/officeDocument/2006/relationships" xmlns:p="http://schemas.openxmlformats.org/presentationml/2006/main">
   <p:cSld>
     <p:spTree>
@@ -16295,7 +16238,7 @@
           <a:p>
             <a:fld id="{85CC3776-6893-40B5-BFB7-819CEB1620E0}" type="datetime1">
               <a:rPr lang="tr-TR" smtClean="0"/>
-              <a:t>25.09.2026</a:t>
+              <a:t>3.10.2026</a:t>
             </a:fld>
             <a:endParaRPr lang="tr-TR"/>
           </a:p>
@@ -16352,7 +16295,7 @@
           <a:p>
             <a:fld id="{556A583B-49D3-4431-A76E-53060577655C}" type="slidenum">
               <a:rPr lang="tr-TR" smtClean="0"/>
-              <a:t>31</a:t>
+              <a:t>30</a:t>
             </a:fld>
             <a:endParaRPr lang="tr-TR"/>
           </a:p>
@@ -16371,7 +16314,7 @@
 </p:sld>
 </file>
 
-<file path=ppt/slides/slide32.xml><?xml version="1.0" encoding="utf-8"?>
+<file path=ppt/slides/slide31.xml><?xml version="1.0" encoding="utf-8"?>
 <p:sld xmlns:a="http://schemas.openxmlformats.org/drawingml/2006/main" xmlns:r="http://schemas.openxmlformats.org/officeDocument/2006/relationships" xmlns:p="http://schemas.openxmlformats.org/presentationml/2006/main">
   <p:cSld>
     <p:spTree>
@@ -16586,7 +16529,7 @@
           <a:p>
             <a:fld id="{1372925D-DBC8-405C-89B5-49F8D2BDFEEE}" type="datetime1">
               <a:rPr lang="tr-TR" smtClean="0"/>
-              <a:t>25.09.2026</a:t>
+              <a:t>3.10.2026</a:t>
             </a:fld>
             <a:endParaRPr lang="tr-TR"/>
           </a:p>
@@ -16643,7 +16586,7 @@
           <a:p>
             <a:fld id="{556A583B-49D3-4431-A76E-53060577655C}" type="slidenum">
               <a:rPr lang="tr-TR" smtClean="0"/>
-              <a:t>32</a:t>
+              <a:t>31</a:t>
             </a:fld>
             <a:endParaRPr lang="tr-TR"/>
           </a:p>
@@ -16662,7 +16605,7 @@
 </p:sld>
 </file>
 
-<file path=ppt/slides/slide33.xml><?xml version="1.0" encoding="utf-8"?>
+<file path=ppt/slides/slide32.xml><?xml version="1.0" encoding="utf-8"?>
 <p:sld xmlns:a="http://schemas.openxmlformats.org/drawingml/2006/main" xmlns:r="http://schemas.openxmlformats.org/officeDocument/2006/relationships" xmlns:p="http://schemas.openxmlformats.org/presentationml/2006/main">
   <p:cSld>
     <p:spTree>
@@ -17221,7 +17164,7 @@
           <a:p>
             <a:fld id="{E90BAD1F-2DE4-4A75-97B2-F99461682000}" type="datetime1">
               <a:rPr lang="tr-TR" smtClean="0"/>
-              <a:t>25.09.2026</a:t>
+              <a:t>3.10.2026</a:t>
             </a:fld>
             <a:endParaRPr lang="tr-TR"/>
           </a:p>
@@ -17278,7 +17221,7 @@
           <a:p>
             <a:fld id="{556A583B-49D3-4431-A76E-53060577655C}" type="slidenum">
               <a:rPr lang="tr-TR" smtClean="0"/>
-              <a:t>33</a:t>
+              <a:t>32</a:t>
             </a:fld>
             <a:endParaRPr lang="tr-TR"/>
           </a:p>
@@ -17297,7 +17240,7 @@
 </p:sld>
 </file>
 
-<file path=ppt/slides/slide34.xml><?xml version="1.0" encoding="utf-8"?>
+<file path=ppt/slides/slide33.xml><?xml version="1.0" encoding="utf-8"?>
 <p:sld xmlns:a="http://schemas.openxmlformats.org/drawingml/2006/main" xmlns:r="http://schemas.openxmlformats.org/officeDocument/2006/relationships" xmlns:p="http://schemas.openxmlformats.org/presentationml/2006/main">
   <p:cSld>
     <p:spTree>
@@ -17854,7 +17797,7 @@
           <a:p>
             <a:fld id="{08AA18FA-F30F-4A34-A5F2-5F6B237A9E7A}" type="datetime1">
               <a:rPr lang="tr-TR" smtClean="0"/>
-              <a:t>25.09.2026</a:t>
+              <a:t>3.10.2026</a:t>
             </a:fld>
             <a:endParaRPr lang="tr-TR"/>
           </a:p>
@@ -17911,7 +17854,7 @@
           <a:p>
             <a:fld id="{556A583B-49D3-4431-A76E-53060577655C}" type="slidenum">
               <a:rPr lang="tr-TR" smtClean="0"/>
-              <a:t>34</a:t>
+              <a:t>33</a:t>
             </a:fld>
             <a:endParaRPr lang="tr-TR"/>
           </a:p>
@@ -17930,7 +17873,7 @@
 </p:sld>
 </file>
 
-<file path=ppt/slides/slide35.xml><?xml version="1.0" encoding="utf-8"?>
+<file path=ppt/slides/slide34.xml><?xml version="1.0" encoding="utf-8"?>
 <p:sld xmlns:a="http://schemas.openxmlformats.org/drawingml/2006/main" xmlns:r="http://schemas.openxmlformats.org/officeDocument/2006/relationships" xmlns:p="http://schemas.openxmlformats.org/presentationml/2006/main">
   <p:cSld>
     <p:spTree>
@@ -18460,7 +18403,7 @@
           <a:p>
             <a:fld id="{042AF11C-9859-454C-A0DA-12524618C623}" type="datetime1">
               <a:rPr lang="tr-TR" smtClean="0"/>
-              <a:t>25.09.2026</a:t>
+              <a:t>3.10.2026</a:t>
             </a:fld>
             <a:endParaRPr lang="tr-TR"/>
           </a:p>
@@ -18517,7 +18460,7 @@
           <a:p>
             <a:fld id="{556A583B-49D3-4431-A76E-53060577655C}" type="slidenum">
               <a:rPr lang="tr-TR" smtClean="0"/>
-              <a:t>35</a:t>
+              <a:t>34</a:t>
             </a:fld>
             <a:endParaRPr lang="tr-TR"/>
           </a:p>
@@ -18536,7 +18479,7 @@
 </p:sld>
 </file>
 
-<file path=ppt/slides/slide36.xml><?xml version="1.0" encoding="utf-8"?>
+<file path=ppt/slides/slide35.xml><?xml version="1.0" encoding="utf-8"?>
 <p:sld xmlns:a="http://schemas.openxmlformats.org/drawingml/2006/main" xmlns:r="http://schemas.openxmlformats.org/officeDocument/2006/relationships" xmlns:p="http://schemas.openxmlformats.org/presentationml/2006/main">
   <p:cSld>
     <p:spTree>
@@ -18794,7 +18737,7 @@
           <a:p>
             <a:fld id="{A29100A3-B5D3-4AF3-8C60-D4A6445A5245}" type="datetime1">
               <a:rPr lang="tr-TR" smtClean="0"/>
-              <a:t>25.09.2026</a:t>
+              <a:t>3.10.2026</a:t>
             </a:fld>
             <a:endParaRPr lang="tr-TR"/>
           </a:p>
@@ -18851,7 +18794,7 @@
           <a:p>
             <a:fld id="{556A583B-49D3-4431-A76E-53060577655C}" type="slidenum">
               <a:rPr lang="tr-TR" smtClean="0"/>
-              <a:t>36</a:t>
+              <a:t>35</a:t>
             </a:fld>
             <a:endParaRPr lang="tr-TR"/>
           </a:p>
@@ -18870,7 +18813,7 @@
 </p:sld>
 </file>
 
-<file path=ppt/slides/slide37.xml><?xml version="1.0" encoding="utf-8"?>
+<file path=ppt/slides/slide36.xml><?xml version="1.0" encoding="utf-8"?>
 <p:sld xmlns:a="http://schemas.openxmlformats.org/drawingml/2006/main" xmlns:r="http://schemas.openxmlformats.org/officeDocument/2006/relationships" xmlns:p="http://schemas.openxmlformats.org/presentationml/2006/main">
   <p:cSld>
     <p:spTree>
@@ -19007,7 +18950,7 @@
           <a:p>
             <a:fld id="{C8538EAB-DF79-497D-BA70-2B74B6C10086}" type="datetime1">
               <a:rPr lang="tr-TR" smtClean="0"/>
-              <a:t>25.09.2026</a:t>
+              <a:t>3.10.2026</a:t>
             </a:fld>
             <a:endParaRPr lang="tr-TR"/>
           </a:p>
@@ -19064,7 +19007,7 @@
           <a:p>
             <a:fld id="{556A583B-49D3-4431-A76E-53060577655C}" type="slidenum">
               <a:rPr lang="tr-TR" smtClean="0"/>
-              <a:t>37</a:t>
+              <a:t>36</a:t>
             </a:fld>
             <a:endParaRPr lang="tr-TR"/>
           </a:p>
@@ -19083,7 +19026,7 @@
 </p:sld>
 </file>
 
-<file path=ppt/slides/slide38.xml><?xml version="1.0" encoding="utf-8"?>
+<file path=ppt/slides/slide37.xml><?xml version="1.0" encoding="utf-8"?>
 <p:sld xmlns:a="http://schemas.openxmlformats.org/drawingml/2006/main" xmlns:r="http://schemas.openxmlformats.org/officeDocument/2006/relationships" xmlns:p="http://schemas.openxmlformats.org/presentationml/2006/main">
   <p:cSld>
     <p:spTree>
@@ -19255,7 +19198,7 @@
           <a:p>
             <a:fld id="{E63A8578-5729-4698-B75A-697A7B849C6B}" type="datetime1">
               <a:rPr lang="tr-TR" smtClean="0"/>
-              <a:t>25.09.2026</a:t>
+              <a:t>3.10.2026</a:t>
             </a:fld>
             <a:endParaRPr lang="tr-TR"/>
           </a:p>
@@ -19312,7 +19255,7 @@
           <a:p>
             <a:fld id="{556A583B-49D3-4431-A76E-53060577655C}" type="slidenum">
               <a:rPr lang="tr-TR" smtClean="0"/>
-              <a:t>38</a:t>
+              <a:t>37</a:t>
             </a:fld>
             <a:endParaRPr lang="tr-TR"/>
           </a:p>
@@ -19331,7 +19274,7 @@
 </p:sld>
 </file>
 
-<file path=ppt/slides/slide39.xml><?xml version="1.0" encoding="utf-8"?>
+<file path=ppt/slides/slide38.xml><?xml version="1.0" encoding="utf-8"?>
 <p:sld xmlns:a="http://schemas.openxmlformats.org/drawingml/2006/main" xmlns:r="http://schemas.openxmlformats.org/officeDocument/2006/relationships" xmlns:p="http://schemas.openxmlformats.org/presentationml/2006/main">
   <p:cSld>
     <p:spTree>
@@ -21457,7 +21400,7 @@
           <a:p>
             <a:fld id="{9BA91D5A-8F65-43FB-8387-B591ADB0FFD0}" type="datetime1">
               <a:rPr lang="tr-TR" smtClean="0"/>
-              <a:t>25.09.2026</a:t>
+              <a:t>3.10.2026</a:t>
             </a:fld>
             <a:endParaRPr lang="tr-TR"/>
           </a:p>
@@ -21514,7 +21457,7 @@
           <a:p>
             <a:fld id="{556A583B-49D3-4431-A76E-53060577655C}" type="slidenum">
               <a:rPr lang="tr-TR" smtClean="0"/>
-              <a:t>39</a:t>
+              <a:t>38</a:t>
             </a:fld>
             <a:endParaRPr lang="tr-TR"/>
           </a:p>
@@ -21533,194 +21476,7 @@
 </p:sld>
 </file>
 
-<file path=ppt/slides/slide4.xml><?xml version="1.0" encoding="utf-8"?>
-<p:sld xmlns:a="http://schemas.openxmlformats.org/drawingml/2006/main" xmlns:r="http://schemas.openxmlformats.org/officeDocument/2006/relationships" xmlns:p="http://schemas.openxmlformats.org/presentationml/2006/main">
-  <p:cSld>
-    <p:spTree>
-      <p:nvGrpSpPr>
-        <p:cNvPr id="1" name=""/>
-        <p:cNvGrpSpPr/>
-        <p:nvPr/>
-      </p:nvGrpSpPr>
-      <p:grpSpPr>
-        <a:xfrm>
-          <a:off x="0" y="0"/>
-          <a:ext cx="0" cy="0"/>
-          <a:chOff x="0" y="0"/>
-          <a:chExt cx="0" cy="0"/>
-        </a:xfrm>
-      </p:grpSpPr>
-      <p:sp>
-        <p:nvSpPr>
-          <p:cNvPr id="2" name="Başlık 1">
-            <a:extLst>
-              <a:ext uri="{FF2B5EF4-FFF2-40B4-BE49-F238E27FC236}">
-                <a16:creationId xmlns:a16="http://schemas.microsoft.com/office/drawing/2014/main" id="{BA413A63-67E2-300B-1344-FB5F0B93533B}"/>
-              </a:ext>
-            </a:extLst>
-          </p:cNvPr>
-          <p:cNvSpPr>
-            <a:spLocks noGrp="1"/>
-          </p:cNvSpPr>
-          <p:nvPr>
-            <p:ph type="title"/>
-          </p:nvPr>
-        </p:nvSpPr>
-        <p:spPr>
-          <a:xfrm>
-            <a:off x="7710089" y="540755"/>
-            <a:ext cx="3203718" cy="1897645"/>
-          </a:xfrm>
-        </p:spPr>
-        <p:txBody>
-          <a:bodyPr>
-            <a:normAutofit/>
-          </a:bodyPr>
-          <a:lstStyle/>
-          <a:p>
-            <a:r>
-              <a:rPr lang="tr-TR" sz="2800" dirty="0"/>
-              <a:t>Türk Hava Yolları ile WhatsApp’ın karşılaştırması</a:t>
-            </a:r>
-          </a:p>
-        </p:txBody>
-      </p:sp>
-      <p:pic>
-        <p:nvPicPr>
-          <p:cNvPr id="5" name="Resim 4">
-            <a:extLst>
-              <a:ext uri="{FF2B5EF4-FFF2-40B4-BE49-F238E27FC236}">
-                <a16:creationId xmlns:a16="http://schemas.microsoft.com/office/drawing/2014/main" id="{FDEC545F-0C7C-0E1E-1B05-1376993D4920}"/>
-              </a:ext>
-            </a:extLst>
-          </p:cNvPr>
-          <p:cNvPicPr>
-            <a:picLocks noChangeAspect="1"/>
-          </p:cNvPicPr>
-          <p:nvPr/>
-        </p:nvPicPr>
-        <p:blipFill>
-          <a:blip r:embed="rId2">
-            <a:extLst>
-              <a:ext uri="{28A0092B-C50C-407E-A947-70E740481C1C}">
-                <a14:useLocalDpi xmlns:a14="http://schemas.microsoft.com/office/drawing/2010/main" val="0"/>
-              </a:ext>
-            </a:extLst>
-          </a:blip>
-          <a:stretch>
-            <a:fillRect/>
-          </a:stretch>
-        </p:blipFill>
-        <p:spPr>
-          <a:xfrm>
-            <a:off x="0" y="0"/>
-            <a:ext cx="6858000" cy="6858000"/>
-          </a:xfrm>
-          <a:prstGeom prst="rect">
-            <a:avLst/>
-          </a:prstGeom>
-        </p:spPr>
-      </p:pic>
-      <p:sp>
-        <p:nvSpPr>
-          <p:cNvPr id="3" name="Veri Yer Tutucusu 2">
-            <a:extLst>
-              <a:ext uri="{FF2B5EF4-FFF2-40B4-BE49-F238E27FC236}">
-                <a16:creationId xmlns:a16="http://schemas.microsoft.com/office/drawing/2014/main" id="{59CB061E-9FC9-85DC-F5BD-5F9D7AC628B7}"/>
-              </a:ext>
-            </a:extLst>
-          </p:cNvPr>
-          <p:cNvSpPr>
-            <a:spLocks noGrp="1"/>
-          </p:cNvSpPr>
-          <p:nvPr>
-            <p:ph type="dt" sz="half" idx="10"/>
-          </p:nvPr>
-        </p:nvSpPr>
-        <p:spPr/>
-        <p:txBody>
-          <a:bodyPr/>
-          <a:lstStyle/>
-          <a:p>
-            <a:fld id="{DD0C0D17-D0F7-4921-92A7-F82ABD37D906}" type="datetime1">
-              <a:rPr lang="tr-TR" smtClean="0"/>
-              <a:t>25.09.2026</a:t>
-            </a:fld>
-            <a:endParaRPr lang="tr-TR"/>
-          </a:p>
-        </p:txBody>
-      </p:sp>
-      <p:sp>
-        <p:nvSpPr>
-          <p:cNvPr id="4" name="Alt Bilgi Yer Tutucusu 3">
-            <a:extLst>
-              <a:ext uri="{FF2B5EF4-FFF2-40B4-BE49-F238E27FC236}">
-                <a16:creationId xmlns:a16="http://schemas.microsoft.com/office/drawing/2014/main" id="{BD6D7420-2D93-ACCF-9812-CAF9ECCCFB46}"/>
-              </a:ext>
-            </a:extLst>
-          </p:cNvPr>
-          <p:cNvSpPr>
-            <a:spLocks noGrp="1"/>
-          </p:cNvSpPr>
-          <p:nvPr>
-            <p:ph type="ftr" sz="quarter" idx="11"/>
-          </p:nvPr>
-        </p:nvSpPr>
-        <p:spPr/>
-        <p:txBody>
-          <a:bodyPr/>
-          <a:lstStyle/>
-          <a:p>
-            <a:r>
-              <a:rPr lang="tr-TR"/>
-              <a:t>Copyright: Harun Altay</a:t>
-            </a:r>
-          </a:p>
-        </p:txBody>
-      </p:sp>
-      <p:sp>
-        <p:nvSpPr>
-          <p:cNvPr id="6" name="Slayt Numarası Yer Tutucusu 5">
-            <a:extLst>
-              <a:ext uri="{FF2B5EF4-FFF2-40B4-BE49-F238E27FC236}">
-                <a16:creationId xmlns:a16="http://schemas.microsoft.com/office/drawing/2014/main" id="{652417D0-00E4-BB81-E957-2C3D00E16B8B}"/>
-              </a:ext>
-            </a:extLst>
-          </p:cNvPr>
-          <p:cNvSpPr>
-            <a:spLocks noGrp="1"/>
-          </p:cNvSpPr>
-          <p:nvPr>
-            <p:ph type="sldNum" sz="quarter" idx="12"/>
-          </p:nvPr>
-        </p:nvSpPr>
-        <p:spPr/>
-        <p:txBody>
-          <a:bodyPr/>
-          <a:lstStyle/>
-          <a:p>
-            <a:fld id="{556A583B-49D3-4431-A76E-53060577655C}" type="slidenum">
-              <a:rPr lang="tr-TR" smtClean="0"/>
-              <a:t>4</a:t>
-            </a:fld>
-            <a:endParaRPr lang="tr-TR"/>
-          </a:p>
-        </p:txBody>
-      </p:sp>
-    </p:spTree>
-    <p:extLst>
-      <p:ext uri="{BB962C8B-B14F-4D97-AF65-F5344CB8AC3E}">
-        <p14:creationId xmlns:p14="http://schemas.microsoft.com/office/powerpoint/2010/main" val="2985869403"/>
-      </p:ext>
-    </p:extLst>
-  </p:cSld>
-  <p:clrMapOvr>
-    <a:masterClrMapping/>
-  </p:clrMapOvr>
-</p:sld>
-</file>
-
-<file path=ppt/slides/slide40.xml><?xml version="1.0" encoding="utf-8"?>
+<file path=ppt/slides/slide39.xml><?xml version="1.0" encoding="utf-8"?>
 <p:sld xmlns:a="http://schemas.openxmlformats.org/drawingml/2006/main" xmlns:r="http://schemas.openxmlformats.org/officeDocument/2006/relationships" xmlns:p="http://schemas.openxmlformats.org/presentationml/2006/main">
   <p:cSld>
     <p:spTree>
@@ -23910,7 +23666,7 @@
           <a:p>
             <a:fld id="{0E10597F-D483-4BFD-B2B0-1D4F7E5A9B84}" type="datetime1">
               <a:rPr lang="tr-TR" smtClean="0"/>
-              <a:t>25.09.2026</a:t>
+              <a:t>3.10.2026</a:t>
             </a:fld>
             <a:endParaRPr lang="tr-TR"/>
           </a:p>
@@ -23967,7 +23723,7 @@
           <a:p>
             <a:fld id="{556A583B-49D3-4431-A76E-53060577655C}" type="slidenum">
               <a:rPr lang="tr-TR" smtClean="0"/>
-              <a:t>40</a:t>
+              <a:t>39</a:t>
             </a:fld>
             <a:endParaRPr lang="tr-TR"/>
           </a:p>
@@ -23986,7 +23742,205 @@
 </p:sld>
 </file>
 
-<file path=ppt/slides/slide41.xml><?xml version="1.0" encoding="utf-8"?>
+<file path=ppt/slides/slide4.xml><?xml version="1.0" encoding="utf-8"?>
+<p:sld xmlns:a="http://schemas.openxmlformats.org/drawingml/2006/main" xmlns:r="http://schemas.openxmlformats.org/officeDocument/2006/relationships" xmlns:p="http://schemas.openxmlformats.org/presentationml/2006/main">
+  <p:cSld>
+    <p:spTree>
+      <p:nvGrpSpPr>
+        <p:cNvPr id="1" name="">
+          <a:extLst>
+            <a:ext uri="{FF2B5EF4-FFF2-40B4-BE49-F238E27FC236}">
+              <a16:creationId xmlns:a16="http://schemas.microsoft.com/office/drawing/2014/main" id="{1CABAE07-294C-F097-A42D-EDF9268C1565}"/>
+            </a:ext>
+          </a:extLst>
+        </p:cNvPr>
+        <p:cNvGrpSpPr/>
+        <p:nvPr/>
+      </p:nvGrpSpPr>
+      <p:grpSpPr>
+        <a:xfrm>
+          <a:off x="0" y="0"/>
+          <a:ext cx="0" cy="0"/>
+          <a:chOff x="0" y="0"/>
+          <a:chExt cx="0" cy="0"/>
+        </a:xfrm>
+      </p:grpSpPr>
+      <p:sp>
+        <p:nvSpPr>
+          <p:cNvPr id="3" name="Metin kutusu 2">
+            <a:extLst>
+              <a:ext uri="{FF2B5EF4-FFF2-40B4-BE49-F238E27FC236}">
+                <a16:creationId xmlns:a16="http://schemas.microsoft.com/office/drawing/2014/main" id="{AD1CFB61-EA21-4355-182E-8B560C34852C}"/>
+              </a:ext>
+            </a:extLst>
+          </p:cNvPr>
+          <p:cNvSpPr txBox="1"/>
+          <p:nvPr/>
+        </p:nvSpPr>
+        <p:spPr>
+          <a:xfrm>
+            <a:off x="7541342" y="400664"/>
+            <a:ext cx="3764595" cy="1384995"/>
+          </a:xfrm>
+          <a:prstGeom prst="rect">
+            <a:avLst/>
+          </a:prstGeom>
+          <a:noFill/>
+        </p:spPr>
+        <p:txBody>
+          <a:bodyPr wrap="square" rtlCol="0">
+            <a:spAutoFit/>
+          </a:bodyPr>
+          <a:lstStyle/>
+          <a:p>
+            <a:r>
+              <a:rPr lang="tr-TR" sz="2800" dirty="0"/>
+              <a:t>Google: </a:t>
+            </a:r>
+            <a:r>
+              <a:rPr lang="en-US" sz="2800" dirty="0"/>
+              <a:t>what are the 10 richest companies in the world</a:t>
+            </a:r>
+            <a:endParaRPr lang="tr-TR" sz="2800" dirty="0"/>
+          </a:p>
+        </p:txBody>
+      </p:sp>
+      <p:pic>
+        <p:nvPicPr>
+          <p:cNvPr id="8" name="Resim 7">
+            <a:extLst>
+              <a:ext uri="{FF2B5EF4-FFF2-40B4-BE49-F238E27FC236}">
+                <a16:creationId xmlns:a16="http://schemas.microsoft.com/office/drawing/2014/main" id="{EA8D7916-682F-DBCA-3FFF-766555EC290C}"/>
+              </a:ext>
+            </a:extLst>
+          </p:cNvPr>
+          <p:cNvPicPr>
+            <a:picLocks noChangeAspect="1"/>
+          </p:cNvPicPr>
+          <p:nvPr/>
+        </p:nvPicPr>
+        <p:blipFill>
+          <a:blip r:embed="rId2">
+            <a:extLst>
+              <a:ext uri="{28A0092B-C50C-407E-A947-70E740481C1C}">
+                <a14:useLocalDpi xmlns:a14="http://schemas.microsoft.com/office/drawing/2010/main" val="0"/>
+              </a:ext>
+            </a:extLst>
+          </a:blip>
+          <a:stretch>
+            <a:fillRect/>
+          </a:stretch>
+        </p:blipFill>
+        <p:spPr>
+          <a:xfrm>
+            <a:off x="886063" y="0"/>
+            <a:ext cx="5482114" cy="6858000"/>
+          </a:xfrm>
+          <a:prstGeom prst="rect">
+            <a:avLst/>
+          </a:prstGeom>
+        </p:spPr>
+      </p:pic>
+      <p:sp>
+        <p:nvSpPr>
+          <p:cNvPr id="2" name="Veri Yer Tutucusu 1">
+            <a:extLst>
+              <a:ext uri="{FF2B5EF4-FFF2-40B4-BE49-F238E27FC236}">
+                <a16:creationId xmlns:a16="http://schemas.microsoft.com/office/drawing/2014/main" id="{54D03920-07D5-DC2C-EC22-F2CEBBE393BC}"/>
+              </a:ext>
+            </a:extLst>
+          </p:cNvPr>
+          <p:cNvSpPr>
+            <a:spLocks noGrp="1"/>
+          </p:cNvSpPr>
+          <p:nvPr>
+            <p:ph type="dt" sz="half" idx="10"/>
+          </p:nvPr>
+        </p:nvSpPr>
+        <p:spPr/>
+        <p:txBody>
+          <a:bodyPr/>
+          <a:lstStyle/>
+          <a:p>
+            <a:fld id="{7B1B89AA-5FB4-493D-B316-F46593A9A95F}" type="datetime1">
+              <a:rPr lang="tr-TR" smtClean="0"/>
+              <a:t>3.10.2026</a:t>
+            </a:fld>
+            <a:endParaRPr lang="tr-TR"/>
+          </a:p>
+        </p:txBody>
+      </p:sp>
+      <p:sp>
+        <p:nvSpPr>
+          <p:cNvPr id="4" name="Alt Bilgi Yer Tutucusu 3">
+            <a:extLst>
+              <a:ext uri="{FF2B5EF4-FFF2-40B4-BE49-F238E27FC236}">
+                <a16:creationId xmlns:a16="http://schemas.microsoft.com/office/drawing/2014/main" id="{A77591FE-4584-A809-E335-3D17B66CFE84}"/>
+              </a:ext>
+            </a:extLst>
+          </p:cNvPr>
+          <p:cNvSpPr>
+            <a:spLocks noGrp="1"/>
+          </p:cNvSpPr>
+          <p:nvPr>
+            <p:ph type="ftr" sz="quarter" idx="11"/>
+          </p:nvPr>
+        </p:nvSpPr>
+        <p:spPr/>
+        <p:txBody>
+          <a:bodyPr/>
+          <a:lstStyle/>
+          <a:p>
+            <a:r>
+              <a:rPr lang="tr-TR"/>
+              <a:t>Copyright: Harun Altay</a:t>
+            </a:r>
+          </a:p>
+        </p:txBody>
+      </p:sp>
+      <p:sp>
+        <p:nvSpPr>
+          <p:cNvPr id="5" name="Slayt Numarası Yer Tutucusu 4">
+            <a:extLst>
+              <a:ext uri="{FF2B5EF4-FFF2-40B4-BE49-F238E27FC236}">
+                <a16:creationId xmlns:a16="http://schemas.microsoft.com/office/drawing/2014/main" id="{25592B3D-83CF-A7BB-220D-A0494BA4B63F}"/>
+              </a:ext>
+            </a:extLst>
+          </p:cNvPr>
+          <p:cNvSpPr>
+            <a:spLocks noGrp="1"/>
+          </p:cNvSpPr>
+          <p:nvPr>
+            <p:ph type="sldNum" sz="quarter" idx="12"/>
+          </p:nvPr>
+        </p:nvSpPr>
+        <p:spPr/>
+        <p:txBody>
+          <a:bodyPr/>
+          <a:lstStyle/>
+          <a:p>
+            <a:fld id="{556A583B-49D3-4431-A76E-53060577655C}" type="slidenum">
+              <a:rPr lang="tr-TR" smtClean="0"/>
+              <a:t>4</a:t>
+            </a:fld>
+            <a:endParaRPr lang="tr-TR"/>
+          </a:p>
+        </p:txBody>
+      </p:sp>
+    </p:spTree>
+    <p:extLst>
+      <p:ext uri="{BB962C8B-B14F-4D97-AF65-F5344CB8AC3E}">
+        <p14:creationId xmlns:p14="http://schemas.microsoft.com/office/powerpoint/2010/main" val="219443333"/>
+      </p:ext>
+    </p:extLst>
+  </p:cSld>
+  <p:clrMapOvr>
+    <a:masterClrMapping/>
+  </p:clrMapOvr>
+</p:sld>
+</file>
+
+<file path=ppt/slides/slide40.xml><?xml version="1.0" encoding="utf-8"?>
 <p:sld xmlns:a="http://schemas.openxmlformats.org/drawingml/2006/main" xmlns:r="http://schemas.openxmlformats.org/officeDocument/2006/relationships" xmlns:p="http://schemas.openxmlformats.org/presentationml/2006/main">
   <p:cSld>
     <p:spTree>
@@ -25115,7 +25069,7 @@
           <a:p>
             <a:fld id="{5853EFAC-713B-4191-9ABC-0BBAF9FE73FC}" type="datetime1">
               <a:rPr lang="tr-TR" smtClean="0"/>
-              <a:t>25.09.2026</a:t>
+              <a:t>3.10.2026</a:t>
             </a:fld>
             <a:endParaRPr lang="tr-TR"/>
           </a:p>
@@ -25172,7 +25126,7 @@
           <a:p>
             <a:fld id="{556A583B-49D3-4431-A76E-53060577655C}" type="slidenum">
               <a:rPr lang="tr-TR" smtClean="0"/>
-              <a:t>41</a:t>
+              <a:t>40</a:t>
             </a:fld>
             <a:endParaRPr lang="tr-TR"/>
           </a:p>
@@ -25191,7 +25145,7 @@
 </p:sld>
 </file>
 
-<file path=ppt/slides/slide42.xml><?xml version="1.0" encoding="utf-8"?>
+<file path=ppt/slides/slide41.xml><?xml version="1.0" encoding="utf-8"?>
 <p:sld xmlns:a="http://schemas.openxmlformats.org/drawingml/2006/main" xmlns:r="http://schemas.openxmlformats.org/officeDocument/2006/relationships" xmlns:p="http://schemas.openxmlformats.org/presentationml/2006/main">
   <p:cSld>
     <p:spTree>
@@ -26308,7 +26262,7 @@
           <a:p>
             <a:fld id="{D3D34EA4-C8F4-4552-BADA-D01235E7140F}" type="datetime1">
               <a:rPr lang="tr-TR" smtClean="0"/>
-              <a:t>25.09.2026</a:t>
+              <a:t>3.10.2026</a:t>
             </a:fld>
             <a:endParaRPr lang="tr-TR"/>
           </a:p>
@@ -26365,7 +26319,7 @@
           <a:p>
             <a:fld id="{556A583B-49D3-4431-A76E-53060577655C}" type="slidenum">
               <a:rPr lang="tr-TR" smtClean="0"/>
-              <a:t>42</a:t>
+              <a:t>41</a:t>
             </a:fld>
             <a:endParaRPr lang="tr-TR"/>
           </a:p>
@@ -26384,7 +26338,7 @@
 </p:sld>
 </file>
 
-<file path=ppt/slides/slide43.xml><?xml version="1.0" encoding="utf-8"?>
+<file path=ppt/slides/slide42.xml><?xml version="1.0" encoding="utf-8"?>
 <p:sld xmlns:a="http://schemas.openxmlformats.org/drawingml/2006/main" xmlns:r="http://schemas.openxmlformats.org/officeDocument/2006/relationships" xmlns:p="http://schemas.openxmlformats.org/presentationml/2006/main">
   <p:cSld>
     <p:spTree>
@@ -27827,7 +27781,7 @@
           <a:p>
             <a:fld id="{5509749A-2EB7-4F9E-AD7B-0F3BBF606F33}" type="datetime1">
               <a:rPr lang="tr-TR" smtClean="0"/>
-              <a:t>25.09.2026</a:t>
+              <a:t>3.10.2026</a:t>
             </a:fld>
             <a:endParaRPr lang="tr-TR"/>
           </a:p>
@@ -27884,7 +27838,7 @@
           <a:p>
             <a:fld id="{556A583B-49D3-4431-A76E-53060577655C}" type="slidenum">
               <a:rPr lang="tr-TR" smtClean="0"/>
-              <a:t>43</a:t>
+              <a:t>42</a:t>
             </a:fld>
             <a:endParaRPr lang="tr-TR"/>
           </a:p>
@@ -27903,7 +27857,7 @@
 </p:sld>
 </file>
 
-<file path=ppt/slides/slide44.xml><?xml version="1.0" encoding="utf-8"?>
+<file path=ppt/slides/slide43.xml><?xml version="1.0" encoding="utf-8"?>
 <p:sld xmlns:a="http://schemas.openxmlformats.org/drawingml/2006/main" xmlns:r="http://schemas.openxmlformats.org/officeDocument/2006/relationships" xmlns:p="http://schemas.openxmlformats.org/presentationml/2006/main">
   <p:cSld>
     <p:spTree>
@@ -29436,7 +29390,7 @@
           <a:p>
             <a:fld id="{A817920D-3E93-4E06-A30C-5B5C0E8598E5}" type="datetime1">
               <a:rPr lang="tr-TR" smtClean="0"/>
-              <a:t>25.09.2026</a:t>
+              <a:t>3.10.2026</a:t>
             </a:fld>
             <a:endParaRPr lang="tr-TR"/>
           </a:p>
@@ -29493,7 +29447,7 @@
           <a:p>
             <a:fld id="{556A583B-49D3-4431-A76E-53060577655C}" type="slidenum">
               <a:rPr lang="tr-TR" smtClean="0"/>
-              <a:t>44</a:t>
+              <a:t>43</a:t>
             </a:fld>
             <a:endParaRPr lang="tr-TR"/>
           </a:p>
@@ -29512,7 +29466,7 @@
 </p:sld>
 </file>
 
-<file path=ppt/slides/slide45.xml><?xml version="1.0" encoding="utf-8"?>
+<file path=ppt/slides/slide44.xml><?xml version="1.0" encoding="utf-8"?>
 <p:sld xmlns:a="http://schemas.openxmlformats.org/drawingml/2006/main" xmlns:r="http://schemas.openxmlformats.org/officeDocument/2006/relationships" xmlns:p="http://schemas.openxmlformats.org/presentationml/2006/main">
   <p:cSld>
     <p:spTree>
@@ -29713,7 +29667,7 @@
           <a:p>
             <a:fld id="{44392EB0-EBAD-438A-B064-5F30060F1D41}" type="datetime1">
               <a:rPr lang="tr-TR" smtClean="0"/>
-              <a:t>25.09.2026</a:t>
+              <a:t>3.10.2026</a:t>
             </a:fld>
             <a:endParaRPr lang="tr-TR"/>
           </a:p>
@@ -29770,7 +29724,7 @@
           <a:p>
             <a:fld id="{556A583B-49D3-4431-A76E-53060577655C}" type="slidenum">
               <a:rPr lang="tr-TR" smtClean="0"/>
-              <a:t>45</a:t>
+              <a:t>44</a:t>
             </a:fld>
             <a:endParaRPr lang="tr-TR"/>
           </a:p>
@@ -29789,7 +29743,7 @@
 </p:sld>
 </file>
 
-<file path=ppt/slides/slide46.xml><?xml version="1.0" encoding="utf-8"?>
+<file path=ppt/slides/slide45.xml><?xml version="1.0" encoding="utf-8"?>
 <p:sld xmlns:a="http://schemas.openxmlformats.org/drawingml/2006/main" xmlns:r="http://schemas.openxmlformats.org/officeDocument/2006/relationships" xmlns:p="http://schemas.openxmlformats.org/presentationml/2006/main">
   <p:cSld>
     <p:spTree>
@@ -29908,7 +29862,7 @@
           <a:p>
             <a:fld id="{37D13B1C-06ED-4B08-8DAE-68BE84972603}" type="datetime1">
               <a:rPr lang="tr-TR" smtClean="0"/>
-              <a:t>25.09.2026</a:t>
+              <a:t>3.10.2026</a:t>
             </a:fld>
             <a:endParaRPr lang="tr-TR"/>
           </a:p>
@@ -29965,7 +29919,7 @@
           <a:p>
             <a:fld id="{556A583B-49D3-4431-A76E-53060577655C}" type="slidenum">
               <a:rPr lang="tr-TR" smtClean="0"/>
-              <a:t>46</a:t>
+              <a:t>45</a:t>
             </a:fld>
             <a:endParaRPr lang="tr-TR"/>
           </a:p>
@@ -29984,7 +29938,7 @@
 </p:sld>
 </file>
 
-<file path=ppt/slides/slide47.xml><?xml version="1.0" encoding="utf-8"?>
+<file path=ppt/slides/slide46.xml><?xml version="1.0" encoding="utf-8"?>
 <p:sld xmlns:a="http://schemas.openxmlformats.org/drawingml/2006/main" xmlns:r="http://schemas.openxmlformats.org/officeDocument/2006/relationships" xmlns:p="http://schemas.openxmlformats.org/presentationml/2006/main">
   <p:cSld>
     <p:spTree>
@@ -30070,7 +30024,7 @@
           <a:p>
             <a:fld id="{C143AAC5-8CDF-4095-BD1F-1322883AC1B0}" type="datetime1">
               <a:rPr lang="tr-TR" smtClean="0"/>
-              <a:t>25.09.2026</a:t>
+              <a:t>3.10.2026</a:t>
             </a:fld>
             <a:endParaRPr lang="tr-TR"/>
           </a:p>
@@ -30127,7 +30081,7 @@
           <a:p>
             <a:fld id="{556A583B-49D3-4431-A76E-53060577655C}" type="slidenum">
               <a:rPr lang="tr-TR" smtClean="0"/>
-              <a:t>47</a:t>
+              <a:t>46</a:t>
             </a:fld>
             <a:endParaRPr lang="tr-TR"/>
           </a:p>
@@ -30147,6 +30101,391 @@
 </file>
 
 <file path=ppt/slides/slide5.xml><?xml version="1.0" encoding="utf-8"?>
+<p:sld xmlns:a="http://schemas.openxmlformats.org/drawingml/2006/main" xmlns:r="http://schemas.openxmlformats.org/officeDocument/2006/relationships" xmlns:p="http://schemas.openxmlformats.org/presentationml/2006/main">
+  <p:cSld>
+    <p:spTree>
+      <p:nvGrpSpPr>
+        <p:cNvPr id="1" name="">
+          <a:extLst>
+            <a:ext uri="{FF2B5EF4-FFF2-40B4-BE49-F238E27FC236}">
+              <a16:creationId xmlns:a16="http://schemas.microsoft.com/office/drawing/2014/main" id="{3B365EDF-939C-1F94-7DC8-C0AE82A3AAD8}"/>
+            </a:ext>
+          </a:extLst>
+        </p:cNvPr>
+        <p:cNvGrpSpPr/>
+        <p:nvPr/>
+      </p:nvGrpSpPr>
+      <p:grpSpPr>
+        <a:xfrm>
+          <a:off x="0" y="0"/>
+          <a:ext cx="0" cy="0"/>
+          <a:chOff x="0" y="0"/>
+          <a:chExt cx="0" cy="0"/>
+        </a:xfrm>
+      </p:grpSpPr>
+      <p:sp>
+        <p:nvSpPr>
+          <p:cNvPr id="3" name="Metin kutusu 2">
+            <a:extLst>
+              <a:ext uri="{FF2B5EF4-FFF2-40B4-BE49-F238E27FC236}">
+                <a16:creationId xmlns:a16="http://schemas.microsoft.com/office/drawing/2014/main" id="{E3A07CAE-0C70-0016-2AF1-C9C0E8C49C49}"/>
+              </a:ext>
+            </a:extLst>
+          </p:cNvPr>
+          <p:cNvSpPr txBox="1"/>
+          <p:nvPr/>
+        </p:nvSpPr>
+        <p:spPr>
+          <a:xfrm>
+            <a:off x="7129862" y="400664"/>
+            <a:ext cx="3764595" cy="1384995"/>
+          </a:xfrm>
+          <a:prstGeom prst="rect">
+            <a:avLst/>
+          </a:prstGeom>
+          <a:noFill/>
+        </p:spPr>
+        <p:txBody>
+          <a:bodyPr wrap="square" rtlCol="0">
+            <a:spAutoFit/>
+          </a:bodyPr>
+          <a:lstStyle/>
+          <a:p>
+            <a:r>
+              <a:rPr lang="tr-TR" sz="2800" dirty="0"/>
+              <a:t>Google: </a:t>
+            </a:r>
+            <a:r>
+              <a:rPr lang="en-US" sz="2800" dirty="0"/>
+              <a:t>what are the 10 richest companies in the world</a:t>
+            </a:r>
+            <a:endParaRPr lang="tr-TR" sz="2800" dirty="0"/>
+          </a:p>
+        </p:txBody>
+      </p:sp>
+      <p:pic>
+        <p:nvPicPr>
+          <p:cNvPr id="4" name="Resim 3">
+            <a:extLst>
+              <a:ext uri="{FF2B5EF4-FFF2-40B4-BE49-F238E27FC236}">
+                <a16:creationId xmlns:a16="http://schemas.microsoft.com/office/drawing/2014/main" id="{08BADC85-7D7D-7F36-3D3E-38A0B1A99766}"/>
+              </a:ext>
+            </a:extLst>
+          </p:cNvPr>
+          <p:cNvPicPr>
+            <a:picLocks noChangeAspect="1"/>
+          </p:cNvPicPr>
+          <p:nvPr/>
+        </p:nvPicPr>
+        <p:blipFill>
+          <a:blip r:embed="rId2">
+            <a:extLst>
+              <a:ext uri="{28A0092B-C50C-407E-A947-70E740481C1C}">
+                <a14:useLocalDpi xmlns:a14="http://schemas.microsoft.com/office/drawing/2010/main" val="0"/>
+              </a:ext>
+            </a:extLst>
+          </a:blip>
+          <a:stretch>
+            <a:fillRect/>
+          </a:stretch>
+        </p:blipFill>
+        <p:spPr>
+          <a:xfrm>
+            <a:off x="750051" y="0"/>
+            <a:ext cx="4999757" cy="6858000"/>
+          </a:xfrm>
+          <a:prstGeom prst="rect">
+            <a:avLst/>
+          </a:prstGeom>
+        </p:spPr>
+      </p:pic>
+      <p:sp>
+        <p:nvSpPr>
+          <p:cNvPr id="2" name="Veri Yer Tutucusu 1">
+            <a:extLst>
+              <a:ext uri="{FF2B5EF4-FFF2-40B4-BE49-F238E27FC236}">
+                <a16:creationId xmlns:a16="http://schemas.microsoft.com/office/drawing/2014/main" id="{B2BFD690-FD86-7349-6B92-0CE024150347}"/>
+              </a:ext>
+            </a:extLst>
+          </p:cNvPr>
+          <p:cNvSpPr>
+            <a:spLocks noGrp="1"/>
+          </p:cNvSpPr>
+          <p:nvPr>
+            <p:ph type="dt" sz="half" idx="10"/>
+          </p:nvPr>
+        </p:nvSpPr>
+        <p:spPr/>
+        <p:txBody>
+          <a:bodyPr/>
+          <a:lstStyle/>
+          <a:p>
+            <a:fld id="{1FCC30DB-9A9A-407B-8F85-2EF59053FD42}" type="datetime1">
+              <a:rPr lang="tr-TR" smtClean="0"/>
+              <a:t>3.10.2026</a:t>
+            </a:fld>
+            <a:endParaRPr lang="tr-TR"/>
+          </a:p>
+        </p:txBody>
+      </p:sp>
+      <p:sp>
+        <p:nvSpPr>
+          <p:cNvPr id="5" name="Alt Bilgi Yer Tutucusu 4">
+            <a:extLst>
+              <a:ext uri="{FF2B5EF4-FFF2-40B4-BE49-F238E27FC236}">
+                <a16:creationId xmlns:a16="http://schemas.microsoft.com/office/drawing/2014/main" id="{AAAB063A-1018-7624-CA5B-DD16E323EB58}"/>
+              </a:ext>
+            </a:extLst>
+          </p:cNvPr>
+          <p:cNvSpPr>
+            <a:spLocks noGrp="1"/>
+          </p:cNvSpPr>
+          <p:nvPr>
+            <p:ph type="ftr" sz="quarter" idx="11"/>
+          </p:nvPr>
+        </p:nvSpPr>
+        <p:spPr/>
+        <p:txBody>
+          <a:bodyPr/>
+          <a:lstStyle/>
+          <a:p>
+            <a:r>
+              <a:rPr lang="tr-TR"/>
+              <a:t>Copyright: Harun Altay</a:t>
+            </a:r>
+          </a:p>
+        </p:txBody>
+      </p:sp>
+      <p:sp>
+        <p:nvSpPr>
+          <p:cNvPr id="6" name="Slayt Numarası Yer Tutucusu 5">
+            <a:extLst>
+              <a:ext uri="{FF2B5EF4-FFF2-40B4-BE49-F238E27FC236}">
+                <a16:creationId xmlns:a16="http://schemas.microsoft.com/office/drawing/2014/main" id="{EE6D7181-3435-96C6-165E-35CCB614C997}"/>
+              </a:ext>
+            </a:extLst>
+          </p:cNvPr>
+          <p:cNvSpPr>
+            <a:spLocks noGrp="1"/>
+          </p:cNvSpPr>
+          <p:nvPr>
+            <p:ph type="sldNum" sz="quarter" idx="12"/>
+          </p:nvPr>
+        </p:nvSpPr>
+        <p:spPr/>
+        <p:txBody>
+          <a:bodyPr/>
+          <a:lstStyle/>
+          <a:p>
+            <a:fld id="{556A583B-49D3-4431-A76E-53060577655C}" type="slidenum">
+              <a:rPr lang="tr-TR" smtClean="0"/>
+              <a:t>5</a:t>
+            </a:fld>
+            <a:endParaRPr lang="tr-TR"/>
+          </a:p>
+        </p:txBody>
+      </p:sp>
+    </p:spTree>
+    <p:extLst>
+      <p:ext uri="{BB962C8B-B14F-4D97-AF65-F5344CB8AC3E}">
+        <p14:creationId xmlns:p14="http://schemas.microsoft.com/office/powerpoint/2010/main" val="3066286309"/>
+      </p:ext>
+    </p:extLst>
+  </p:cSld>
+  <p:clrMapOvr>
+    <a:masterClrMapping/>
+  </p:clrMapOvr>
+</p:sld>
+</file>
+
+<file path=ppt/slides/slide6.xml><?xml version="1.0" encoding="utf-8"?>
+<p:sld xmlns:a="http://schemas.openxmlformats.org/drawingml/2006/main" xmlns:r="http://schemas.openxmlformats.org/officeDocument/2006/relationships" xmlns:p="http://schemas.openxmlformats.org/presentationml/2006/main">
+  <p:cSld>
+    <p:spTree>
+      <p:nvGrpSpPr>
+        <p:cNvPr id="1" name=""/>
+        <p:cNvGrpSpPr/>
+        <p:nvPr/>
+      </p:nvGrpSpPr>
+      <p:grpSpPr>
+        <a:xfrm>
+          <a:off x="0" y="0"/>
+          <a:ext cx="0" cy="0"/>
+          <a:chOff x="0" y="0"/>
+          <a:chExt cx="0" cy="0"/>
+        </a:xfrm>
+      </p:grpSpPr>
+      <p:sp>
+        <p:nvSpPr>
+          <p:cNvPr id="2" name="Başlık 1">
+            <a:extLst>
+              <a:ext uri="{FF2B5EF4-FFF2-40B4-BE49-F238E27FC236}">
+                <a16:creationId xmlns:a16="http://schemas.microsoft.com/office/drawing/2014/main" id="{BA413A63-67E2-300B-1344-FB5F0B93533B}"/>
+              </a:ext>
+            </a:extLst>
+          </p:cNvPr>
+          <p:cNvSpPr>
+            <a:spLocks noGrp="1"/>
+          </p:cNvSpPr>
+          <p:nvPr>
+            <p:ph type="title"/>
+          </p:nvPr>
+        </p:nvSpPr>
+        <p:spPr>
+          <a:xfrm>
+            <a:off x="7710089" y="540755"/>
+            <a:ext cx="3203718" cy="1897645"/>
+          </a:xfrm>
+        </p:spPr>
+        <p:txBody>
+          <a:bodyPr>
+            <a:normAutofit/>
+          </a:bodyPr>
+          <a:lstStyle/>
+          <a:p>
+            <a:r>
+              <a:rPr lang="tr-TR" sz="2800" dirty="0"/>
+              <a:t>Türk Hava Yolları ile WhatsApp’ın karşılaştırması</a:t>
+            </a:r>
+          </a:p>
+        </p:txBody>
+      </p:sp>
+      <p:pic>
+        <p:nvPicPr>
+          <p:cNvPr id="5" name="Resim 4">
+            <a:extLst>
+              <a:ext uri="{FF2B5EF4-FFF2-40B4-BE49-F238E27FC236}">
+                <a16:creationId xmlns:a16="http://schemas.microsoft.com/office/drawing/2014/main" id="{FDEC545F-0C7C-0E1E-1B05-1376993D4920}"/>
+              </a:ext>
+            </a:extLst>
+          </p:cNvPr>
+          <p:cNvPicPr>
+            <a:picLocks noChangeAspect="1"/>
+          </p:cNvPicPr>
+          <p:nvPr/>
+        </p:nvPicPr>
+        <p:blipFill>
+          <a:blip r:embed="rId2">
+            <a:extLst>
+              <a:ext uri="{28A0092B-C50C-407E-A947-70E740481C1C}">
+                <a14:useLocalDpi xmlns:a14="http://schemas.microsoft.com/office/drawing/2010/main" val="0"/>
+              </a:ext>
+            </a:extLst>
+          </a:blip>
+          <a:stretch>
+            <a:fillRect/>
+          </a:stretch>
+        </p:blipFill>
+        <p:spPr>
+          <a:xfrm>
+            <a:off x="0" y="0"/>
+            <a:ext cx="6858000" cy="6858000"/>
+          </a:xfrm>
+          <a:prstGeom prst="rect">
+            <a:avLst/>
+          </a:prstGeom>
+        </p:spPr>
+      </p:pic>
+      <p:sp>
+        <p:nvSpPr>
+          <p:cNvPr id="3" name="Veri Yer Tutucusu 2">
+            <a:extLst>
+              <a:ext uri="{FF2B5EF4-FFF2-40B4-BE49-F238E27FC236}">
+                <a16:creationId xmlns:a16="http://schemas.microsoft.com/office/drawing/2014/main" id="{59CB061E-9FC9-85DC-F5BD-5F9D7AC628B7}"/>
+              </a:ext>
+            </a:extLst>
+          </p:cNvPr>
+          <p:cNvSpPr>
+            <a:spLocks noGrp="1"/>
+          </p:cNvSpPr>
+          <p:nvPr>
+            <p:ph type="dt" sz="half" idx="10"/>
+          </p:nvPr>
+        </p:nvSpPr>
+        <p:spPr/>
+        <p:txBody>
+          <a:bodyPr/>
+          <a:lstStyle/>
+          <a:p>
+            <a:fld id="{DD0C0D17-D0F7-4921-92A7-F82ABD37D906}" type="datetime1">
+              <a:rPr lang="tr-TR" smtClean="0"/>
+              <a:t>3.10.2026</a:t>
+            </a:fld>
+            <a:endParaRPr lang="tr-TR"/>
+          </a:p>
+        </p:txBody>
+      </p:sp>
+      <p:sp>
+        <p:nvSpPr>
+          <p:cNvPr id="4" name="Alt Bilgi Yer Tutucusu 3">
+            <a:extLst>
+              <a:ext uri="{FF2B5EF4-FFF2-40B4-BE49-F238E27FC236}">
+                <a16:creationId xmlns:a16="http://schemas.microsoft.com/office/drawing/2014/main" id="{BD6D7420-2D93-ACCF-9812-CAF9ECCCFB46}"/>
+              </a:ext>
+            </a:extLst>
+          </p:cNvPr>
+          <p:cNvSpPr>
+            <a:spLocks noGrp="1"/>
+          </p:cNvSpPr>
+          <p:nvPr>
+            <p:ph type="ftr" sz="quarter" idx="11"/>
+          </p:nvPr>
+        </p:nvSpPr>
+        <p:spPr/>
+        <p:txBody>
+          <a:bodyPr/>
+          <a:lstStyle/>
+          <a:p>
+            <a:r>
+              <a:rPr lang="tr-TR"/>
+              <a:t>Copyright: Harun Altay</a:t>
+            </a:r>
+          </a:p>
+        </p:txBody>
+      </p:sp>
+      <p:sp>
+        <p:nvSpPr>
+          <p:cNvPr id="6" name="Slayt Numarası Yer Tutucusu 5">
+            <a:extLst>
+              <a:ext uri="{FF2B5EF4-FFF2-40B4-BE49-F238E27FC236}">
+                <a16:creationId xmlns:a16="http://schemas.microsoft.com/office/drawing/2014/main" id="{652417D0-00E4-BB81-E957-2C3D00E16B8B}"/>
+              </a:ext>
+            </a:extLst>
+          </p:cNvPr>
+          <p:cNvSpPr>
+            <a:spLocks noGrp="1"/>
+          </p:cNvSpPr>
+          <p:nvPr>
+            <p:ph type="sldNum" sz="quarter" idx="12"/>
+          </p:nvPr>
+        </p:nvSpPr>
+        <p:spPr/>
+        <p:txBody>
+          <a:bodyPr/>
+          <a:lstStyle/>
+          <a:p>
+            <a:fld id="{556A583B-49D3-4431-A76E-53060577655C}" type="slidenum">
+              <a:rPr lang="tr-TR" smtClean="0"/>
+              <a:t>6</a:t>
+            </a:fld>
+            <a:endParaRPr lang="tr-TR"/>
+          </a:p>
+        </p:txBody>
+      </p:sp>
+    </p:spTree>
+    <p:extLst>
+      <p:ext uri="{BB962C8B-B14F-4D97-AF65-F5344CB8AC3E}">
+        <p14:creationId xmlns:p14="http://schemas.microsoft.com/office/powerpoint/2010/main" val="2985869403"/>
+      </p:ext>
+    </p:extLst>
+  </p:cSld>
+  <p:clrMapOvr>
+    <a:masterClrMapping/>
+  </p:clrMapOvr>
+</p:sld>
+</file>
+
+<file path=ppt/slides/slide7.xml><?xml version="1.0" encoding="utf-8"?>
 <p:sld xmlns:a="http://schemas.openxmlformats.org/drawingml/2006/main" xmlns:r="http://schemas.openxmlformats.org/officeDocument/2006/relationships" xmlns:p="http://schemas.openxmlformats.org/presentationml/2006/main">
   <p:cSld>
     <p:spTree>
@@ -30263,7 +30602,7 @@
           <a:p>
             <a:fld id="{E39A9F3D-0371-49E3-99E7-76A4D5BBDDE8}" type="datetime1">
               <a:rPr lang="tr-TR" smtClean="0"/>
-              <a:t>25.09.2026</a:t>
+              <a:t>3.10.2026</a:t>
             </a:fld>
             <a:endParaRPr lang="tr-TR"/>
           </a:p>
@@ -30320,7 +30659,7 @@
           <a:p>
             <a:fld id="{556A583B-49D3-4431-A76E-53060577655C}" type="slidenum">
               <a:rPr lang="tr-TR" smtClean="0"/>
-              <a:t>5</a:t>
+              <a:t>7</a:t>
             </a:fld>
             <a:endParaRPr lang="tr-TR"/>
           </a:p>
@@ -30339,243 +30678,7 @@
 </p:sld>
 </file>
 
-<file path=ppt/slides/slide6.xml><?xml version="1.0" encoding="utf-8"?>
-<p:sld xmlns:a="http://schemas.openxmlformats.org/drawingml/2006/main" xmlns:r="http://schemas.openxmlformats.org/officeDocument/2006/relationships" xmlns:p="http://schemas.openxmlformats.org/presentationml/2006/main">
-  <p:cSld>
-    <p:spTree>
-      <p:nvGrpSpPr>
-        <p:cNvPr id="1" name="">
-          <a:extLst>
-            <a:ext uri="{FF2B5EF4-FFF2-40B4-BE49-F238E27FC236}">
-              <a16:creationId xmlns:a16="http://schemas.microsoft.com/office/drawing/2014/main" id="{74D4869C-62F0-A023-3A79-1F036E269253}"/>
-            </a:ext>
-          </a:extLst>
-        </p:cNvPr>
-        <p:cNvGrpSpPr/>
-        <p:nvPr/>
-      </p:nvGrpSpPr>
-      <p:grpSpPr>
-        <a:xfrm>
-          <a:off x="0" y="0"/>
-          <a:ext cx="0" cy="0"/>
-          <a:chOff x="0" y="0"/>
-          <a:chExt cx="0" cy="0"/>
-        </a:xfrm>
-      </p:grpSpPr>
-      <p:sp>
-        <p:nvSpPr>
-          <p:cNvPr id="2" name="Başlık 1">
-            <a:extLst>
-              <a:ext uri="{FF2B5EF4-FFF2-40B4-BE49-F238E27FC236}">
-                <a16:creationId xmlns:a16="http://schemas.microsoft.com/office/drawing/2014/main" id="{4F7F74FF-0458-4A70-9889-9A301B1D2A0C}"/>
-              </a:ext>
-            </a:extLst>
-          </p:cNvPr>
-          <p:cNvSpPr>
-            <a:spLocks noGrp="1"/>
-          </p:cNvSpPr>
-          <p:nvPr>
-            <p:ph type="title"/>
-          </p:nvPr>
-        </p:nvSpPr>
-        <p:spPr>
-          <a:xfrm>
-            <a:off x="838200" y="365126"/>
-            <a:ext cx="10515600" cy="726256"/>
-          </a:xfrm>
-        </p:spPr>
-        <p:txBody>
-          <a:bodyPr>
-            <a:normAutofit/>
-          </a:bodyPr>
-          <a:lstStyle/>
-          <a:p>
-            <a:r>
-              <a:rPr lang="tr-TR" sz="3600" dirty="0"/>
-              <a:t>Bu eğitim kimin içindir?</a:t>
-            </a:r>
-          </a:p>
-        </p:txBody>
-      </p:sp>
-      <p:sp>
-        <p:nvSpPr>
-          <p:cNvPr id="3" name="İçerik Yer Tutucusu 2">
-            <a:extLst>
-              <a:ext uri="{FF2B5EF4-FFF2-40B4-BE49-F238E27FC236}">
-                <a16:creationId xmlns:a16="http://schemas.microsoft.com/office/drawing/2014/main" id="{FF481CC2-0E24-822C-166F-C0A82E72999D}"/>
-              </a:ext>
-            </a:extLst>
-          </p:cNvPr>
-          <p:cNvSpPr>
-            <a:spLocks noGrp="1"/>
-          </p:cNvSpPr>
-          <p:nvPr>
-            <p:ph idx="1"/>
-          </p:nvPr>
-        </p:nvSpPr>
-        <p:spPr>
-          <a:xfrm>
-            <a:off x="838200" y="1091382"/>
-            <a:ext cx="10515600" cy="5220928"/>
-          </a:xfrm>
-        </p:spPr>
-        <p:txBody>
-          <a:bodyPr>
-            <a:normAutofit/>
-          </a:bodyPr>
-          <a:lstStyle/>
-          <a:p>
-            <a:r>
-              <a:rPr lang="tr-TR" dirty="0"/>
-              <a:t>Yazılımı geliştirmeyi ve programcılığı hiç bilmeyenler içindir</a:t>
-            </a:r>
-          </a:p>
-          <a:p>
-            <a:r>
-              <a:rPr lang="tr-TR" dirty="0"/>
-              <a:t>İlkokul, orta okul, lise ve üniversite öğrencileri içindir</a:t>
-            </a:r>
-          </a:p>
-          <a:p>
-            <a:r>
-              <a:rPr lang="tr-TR" dirty="0"/>
-              <a:t>Hobi arayan emekliler, ev hanımları ve herkes içindir</a:t>
-            </a:r>
-          </a:p>
-          <a:p>
-            <a:r>
-              <a:rPr lang="tr-TR" dirty="0" err="1"/>
-              <a:t>Yazılımcılık</a:t>
-            </a:r>
-            <a:r>
-              <a:rPr lang="tr-TR" dirty="0"/>
-              <a:t> acaba bana meslek olur mu diyenler içindir</a:t>
-            </a:r>
-          </a:p>
-          <a:p>
-            <a:r>
-              <a:rPr lang="tr-TR" dirty="0" err="1"/>
-              <a:t>Yazılımcılığın</a:t>
-            </a:r>
-            <a:r>
-              <a:rPr lang="tr-TR" dirty="0"/>
-              <a:t> «Yönetici Özetini (</a:t>
-            </a:r>
-            <a:r>
-              <a:rPr lang="tr-TR"/>
-              <a:t>management </a:t>
-            </a:r>
-            <a:r>
-              <a:rPr lang="tr-TR" dirty="0" err="1"/>
-              <a:t>summary</a:t>
-            </a:r>
-            <a:r>
-              <a:rPr lang="tr-TR" dirty="0"/>
-              <a:t>)» görmek isteyenler içindir</a:t>
-            </a:r>
-          </a:p>
-        </p:txBody>
-      </p:sp>
-      <p:sp>
-        <p:nvSpPr>
-          <p:cNvPr id="4" name="Veri Yer Tutucusu 3">
-            <a:extLst>
-              <a:ext uri="{FF2B5EF4-FFF2-40B4-BE49-F238E27FC236}">
-                <a16:creationId xmlns:a16="http://schemas.microsoft.com/office/drawing/2014/main" id="{C2EF1EEE-BF97-7861-D880-10B5DAEA83E5}"/>
-              </a:ext>
-            </a:extLst>
-          </p:cNvPr>
-          <p:cNvSpPr>
-            <a:spLocks noGrp="1"/>
-          </p:cNvSpPr>
-          <p:nvPr>
-            <p:ph type="dt" sz="half" idx="10"/>
-          </p:nvPr>
-        </p:nvSpPr>
-        <p:spPr/>
-        <p:txBody>
-          <a:bodyPr/>
-          <a:lstStyle/>
-          <a:p>
-            <a:fld id="{E9290591-5B3F-4E6A-A4B5-910A3B0B03FF}" type="datetime1">
-              <a:rPr lang="tr-TR" smtClean="0"/>
-              <a:t>25.09.2026</a:t>
-            </a:fld>
-            <a:endParaRPr lang="tr-TR"/>
-          </a:p>
-        </p:txBody>
-      </p:sp>
-      <p:sp>
-        <p:nvSpPr>
-          <p:cNvPr id="5" name="Alt Bilgi Yer Tutucusu 4">
-            <a:extLst>
-              <a:ext uri="{FF2B5EF4-FFF2-40B4-BE49-F238E27FC236}">
-                <a16:creationId xmlns:a16="http://schemas.microsoft.com/office/drawing/2014/main" id="{FD7ABFEB-FCFD-D25C-ABA3-39ECD85546E6}"/>
-              </a:ext>
-            </a:extLst>
-          </p:cNvPr>
-          <p:cNvSpPr>
-            <a:spLocks noGrp="1"/>
-          </p:cNvSpPr>
-          <p:nvPr>
-            <p:ph type="ftr" sz="quarter" idx="11"/>
-          </p:nvPr>
-        </p:nvSpPr>
-        <p:spPr/>
-        <p:txBody>
-          <a:bodyPr/>
-          <a:lstStyle/>
-          <a:p>
-            <a:r>
-              <a:rPr lang="tr-TR"/>
-              <a:t>Copyright: Harun Altay</a:t>
-            </a:r>
-          </a:p>
-        </p:txBody>
-      </p:sp>
-      <p:sp>
-        <p:nvSpPr>
-          <p:cNvPr id="6" name="Slayt Numarası Yer Tutucusu 5">
-            <a:extLst>
-              <a:ext uri="{FF2B5EF4-FFF2-40B4-BE49-F238E27FC236}">
-                <a16:creationId xmlns:a16="http://schemas.microsoft.com/office/drawing/2014/main" id="{CA7BEB0C-B7F1-F1A0-F63A-BDE9E4DE1568}"/>
-              </a:ext>
-            </a:extLst>
-          </p:cNvPr>
-          <p:cNvSpPr>
-            <a:spLocks noGrp="1"/>
-          </p:cNvSpPr>
-          <p:nvPr>
-            <p:ph type="sldNum" sz="quarter" idx="12"/>
-          </p:nvPr>
-        </p:nvSpPr>
-        <p:spPr/>
-        <p:txBody>
-          <a:bodyPr/>
-          <a:lstStyle/>
-          <a:p>
-            <a:fld id="{556A583B-49D3-4431-A76E-53060577655C}" type="slidenum">
-              <a:rPr lang="tr-TR" smtClean="0"/>
-              <a:t>6</a:t>
-            </a:fld>
-            <a:endParaRPr lang="tr-TR"/>
-          </a:p>
-        </p:txBody>
-      </p:sp>
-    </p:spTree>
-    <p:extLst>
-      <p:ext uri="{BB962C8B-B14F-4D97-AF65-F5344CB8AC3E}">
-        <p14:creationId xmlns:p14="http://schemas.microsoft.com/office/powerpoint/2010/main" val="1790205340"/>
-      </p:ext>
-    </p:extLst>
-  </p:cSld>
-  <p:clrMapOvr>
-    <a:masterClrMapping/>
-  </p:clrMapOvr>
-</p:sld>
-</file>
-
-<file path=ppt/slides/slide7.xml><?xml version="1.0" encoding="utf-8"?>
+<file path=ppt/slides/slide8.xml><?xml version="1.0" encoding="utf-8"?>
 <p:sld xmlns:a="http://schemas.openxmlformats.org/drawingml/2006/main" xmlns:r="http://schemas.openxmlformats.org/officeDocument/2006/relationships" xmlns:p="http://schemas.openxmlformats.org/presentationml/2006/main">
   <p:cSld>
     <p:spTree>
@@ -30756,7 +30859,7 @@
           <a:p>
             <a:fld id="{E9290591-5B3F-4E6A-A4B5-910A3B0B03FF}" type="datetime1">
               <a:rPr lang="tr-TR" smtClean="0"/>
-              <a:t>25.09.2026</a:t>
+              <a:t>3.10.2026</a:t>
             </a:fld>
             <a:endParaRPr lang="tr-TR"/>
           </a:p>
@@ -30813,7 +30916,7 @@
           <a:p>
             <a:fld id="{556A583B-49D3-4431-A76E-53060577655C}" type="slidenum">
               <a:rPr lang="tr-TR" smtClean="0"/>
-              <a:t>7</a:t>
+              <a:t>8</a:t>
             </a:fld>
             <a:endParaRPr lang="tr-TR"/>
           </a:p>
@@ -30832,7 +30935,7 @@
 </p:sld>
 </file>
 
-<file path=ppt/slides/slide8.xml><?xml version="1.0" encoding="utf-8"?>
+<file path=ppt/slides/slide9.xml><?xml version="1.0" encoding="utf-8"?>
 <p:sld xmlns:a="http://schemas.openxmlformats.org/drawingml/2006/main" xmlns:r="http://schemas.openxmlformats.org/officeDocument/2006/relationships" xmlns:p="http://schemas.openxmlformats.org/presentationml/2006/main">
   <p:cSld>
     <p:spTree>
@@ -30949,7 +31052,7 @@
           <a:p>
             <a:fld id="{C1AECFD1-912F-440E-B5D2-E8507637DDA3}" type="datetime1">
               <a:rPr lang="tr-TR" smtClean="0"/>
-              <a:t>25.09.2026</a:t>
+              <a:t>3.10.2026</a:t>
             </a:fld>
             <a:endParaRPr lang="tr-TR"/>
           </a:p>
@@ -31006,7 +31109,7 @@
           <a:p>
             <a:fld id="{556A583B-49D3-4431-A76E-53060577655C}" type="slidenum">
               <a:rPr lang="tr-TR" smtClean="0"/>
-              <a:t>8</a:t>
+              <a:t>9</a:t>
             </a:fld>
             <a:endParaRPr lang="tr-TR"/>
           </a:p>
@@ -31016,260 +31119,6 @@
     <p:extLst>
       <p:ext uri="{BB962C8B-B14F-4D97-AF65-F5344CB8AC3E}">
         <p14:creationId xmlns:p14="http://schemas.microsoft.com/office/powerpoint/2010/main" val="1970157548"/>
-      </p:ext>
-    </p:extLst>
-  </p:cSld>
-  <p:clrMapOvr>
-    <a:masterClrMapping/>
-  </p:clrMapOvr>
-</p:sld>
-</file>
-
-<file path=ppt/slides/slide9.xml><?xml version="1.0" encoding="utf-8"?>
-<p:sld xmlns:a="http://schemas.openxmlformats.org/drawingml/2006/main" xmlns:r="http://schemas.openxmlformats.org/officeDocument/2006/relationships" xmlns:p="http://schemas.openxmlformats.org/presentationml/2006/main">
-  <p:cSld>
-    <p:spTree>
-      <p:nvGrpSpPr>
-        <p:cNvPr id="1" name="">
-          <a:extLst>
-            <a:ext uri="{FF2B5EF4-FFF2-40B4-BE49-F238E27FC236}">
-              <a16:creationId xmlns:a16="http://schemas.microsoft.com/office/drawing/2014/main" id="{F66C4B87-0194-DE33-1678-0AC4A6CFC256}"/>
-            </a:ext>
-          </a:extLst>
-        </p:cNvPr>
-        <p:cNvGrpSpPr/>
-        <p:nvPr/>
-      </p:nvGrpSpPr>
-      <p:grpSpPr>
-        <a:xfrm>
-          <a:off x="0" y="0"/>
-          <a:ext cx="0" cy="0"/>
-          <a:chOff x="0" y="0"/>
-          <a:chExt cx="0" cy="0"/>
-        </a:xfrm>
-      </p:grpSpPr>
-      <p:pic>
-        <p:nvPicPr>
-          <p:cNvPr id="4" name="Resim 3">
-            <a:extLst>
-              <a:ext uri="{FF2B5EF4-FFF2-40B4-BE49-F238E27FC236}">
-                <a16:creationId xmlns:a16="http://schemas.microsoft.com/office/drawing/2014/main" id="{31BF3C76-AC2B-E01D-120A-745F2D108F8F}"/>
-              </a:ext>
-            </a:extLst>
-          </p:cNvPr>
-          <p:cNvPicPr>
-            <a:picLocks noChangeAspect="1"/>
-          </p:cNvPicPr>
-          <p:nvPr/>
-        </p:nvPicPr>
-        <p:blipFill>
-          <a:blip r:embed="rId2">
-            <a:extLst>
-              <a:ext uri="{28A0092B-C50C-407E-A947-70E740481C1C}">
-                <a14:useLocalDpi xmlns:a14="http://schemas.microsoft.com/office/drawing/2010/main" val="0"/>
-              </a:ext>
-            </a:extLst>
-          </a:blip>
-          <a:stretch>
-            <a:fillRect/>
-          </a:stretch>
-        </p:blipFill>
-        <p:spPr>
-          <a:xfrm>
-            <a:off x="349521" y="509395"/>
-            <a:ext cx="7606963" cy="4278916"/>
-          </a:xfrm>
-          <a:prstGeom prst="rect">
-            <a:avLst/>
-          </a:prstGeom>
-        </p:spPr>
-      </p:pic>
-      <p:sp>
-        <p:nvSpPr>
-          <p:cNvPr id="3" name="Metin kutusu 2">
-            <a:extLst>
-              <a:ext uri="{FF2B5EF4-FFF2-40B4-BE49-F238E27FC236}">
-                <a16:creationId xmlns:a16="http://schemas.microsoft.com/office/drawing/2014/main" id="{A5CB9D32-66E2-73EB-2B9E-C177A703916B}"/>
-              </a:ext>
-            </a:extLst>
-          </p:cNvPr>
-          <p:cNvSpPr txBox="1"/>
-          <p:nvPr/>
-        </p:nvSpPr>
-        <p:spPr>
-          <a:xfrm>
-            <a:off x="8192361" y="827194"/>
-            <a:ext cx="3764595" cy="1815882"/>
-          </a:xfrm>
-          <a:prstGeom prst="rect">
-            <a:avLst/>
-          </a:prstGeom>
-          <a:noFill/>
-        </p:spPr>
-        <p:txBody>
-          <a:bodyPr wrap="square" rtlCol="0">
-            <a:spAutoFit/>
-          </a:bodyPr>
-          <a:lstStyle/>
-          <a:p>
-            <a:r>
-              <a:rPr lang="tr-TR" sz="2800" dirty="0"/>
-              <a:t>Bilgisayar çeşitlerine örnek olarak, sadece «</a:t>
-            </a:r>
-            <a:r>
-              <a:rPr lang="tr-TR" sz="2800" dirty="0" err="1"/>
-              <a:t>iot</a:t>
-            </a:r>
-            <a:r>
-              <a:rPr lang="tr-TR" sz="2800" dirty="0"/>
-              <a:t>» cihazlarının bazı çeşitleri</a:t>
-            </a:r>
-          </a:p>
-        </p:txBody>
-      </p:sp>
-      <p:sp>
-        <p:nvSpPr>
-          <p:cNvPr id="6" name="Metin kutusu 5">
-            <a:extLst>
-              <a:ext uri="{FF2B5EF4-FFF2-40B4-BE49-F238E27FC236}">
-                <a16:creationId xmlns:a16="http://schemas.microsoft.com/office/drawing/2014/main" id="{DCE0AEC4-2002-1FC9-A168-BBF68E5DB4C0}"/>
-              </a:ext>
-            </a:extLst>
-          </p:cNvPr>
-          <p:cNvSpPr txBox="1"/>
-          <p:nvPr/>
-        </p:nvSpPr>
-        <p:spPr>
-          <a:xfrm>
-            <a:off x="8192361" y="2841523"/>
-            <a:ext cx="3411793" cy="1477328"/>
-          </a:xfrm>
-          <a:prstGeom prst="rect">
-            <a:avLst/>
-          </a:prstGeom>
-          <a:noFill/>
-        </p:spPr>
-        <p:txBody>
-          <a:bodyPr wrap="square" rtlCol="0">
-            <a:spAutoFit/>
-          </a:bodyPr>
-          <a:lstStyle/>
-          <a:p>
-            <a:r>
-              <a:rPr lang="tr-TR" dirty="0" err="1"/>
-              <a:t>İot</a:t>
-            </a:r>
-            <a:r>
-              <a:rPr lang="tr-TR" dirty="0"/>
-              <a:t>: (internet of </a:t>
-            </a:r>
-            <a:r>
-              <a:rPr lang="tr-TR" dirty="0" err="1"/>
-              <a:t>things</a:t>
-            </a:r>
-            <a:r>
-              <a:rPr lang="tr-TR" dirty="0"/>
-              <a:t>):</a:t>
-            </a:r>
-          </a:p>
-          <a:p>
-            <a:r>
-              <a:rPr lang="tr-TR" dirty="0"/>
-              <a:t>Birbirine internet ve benzeri bir bağ ile bağlanmış, küçüklü büyüklü cihazlar, donanımı ile yazılımı ile beraber</a:t>
-            </a:r>
-          </a:p>
-        </p:txBody>
-      </p:sp>
-      <p:sp>
-        <p:nvSpPr>
-          <p:cNvPr id="2" name="Veri Yer Tutucusu 1">
-            <a:extLst>
-              <a:ext uri="{FF2B5EF4-FFF2-40B4-BE49-F238E27FC236}">
-                <a16:creationId xmlns:a16="http://schemas.microsoft.com/office/drawing/2014/main" id="{CEE04E5D-A0DE-B3F0-E359-A42AD0AC578F}"/>
-              </a:ext>
-            </a:extLst>
-          </p:cNvPr>
-          <p:cNvSpPr>
-            <a:spLocks noGrp="1"/>
-          </p:cNvSpPr>
-          <p:nvPr>
-            <p:ph type="dt" sz="half" idx="10"/>
-          </p:nvPr>
-        </p:nvSpPr>
-        <p:spPr/>
-        <p:txBody>
-          <a:bodyPr/>
-          <a:lstStyle/>
-          <a:p>
-            <a:fld id="{D91DE6A9-2411-46E2-B574-284264D3EA73}" type="datetime1">
-              <a:rPr lang="tr-TR" smtClean="0"/>
-              <a:t>25.09.2026</a:t>
-            </a:fld>
-            <a:endParaRPr lang="tr-TR"/>
-          </a:p>
-        </p:txBody>
-      </p:sp>
-      <p:sp>
-        <p:nvSpPr>
-          <p:cNvPr id="5" name="Alt Bilgi Yer Tutucusu 4">
-            <a:extLst>
-              <a:ext uri="{FF2B5EF4-FFF2-40B4-BE49-F238E27FC236}">
-                <a16:creationId xmlns:a16="http://schemas.microsoft.com/office/drawing/2014/main" id="{D11EB380-22FE-F038-7F3F-4408A52B8CE7}"/>
-              </a:ext>
-            </a:extLst>
-          </p:cNvPr>
-          <p:cNvSpPr>
-            <a:spLocks noGrp="1"/>
-          </p:cNvSpPr>
-          <p:nvPr>
-            <p:ph type="ftr" sz="quarter" idx="11"/>
-          </p:nvPr>
-        </p:nvSpPr>
-        <p:spPr/>
-        <p:txBody>
-          <a:bodyPr/>
-          <a:lstStyle/>
-          <a:p>
-            <a:r>
-              <a:rPr lang="tr-TR"/>
-              <a:t>Copyright: Harun Altay</a:t>
-            </a:r>
-          </a:p>
-        </p:txBody>
-      </p:sp>
-      <p:sp>
-        <p:nvSpPr>
-          <p:cNvPr id="7" name="Slayt Numarası Yer Tutucusu 6">
-            <a:extLst>
-              <a:ext uri="{FF2B5EF4-FFF2-40B4-BE49-F238E27FC236}">
-                <a16:creationId xmlns:a16="http://schemas.microsoft.com/office/drawing/2014/main" id="{77043C78-A403-9F94-E41B-A607C2FDE2D7}"/>
-              </a:ext>
-            </a:extLst>
-          </p:cNvPr>
-          <p:cNvSpPr>
-            <a:spLocks noGrp="1"/>
-          </p:cNvSpPr>
-          <p:nvPr>
-            <p:ph type="sldNum" sz="quarter" idx="12"/>
-          </p:nvPr>
-        </p:nvSpPr>
-        <p:spPr/>
-        <p:txBody>
-          <a:bodyPr/>
-          <a:lstStyle/>
-          <a:p>
-            <a:fld id="{556A583B-49D3-4431-A76E-53060577655C}" type="slidenum">
-              <a:rPr lang="tr-TR" smtClean="0"/>
-              <a:t>9</a:t>
-            </a:fld>
-            <a:endParaRPr lang="tr-TR"/>
-          </a:p>
-        </p:txBody>
-      </p:sp>
-    </p:spTree>
-    <p:extLst>
-      <p:ext uri="{BB962C8B-B14F-4D97-AF65-F5344CB8AC3E}">
-        <p14:creationId xmlns:p14="http://schemas.microsoft.com/office/powerpoint/2010/main" val="348304317"/>
       </p:ext>
     </p:extLst>
   </p:cSld>

--- a/prog-diller/yazilim-sunum/Yazilim-Programlama-Dilleri-Giris.pptx
+++ b/prog-diller/yazilim-sunum/Yazilim-Programlama-Dilleri-Giris.pptx
@@ -5,7 +5,7 @@
     <p:sldMasterId id="2147483648" r:id="rId1"/>
   </p:sldMasterIdLst>
   <p:notesMasterIdLst>
-    <p:notesMasterId r:id="rId48"/>
+    <p:notesMasterId r:id="rId58"/>
   </p:notesMasterIdLst>
   <p:sldIdLst>
     <p:sldId id="256" r:id="rId2"/>
@@ -51,9 +51,19 @@
     <p:sldId id="297" r:id="rId42"/>
     <p:sldId id="298" r:id="rId43"/>
     <p:sldId id="316" r:id="rId44"/>
-    <p:sldId id="272" r:id="rId45"/>
-    <p:sldId id="301" r:id="rId46"/>
-    <p:sldId id="318" r:id="rId47"/>
+    <p:sldId id="320" r:id="rId45"/>
+    <p:sldId id="321" r:id="rId46"/>
+    <p:sldId id="323" r:id="rId47"/>
+    <p:sldId id="324" r:id="rId48"/>
+    <p:sldId id="325" r:id="rId49"/>
+    <p:sldId id="326" r:id="rId50"/>
+    <p:sldId id="329" r:id="rId51"/>
+    <p:sldId id="322" r:id="rId52"/>
+    <p:sldId id="328" r:id="rId53"/>
+    <p:sldId id="327" r:id="rId54"/>
+    <p:sldId id="272" r:id="rId55"/>
+    <p:sldId id="301" r:id="rId56"/>
+    <p:sldId id="318" r:id="rId57"/>
   </p:sldIdLst>
   <p:sldSz cx="12192000" cy="6858000"/>
   <p:notesSz cx="6858000" cy="9144000"/>
@@ -1757,7 +1767,7 @@
           <a:p>
             <a:fld id="{C1588F4E-3675-40DB-9220-26466038BC35}" type="datetimeFigureOut">
               <a:rPr lang="tr-TR" smtClean="0"/>
-              <a:t>3.10.2026</a:t>
+              <a:t>4.10.2026</a:t>
             </a:fld>
             <a:endParaRPr lang="tr-TR"/>
           </a:p>
@@ -2255,7 +2265,7 @@
           <a:p>
             <a:fld id="{B341F49D-51DC-4353-AA5E-05FE8786A758}" type="datetime1">
               <a:rPr lang="tr-TR" smtClean="0"/>
-              <a:t>3.10.2026</a:t>
+              <a:t>4.10.2026</a:t>
             </a:fld>
             <a:endParaRPr lang="tr-TR"/>
           </a:p>
@@ -2456,7 +2466,7 @@
           <a:p>
             <a:fld id="{E62381A7-30B7-42F3-9FAA-B0CA7D840D09}" type="datetime1">
               <a:rPr lang="tr-TR" smtClean="0"/>
-              <a:t>3.10.2026</a:t>
+              <a:t>4.10.2026</a:t>
             </a:fld>
             <a:endParaRPr lang="tr-TR"/>
           </a:p>
@@ -2667,7 +2677,7 @@
           <a:p>
             <a:fld id="{59DB5FF5-A25E-4962-9109-204BA4BAC34F}" type="datetime1">
               <a:rPr lang="tr-TR" smtClean="0"/>
-              <a:t>3.10.2026</a:t>
+              <a:t>4.10.2026</a:t>
             </a:fld>
             <a:endParaRPr lang="tr-TR"/>
           </a:p>
@@ -2868,7 +2878,7 @@
           <a:p>
             <a:fld id="{E5A72F27-F128-4B68-926B-C496DC38618F}" type="datetime1">
               <a:rPr lang="tr-TR" smtClean="0"/>
-              <a:t>3.10.2026</a:t>
+              <a:t>4.10.2026</a:t>
             </a:fld>
             <a:endParaRPr lang="tr-TR"/>
           </a:p>
@@ -3146,7 +3156,7 @@
           <a:p>
             <a:fld id="{296B5E9F-399B-4CBC-87EE-198C34067A1D}" type="datetime1">
               <a:rPr lang="tr-TR" smtClean="0"/>
-              <a:t>3.10.2026</a:t>
+              <a:t>4.10.2026</a:t>
             </a:fld>
             <a:endParaRPr lang="tr-TR"/>
           </a:p>
@@ -3414,7 +3424,7 @@
           <a:p>
             <a:fld id="{9AEEAF4F-0C2D-439E-BD32-BCCB7DCDA994}" type="datetime1">
               <a:rPr lang="tr-TR" smtClean="0"/>
-              <a:t>3.10.2026</a:t>
+              <a:t>4.10.2026</a:t>
             </a:fld>
             <a:endParaRPr lang="tr-TR"/>
           </a:p>
@@ -3829,7 +3839,7 @@
           <a:p>
             <a:fld id="{0A76AC57-E932-4B31-8A8B-90137E7295CB}" type="datetime1">
               <a:rPr lang="tr-TR" smtClean="0"/>
-              <a:t>3.10.2026</a:t>
+              <a:t>4.10.2026</a:t>
             </a:fld>
             <a:endParaRPr lang="tr-TR"/>
           </a:p>
@@ -3973,7 +3983,7 @@
           <a:p>
             <a:fld id="{53BFBF74-6E94-4323-A735-12508C54A430}" type="datetime1">
               <a:rPr lang="tr-TR" smtClean="0"/>
-              <a:t>3.10.2026</a:t>
+              <a:t>4.10.2026</a:t>
             </a:fld>
             <a:endParaRPr lang="tr-TR"/>
           </a:p>
@@ -4089,7 +4099,7 @@
           <a:p>
             <a:fld id="{8872924C-4DA0-4B68-B1C3-68ED2F1D36BB}" type="datetime1">
               <a:rPr lang="tr-TR" smtClean="0"/>
-              <a:t>3.10.2026</a:t>
+              <a:t>4.10.2026</a:t>
             </a:fld>
             <a:endParaRPr lang="tr-TR"/>
           </a:p>
@@ -4403,7 +4413,7 @@
           <a:p>
             <a:fld id="{A4145484-6478-4CA1-986F-3503D418C519}" type="datetime1">
               <a:rPr lang="tr-TR" smtClean="0"/>
-              <a:t>3.10.2026</a:t>
+              <a:t>4.10.2026</a:t>
             </a:fld>
             <a:endParaRPr lang="tr-TR"/>
           </a:p>
@@ -4694,7 +4704,7 @@
           <a:p>
             <a:fld id="{8EECA174-3F35-4EC9-8602-0BE460802ABF}" type="datetime1">
               <a:rPr lang="tr-TR" smtClean="0"/>
-              <a:t>3.10.2026</a:t>
+              <a:t>4.10.2026</a:t>
             </a:fld>
             <a:endParaRPr lang="tr-TR"/>
           </a:p>
@@ -4938,7 +4948,7 @@
           <a:p>
             <a:fld id="{A8191261-EC42-4438-8A8B-1E35F059B980}" type="datetime1">
               <a:rPr lang="tr-TR" smtClean="0"/>
-              <a:t>3.10.2026</a:t>
+              <a:t>4.10.2026</a:t>
             </a:fld>
             <a:endParaRPr lang="tr-TR"/>
           </a:p>
@@ -5520,13 +5530,14 @@
           <a:p>
             <a:pPr algn="l"/>
             <a:r>
+              <a:rPr lang="tr-TR" dirty="0"/>
+              <a:t>2026 10 </a:t>
+            </a:r>
+            <a:r>
               <a:rPr lang="tr-TR"/>
-              <a:t>2026 10 02 </a:t>
-            </a:r>
-            <a:r>
-              <a:rPr lang="tr-TR" dirty="0"/>
-              <a:t>Cuma</a:t>
-            </a:r>
+              <a:t>03 Cumartesi</a:t>
+            </a:r>
+            <a:endParaRPr lang="tr-TR" dirty="0"/>
           </a:p>
         </p:txBody>
       </p:sp>
@@ -5772,7 +5783,7 @@
           <a:p>
             <a:fld id="{D91DE6A9-2411-46E2-B574-284264D3EA73}" type="datetime1">
               <a:rPr lang="tr-TR" smtClean="0"/>
-              <a:t>3.10.2026</a:t>
+              <a:t>4.10.2026</a:t>
             </a:fld>
             <a:endParaRPr lang="tr-TR"/>
           </a:p>
@@ -5965,7 +5976,7 @@
           <a:p>
             <a:fld id="{C0AA646A-5437-49DA-951A-D7D791F9EE00}" type="datetime1">
               <a:rPr lang="tr-TR" smtClean="0"/>
-              <a:t>3.10.2026</a:t>
+              <a:t>4.10.2026</a:t>
             </a:fld>
             <a:endParaRPr lang="tr-TR"/>
           </a:p>
@@ -6158,7 +6169,7 @@
           <a:p>
             <a:fld id="{3DCC6A6F-D769-4D7D-90A6-54BF9D528B41}" type="datetime1">
               <a:rPr lang="tr-TR" smtClean="0"/>
-              <a:t>3.10.2026</a:t>
+              <a:t>4.10.2026</a:t>
             </a:fld>
             <a:endParaRPr lang="tr-TR"/>
           </a:p>
@@ -6462,7 +6473,7 @@
           <a:p>
             <a:fld id="{620F5416-4C6E-4457-8D8E-988B56C31E5E}" type="datetime1">
               <a:rPr lang="tr-TR" smtClean="0"/>
-              <a:t>3.10.2026</a:t>
+              <a:t>4.10.2026</a:t>
             </a:fld>
             <a:endParaRPr lang="tr-TR"/>
           </a:p>
@@ -6851,7 +6862,7 @@
           <a:p>
             <a:fld id="{23005A21-DB29-43B5-9F7A-E7F4EEE107FC}" type="datetime1">
               <a:rPr lang="tr-TR" smtClean="0"/>
-              <a:t>3.10.2026</a:t>
+              <a:t>4.10.2026</a:t>
             </a:fld>
             <a:endParaRPr lang="tr-TR"/>
           </a:p>
@@ -7130,7 +7141,7 @@
           <a:p>
             <a:fld id="{CF224AFF-D660-4DD8-B4F6-674FF8433224}" type="datetime1">
               <a:rPr lang="tr-TR" smtClean="0"/>
-              <a:t>3.10.2026</a:t>
+              <a:t>4.10.2026</a:t>
             </a:fld>
             <a:endParaRPr lang="tr-TR"/>
           </a:p>
@@ -7479,7 +7490,7 @@
           <a:p>
             <a:fld id="{B6BBD6E4-FB31-4A52-9DFC-A484A65B3457}" type="datetime1">
               <a:rPr lang="tr-TR" smtClean="0"/>
-              <a:t>3.10.2026</a:t>
+              <a:t>4.10.2026</a:t>
             </a:fld>
             <a:endParaRPr lang="tr-TR"/>
           </a:p>
@@ -7957,7 +7968,7 @@
           <a:p>
             <a:fld id="{EAC09926-1D10-4811-A13B-CDB95D2B1C1B}" type="datetime1">
               <a:rPr lang="tr-TR" smtClean="0"/>
-              <a:t>3.10.2026</a:t>
+              <a:t>4.10.2026</a:t>
             </a:fld>
             <a:endParaRPr lang="tr-TR"/>
           </a:p>
@@ -8570,7 +8581,7 @@
           <a:p>
             <a:fld id="{EC2C1FF6-8E02-4E65-991D-10B055A5B89D}" type="datetime1">
               <a:rPr lang="tr-TR" smtClean="0"/>
-              <a:t>3.10.2026</a:t>
+              <a:t>4.10.2026</a:t>
             </a:fld>
             <a:endParaRPr lang="tr-TR"/>
           </a:p>
@@ -8819,7 +8830,7 @@
           <a:p>
             <a:fld id="{6F810ABF-9C50-4724-8918-9A528197358E}" type="datetime1">
               <a:rPr lang="tr-TR" smtClean="0"/>
-              <a:t>3.10.2026</a:t>
+              <a:t>4.10.2026</a:t>
             </a:fld>
             <a:endParaRPr lang="tr-TR"/>
           </a:p>
@@ -9055,7 +9066,7 @@
           <a:p>
             <a:fld id="{E9290591-5B3F-4E6A-A4B5-910A3B0B03FF}" type="datetime1">
               <a:rPr lang="tr-TR" smtClean="0"/>
-              <a:t>3.10.2026</a:t>
+              <a:t>4.10.2026</a:t>
             </a:fld>
             <a:endParaRPr lang="tr-TR"/>
           </a:p>
@@ -9446,7 +9457,7 @@
           <a:p>
             <a:fld id="{D30B0625-DE47-4D45-9D3F-083BD941E2E4}" type="datetime1">
               <a:rPr lang="tr-TR" smtClean="0"/>
-              <a:t>3.10.2026</a:t>
+              <a:t>4.10.2026</a:t>
             </a:fld>
             <a:endParaRPr lang="tr-TR"/>
           </a:p>
@@ -9881,7 +9892,7 @@
           <a:p>
             <a:fld id="{D8E885D9-CB74-4EAA-94AA-376736753B75}" type="datetime1">
               <a:rPr lang="tr-TR" smtClean="0"/>
-              <a:t>3.10.2026</a:t>
+              <a:t>4.10.2026</a:t>
             </a:fld>
             <a:endParaRPr lang="tr-TR"/>
           </a:p>
@@ -10104,7 +10115,7 @@
           <a:p>
             <a:fld id="{9DFE37CF-9389-4D95-A5A4-8ABF62880B6D}" type="datetime1">
               <a:rPr lang="tr-TR" smtClean="0"/>
-              <a:t>3.10.2026</a:t>
+              <a:t>4.10.2026</a:t>
             </a:fld>
             <a:endParaRPr lang="tr-TR"/>
           </a:p>
@@ -10327,7 +10338,7 @@
           <a:p>
             <a:fld id="{3CD0A053-38B2-4B21-AD22-D37FE0373FB2}" type="datetime1">
               <a:rPr lang="tr-TR" smtClean="0"/>
-              <a:t>3.10.2026</a:t>
+              <a:t>4.10.2026</a:t>
             </a:fld>
             <a:endParaRPr lang="tr-TR"/>
           </a:p>
@@ -10550,7 +10561,7 @@
           <a:p>
             <a:fld id="{0998C81F-67F8-419F-98BA-11B5239DC92E}" type="datetime1">
               <a:rPr lang="tr-TR" smtClean="0"/>
-              <a:t>3.10.2026</a:t>
+              <a:t>4.10.2026</a:t>
             </a:fld>
             <a:endParaRPr lang="tr-TR"/>
           </a:p>
@@ -11033,7 +11044,7 @@
           <a:p>
             <a:fld id="{F56E870C-C0BF-4C65-BD7A-20752F252FB9}" type="datetime1">
               <a:rPr lang="tr-TR" smtClean="0"/>
-              <a:t>3.10.2026</a:t>
+              <a:t>4.10.2026</a:t>
             </a:fld>
             <a:endParaRPr lang="tr-TR"/>
           </a:p>
@@ -13009,7 +13020,7 @@
           <a:p>
             <a:fld id="{4CCF6595-5809-4331-A82F-8ECD7B658D5D}" type="datetime1">
               <a:rPr lang="tr-TR" smtClean="0"/>
-              <a:t>3.10.2026</a:t>
+              <a:t>4.10.2026</a:t>
             </a:fld>
             <a:endParaRPr lang="tr-TR"/>
           </a:p>
@@ -13953,7 +13964,7 @@
           <a:p>
             <a:fld id="{141FD688-8E0B-4917-93B2-78EE6D6B57D6}" type="datetime1">
               <a:rPr lang="tr-TR" smtClean="0"/>
-              <a:t>3.10.2026</a:t>
+              <a:t>4.10.2026</a:t>
             </a:fld>
             <a:endParaRPr lang="tr-TR"/>
           </a:p>
@@ -15362,7 +15373,7 @@
           <a:p>
             <a:fld id="{9177C320-059E-4DC3-8059-CCDED2AD416A}" type="datetime1">
               <a:rPr lang="tr-TR" smtClean="0"/>
-              <a:t>3.10.2026</a:t>
+              <a:t>4.10.2026</a:t>
             </a:fld>
             <a:endParaRPr lang="tr-TR"/>
           </a:p>
@@ -15555,7 +15566,7 @@
           <a:p>
             <a:fld id="{8473EE66-3B5B-40DD-8C05-2B867A749528}" type="datetime1">
               <a:rPr lang="tr-TR" smtClean="0"/>
-              <a:t>3.10.2026</a:t>
+              <a:t>4.10.2026</a:t>
             </a:fld>
             <a:endParaRPr lang="tr-TR"/>
           </a:p>
@@ -15867,7 +15878,7 @@
           <a:p>
             <a:fld id="{EC2B6ACD-0C76-4F71-96B9-0FCA794ADD48}" type="datetime1">
               <a:rPr lang="tr-TR" smtClean="0"/>
-              <a:t>3.10.2026</a:t>
+              <a:t>4.10.2026</a:t>
             </a:fld>
             <a:endParaRPr lang="tr-TR"/>
           </a:p>
@@ -16238,7 +16249,7 @@
           <a:p>
             <a:fld id="{85CC3776-6893-40B5-BFB7-819CEB1620E0}" type="datetime1">
               <a:rPr lang="tr-TR" smtClean="0"/>
-              <a:t>3.10.2026</a:t>
+              <a:t>4.10.2026</a:t>
             </a:fld>
             <a:endParaRPr lang="tr-TR"/>
           </a:p>
@@ -16529,7 +16540,7 @@
           <a:p>
             <a:fld id="{1372925D-DBC8-405C-89B5-49F8D2BDFEEE}" type="datetime1">
               <a:rPr lang="tr-TR" smtClean="0"/>
-              <a:t>3.10.2026</a:t>
+              <a:t>4.10.2026</a:t>
             </a:fld>
             <a:endParaRPr lang="tr-TR"/>
           </a:p>
@@ -17164,7 +17175,7 @@
           <a:p>
             <a:fld id="{E90BAD1F-2DE4-4A75-97B2-F99461682000}" type="datetime1">
               <a:rPr lang="tr-TR" smtClean="0"/>
-              <a:t>3.10.2026</a:t>
+              <a:t>4.10.2026</a:t>
             </a:fld>
             <a:endParaRPr lang="tr-TR"/>
           </a:p>
@@ -17797,7 +17808,7 @@
           <a:p>
             <a:fld id="{08AA18FA-F30F-4A34-A5F2-5F6B237A9E7A}" type="datetime1">
               <a:rPr lang="tr-TR" smtClean="0"/>
-              <a:t>3.10.2026</a:t>
+              <a:t>4.10.2026</a:t>
             </a:fld>
             <a:endParaRPr lang="tr-TR"/>
           </a:p>
@@ -18403,7 +18414,7 @@
           <a:p>
             <a:fld id="{042AF11C-9859-454C-A0DA-12524618C623}" type="datetime1">
               <a:rPr lang="tr-TR" smtClean="0"/>
-              <a:t>3.10.2026</a:t>
+              <a:t>4.10.2026</a:t>
             </a:fld>
             <a:endParaRPr lang="tr-TR"/>
           </a:p>
@@ -18737,7 +18748,7 @@
           <a:p>
             <a:fld id="{A29100A3-B5D3-4AF3-8C60-D4A6445A5245}" type="datetime1">
               <a:rPr lang="tr-TR" smtClean="0"/>
-              <a:t>3.10.2026</a:t>
+              <a:t>4.10.2026</a:t>
             </a:fld>
             <a:endParaRPr lang="tr-TR"/>
           </a:p>
@@ -18950,7 +18961,7 @@
           <a:p>
             <a:fld id="{C8538EAB-DF79-497D-BA70-2B74B6C10086}" type="datetime1">
               <a:rPr lang="tr-TR" smtClean="0"/>
-              <a:t>3.10.2026</a:t>
+              <a:t>4.10.2026</a:t>
             </a:fld>
             <a:endParaRPr lang="tr-TR"/>
           </a:p>
@@ -19198,7 +19209,7 @@
           <a:p>
             <a:fld id="{E63A8578-5729-4698-B75A-697A7B849C6B}" type="datetime1">
               <a:rPr lang="tr-TR" smtClean="0"/>
-              <a:t>3.10.2026</a:t>
+              <a:t>4.10.2026</a:t>
             </a:fld>
             <a:endParaRPr lang="tr-TR"/>
           </a:p>
@@ -21400,7 +21411,7 @@
           <a:p>
             <a:fld id="{9BA91D5A-8F65-43FB-8387-B591ADB0FFD0}" type="datetime1">
               <a:rPr lang="tr-TR" smtClean="0"/>
-              <a:t>3.10.2026</a:t>
+              <a:t>4.10.2026</a:t>
             </a:fld>
             <a:endParaRPr lang="tr-TR"/>
           </a:p>
@@ -23666,7 +23677,7 @@
           <a:p>
             <a:fld id="{0E10597F-D483-4BFD-B2B0-1D4F7E5A9B84}" type="datetime1">
               <a:rPr lang="tr-TR" smtClean="0"/>
-              <a:t>3.10.2026</a:t>
+              <a:t>4.10.2026</a:t>
             </a:fld>
             <a:endParaRPr lang="tr-TR"/>
           </a:p>
@@ -23864,7 +23875,7 @@
           <a:p>
             <a:fld id="{7B1B89AA-5FB4-493D-B316-F46593A9A95F}" type="datetime1">
               <a:rPr lang="tr-TR" smtClean="0"/>
-              <a:t>3.10.2026</a:t>
+              <a:t>4.10.2026</a:t>
             </a:fld>
             <a:endParaRPr lang="tr-TR"/>
           </a:p>
@@ -25069,7 +25080,7 @@
           <a:p>
             <a:fld id="{5853EFAC-713B-4191-9ABC-0BBAF9FE73FC}" type="datetime1">
               <a:rPr lang="tr-TR" smtClean="0"/>
-              <a:t>3.10.2026</a:t>
+              <a:t>4.10.2026</a:t>
             </a:fld>
             <a:endParaRPr lang="tr-TR"/>
           </a:p>
@@ -26262,7 +26273,7 @@
           <a:p>
             <a:fld id="{D3D34EA4-C8F4-4552-BADA-D01235E7140F}" type="datetime1">
               <a:rPr lang="tr-TR" smtClean="0"/>
-              <a:t>3.10.2026</a:t>
+              <a:t>4.10.2026</a:t>
             </a:fld>
             <a:endParaRPr lang="tr-TR"/>
           </a:p>
@@ -27781,7 +27792,7 @@
           <a:p>
             <a:fld id="{5509749A-2EB7-4F9E-AD7B-0F3BBF606F33}" type="datetime1">
               <a:rPr lang="tr-TR" smtClean="0"/>
-              <a:t>3.10.2026</a:t>
+              <a:t>4.10.2026</a:t>
             </a:fld>
             <a:endParaRPr lang="tr-TR"/>
           </a:p>
@@ -29390,7 +29401,7 @@
           <a:p>
             <a:fld id="{A817920D-3E93-4E06-A30C-5B5C0E8598E5}" type="datetime1">
               <a:rPr lang="tr-TR" smtClean="0"/>
-              <a:t>3.10.2026</a:t>
+              <a:t>4.10.2026</a:t>
             </a:fld>
             <a:endParaRPr lang="tr-TR"/>
           </a:p>
@@ -29471,13 +29482,7 @@
   <p:cSld>
     <p:spTree>
       <p:nvGrpSpPr>
-        <p:cNvPr id="1" name="">
-          <a:extLst>
-            <a:ext uri="{FF2B5EF4-FFF2-40B4-BE49-F238E27FC236}">
-              <a16:creationId xmlns:a16="http://schemas.microsoft.com/office/drawing/2014/main" id="{3059F843-5E61-E26D-0F00-AAF22D047836}"/>
-            </a:ext>
-          </a:extLst>
-        </p:cNvPr>
+        <p:cNvPr id="1" name=""/>
         <p:cNvGrpSpPr/>
         <p:nvPr/>
       </p:nvGrpSpPr>
@@ -29494,7 +29499,7 @@
           <p:cNvPr id="2" name="Başlık 1">
             <a:extLst>
               <a:ext uri="{FF2B5EF4-FFF2-40B4-BE49-F238E27FC236}">
-                <a16:creationId xmlns:a16="http://schemas.microsoft.com/office/drawing/2014/main" id="{E5B5A526-37A7-5F07-8B4A-BAF80717E1C3}"/>
+                <a16:creationId xmlns:a16="http://schemas.microsoft.com/office/drawing/2014/main" id="{24C3BD4A-515F-7B2B-A5F0-F6A0212B7193}"/>
               </a:ext>
             </a:extLst>
           </p:cNvPr>
@@ -29505,12 +29510,7 @@
             <p:ph type="title"/>
           </p:nvPr>
         </p:nvSpPr>
-        <p:spPr>
-          <a:xfrm>
-            <a:off x="838200" y="365126"/>
-            <a:ext cx="10515600" cy="726256"/>
-          </a:xfrm>
-        </p:spPr>
+        <p:spPr/>
         <p:txBody>
           <a:bodyPr>
             <a:normAutofit/>
@@ -29518,8 +29518,8 @@
           <a:lstStyle/>
           <a:p>
             <a:r>
-              <a:rPr lang="tr-TR" sz="3600" dirty="0"/>
-              <a:t>Bu seminerde neler yoktur?</a:t>
+              <a:rPr lang="tr-TR" sz="2800" dirty="0"/>
+              <a:t>Kod: Bir kelimenin karakterlerini alt alta listele</a:t>
             </a:r>
           </a:p>
         </p:txBody>
@@ -29529,7 +29529,7 @@
           <p:cNvPr id="3" name="İçerik Yer Tutucusu 2">
             <a:extLst>
               <a:ext uri="{FF2B5EF4-FFF2-40B4-BE49-F238E27FC236}">
-                <a16:creationId xmlns:a16="http://schemas.microsoft.com/office/drawing/2014/main" id="{273941DE-B440-F903-502F-E07C0EBD54DF}"/>
+                <a16:creationId xmlns:a16="http://schemas.microsoft.com/office/drawing/2014/main" id="{1E7AACE5-121A-171A-A576-F16EFC552CA0}"/>
               </a:ext>
             </a:extLst>
           </p:cNvPr>
@@ -29540,106 +29540,14 @@
             <p:ph idx="1"/>
           </p:nvPr>
         </p:nvSpPr>
-        <p:spPr>
-          <a:xfrm>
-            <a:off x="838200" y="1091382"/>
-            <a:ext cx="10515600" cy="5220928"/>
-          </a:xfrm>
-        </p:spPr>
-        <p:txBody>
-          <a:bodyPr>
-            <a:normAutofit fontScale="92500" lnSpcReduction="10000"/>
-          </a:bodyPr>
+        <p:spPr/>
+        <p:txBody>
+          <a:bodyPr/>
           <a:lstStyle/>
           <a:p>
             <a:r>
               <a:rPr lang="tr-TR" dirty="0"/>
-              <a:t>İleri veri yapıları</a:t>
-            </a:r>
-          </a:p>
-          <a:p>
-            <a:pPr lvl="1"/>
-            <a:r>
-              <a:rPr lang="tr-TR" dirty="0"/>
-              <a:t>Set</a:t>
-            </a:r>
-          </a:p>
-          <a:p>
-            <a:pPr lvl="1"/>
-            <a:r>
-              <a:rPr lang="tr-TR" dirty="0" err="1"/>
-              <a:t>Map</a:t>
-            </a:r>
-            <a:endParaRPr lang="tr-TR" dirty="0"/>
-          </a:p>
-          <a:p>
-            <a:pPr lvl="1"/>
-            <a:r>
-              <a:rPr lang="tr-TR" dirty="0" err="1"/>
-              <a:t>Tuple</a:t>
-            </a:r>
-            <a:endParaRPr lang="tr-TR" dirty="0"/>
-          </a:p>
-          <a:p>
-            <a:r>
-              <a:rPr lang="tr-TR" dirty="0"/>
-              <a:t>Dosya okumalar</a:t>
-            </a:r>
-          </a:p>
-          <a:p>
-            <a:r>
-              <a:rPr lang="tr-TR" dirty="0"/>
-              <a:t>Sınıflar (Class)</a:t>
-            </a:r>
-          </a:p>
-          <a:p>
-            <a:r>
-              <a:rPr lang="tr-TR" dirty="0"/>
-              <a:t>Ve daha bir çok şey</a:t>
-            </a:r>
-          </a:p>
-          <a:p>
-            <a:r>
-              <a:rPr lang="tr-TR" dirty="0"/>
-              <a:t>(Gerçi onlar da kolaydır, zor değil)</a:t>
-            </a:r>
-          </a:p>
-          <a:p>
-            <a:endParaRPr lang="tr-TR" dirty="0"/>
-          </a:p>
-          <a:p>
-            <a:r>
-              <a:rPr lang="tr-TR" dirty="0"/>
-              <a:t>Ara Yüz (</a:t>
-            </a:r>
-            <a:r>
-              <a:rPr lang="tr-TR" dirty="0" err="1"/>
-              <a:t>interface</a:t>
-            </a:r>
-            <a:r>
-              <a:rPr lang="tr-TR" dirty="0"/>
-              <a:t>) yazma:</a:t>
-            </a:r>
-          </a:p>
-          <a:p>
-            <a:pPr lvl="1"/>
-            <a:r>
-              <a:rPr lang="tr-TR" dirty="0"/>
-              <a:t>Web’de, </a:t>
-            </a:r>
-          </a:p>
-          <a:p>
-            <a:pPr lvl="1"/>
-            <a:r>
-              <a:rPr lang="tr-TR" dirty="0"/>
-              <a:t>masa üstünde, </a:t>
-            </a:r>
-          </a:p>
-          <a:p>
-            <a:pPr lvl="1"/>
-            <a:r>
-              <a:rPr lang="tr-TR" dirty="0"/>
-              <a:t>cep telefonunda</a:t>
+              <a:t>Çamoğlu 3, 129</a:t>
             </a:r>
           </a:p>
         </p:txBody>
@@ -29649,7 +29557,7 @@
           <p:cNvPr id="4" name="Veri Yer Tutucusu 3">
             <a:extLst>
               <a:ext uri="{FF2B5EF4-FFF2-40B4-BE49-F238E27FC236}">
-                <a16:creationId xmlns:a16="http://schemas.microsoft.com/office/drawing/2014/main" id="{59A88FA0-83E5-BF15-70A4-C3104781CF17}"/>
+                <a16:creationId xmlns:a16="http://schemas.microsoft.com/office/drawing/2014/main" id="{B77651A0-CC55-0D0E-DC1F-F21D6059A347}"/>
               </a:ext>
             </a:extLst>
           </p:cNvPr>
@@ -29665,9 +29573,9 @@
           <a:bodyPr/>
           <a:lstStyle/>
           <a:p>
-            <a:fld id="{44392EB0-EBAD-438A-B064-5F30060F1D41}" type="datetime1">
+            <a:fld id="{E5A72F27-F128-4B68-926B-C496DC38618F}" type="datetime1">
               <a:rPr lang="tr-TR" smtClean="0"/>
-              <a:t>3.10.2026</a:t>
+              <a:t>4.10.2026</a:t>
             </a:fld>
             <a:endParaRPr lang="tr-TR"/>
           </a:p>
@@ -29678,7 +29586,7 @@
           <p:cNvPr id="5" name="Alt Bilgi Yer Tutucusu 4">
             <a:extLst>
               <a:ext uri="{FF2B5EF4-FFF2-40B4-BE49-F238E27FC236}">
-                <a16:creationId xmlns:a16="http://schemas.microsoft.com/office/drawing/2014/main" id="{F72200F0-A375-78CC-F4FB-5D84F1E912D1}"/>
+                <a16:creationId xmlns:a16="http://schemas.microsoft.com/office/drawing/2014/main" id="{6D53A114-CFAA-F7C5-3B1D-7D53A5FB6E64}"/>
               </a:ext>
             </a:extLst>
           </p:cNvPr>
@@ -29706,7 +29614,7 @@
           <p:cNvPr id="6" name="Slayt Numarası Yer Tutucusu 5">
             <a:extLst>
               <a:ext uri="{FF2B5EF4-FFF2-40B4-BE49-F238E27FC236}">
-                <a16:creationId xmlns:a16="http://schemas.microsoft.com/office/drawing/2014/main" id="{8B7A5F5F-2E40-3DED-078C-608BDCF26E86}"/>
+                <a16:creationId xmlns:a16="http://schemas.microsoft.com/office/drawing/2014/main" id="{9E893C14-B537-067C-FC39-90040B4D8BDC}"/>
               </a:ext>
             </a:extLst>
           </p:cNvPr>
@@ -29733,7 +29641,7 @@
     </p:spTree>
     <p:extLst>
       <p:ext uri="{BB962C8B-B14F-4D97-AF65-F5344CB8AC3E}">
-        <p14:creationId xmlns:p14="http://schemas.microsoft.com/office/powerpoint/2010/main" val="3543395672"/>
+        <p14:creationId xmlns:p14="http://schemas.microsoft.com/office/powerpoint/2010/main" val="609975507"/>
       </p:ext>
     </p:extLst>
   </p:cSld>
@@ -29751,7 +29659,7 @@
         <p:cNvPr id="1" name="">
           <a:extLst>
             <a:ext uri="{FF2B5EF4-FFF2-40B4-BE49-F238E27FC236}">
-              <a16:creationId xmlns:a16="http://schemas.microsoft.com/office/drawing/2014/main" id="{FA4187F3-1E97-E8B7-D0F5-726C98774AF0}"/>
+              <a16:creationId xmlns:a16="http://schemas.microsoft.com/office/drawing/2014/main" id="{E09A0812-E973-B888-FE4E-4C308112FE7F}"/>
             </a:ext>
           </a:extLst>
         </p:cNvPr>
@@ -29771,7 +29679,7 @@
           <p:cNvPr id="2" name="Başlık 1">
             <a:extLst>
               <a:ext uri="{FF2B5EF4-FFF2-40B4-BE49-F238E27FC236}">
-                <a16:creationId xmlns:a16="http://schemas.microsoft.com/office/drawing/2014/main" id="{E0F77567-A569-7A61-D5E1-7F0603E81B4C}"/>
+                <a16:creationId xmlns:a16="http://schemas.microsoft.com/office/drawing/2014/main" id="{2079C38B-7F42-59A5-28EF-63BE83E334E6}"/>
               </a:ext>
             </a:extLst>
           </p:cNvPr>
@@ -29782,12 +29690,7 @@
             <p:ph type="title"/>
           </p:nvPr>
         </p:nvSpPr>
-        <p:spPr>
-          <a:xfrm>
-            <a:off x="838200" y="365126"/>
-            <a:ext cx="10515600" cy="726256"/>
-          </a:xfrm>
-        </p:spPr>
+        <p:spPr/>
         <p:txBody>
           <a:bodyPr>
             <a:normAutofit/>
@@ -29795,8 +29698,8 @@
           <a:lstStyle/>
           <a:p>
             <a:r>
-              <a:rPr lang="tr-TR" sz="3600" dirty="0"/>
-              <a:t>Bundan sonraki adım</a:t>
+              <a:rPr lang="tr-TR" sz="2800" dirty="0"/>
+              <a:t>Kod: Bir dizideki sayıların toplamını bulma</a:t>
             </a:r>
           </a:p>
         </p:txBody>
@@ -29806,7 +29709,7 @@
           <p:cNvPr id="3" name="İçerik Yer Tutucusu 2">
             <a:extLst>
               <a:ext uri="{FF2B5EF4-FFF2-40B4-BE49-F238E27FC236}">
-                <a16:creationId xmlns:a16="http://schemas.microsoft.com/office/drawing/2014/main" id="{9D8B09B8-DDF8-8563-058A-E9F7EBD70206}"/>
+                <a16:creationId xmlns:a16="http://schemas.microsoft.com/office/drawing/2014/main" id="{49C94E70-6126-2772-7C59-CA49FD04EF28}"/>
               </a:ext>
             </a:extLst>
           </p:cNvPr>
@@ -29817,25 +29720,15 @@
             <p:ph idx="1"/>
           </p:nvPr>
         </p:nvSpPr>
-        <p:spPr>
-          <a:xfrm>
-            <a:off x="838200" y="1303020"/>
-            <a:ext cx="10515600" cy="5009290"/>
-          </a:xfrm>
-        </p:spPr>
-        <p:txBody>
-          <a:bodyPr>
-            <a:normAutofit/>
-          </a:bodyPr>
+        <p:spPr/>
+        <p:txBody>
+          <a:bodyPr/>
           <a:lstStyle/>
           <a:p>
             <a:r>
               <a:rPr lang="tr-TR" dirty="0"/>
-              <a:t>Eğer bu seminer beğenilirse, faydalı görülürse, o zaman devamı da hazırlanabilir. Talebe bağlı.</a:t>
-            </a:r>
-          </a:p>
-          <a:p>
-            <a:endParaRPr lang="tr-TR" dirty="0"/>
+              <a:t>Çamoğlu 3, 142</a:t>
+            </a:r>
           </a:p>
         </p:txBody>
       </p:sp>
@@ -29844,7 +29737,7 @@
           <p:cNvPr id="4" name="Veri Yer Tutucusu 3">
             <a:extLst>
               <a:ext uri="{FF2B5EF4-FFF2-40B4-BE49-F238E27FC236}">
-                <a16:creationId xmlns:a16="http://schemas.microsoft.com/office/drawing/2014/main" id="{3FA8F0DE-0EC7-90B8-9AC6-FB66D93CBBA8}"/>
+                <a16:creationId xmlns:a16="http://schemas.microsoft.com/office/drawing/2014/main" id="{27578CBE-DC29-98EE-1DE1-89E3302AA2ED}"/>
               </a:ext>
             </a:extLst>
           </p:cNvPr>
@@ -29860,9 +29753,9 @@
           <a:bodyPr/>
           <a:lstStyle/>
           <a:p>
-            <a:fld id="{37D13B1C-06ED-4B08-8DAE-68BE84972603}" type="datetime1">
+            <a:fld id="{E5A72F27-F128-4B68-926B-C496DC38618F}" type="datetime1">
               <a:rPr lang="tr-TR" smtClean="0"/>
-              <a:t>3.10.2026</a:t>
+              <a:t>4.10.2026</a:t>
             </a:fld>
             <a:endParaRPr lang="tr-TR"/>
           </a:p>
@@ -29873,7 +29766,7 @@
           <p:cNvPr id="5" name="Alt Bilgi Yer Tutucusu 4">
             <a:extLst>
               <a:ext uri="{FF2B5EF4-FFF2-40B4-BE49-F238E27FC236}">
-                <a16:creationId xmlns:a16="http://schemas.microsoft.com/office/drawing/2014/main" id="{4624F7CA-7DE4-AEC2-37EB-37C5035DB5A6}"/>
+                <a16:creationId xmlns:a16="http://schemas.microsoft.com/office/drawing/2014/main" id="{1617B933-464D-0DBD-AD4C-4B89E2496B7E}"/>
               </a:ext>
             </a:extLst>
           </p:cNvPr>
@@ -29901,7 +29794,7 @@
           <p:cNvPr id="6" name="Slayt Numarası Yer Tutucusu 5">
             <a:extLst>
               <a:ext uri="{FF2B5EF4-FFF2-40B4-BE49-F238E27FC236}">
-                <a16:creationId xmlns:a16="http://schemas.microsoft.com/office/drawing/2014/main" id="{E85AE4FA-0090-45E8-A0D8-EB5028EBA76E}"/>
+                <a16:creationId xmlns:a16="http://schemas.microsoft.com/office/drawing/2014/main" id="{56422D3F-723C-FF30-C625-F0DFA01179EC}"/>
               </a:ext>
             </a:extLst>
           </p:cNvPr>
@@ -29928,7 +29821,7 @@
     </p:spTree>
     <p:extLst>
       <p:ext uri="{BB962C8B-B14F-4D97-AF65-F5344CB8AC3E}">
-        <p14:creationId xmlns:p14="http://schemas.microsoft.com/office/powerpoint/2010/main" val="588949760"/>
+        <p14:creationId xmlns:p14="http://schemas.microsoft.com/office/powerpoint/2010/main" val="3144457111"/>
       </p:ext>
     </p:extLst>
   </p:cSld>
@@ -29946,7 +29839,7 @@
         <p:cNvPr id="1" name="">
           <a:extLst>
             <a:ext uri="{FF2B5EF4-FFF2-40B4-BE49-F238E27FC236}">
-              <a16:creationId xmlns:a16="http://schemas.microsoft.com/office/drawing/2014/main" id="{C09E59DB-CE48-E2B8-E091-54AF135A95F9}"/>
+              <a16:creationId xmlns:a16="http://schemas.microsoft.com/office/drawing/2014/main" id="{A4A484BF-5943-6A32-2605-0709320CFEA7}"/>
             </a:ext>
           </a:extLst>
         </p:cNvPr>
@@ -29963,10 +29856,10 @@
       </p:grpSpPr>
       <p:sp>
         <p:nvSpPr>
-          <p:cNvPr id="3" name="İçerik Yer Tutucusu 2">
-            <a:extLst>
-              <a:ext uri="{FF2B5EF4-FFF2-40B4-BE49-F238E27FC236}">
-                <a16:creationId xmlns:a16="http://schemas.microsoft.com/office/drawing/2014/main" id="{455E2F0B-990D-0648-DBCD-66353CCDFBAE}"/>
+          <p:cNvPr id="2" name="Başlık 1">
+            <a:extLst>
+              <a:ext uri="{FF2B5EF4-FFF2-40B4-BE49-F238E27FC236}">
+                <a16:creationId xmlns:a16="http://schemas.microsoft.com/office/drawing/2014/main" id="{525B8D8A-DFA0-8272-8BD7-D06B0865A0F5}"/>
               </a:ext>
             </a:extLst>
           </p:cNvPr>
@@ -29974,39 +29867,37 @@
             <a:spLocks noGrp="1"/>
           </p:cNvSpPr>
           <p:nvPr>
-            <p:ph idx="1"/>
-          </p:nvPr>
-        </p:nvSpPr>
-        <p:spPr>
-          <a:xfrm>
-            <a:off x="730045" y="2408902"/>
-            <a:ext cx="10515600" cy="1455175"/>
-          </a:xfrm>
-        </p:spPr>
+            <p:ph type="title"/>
+          </p:nvPr>
+        </p:nvSpPr>
+        <p:spPr/>
         <p:txBody>
           <a:bodyPr>
             <a:normAutofit/>
           </a:bodyPr>
           <a:lstStyle/>
           <a:p>
-            <a:pPr algn="ctr"/>
-            <a:r>
-              <a:rPr lang="tr-TR" sz="4800" dirty="0"/>
-              <a:t>Sabırla izlediğiniz için teşekkür ederiz!</a:t>
-            </a:r>
-          </a:p>
-          <a:p>
-            <a:pPr algn="ctr"/>
-            <a:endParaRPr lang="tr-TR" sz="4800" dirty="0"/>
-          </a:p>
-        </p:txBody>
-      </p:sp>
-      <p:sp>
-        <p:nvSpPr>
-          <p:cNvPr id="2" name="Veri Yer Tutucusu 1">
-            <a:extLst>
-              <a:ext uri="{FF2B5EF4-FFF2-40B4-BE49-F238E27FC236}">
-                <a16:creationId xmlns:a16="http://schemas.microsoft.com/office/drawing/2014/main" id="{A6E549C8-520A-BFFF-F177-BEE5CBFBFE91}"/>
+            <a:r>
+              <a:rPr lang="tr-TR" sz="2800" dirty="0"/>
+              <a:t>Kod: 5 ile tam bölünen ama 3 ün katı olmayan sayılar (</a:t>
+            </a:r>
+            <a:r>
+              <a:rPr lang="tr-TR" sz="2800" dirty="0" err="1"/>
+              <a:t>fizz-buzz</a:t>
+            </a:r>
+            <a:r>
+              <a:rPr lang="tr-TR" sz="2800" dirty="0"/>
+              <a:t>)</a:t>
+            </a:r>
+          </a:p>
+        </p:txBody>
+      </p:sp>
+      <p:sp>
+        <p:nvSpPr>
+          <p:cNvPr id="3" name="İçerik Yer Tutucusu 2">
+            <a:extLst>
+              <a:ext uri="{FF2B5EF4-FFF2-40B4-BE49-F238E27FC236}">
+                <a16:creationId xmlns:a16="http://schemas.microsoft.com/office/drawing/2014/main" id="{55DEF994-6D09-43FB-6841-99DEF3EBD4B4}"/>
               </a:ext>
             </a:extLst>
           </p:cNvPr>
@@ -30014,7 +29905,7 @@
             <a:spLocks noGrp="1"/>
           </p:cNvSpPr>
           <p:nvPr>
-            <p:ph type="dt" sz="half" idx="10"/>
+            <p:ph idx="1"/>
           </p:nvPr>
         </p:nvSpPr>
         <p:spPr/>
@@ -30022,20 +29913,19 @@
           <a:bodyPr/>
           <a:lstStyle/>
           <a:p>
-            <a:fld id="{C143AAC5-8CDF-4095-BD1F-1322883AC1B0}" type="datetime1">
-              <a:rPr lang="tr-TR" smtClean="0"/>
-              <a:t>3.10.2026</a:t>
-            </a:fld>
-            <a:endParaRPr lang="tr-TR"/>
-          </a:p>
-        </p:txBody>
-      </p:sp>
-      <p:sp>
-        <p:nvSpPr>
-          <p:cNvPr id="4" name="Alt Bilgi Yer Tutucusu 3">
-            <a:extLst>
-              <a:ext uri="{FF2B5EF4-FFF2-40B4-BE49-F238E27FC236}">
-                <a16:creationId xmlns:a16="http://schemas.microsoft.com/office/drawing/2014/main" id="{564434AA-A919-0D9B-6D5D-D31D224A71D2}"/>
+            <a:r>
+              <a:rPr lang="tr-TR" dirty="0"/>
+              <a:t>Çamoğlu 3, 144</a:t>
+            </a:r>
+          </a:p>
+        </p:txBody>
+      </p:sp>
+      <p:sp>
+        <p:nvSpPr>
+          <p:cNvPr id="4" name="Veri Yer Tutucusu 3">
+            <a:extLst>
+              <a:ext uri="{FF2B5EF4-FFF2-40B4-BE49-F238E27FC236}">
+                <a16:creationId xmlns:a16="http://schemas.microsoft.com/office/drawing/2014/main" id="{D7BF5873-D8A4-67C7-4221-7DC6EAEA298C}"/>
               </a:ext>
             </a:extLst>
           </p:cNvPr>
@@ -30043,7 +29933,7 @@
             <a:spLocks noGrp="1"/>
           </p:cNvSpPr>
           <p:nvPr>
-            <p:ph type="ftr" sz="quarter" idx="11"/>
+            <p:ph type="dt" sz="half" idx="10"/>
           </p:nvPr>
         </p:nvSpPr>
         <p:spPr/>
@@ -30051,6 +29941,35 @@
           <a:bodyPr/>
           <a:lstStyle/>
           <a:p>
+            <a:fld id="{E5A72F27-F128-4B68-926B-C496DC38618F}" type="datetime1">
+              <a:rPr lang="tr-TR" smtClean="0"/>
+              <a:t>4.10.2026</a:t>
+            </a:fld>
+            <a:endParaRPr lang="tr-TR"/>
+          </a:p>
+        </p:txBody>
+      </p:sp>
+      <p:sp>
+        <p:nvSpPr>
+          <p:cNvPr id="5" name="Alt Bilgi Yer Tutucusu 4">
+            <a:extLst>
+              <a:ext uri="{FF2B5EF4-FFF2-40B4-BE49-F238E27FC236}">
+                <a16:creationId xmlns:a16="http://schemas.microsoft.com/office/drawing/2014/main" id="{96A87BDD-8075-84B5-DCDB-2DFB79E718E2}"/>
+              </a:ext>
+            </a:extLst>
+          </p:cNvPr>
+          <p:cNvSpPr>
+            <a:spLocks noGrp="1"/>
+          </p:cNvSpPr>
+          <p:nvPr>
+            <p:ph type="ftr" sz="quarter" idx="11"/>
+          </p:nvPr>
+        </p:nvSpPr>
+        <p:spPr/>
+        <p:txBody>
+          <a:bodyPr/>
+          <a:lstStyle/>
+          <a:p>
             <a:r>
               <a:rPr lang="tr-TR"/>
               <a:t>Copyright: Harun Altay</a:t>
@@ -30060,10 +29979,10 @@
       </p:sp>
       <p:sp>
         <p:nvSpPr>
-          <p:cNvPr id="5" name="Slayt Numarası Yer Tutucusu 4">
-            <a:extLst>
-              <a:ext uri="{FF2B5EF4-FFF2-40B4-BE49-F238E27FC236}">
-                <a16:creationId xmlns:a16="http://schemas.microsoft.com/office/drawing/2014/main" id="{F5C13B5C-6512-5FF2-90EF-8AE7B8B9FDAB}"/>
+          <p:cNvPr id="6" name="Slayt Numarası Yer Tutucusu 5">
+            <a:extLst>
+              <a:ext uri="{FF2B5EF4-FFF2-40B4-BE49-F238E27FC236}">
+                <a16:creationId xmlns:a16="http://schemas.microsoft.com/office/drawing/2014/main" id="{76B6371E-D351-EDEA-D0F7-8A8019A2A795}"/>
               </a:ext>
             </a:extLst>
           </p:cNvPr>
@@ -30090,7 +30009,547 @@
     </p:spTree>
     <p:extLst>
       <p:ext uri="{BB962C8B-B14F-4D97-AF65-F5344CB8AC3E}">
-        <p14:creationId xmlns:p14="http://schemas.microsoft.com/office/powerpoint/2010/main" val="2531446554"/>
+        <p14:creationId xmlns:p14="http://schemas.microsoft.com/office/powerpoint/2010/main" val="454016312"/>
+      </p:ext>
+    </p:extLst>
+  </p:cSld>
+  <p:clrMapOvr>
+    <a:masterClrMapping/>
+  </p:clrMapOvr>
+</p:sld>
+</file>
+
+<file path=ppt/slides/slide47.xml><?xml version="1.0" encoding="utf-8"?>
+<p:sld xmlns:a="http://schemas.openxmlformats.org/drawingml/2006/main" xmlns:r="http://schemas.openxmlformats.org/officeDocument/2006/relationships" xmlns:p="http://schemas.openxmlformats.org/presentationml/2006/main">
+  <p:cSld>
+    <p:spTree>
+      <p:nvGrpSpPr>
+        <p:cNvPr id="1" name="">
+          <a:extLst>
+            <a:ext uri="{FF2B5EF4-FFF2-40B4-BE49-F238E27FC236}">
+              <a16:creationId xmlns:a16="http://schemas.microsoft.com/office/drawing/2014/main" id="{CED4DE73-23B7-95E8-F432-04B974A3FB8C}"/>
+            </a:ext>
+          </a:extLst>
+        </p:cNvPr>
+        <p:cNvGrpSpPr/>
+        <p:nvPr/>
+      </p:nvGrpSpPr>
+      <p:grpSpPr>
+        <a:xfrm>
+          <a:off x="0" y="0"/>
+          <a:ext cx="0" cy="0"/>
+          <a:chOff x="0" y="0"/>
+          <a:chExt cx="0" cy="0"/>
+        </a:xfrm>
+      </p:grpSpPr>
+      <p:sp>
+        <p:nvSpPr>
+          <p:cNvPr id="2" name="Başlık 1">
+            <a:extLst>
+              <a:ext uri="{FF2B5EF4-FFF2-40B4-BE49-F238E27FC236}">
+                <a16:creationId xmlns:a16="http://schemas.microsoft.com/office/drawing/2014/main" id="{5BF2B6D4-6B1D-4380-BF22-F73138BBFB92}"/>
+              </a:ext>
+            </a:extLst>
+          </p:cNvPr>
+          <p:cNvSpPr>
+            <a:spLocks noGrp="1"/>
+          </p:cNvSpPr>
+          <p:nvPr>
+            <p:ph type="title"/>
+          </p:nvPr>
+        </p:nvSpPr>
+        <p:spPr/>
+        <p:txBody>
+          <a:bodyPr>
+            <a:normAutofit/>
+          </a:bodyPr>
+          <a:lstStyle/>
+          <a:p>
+            <a:r>
+              <a:rPr lang="tr-TR" sz="2800" dirty="0"/>
+              <a:t>Kod: Metni tersten yazdırma</a:t>
+            </a:r>
+          </a:p>
+        </p:txBody>
+      </p:sp>
+      <p:sp>
+        <p:nvSpPr>
+          <p:cNvPr id="3" name="İçerik Yer Tutucusu 2">
+            <a:extLst>
+              <a:ext uri="{FF2B5EF4-FFF2-40B4-BE49-F238E27FC236}">
+                <a16:creationId xmlns:a16="http://schemas.microsoft.com/office/drawing/2014/main" id="{BC1AC6BB-301A-FDF2-FE29-C80379A7D09E}"/>
+              </a:ext>
+            </a:extLst>
+          </p:cNvPr>
+          <p:cNvSpPr>
+            <a:spLocks noGrp="1"/>
+          </p:cNvSpPr>
+          <p:nvPr>
+            <p:ph idx="1"/>
+          </p:nvPr>
+        </p:nvSpPr>
+        <p:spPr/>
+        <p:txBody>
+          <a:bodyPr/>
+          <a:lstStyle/>
+          <a:p>
+            <a:r>
+              <a:rPr lang="tr-TR" dirty="0"/>
+              <a:t>Çamoğlu 3, 149</a:t>
+            </a:r>
+          </a:p>
+        </p:txBody>
+      </p:sp>
+      <p:sp>
+        <p:nvSpPr>
+          <p:cNvPr id="4" name="Veri Yer Tutucusu 3">
+            <a:extLst>
+              <a:ext uri="{FF2B5EF4-FFF2-40B4-BE49-F238E27FC236}">
+                <a16:creationId xmlns:a16="http://schemas.microsoft.com/office/drawing/2014/main" id="{9E31C6BA-1998-014D-DF7C-42A13C5A2FB2}"/>
+              </a:ext>
+            </a:extLst>
+          </p:cNvPr>
+          <p:cNvSpPr>
+            <a:spLocks noGrp="1"/>
+          </p:cNvSpPr>
+          <p:nvPr>
+            <p:ph type="dt" sz="half" idx="10"/>
+          </p:nvPr>
+        </p:nvSpPr>
+        <p:spPr/>
+        <p:txBody>
+          <a:bodyPr/>
+          <a:lstStyle/>
+          <a:p>
+            <a:fld id="{E5A72F27-F128-4B68-926B-C496DC38618F}" type="datetime1">
+              <a:rPr lang="tr-TR" smtClean="0"/>
+              <a:t>4.10.2026</a:t>
+            </a:fld>
+            <a:endParaRPr lang="tr-TR"/>
+          </a:p>
+        </p:txBody>
+      </p:sp>
+      <p:sp>
+        <p:nvSpPr>
+          <p:cNvPr id="5" name="Alt Bilgi Yer Tutucusu 4">
+            <a:extLst>
+              <a:ext uri="{FF2B5EF4-FFF2-40B4-BE49-F238E27FC236}">
+                <a16:creationId xmlns:a16="http://schemas.microsoft.com/office/drawing/2014/main" id="{5A1D0F8D-AD83-B7BF-0E90-E9DB50F7B101}"/>
+              </a:ext>
+            </a:extLst>
+          </p:cNvPr>
+          <p:cNvSpPr>
+            <a:spLocks noGrp="1"/>
+          </p:cNvSpPr>
+          <p:nvPr>
+            <p:ph type="ftr" sz="quarter" idx="11"/>
+          </p:nvPr>
+        </p:nvSpPr>
+        <p:spPr/>
+        <p:txBody>
+          <a:bodyPr/>
+          <a:lstStyle/>
+          <a:p>
+            <a:r>
+              <a:rPr lang="tr-TR"/>
+              <a:t>Copyright: Harun Altay</a:t>
+            </a:r>
+          </a:p>
+        </p:txBody>
+      </p:sp>
+      <p:sp>
+        <p:nvSpPr>
+          <p:cNvPr id="6" name="Slayt Numarası Yer Tutucusu 5">
+            <a:extLst>
+              <a:ext uri="{FF2B5EF4-FFF2-40B4-BE49-F238E27FC236}">
+                <a16:creationId xmlns:a16="http://schemas.microsoft.com/office/drawing/2014/main" id="{C2FFF1C9-5826-20F5-2AF1-E28D98A352D9}"/>
+              </a:ext>
+            </a:extLst>
+          </p:cNvPr>
+          <p:cNvSpPr>
+            <a:spLocks noGrp="1"/>
+          </p:cNvSpPr>
+          <p:nvPr>
+            <p:ph type="sldNum" sz="quarter" idx="12"/>
+          </p:nvPr>
+        </p:nvSpPr>
+        <p:spPr/>
+        <p:txBody>
+          <a:bodyPr/>
+          <a:lstStyle/>
+          <a:p>
+            <a:fld id="{556A583B-49D3-4431-A76E-53060577655C}" type="slidenum">
+              <a:rPr lang="tr-TR" smtClean="0"/>
+              <a:t>47</a:t>
+            </a:fld>
+            <a:endParaRPr lang="tr-TR"/>
+          </a:p>
+        </p:txBody>
+      </p:sp>
+    </p:spTree>
+    <p:extLst>
+      <p:ext uri="{BB962C8B-B14F-4D97-AF65-F5344CB8AC3E}">
+        <p14:creationId xmlns:p14="http://schemas.microsoft.com/office/powerpoint/2010/main" val="2184441089"/>
+      </p:ext>
+    </p:extLst>
+  </p:cSld>
+  <p:clrMapOvr>
+    <a:masterClrMapping/>
+  </p:clrMapOvr>
+</p:sld>
+</file>
+
+<file path=ppt/slides/slide48.xml><?xml version="1.0" encoding="utf-8"?>
+<p:sld xmlns:a="http://schemas.openxmlformats.org/drawingml/2006/main" xmlns:r="http://schemas.openxmlformats.org/officeDocument/2006/relationships" xmlns:p="http://schemas.openxmlformats.org/presentationml/2006/main">
+  <p:cSld>
+    <p:spTree>
+      <p:nvGrpSpPr>
+        <p:cNvPr id="1" name="">
+          <a:extLst>
+            <a:ext uri="{FF2B5EF4-FFF2-40B4-BE49-F238E27FC236}">
+              <a16:creationId xmlns:a16="http://schemas.microsoft.com/office/drawing/2014/main" id="{390FA761-B1E4-9F50-5633-31DE57909661}"/>
+            </a:ext>
+          </a:extLst>
+        </p:cNvPr>
+        <p:cNvGrpSpPr/>
+        <p:nvPr/>
+      </p:nvGrpSpPr>
+      <p:grpSpPr>
+        <a:xfrm>
+          <a:off x="0" y="0"/>
+          <a:ext cx="0" cy="0"/>
+          <a:chOff x="0" y="0"/>
+          <a:chExt cx="0" cy="0"/>
+        </a:xfrm>
+      </p:grpSpPr>
+      <p:sp>
+        <p:nvSpPr>
+          <p:cNvPr id="2" name="Başlık 1">
+            <a:extLst>
+              <a:ext uri="{FF2B5EF4-FFF2-40B4-BE49-F238E27FC236}">
+                <a16:creationId xmlns:a16="http://schemas.microsoft.com/office/drawing/2014/main" id="{76F7AF56-F591-92A7-5DA8-30B0099CB88F}"/>
+              </a:ext>
+            </a:extLst>
+          </p:cNvPr>
+          <p:cNvSpPr>
+            <a:spLocks noGrp="1"/>
+          </p:cNvSpPr>
+          <p:nvPr>
+            <p:ph type="title"/>
+          </p:nvPr>
+        </p:nvSpPr>
+        <p:spPr/>
+        <p:txBody>
+          <a:bodyPr>
+            <a:normAutofit/>
+          </a:bodyPr>
+          <a:lstStyle/>
+          <a:p>
+            <a:r>
+              <a:rPr lang="tr-TR" sz="2800" dirty="0"/>
+              <a:t>Kod: Simetrik metin</a:t>
+            </a:r>
+          </a:p>
+        </p:txBody>
+      </p:sp>
+      <p:sp>
+        <p:nvSpPr>
+          <p:cNvPr id="3" name="İçerik Yer Tutucusu 2">
+            <a:extLst>
+              <a:ext uri="{FF2B5EF4-FFF2-40B4-BE49-F238E27FC236}">
+                <a16:creationId xmlns:a16="http://schemas.microsoft.com/office/drawing/2014/main" id="{55258F42-4BF2-179C-8ED4-CB773D672E5A}"/>
+              </a:ext>
+            </a:extLst>
+          </p:cNvPr>
+          <p:cNvSpPr>
+            <a:spLocks noGrp="1"/>
+          </p:cNvSpPr>
+          <p:nvPr>
+            <p:ph idx="1"/>
+          </p:nvPr>
+        </p:nvSpPr>
+        <p:spPr/>
+        <p:txBody>
+          <a:bodyPr/>
+          <a:lstStyle/>
+          <a:p>
+            <a:r>
+              <a:rPr lang="tr-TR" dirty="0"/>
+              <a:t>Çamoğlu 3, 151</a:t>
+            </a:r>
+          </a:p>
+        </p:txBody>
+      </p:sp>
+      <p:sp>
+        <p:nvSpPr>
+          <p:cNvPr id="4" name="Veri Yer Tutucusu 3">
+            <a:extLst>
+              <a:ext uri="{FF2B5EF4-FFF2-40B4-BE49-F238E27FC236}">
+                <a16:creationId xmlns:a16="http://schemas.microsoft.com/office/drawing/2014/main" id="{B66442F7-9339-ACDE-364E-932BBD486DB5}"/>
+              </a:ext>
+            </a:extLst>
+          </p:cNvPr>
+          <p:cNvSpPr>
+            <a:spLocks noGrp="1"/>
+          </p:cNvSpPr>
+          <p:nvPr>
+            <p:ph type="dt" sz="half" idx="10"/>
+          </p:nvPr>
+        </p:nvSpPr>
+        <p:spPr/>
+        <p:txBody>
+          <a:bodyPr/>
+          <a:lstStyle/>
+          <a:p>
+            <a:fld id="{E5A72F27-F128-4B68-926B-C496DC38618F}" type="datetime1">
+              <a:rPr lang="tr-TR" smtClean="0"/>
+              <a:t>4.10.2026</a:t>
+            </a:fld>
+            <a:endParaRPr lang="tr-TR"/>
+          </a:p>
+        </p:txBody>
+      </p:sp>
+      <p:sp>
+        <p:nvSpPr>
+          <p:cNvPr id="5" name="Alt Bilgi Yer Tutucusu 4">
+            <a:extLst>
+              <a:ext uri="{FF2B5EF4-FFF2-40B4-BE49-F238E27FC236}">
+                <a16:creationId xmlns:a16="http://schemas.microsoft.com/office/drawing/2014/main" id="{B26F6513-C9C8-EE74-E089-43FF0BF1A63D}"/>
+              </a:ext>
+            </a:extLst>
+          </p:cNvPr>
+          <p:cNvSpPr>
+            <a:spLocks noGrp="1"/>
+          </p:cNvSpPr>
+          <p:nvPr>
+            <p:ph type="ftr" sz="quarter" idx="11"/>
+          </p:nvPr>
+        </p:nvSpPr>
+        <p:spPr/>
+        <p:txBody>
+          <a:bodyPr/>
+          <a:lstStyle/>
+          <a:p>
+            <a:r>
+              <a:rPr lang="tr-TR"/>
+              <a:t>Copyright: Harun Altay</a:t>
+            </a:r>
+          </a:p>
+        </p:txBody>
+      </p:sp>
+      <p:sp>
+        <p:nvSpPr>
+          <p:cNvPr id="6" name="Slayt Numarası Yer Tutucusu 5">
+            <a:extLst>
+              <a:ext uri="{FF2B5EF4-FFF2-40B4-BE49-F238E27FC236}">
+                <a16:creationId xmlns:a16="http://schemas.microsoft.com/office/drawing/2014/main" id="{D0D5E862-AD7F-6D3E-0E17-C3C145065FC5}"/>
+              </a:ext>
+            </a:extLst>
+          </p:cNvPr>
+          <p:cNvSpPr>
+            <a:spLocks noGrp="1"/>
+          </p:cNvSpPr>
+          <p:nvPr>
+            <p:ph type="sldNum" sz="quarter" idx="12"/>
+          </p:nvPr>
+        </p:nvSpPr>
+        <p:spPr/>
+        <p:txBody>
+          <a:bodyPr/>
+          <a:lstStyle/>
+          <a:p>
+            <a:fld id="{556A583B-49D3-4431-A76E-53060577655C}" type="slidenum">
+              <a:rPr lang="tr-TR" smtClean="0"/>
+              <a:t>48</a:t>
+            </a:fld>
+            <a:endParaRPr lang="tr-TR"/>
+          </a:p>
+        </p:txBody>
+      </p:sp>
+    </p:spTree>
+    <p:extLst>
+      <p:ext uri="{BB962C8B-B14F-4D97-AF65-F5344CB8AC3E}">
+        <p14:creationId xmlns:p14="http://schemas.microsoft.com/office/powerpoint/2010/main" val="2225521562"/>
+      </p:ext>
+    </p:extLst>
+  </p:cSld>
+  <p:clrMapOvr>
+    <a:masterClrMapping/>
+  </p:clrMapOvr>
+</p:sld>
+</file>
+
+<file path=ppt/slides/slide49.xml><?xml version="1.0" encoding="utf-8"?>
+<p:sld xmlns:a="http://schemas.openxmlformats.org/drawingml/2006/main" xmlns:r="http://schemas.openxmlformats.org/officeDocument/2006/relationships" xmlns:p="http://schemas.openxmlformats.org/presentationml/2006/main">
+  <p:cSld>
+    <p:spTree>
+      <p:nvGrpSpPr>
+        <p:cNvPr id="1" name="">
+          <a:extLst>
+            <a:ext uri="{FF2B5EF4-FFF2-40B4-BE49-F238E27FC236}">
+              <a16:creationId xmlns:a16="http://schemas.microsoft.com/office/drawing/2014/main" id="{67CACFC1-81CA-6215-4EED-1EC16B302484}"/>
+            </a:ext>
+          </a:extLst>
+        </p:cNvPr>
+        <p:cNvGrpSpPr/>
+        <p:nvPr/>
+      </p:nvGrpSpPr>
+      <p:grpSpPr>
+        <a:xfrm>
+          <a:off x="0" y="0"/>
+          <a:ext cx="0" cy="0"/>
+          <a:chOff x="0" y="0"/>
+          <a:chExt cx="0" cy="0"/>
+        </a:xfrm>
+      </p:grpSpPr>
+      <p:sp>
+        <p:nvSpPr>
+          <p:cNvPr id="2" name="Başlık 1">
+            <a:extLst>
+              <a:ext uri="{FF2B5EF4-FFF2-40B4-BE49-F238E27FC236}">
+                <a16:creationId xmlns:a16="http://schemas.microsoft.com/office/drawing/2014/main" id="{71C459B9-B532-DFD3-CA94-37675B45BF75}"/>
+              </a:ext>
+            </a:extLst>
+          </p:cNvPr>
+          <p:cNvSpPr>
+            <a:spLocks noGrp="1"/>
+          </p:cNvSpPr>
+          <p:nvPr>
+            <p:ph type="title"/>
+          </p:nvPr>
+        </p:nvSpPr>
+        <p:spPr/>
+        <p:txBody>
+          <a:bodyPr>
+            <a:normAutofit/>
+          </a:bodyPr>
+          <a:lstStyle/>
+          <a:p>
+            <a:r>
+              <a:rPr lang="tr-TR" sz="2800" dirty="0"/>
+              <a:t>Kod: Asal sayılar</a:t>
+            </a:r>
+          </a:p>
+        </p:txBody>
+      </p:sp>
+      <p:sp>
+        <p:nvSpPr>
+          <p:cNvPr id="3" name="İçerik Yer Tutucusu 2">
+            <a:extLst>
+              <a:ext uri="{FF2B5EF4-FFF2-40B4-BE49-F238E27FC236}">
+                <a16:creationId xmlns:a16="http://schemas.microsoft.com/office/drawing/2014/main" id="{141836A8-C5A2-54B5-1D18-B8CAB0AFA536}"/>
+              </a:ext>
+            </a:extLst>
+          </p:cNvPr>
+          <p:cNvSpPr>
+            <a:spLocks noGrp="1"/>
+          </p:cNvSpPr>
+          <p:nvPr>
+            <p:ph idx="1"/>
+          </p:nvPr>
+        </p:nvSpPr>
+        <p:spPr/>
+        <p:txBody>
+          <a:bodyPr/>
+          <a:lstStyle/>
+          <a:p>
+            <a:r>
+              <a:rPr lang="tr-TR" dirty="0"/>
+              <a:t>Çamoğlu 3, 154</a:t>
+            </a:r>
+          </a:p>
+        </p:txBody>
+      </p:sp>
+      <p:sp>
+        <p:nvSpPr>
+          <p:cNvPr id="4" name="Veri Yer Tutucusu 3">
+            <a:extLst>
+              <a:ext uri="{FF2B5EF4-FFF2-40B4-BE49-F238E27FC236}">
+                <a16:creationId xmlns:a16="http://schemas.microsoft.com/office/drawing/2014/main" id="{E363FF4A-0FED-968B-92DB-C79A627D7410}"/>
+              </a:ext>
+            </a:extLst>
+          </p:cNvPr>
+          <p:cNvSpPr>
+            <a:spLocks noGrp="1"/>
+          </p:cNvSpPr>
+          <p:nvPr>
+            <p:ph type="dt" sz="half" idx="10"/>
+          </p:nvPr>
+        </p:nvSpPr>
+        <p:spPr/>
+        <p:txBody>
+          <a:bodyPr/>
+          <a:lstStyle/>
+          <a:p>
+            <a:fld id="{E5A72F27-F128-4B68-926B-C496DC38618F}" type="datetime1">
+              <a:rPr lang="tr-TR" smtClean="0"/>
+              <a:t>4.10.2026</a:t>
+            </a:fld>
+            <a:endParaRPr lang="tr-TR"/>
+          </a:p>
+        </p:txBody>
+      </p:sp>
+      <p:sp>
+        <p:nvSpPr>
+          <p:cNvPr id="5" name="Alt Bilgi Yer Tutucusu 4">
+            <a:extLst>
+              <a:ext uri="{FF2B5EF4-FFF2-40B4-BE49-F238E27FC236}">
+                <a16:creationId xmlns:a16="http://schemas.microsoft.com/office/drawing/2014/main" id="{28243D1F-0CDF-BEA0-D9B1-3C60D0FF704E}"/>
+              </a:ext>
+            </a:extLst>
+          </p:cNvPr>
+          <p:cNvSpPr>
+            <a:spLocks noGrp="1"/>
+          </p:cNvSpPr>
+          <p:nvPr>
+            <p:ph type="ftr" sz="quarter" idx="11"/>
+          </p:nvPr>
+        </p:nvSpPr>
+        <p:spPr/>
+        <p:txBody>
+          <a:bodyPr/>
+          <a:lstStyle/>
+          <a:p>
+            <a:r>
+              <a:rPr lang="tr-TR"/>
+              <a:t>Copyright: Harun Altay</a:t>
+            </a:r>
+          </a:p>
+        </p:txBody>
+      </p:sp>
+      <p:sp>
+        <p:nvSpPr>
+          <p:cNvPr id="6" name="Slayt Numarası Yer Tutucusu 5">
+            <a:extLst>
+              <a:ext uri="{FF2B5EF4-FFF2-40B4-BE49-F238E27FC236}">
+                <a16:creationId xmlns:a16="http://schemas.microsoft.com/office/drawing/2014/main" id="{E551E622-617D-EDFE-F239-0BF5DC5F5335}"/>
+              </a:ext>
+            </a:extLst>
+          </p:cNvPr>
+          <p:cNvSpPr>
+            <a:spLocks noGrp="1"/>
+          </p:cNvSpPr>
+          <p:nvPr>
+            <p:ph type="sldNum" sz="quarter" idx="12"/>
+          </p:nvPr>
+        </p:nvSpPr>
+        <p:spPr/>
+        <p:txBody>
+          <a:bodyPr/>
+          <a:lstStyle/>
+          <a:p>
+            <a:fld id="{556A583B-49D3-4431-A76E-53060577655C}" type="slidenum">
+              <a:rPr lang="tr-TR" smtClean="0"/>
+              <a:t>49</a:t>
+            </a:fld>
+            <a:endParaRPr lang="tr-TR"/>
+          </a:p>
+        </p:txBody>
+      </p:sp>
+    </p:spTree>
+    <p:extLst>
+      <p:ext uri="{BB962C8B-B14F-4D97-AF65-F5344CB8AC3E}">
+        <p14:creationId xmlns:p14="http://schemas.microsoft.com/office/powerpoint/2010/main" val="2983040801"/>
       </p:ext>
     </p:extLst>
   </p:cSld>
@@ -30222,7 +30681,7 @@
           <a:p>
             <a:fld id="{1FCC30DB-9A9A-407B-8F85-2EF59053FD42}" type="datetime1">
               <a:rPr lang="tr-TR" smtClean="0"/>
-              <a:t>3.10.2026</a:t>
+              <a:t>4.10.2026</a:t>
             </a:fld>
             <a:endParaRPr lang="tr-TR"/>
           </a:p>
@@ -30289,6 +30748,1368 @@
     <p:extLst>
       <p:ext uri="{BB962C8B-B14F-4D97-AF65-F5344CB8AC3E}">
         <p14:creationId xmlns:p14="http://schemas.microsoft.com/office/powerpoint/2010/main" val="3066286309"/>
+      </p:ext>
+    </p:extLst>
+  </p:cSld>
+  <p:clrMapOvr>
+    <a:masterClrMapping/>
+  </p:clrMapOvr>
+</p:sld>
+</file>
+
+<file path=ppt/slides/slide50.xml><?xml version="1.0" encoding="utf-8"?>
+<p:sld xmlns:a="http://schemas.openxmlformats.org/drawingml/2006/main" xmlns:r="http://schemas.openxmlformats.org/officeDocument/2006/relationships" xmlns:p="http://schemas.openxmlformats.org/presentationml/2006/main">
+  <p:cSld>
+    <p:spTree>
+      <p:nvGrpSpPr>
+        <p:cNvPr id="1" name="">
+          <a:extLst>
+            <a:ext uri="{FF2B5EF4-FFF2-40B4-BE49-F238E27FC236}">
+              <a16:creationId xmlns:a16="http://schemas.microsoft.com/office/drawing/2014/main" id="{FEFEBFF6-97DA-CCE9-EAED-F0A97EA6D4C0}"/>
+            </a:ext>
+          </a:extLst>
+        </p:cNvPr>
+        <p:cNvGrpSpPr/>
+        <p:nvPr/>
+      </p:nvGrpSpPr>
+      <p:grpSpPr>
+        <a:xfrm>
+          <a:off x="0" y="0"/>
+          <a:ext cx="0" cy="0"/>
+          <a:chOff x="0" y="0"/>
+          <a:chExt cx="0" cy="0"/>
+        </a:xfrm>
+      </p:grpSpPr>
+      <p:sp>
+        <p:nvSpPr>
+          <p:cNvPr id="2" name="Başlık 1">
+            <a:extLst>
+              <a:ext uri="{FF2B5EF4-FFF2-40B4-BE49-F238E27FC236}">
+                <a16:creationId xmlns:a16="http://schemas.microsoft.com/office/drawing/2014/main" id="{2D97DFD1-A1E7-497D-9DF8-6FC6DD2AE7F2}"/>
+              </a:ext>
+            </a:extLst>
+          </p:cNvPr>
+          <p:cNvSpPr>
+            <a:spLocks noGrp="1"/>
+          </p:cNvSpPr>
+          <p:nvPr>
+            <p:ph type="title"/>
+          </p:nvPr>
+        </p:nvSpPr>
+        <p:spPr/>
+        <p:txBody>
+          <a:bodyPr>
+            <a:normAutofit/>
+          </a:bodyPr>
+          <a:lstStyle/>
+          <a:p>
+            <a:r>
+              <a:rPr lang="tr-TR" sz="2800" dirty="0"/>
+              <a:t>Kod: Sayı tutma oyunu 1</a:t>
+            </a:r>
+          </a:p>
+        </p:txBody>
+      </p:sp>
+      <p:sp>
+        <p:nvSpPr>
+          <p:cNvPr id="3" name="İçerik Yer Tutucusu 2">
+            <a:extLst>
+              <a:ext uri="{FF2B5EF4-FFF2-40B4-BE49-F238E27FC236}">
+                <a16:creationId xmlns:a16="http://schemas.microsoft.com/office/drawing/2014/main" id="{1EF7A9A2-5952-CA19-549F-46C240E5F5AE}"/>
+              </a:ext>
+            </a:extLst>
+          </p:cNvPr>
+          <p:cNvSpPr>
+            <a:spLocks noGrp="1"/>
+          </p:cNvSpPr>
+          <p:nvPr>
+            <p:ph idx="1"/>
+          </p:nvPr>
+        </p:nvSpPr>
+        <p:spPr/>
+        <p:txBody>
+          <a:bodyPr/>
+          <a:lstStyle/>
+          <a:p>
+            <a:r>
+              <a:rPr lang="tr-TR" dirty="0"/>
+              <a:t>Çamoğlu 3, 157</a:t>
+            </a:r>
+          </a:p>
+        </p:txBody>
+      </p:sp>
+      <p:sp>
+        <p:nvSpPr>
+          <p:cNvPr id="4" name="Veri Yer Tutucusu 3">
+            <a:extLst>
+              <a:ext uri="{FF2B5EF4-FFF2-40B4-BE49-F238E27FC236}">
+                <a16:creationId xmlns:a16="http://schemas.microsoft.com/office/drawing/2014/main" id="{D1E5E8F4-C49A-2A75-0A36-A0A73F74BA7C}"/>
+              </a:ext>
+            </a:extLst>
+          </p:cNvPr>
+          <p:cNvSpPr>
+            <a:spLocks noGrp="1"/>
+          </p:cNvSpPr>
+          <p:nvPr>
+            <p:ph type="dt" sz="half" idx="10"/>
+          </p:nvPr>
+        </p:nvSpPr>
+        <p:spPr/>
+        <p:txBody>
+          <a:bodyPr/>
+          <a:lstStyle/>
+          <a:p>
+            <a:fld id="{E5A72F27-F128-4B68-926B-C496DC38618F}" type="datetime1">
+              <a:rPr lang="tr-TR" smtClean="0"/>
+              <a:t>4.10.2026</a:t>
+            </a:fld>
+            <a:endParaRPr lang="tr-TR"/>
+          </a:p>
+        </p:txBody>
+      </p:sp>
+      <p:sp>
+        <p:nvSpPr>
+          <p:cNvPr id="5" name="Alt Bilgi Yer Tutucusu 4">
+            <a:extLst>
+              <a:ext uri="{FF2B5EF4-FFF2-40B4-BE49-F238E27FC236}">
+                <a16:creationId xmlns:a16="http://schemas.microsoft.com/office/drawing/2014/main" id="{E3FAAED7-05A4-D68F-75BC-F5083D677ADB}"/>
+              </a:ext>
+            </a:extLst>
+          </p:cNvPr>
+          <p:cNvSpPr>
+            <a:spLocks noGrp="1"/>
+          </p:cNvSpPr>
+          <p:nvPr>
+            <p:ph type="ftr" sz="quarter" idx="11"/>
+          </p:nvPr>
+        </p:nvSpPr>
+        <p:spPr/>
+        <p:txBody>
+          <a:bodyPr/>
+          <a:lstStyle/>
+          <a:p>
+            <a:r>
+              <a:rPr lang="tr-TR"/>
+              <a:t>Copyright: Harun Altay</a:t>
+            </a:r>
+          </a:p>
+        </p:txBody>
+      </p:sp>
+      <p:sp>
+        <p:nvSpPr>
+          <p:cNvPr id="6" name="Slayt Numarası Yer Tutucusu 5">
+            <a:extLst>
+              <a:ext uri="{FF2B5EF4-FFF2-40B4-BE49-F238E27FC236}">
+                <a16:creationId xmlns:a16="http://schemas.microsoft.com/office/drawing/2014/main" id="{19F08D81-1662-C016-599A-4EED32CE68E0}"/>
+              </a:ext>
+            </a:extLst>
+          </p:cNvPr>
+          <p:cNvSpPr>
+            <a:spLocks noGrp="1"/>
+          </p:cNvSpPr>
+          <p:nvPr>
+            <p:ph type="sldNum" sz="quarter" idx="12"/>
+          </p:nvPr>
+        </p:nvSpPr>
+        <p:spPr/>
+        <p:txBody>
+          <a:bodyPr/>
+          <a:lstStyle/>
+          <a:p>
+            <a:fld id="{556A583B-49D3-4431-A76E-53060577655C}" type="slidenum">
+              <a:rPr lang="tr-TR" smtClean="0"/>
+              <a:t>50</a:t>
+            </a:fld>
+            <a:endParaRPr lang="tr-TR"/>
+          </a:p>
+        </p:txBody>
+      </p:sp>
+    </p:spTree>
+    <p:extLst>
+      <p:ext uri="{BB962C8B-B14F-4D97-AF65-F5344CB8AC3E}">
+        <p14:creationId xmlns:p14="http://schemas.microsoft.com/office/powerpoint/2010/main" val="2047084111"/>
+      </p:ext>
+    </p:extLst>
+  </p:cSld>
+  <p:clrMapOvr>
+    <a:masterClrMapping/>
+  </p:clrMapOvr>
+</p:sld>
+</file>
+
+<file path=ppt/slides/slide51.xml><?xml version="1.0" encoding="utf-8"?>
+<p:sld xmlns:a="http://schemas.openxmlformats.org/drawingml/2006/main" xmlns:r="http://schemas.openxmlformats.org/officeDocument/2006/relationships" xmlns:p="http://schemas.openxmlformats.org/presentationml/2006/main">
+  <p:cSld>
+    <p:spTree>
+      <p:nvGrpSpPr>
+        <p:cNvPr id="1" name="">
+          <a:extLst>
+            <a:ext uri="{FF2B5EF4-FFF2-40B4-BE49-F238E27FC236}">
+              <a16:creationId xmlns:a16="http://schemas.microsoft.com/office/drawing/2014/main" id="{2953CC24-9723-FEA6-5108-1465386CFF38}"/>
+            </a:ext>
+          </a:extLst>
+        </p:cNvPr>
+        <p:cNvGrpSpPr/>
+        <p:nvPr/>
+      </p:nvGrpSpPr>
+      <p:grpSpPr>
+        <a:xfrm>
+          <a:off x="0" y="0"/>
+          <a:ext cx="0" cy="0"/>
+          <a:chOff x="0" y="0"/>
+          <a:chExt cx="0" cy="0"/>
+        </a:xfrm>
+      </p:grpSpPr>
+      <p:sp>
+        <p:nvSpPr>
+          <p:cNvPr id="2" name="Başlık 1">
+            <a:extLst>
+              <a:ext uri="{FF2B5EF4-FFF2-40B4-BE49-F238E27FC236}">
+                <a16:creationId xmlns:a16="http://schemas.microsoft.com/office/drawing/2014/main" id="{E51A0ACC-6EB3-7688-E298-9F8FC3545D16}"/>
+              </a:ext>
+            </a:extLst>
+          </p:cNvPr>
+          <p:cNvSpPr>
+            <a:spLocks noGrp="1"/>
+          </p:cNvSpPr>
+          <p:nvPr>
+            <p:ph type="title"/>
+          </p:nvPr>
+        </p:nvSpPr>
+        <p:spPr/>
+        <p:txBody>
+          <a:bodyPr>
+            <a:normAutofit/>
+          </a:bodyPr>
+          <a:lstStyle/>
+          <a:p>
+            <a:r>
+              <a:rPr lang="tr-TR" sz="2800" dirty="0"/>
+              <a:t>Kod: Bir sayının faktöriyelini bulma</a:t>
+            </a:r>
+          </a:p>
+        </p:txBody>
+      </p:sp>
+      <p:sp>
+        <p:nvSpPr>
+          <p:cNvPr id="3" name="İçerik Yer Tutucusu 2">
+            <a:extLst>
+              <a:ext uri="{FF2B5EF4-FFF2-40B4-BE49-F238E27FC236}">
+                <a16:creationId xmlns:a16="http://schemas.microsoft.com/office/drawing/2014/main" id="{BB5EFA09-8C17-695E-489F-24865C13DD8D}"/>
+              </a:ext>
+            </a:extLst>
+          </p:cNvPr>
+          <p:cNvSpPr>
+            <a:spLocks noGrp="1"/>
+          </p:cNvSpPr>
+          <p:nvPr>
+            <p:ph idx="1"/>
+          </p:nvPr>
+        </p:nvSpPr>
+        <p:spPr/>
+        <p:txBody>
+          <a:bodyPr/>
+          <a:lstStyle/>
+          <a:p>
+            <a:r>
+              <a:rPr lang="tr-TR" dirty="0"/>
+              <a:t>Çamoğlu 3, 164</a:t>
+            </a:r>
+          </a:p>
+        </p:txBody>
+      </p:sp>
+      <p:sp>
+        <p:nvSpPr>
+          <p:cNvPr id="4" name="Veri Yer Tutucusu 3">
+            <a:extLst>
+              <a:ext uri="{FF2B5EF4-FFF2-40B4-BE49-F238E27FC236}">
+                <a16:creationId xmlns:a16="http://schemas.microsoft.com/office/drawing/2014/main" id="{25E8E5F7-1962-B41E-148D-1FCA497A5C6F}"/>
+              </a:ext>
+            </a:extLst>
+          </p:cNvPr>
+          <p:cNvSpPr>
+            <a:spLocks noGrp="1"/>
+          </p:cNvSpPr>
+          <p:nvPr>
+            <p:ph type="dt" sz="half" idx="10"/>
+          </p:nvPr>
+        </p:nvSpPr>
+        <p:spPr/>
+        <p:txBody>
+          <a:bodyPr/>
+          <a:lstStyle/>
+          <a:p>
+            <a:fld id="{E5A72F27-F128-4B68-926B-C496DC38618F}" type="datetime1">
+              <a:rPr lang="tr-TR" smtClean="0"/>
+              <a:t>4.10.2026</a:t>
+            </a:fld>
+            <a:endParaRPr lang="tr-TR"/>
+          </a:p>
+        </p:txBody>
+      </p:sp>
+      <p:sp>
+        <p:nvSpPr>
+          <p:cNvPr id="5" name="Alt Bilgi Yer Tutucusu 4">
+            <a:extLst>
+              <a:ext uri="{FF2B5EF4-FFF2-40B4-BE49-F238E27FC236}">
+                <a16:creationId xmlns:a16="http://schemas.microsoft.com/office/drawing/2014/main" id="{B480E8E5-B54B-187A-E970-08F7591FC664}"/>
+              </a:ext>
+            </a:extLst>
+          </p:cNvPr>
+          <p:cNvSpPr>
+            <a:spLocks noGrp="1"/>
+          </p:cNvSpPr>
+          <p:nvPr>
+            <p:ph type="ftr" sz="quarter" idx="11"/>
+          </p:nvPr>
+        </p:nvSpPr>
+        <p:spPr/>
+        <p:txBody>
+          <a:bodyPr/>
+          <a:lstStyle/>
+          <a:p>
+            <a:r>
+              <a:rPr lang="tr-TR"/>
+              <a:t>Copyright: Harun Altay</a:t>
+            </a:r>
+          </a:p>
+        </p:txBody>
+      </p:sp>
+      <p:sp>
+        <p:nvSpPr>
+          <p:cNvPr id="6" name="Slayt Numarası Yer Tutucusu 5">
+            <a:extLst>
+              <a:ext uri="{FF2B5EF4-FFF2-40B4-BE49-F238E27FC236}">
+                <a16:creationId xmlns:a16="http://schemas.microsoft.com/office/drawing/2014/main" id="{4D0CE252-AC61-D8E4-321C-EBEB44DE2D9E}"/>
+              </a:ext>
+            </a:extLst>
+          </p:cNvPr>
+          <p:cNvSpPr>
+            <a:spLocks noGrp="1"/>
+          </p:cNvSpPr>
+          <p:nvPr>
+            <p:ph type="sldNum" sz="quarter" idx="12"/>
+          </p:nvPr>
+        </p:nvSpPr>
+        <p:spPr/>
+        <p:txBody>
+          <a:bodyPr/>
+          <a:lstStyle/>
+          <a:p>
+            <a:fld id="{556A583B-49D3-4431-A76E-53060577655C}" type="slidenum">
+              <a:rPr lang="tr-TR" smtClean="0"/>
+              <a:t>51</a:t>
+            </a:fld>
+            <a:endParaRPr lang="tr-TR"/>
+          </a:p>
+        </p:txBody>
+      </p:sp>
+    </p:spTree>
+    <p:extLst>
+      <p:ext uri="{BB962C8B-B14F-4D97-AF65-F5344CB8AC3E}">
+        <p14:creationId xmlns:p14="http://schemas.microsoft.com/office/powerpoint/2010/main" val="1345304645"/>
+      </p:ext>
+    </p:extLst>
+  </p:cSld>
+  <p:clrMapOvr>
+    <a:masterClrMapping/>
+  </p:clrMapOvr>
+</p:sld>
+</file>
+
+<file path=ppt/slides/slide52.xml><?xml version="1.0" encoding="utf-8"?>
+<p:sld xmlns:a="http://schemas.openxmlformats.org/drawingml/2006/main" xmlns:r="http://schemas.openxmlformats.org/officeDocument/2006/relationships" xmlns:p="http://schemas.openxmlformats.org/presentationml/2006/main">
+  <p:cSld>
+    <p:spTree>
+      <p:nvGrpSpPr>
+        <p:cNvPr id="1" name="">
+          <a:extLst>
+            <a:ext uri="{FF2B5EF4-FFF2-40B4-BE49-F238E27FC236}">
+              <a16:creationId xmlns:a16="http://schemas.microsoft.com/office/drawing/2014/main" id="{1BBAA465-5FE0-044D-E118-FA014B6BAFAE}"/>
+            </a:ext>
+          </a:extLst>
+        </p:cNvPr>
+        <p:cNvGrpSpPr/>
+        <p:nvPr/>
+      </p:nvGrpSpPr>
+      <p:grpSpPr>
+        <a:xfrm>
+          <a:off x="0" y="0"/>
+          <a:ext cx="0" cy="0"/>
+          <a:chOff x="0" y="0"/>
+          <a:chExt cx="0" cy="0"/>
+        </a:xfrm>
+      </p:grpSpPr>
+      <p:sp>
+        <p:nvSpPr>
+          <p:cNvPr id="2" name="Başlık 1">
+            <a:extLst>
+              <a:ext uri="{FF2B5EF4-FFF2-40B4-BE49-F238E27FC236}">
+                <a16:creationId xmlns:a16="http://schemas.microsoft.com/office/drawing/2014/main" id="{8A686306-0774-1B1F-ECF3-8194459766DE}"/>
+              </a:ext>
+            </a:extLst>
+          </p:cNvPr>
+          <p:cNvSpPr>
+            <a:spLocks noGrp="1"/>
+          </p:cNvSpPr>
+          <p:nvPr>
+            <p:ph type="title"/>
+          </p:nvPr>
+        </p:nvSpPr>
+        <p:spPr/>
+        <p:txBody>
+          <a:bodyPr>
+            <a:normAutofit/>
+          </a:bodyPr>
+          <a:lstStyle/>
+          <a:p>
+            <a:r>
+              <a:rPr lang="tr-TR" sz="2800" dirty="0"/>
+              <a:t>Kod: </a:t>
+            </a:r>
+            <a:r>
+              <a:rPr lang="tr-TR" sz="2800" dirty="0" err="1"/>
+              <a:t>Palindrom</a:t>
+            </a:r>
+            <a:r>
+              <a:rPr lang="tr-TR" sz="2800" dirty="0"/>
+              <a:t> Kontrolü</a:t>
+            </a:r>
+          </a:p>
+        </p:txBody>
+      </p:sp>
+      <p:sp>
+        <p:nvSpPr>
+          <p:cNvPr id="3" name="İçerik Yer Tutucusu 2">
+            <a:extLst>
+              <a:ext uri="{FF2B5EF4-FFF2-40B4-BE49-F238E27FC236}">
+                <a16:creationId xmlns:a16="http://schemas.microsoft.com/office/drawing/2014/main" id="{DE9F1A93-EC29-F646-014E-3416EB1ACDEC}"/>
+              </a:ext>
+            </a:extLst>
+          </p:cNvPr>
+          <p:cNvSpPr>
+            <a:spLocks noGrp="1"/>
+          </p:cNvSpPr>
+          <p:nvPr>
+            <p:ph idx="1"/>
+          </p:nvPr>
+        </p:nvSpPr>
+        <p:spPr/>
+        <p:txBody>
+          <a:bodyPr/>
+          <a:lstStyle/>
+          <a:p>
+            <a:r>
+              <a:rPr lang="tr-TR" dirty="0"/>
+              <a:t>Çamoğlu 3, 165</a:t>
+            </a:r>
+          </a:p>
+        </p:txBody>
+      </p:sp>
+      <p:sp>
+        <p:nvSpPr>
+          <p:cNvPr id="4" name="Veri Yer Tutucusu 3">
+            <a:extLst>
+              <a:ext uri="{FF2B5EF4-FFF2-40B4-BE49-F238E27FC236}">
+                <a16:creationId xmlns:a16="http://schemas.microsoft.com/office/drawing/2014/main" id="{383E768A-4D1B-F556-5107-CD3A97996170}"/>
+              </a:ext>
+            </a:extLst>
+          </p:cNvPr>
+          <p:cNvSpPr>
+            <a:spLocks noGrp="1"/>
+          </p:cNvSpPr>
+          <p:nvPr>
+            <p:ph type="dt" sz="half" idx="10"/>
+          </p:nvPr>
+        </p:nvSpPr>
+        <p:spPr/>
+        <p:txBody>
+          <a:bodyPr/>
+          <a:lstStyle/>
+          <a:p>
+            <a:fld id="{E5A72F27-F128-4B68-926B-C496DC38618F}" type="datetime1">
+              <a:rPr lang="tr-TR" smtClean="0"/>
+              <a:t>4.10.2026</a:t>
+            </a:fld>
+            <a:endParaRPr lang="tr-TR"/>
+          </a:p>
+        </p:txBody>
+      </p:sp>
+      <p:sp>
+        <p:nvSpPr>
+          <p:cNvPr id="5" name="Alt Bilgi Yer Tutucusu 4">
+            <a:extLst>
+              <a:ext uri="{FF2B5EF4-FFF2-40B4-BE49-F238E27FC236}">
+                <a16:creationId xmlns:a16="http://schemas.microsoft.com/office/drawing/2014/main" id="{5BA93D9C-8EFB-5DE7-41D2-DE697B2F0867}"/>
+              </a:ext>
+            </a:extLst>
+          </p:cNvPr>
+          <p:cNvSpPr>
+            <a:spLocks noGrp="1"/>
+          </p:cNvSpPr>
+          <p:nvPr>
+            <p:ph type="ftr" sz="quarter" idx="11"/>
+          </p:nvPr>
+        </p:nvSpPr>
+        <p:spPr/>
+        <p:txBody>
+          <a:bodyPr/>
+          <a:lstStyle/>
+          <a:p>
+            <a:r>
+              <a:rPr lang="tr-TR"/>
+              <a:t>Copyright: Harun Altay</a:t>
+            </a:r>
+          </a:p>
+        </p:txBody>
+      </p:sp>
+      <p:sp>
+        <p:nvSpPr>
+          <p:cNvPr id="6" name="Slayt Numarası Yer Tutucusu 5">
+            <a:extLst>
+              <a:ext uri="{FF2B5EF4-FFF2-40B4-BE49-F238E27FC236}">
+                <a16:creationId xmlns:a16="http://schemas.microsoft.com/office/drawing/2014/main" id="{54C809A1-182D-FD8D-64B2-04BA10C493BD}"/>
+              </a:ext>
+            </a:extLst>
+          </p:cNvPr>
+          <p:cNvSpPr>
+            <a:spLocks noGrp="1"/>
+          </p:cNvSpPr>
+          <p:nvPr>
+            <p:ph type="sldNum" sz="quarter" idx="12"/>
+          </p:nvPr>
+        </p:nvSpPr>
+        <p:spPr/>
+        <p:txBody>
+          <a:bodyPr/>
+          <a:lstStyle/>
+          <a:p>
+            <a:fld id="{556A583B-49D3-4431-A76E-53060577655C}" type="slidenum">
+              <a:rPr lang="tr-TR" smtClean="0"/>
+              <a:t>52</a:t>
+            </a:fld>
+            <a:endParaRPr lang="tr-TR"/>
+          </a:p>
+        </p:txBody>
+      </p:sp>
+    </p:spTree>
+    <p:extLst>
+      <p:ext uri="{BB962C8B-B14F-4D97-AF65-F5344CB8AC3E}">
+        <p14:creationId xmlns:p14="http://schemas.microsoft.com/office/powerpoint/2010/main" val="2679368672"/>
+      </p:ext>
+    </p:extLst>
+  </p:cSld>
+  <p:clrMapOvr>
+    <a:masterClrMapping/>
+  </p:clrMapOvr>
+</p:sld>
+</file>
+
+<file path=ppt/slides/slide53.xml><?xml version="1.0" encoding="utf-8"?>
+<p:sld xmlns:a="http://schemas.openxmlformats.org/drawingml/2006/main" xmlns:r="http://schemas.openxmlformats.org/officeDocument/2006/relationships" xmlns:p="http://schemas.openxmlformats.org/presentationml/2006/main">
+  <p:cSld>
+    <p:spTree>
+      <p:nvGrpSpPr>
+        <p:cNvPr id="1" name="">
+          <a:extLst>
+            <a:ext uri="{FF2B5EF4-FFF2-40B4-BE49-F238E27FC236}">
+              <a16:creationId xmlns:a16="http://schemas.microsoft.com/office/drawing/2014/main" id="{E9932E34-637B-BFC7-9F97-657235168EB6}"/>
+            </a:ext>
+          </a:extLst>
+        </p:cNvPr>
+        <p:cNvGrpSpPr/>
+        <p:nvPr/>
+      </p:nvGrpSpPr>
+      <p:grpSpPr>
+        <a:xfrm>
+          <a:off x="0" y="0"/>
+          <a:ext cx="0" cy="0"/>
+          <a:chOff x="0" y="0"/>
+          <a:chExt cx="0" cy="0"/>
+        </a:xfrm>
+      </p:grpSpPr>
+      <p:sp>
+        <p:nvSpPr>
+          <p:cNvPr id="2" name="Başlık 1">
+            <a:extLst>
+              <a:ext uri="{FF2B5EF4-FFF2-40B4-BE49-F238E27FC236}">
+                <a16:creationId xmlns:a16="http://schemas.microsoft.com/office/drawing/2014/main" id="{67C79D28-DFD2-765C-05EB-6279D59ABE1B}"/>
+              </a:ext>
+            </a:extLst>
+          </p:cNvPr>
+          <p:cNvSpPr>
+            <a:spLocks noGrp="1"/>
+          </p:cNvSpPr>
+          <p:nvPr>
+            <p:ph type="title"/>
+          </p:nvPr>
+        </p:nvSpPr>
+        <p:spPr/>
+        <p:txBody>
+          <a:bodyPr>
+            <a:normAutofit/>
+          </a:bodyPr>
+          <a:lstStyle/>
+          <a:p>
+            <a:r>
+              <a:rPr lang="tr-TR" sz="2800" dirty="0"/>
+              <a:t>Kod: Sayı tutma oyunu 2</a:t>
+            </a:r>
+          </a:p>
+        </p:txBody>
+      </p:sp>
+      <p:sp>
+        <p:nvSpPr>
+          <p:cNvPr id="3" name="İçerik Yer Tutucusu 2">
+            <a:extLst>
+              <a:ext uri="{FF2B5EF4-FFF2-40B4-BE49-F238E27FC236}">
+                <a16:creationId xmlns:a16="http://schemas.microsoft.com/office/drawing/2014/main" id="{8182E6D7-360F-AE23-0C02-EC715A4C42D7}"/>
+              </a:ext>
+            </a:extLst>
+          </p:cNvPr>
+          <p:cNvSpPr>
+            <a:spLocks noGrp="1"/>
+          </p:cNvSpPr>
+          <p:nvPr>
+            <p:ph idx="1"/>
+          </p:nvPr>
+        </p:nvSpPr>
+        <p:spPr/>
+        <p:txBody>
+          <a:bodyPr/>
+          <a:lstStyle/>
+          <a:p>
+            <a:r>
+              <a:rPr lang="tr-TR" dirty="0"/>
+              <a:t>Çamoğlu 5, 168</a:t>
+            </a:r>
+          </a:p>
+        </p:txBody>
+      </p:sp>
+      <p:sp>
+        <p:nvSpPr>
+          <p:cNvPr id="4" name="Veri Yer Tutucusu 3">
+            <a:extLst>
+              <a:ext uri="{FF2B5EF4-FFF2-40B4-BE49-F238E27FC236}">
+                <a16:creationId xmlns:a16="http://schemas.microsoft.com/office/drawing/2014/main" id="{10A423C3-0678-9357-6B99-25700F35D112}"/>
+              </a:ext>
+            </a:extLst>
+          </p:cNvPr>
+          <p:cNvSpPr>
+            <a:spLocks noGrp="1"/>
+          </p:cNvSpPr>
+          <p:nvPr>
+            <p:ph type="dt" sz="half" idx="10"/>
+          </p:nvPr>
+        </p:nvSpPr>
+        <p:spPr/>
+        <p:txBody>
+          <a:bodyPr/>
+          <a:lstStyle/>
+          <a:p>
+            <a:fld id="{E5A72F27-F128-4B68-926B-C496DC38618F}" type="datetime1">
+              <a:rPr lang="tr-TR" smtClean="0"/>
+              <a:t>4.10.2026</a:t>
+            </a:fld>
+            <a:endParaRPr lang="tr-TR"/>
+          </a:p>
+        </p:txBody>
+      </p:sp>
+      <p:sp>
+        <p:nvSpPr>
+          <p:cNvPr id="5" name="Alt Bilgi Yer Tutucusu 4">
+            <a:extLst>
+              <a:ext uri="{FF2B5EF4-FFF2-40B4-BE49-F238E27FC236}">
+                <a16:creationId xmlns:a16="http://schemas.microsoft.com/office/drawing/2014/main" id="{7A31E715-ED24-64ED-A59B-1C30D0E5F2F1}"/>
+              </a:ext>
+            </a:extLst>
+          </p:cNvPr>
+          <p:cNvSpPr>
+            <a:spLocks noGrp="1"/>
+          </p:cNvSpPr>
+          <p:nvPr>
+            <p:ph type="ftr" sz="quarter" idx="11"/>
+          </p:nvPr>
+        </p:nvSpPr>
+        <p:spPr/>
+        <p:txBody>
+          <a:bodyPr/>
+          <a:lstStyle/>
+          <a:p>
+            <a:r>
+              <a:rPr lang="tr-TR"/>
+              <a:t>Copyright: Harun Altay</a:t>
+            </a:r>
+          </a:p>
+        </p:txBody>
+      </p:sp>
+      <p:sp>
+        <p:nvSpPr>
+          <p:cNvPr id="6" name="Slayt Numarası Yer Tutucusu 5">
+            <a:extLst>
+              <a:ext uri="{FF2B5EF4-FFF2-40B4-BE49-F238E27FC236}">
+                <a16:creationId xmlns:a16="http://schemas.microsoft.com/office/drawing/2014/main" id="{AA627EC9-B1B1-E705-279A-AA11370EBEAC}"/>
+              </a:ext>
+            </a:extLst>
+          </p:cNvPr>
+          <p:cNvSpPr>
+            <a:spLocks noGrp="1"/>
+          </p:cNvSpPr>
+          <p:nvPr>
+            <p:ph type="sldNum" sz="quarter" idx="12"/>
+          </p:nvPr>
+        </p:nvSpPr>
+        <p:spPr/>
+        <p:txBody>
+          <a:bodyPr/>
+          <a:lstStyle/>
+          <a:p>
+            <a:fld id="{556A583B-49D3-4431-A76E-53060577655C}" type="slidenum">
+              <a:rPr lang="tr-TR" smtClean="0"/>
+              <a:t>53</a:t>
+            </a:fld>
+            <a:endParaRPr lang="tr-TR"/>
+          </a:p>
+        </p:txBody>
+      </p:sp>
+    </p:spTree>
+    <p:extLst>
+      <p:ext uri="{BB962C8B-B14F-4D97-AF65-F5344CB8AC3E}">
+        <p14:creationId xmlns:p14="http://schemas.microsoft.com/office/powerpoint/2010/main" val="2336341326"/>
+      </p:ext>
+    </p:extLst>
+  </p:cSld>
+  <p:clrMapOvr>
+    <a:masterClrMapping/>
+  </p:clrMapOvr>
+</p:sld>
+</file>
+
+<file path=ppt/slides/slide54.xml><?xml version="1.0" encoding="utf-8"?>
+<p:sld xmlns:a="http://schemas.openxmlformats.org/drawingml/2006/main" xmlns:r="http://schemas.openxmlformats.org/officeDocument/2006/relationships" xmlns:p="http://schemas.openxmlformats.org/presentationml/2006/main">
+  <p:cSld>
+    <p:spTree>
+      <p:nvGrpSpPr>
+        <p:cNvPr id="1" name="">
+          <a:extLst>
+            <a:ext uri="{FF2B5EF4-FFF2-40B4-BE49-F238E27FC236}">
+              <a16:creationId xmlns:a16="http://schemas.microsoft.com/office/drawing/2014/main" id="{3059F843-5E61-E26D-0F00-AAF22D047836}"/>
+            </a:ext>
+          </a:extLst>
+        </p:cNvPr>
+        <p:cNvGrpSpPr/>
+        <p:nvPr/>
+      </p:nvGrpSpPr>
+      <p:grpSpPr>
+        <a:xfrm>
+          <a:off x="0" y="0"/>
+          <a:ext cx="0" cy="0"/>
+          <a:chOff x="0" y="0"/>
+          <a:chExt cx="0" cy="0"/>
+        </a:xfrm>
+      </p:grpSpPr>
+      <p:sp>
+        <p:nvSpPr>
+          <p:cNvPr id="2" name="Başlık 1">
+            <a:extLst>
+              <a:ext uri="{FF2B5EF4-FFF2-40B4-BE49-F238E27FC236}">
+                <a16:creationId xmlns:a16="http://schemas.microsoft.com/office/drawing/2014/main" id="{E5B5A526-37A7-5F07-8B4A-BAF80717E1C3}"/>
+              </a:ext>
+            </a:extLst>
+          </p:cNvPr>
+          <p:cNvSpPr>
+            <a:spLocks noGrp="1"/>
+          </p:cNvSpPr>
+          <p:nvPr>
+            <p:ph type="title"/>
+          </p:nvPr>
+        </p:nvSpPr>
+        <p:spPr>
+          <a:xfrm>
+            <a:off x="838200" y="365126"/>
+            <a:ext cx="10515600" cy="726256"/>
+          </a:xfrm>
+        </p:spPr>
+        <p:txBody>
+          <a:bodyPr>
+            <a:normAutofit/>
+          </a:bodyPr>
+          <a:lstStyle/>
+          <a:p>
+            <a:r>
+              <a:rPr lang="tr-TR" sz="3600" dirty="0"/>
+              <a:t>Bu seminerde neler yoktur?</a:t>
+            </a:r>
+          </a:p>
+        </p:txBody>
+      </p:sp>
+      <p:sp>
+        <p:nvSpPr>
+          <p:cNvPr id="3" name="İçerik Yer Tutucusu 2">
+            <a:extLst>
+              <a:ext uri="{FF2B5EF4-FFF2-40B4-BE49-F238E27FC236}">
+                <a16:creationId xmlns:a16="http://schemas.microsoft.com/office/drawing/2014/main" id="{273941DE-B440-F903-502F-E07C0EBD54DF}"/>
+              </a:ext>
+            </a:extLst>
+          </p:cNvPr>
+          <p:cNvSpPr>
+            <a:spLocks noGrp="1"/>
+          </p:cNvSpPr>
+          <p:nvPr>
+            <p:ph idx="1"/>
+          </p:nvPr>
+        </p:nvSpPr>
+        <p:spPr>
+          <a:xfrm>
+            <a:off x="838200" y="1091382"/>
+            <a:ext cx="10515600" cy="5220928"/>
+          </a:xfrm>
+        </p:spPr>
+        <p:txBody>
+          <a:bodyPr>
+            <a:normAutofit fontScale="92500" lnSpcReduction="10000"/>
+          </a:bodyPr>
+          <a:lstStyle/>
+          <a:p>
+            <a:r>
+              <a:rPr lang="tr-TR" dirty="0"/>
+              <a:t>İleri veri yapıları</a:t>
+            </a:r>
+          </a:p>
+          <a:p>
+            <a:pPr lvl="1"/>
+            <a:r>
+              <a:rPr lang="tr-TR" dirty="0"/>
+              <a:t>Set</a:t>
+            </a:r>
+          </a:p>
+          <a:p>
+            <a:pPr lvl="1"/>
+            <a:r>
+              <a:rPr lang="tr-TR" dirty="0" err="1"/>
+              <a:t>Map</a:t>
+            </a:r>
+            <a:endParaRPr lang="tr-TR" dirty="0"/>
+          </a:p>
+          <a:p>
+            <a:pPr lvl="1"/>
+            <a:r>
+              <a:rPr lang="tr-TR" dirty="0" err="1"/>
+              <a:t>Tuple</a:t>
+            </a:r>
+            <a:endParaRPr lang="tr-TR" dirty="0"/>
+          </a:p>
+          <a:p>
+            <a:r>
+              <a:rPr lang="tr-TR" dirty="0"/>
+              <a:t>Dosya okumalar</a:t>
+            </a:r>
+          </a:p>
+          <a:p>
+            <a:r>
+              <a:rPr lang="tr-TR" dirty="0"/>
+              <a:t>Sınıflar (Class)</a:t>
+            </a:r>
+          </a:p>
+          <a:p>
+            <a:r>
+              <a:rPr lang="tr-TR" dirty="0"/>
+              <a:t>Ve daha bir çok şey</a:t>
+            </a:r>
+          </a:p>
+          <a:p>
+            <a:r>
+              <a:rPr lang="tr-TR" dirty="0"/>
+              <a:t>(Gerçi onlar da kolaydır, zor değil)</a:t>
+            </a:r>
+          </a:p>
+          <a:p>
+            <a:endParaRPr lang="tr-TR" dirty="0"/>
+          </a:p>
+          <a:p>
+            <a:r>
+              <a:rPr lang="tr-TR" dirty="0"/>
+              <a:t>Ara Yüz (</a:t>
+            </a:r>
+            <a:r>
+              <a:rPr lang="tr-TR" dirty="0" err="1"/>
+              <a:t>interface</a:t>
+            </a:r>
+            <a:r>
+              <a:rPr lang="tr-TR" dirty="0"/>
+              <a:t>) yazma:</a:t>
+            </a:r>
+          </a:p>
+          <a:p>
+            <a:pPr lvl="1"/>
+            <a:r>
+              <a:rPr lang="tr-TR" dirty="0"/>
+              <a:t>Web’de, </a:t>
+            </a:r>
+          </a:p>
+          <a:p>
+            <a:pPr lvl="1"/>
+            <a:r>
+              <a:rPr lang="tr-TR" dirty="0"/>
+              <a:t>masa üstünde, </a:t>
+            </a:r>
+          </a:p>
+          <a:p>
+            <a:pPr lvl="1"/>
+            <a:r>
+              <a:rPr lang="tr-TR" dirty="0"/>
+              <a:t>cep telefonunda</a:t>
+            </a:r>
+          </a:p>
+        </p:txBody>
+      </p:sp>
+      <p:sp>
+        <p:nvSpPr>
+          <p:cNvPr id="4" name="Veri Yer Tutucusu 3">
+            <a:extLst>
+              <a:ext uri="{FF2B5EF4-FFF2-40B4-BE49-F238E27FC236}">
+                <a16:creationId xmlns:a16="http://schemas.microsoft.com/office/drawing/2014/main" id="{59A88FA0-83E5-BF15-70A4-C3104781CF17}"/>
+              </a:ext>
+            </a:extLst>
+          </p:cNvPr>
+          <p:cNvSpPr>
+            <a:spLocks noGrp="1"/>
+          </p:cNvSpPr>
+          <p:nvPr>
+            <p:ph type="dt" sz="half" idx="10"/>
+          </p:nvPr>
+        </p:nvSpPr>
+        <p:spPr/>
+        <p:txBody>
+          <a:bodyPr/>
+          <a:lstStyle/>
+          <a:p>
+            <a:fld id="{44392EB0-EBAD-438A-B064-5F30060F1D41}" type="datetime1">
+              <a:rPr lang="tr-TR" smtClean="0"/>
+              <a:t>4.10.2026</a:t>
+            </a:fld>
+            <a:endParaRPr lang="tr-TR"/>
+          </a:p>
+        </p:txBody>
+      </p:sp>
+      <p:sp>
+        <p:nvSpPr>
+          <p:cNvPr id="5" name="Alt Bilgi Yer Tutucusu 4">
+            <a:extLst>
+              <a:ext uri="{FF2B5EF4-FFF2-40B4-BE49-F238E27FC236}">
+                <a16:creationId xmlns:a16="http://schemas.microsoft.com/office/drawing/2014/main" id="{F72200F0-A375-78CC-F4FB-5D84F1E912D1}"/>
+              </a:ext>
+            </a:extLst>
+          </p:cNvPr>
+          <p:cNvSpPr>
+            <a:spLocks noGrp="1"/>
+          </p:cNvSpPr>
+          <p:nvPr>
+            <p:ph type="ftr" sz="quarter" idx="11"/>
+          </p:nvPr>
+        </p:nvSpPr>
+        <p:spPr/>
+        <p:txBody>
+          <a:bodyPr/>
+          <a:lstStyle/>
+          <a:p>
+            <a:r>
+              <a:rPr lang="tr-TR"/>
+              <a:t>Copyright: Harun Altay</a:t>
+            </a:r>
+          </a:p>
+        </p:txBody>
+      </p:sp>
+      <p:sp>
+        <p:nvSpPr>
+          <p:cNvPr id="6" name="Slayt Numarası Yer Tutucusu 5">
+            <a:extLst>
+              <a:ext uri="{FF2B5EF4-FFF2-40B4-BE49-F238E27FC236}">
+                <a16:creationId xmlns:a16="http://schemas.microsoft.com/office/drawing/2014/main" id="{8B7A5F5F-2E40-3DED-078C-608BDCF26E86}"/>
+              </a:ext>
+            </a:extLst>
+          </p:cNvPr>
+          <p:cNvSpPr>
+            <a:spLocks noGrp="1"/>
+          </p:cNvSpPr>
+          <p:nvPr>
+            <p:ph type="sldNum" sz="quarter" idx="12"/>
+          </p:nvPr>
+        </p:nvSpPr>
+        <p:spPr/>
+        <p:txBody>
+          <a:bodyPr/>
+          <a:lstStyle/>
+          <a:p>
+            <a:fld id="{556A583B-49D3-4431-A76E-53060577655C}" type="slidenum">
+              <a:rPr lang="tr-TR" smtClean="0"/>
+              <a:t>54</a:t>
+            </a:fld>
+            <a:endParaRPr lang="tr-TR"/>
+          </a:p>
+        </p:txBody>
+      </p:sp>
+    </p:spTree>
+    <p:extLst>
+      <p:ext uri="{BB962C8B-B14F-4D97-AF65-F5344CB8AC3E}">
+        <p14:creationId xmlns:p14="http://schemas.microsoft.com/office/powerpoint/2010/main" val="3543395672"/>
+      </p:ext>
+    </p:extLst>
+  </p:cSld>
+  <p:clrMapOvr>
+    <a:masterClrMapping/>
+  </p:clrMapOvr>
+</p:sld>
+</file>
+
+<file path=ppt/slides/slide55.xml><?xml version="1.0" encoding="utf-8"?>
+<p:sld xmlns:a="http://schemas.openxmlformats.org/drawingml/2006/main" xmlns:r="http://schemas.openxmlformats.org/officeDocument/2006/relationships" xmlns:p="http://schemas.openxmlformats.org/presentationml/2006/main">
+  <p:cSld>
+    <p:spTree>
+      <p:nvGrpSpPr>
+        <p:cNvPr id="1" name="">
+          <a:extLst>
+            <a:ext uri="{FF2B5EF4-FFF2-40B4-BE49-F238E27FC236}">
+              <a16:creationId xmlns:a16="http://schemas.microsoft.com/office/drawing/2014/main" id="{FA4187F3-1E97-E8B7-D0F5-726C98774AF0}"/>
+            </a:ext>
+          </a:extLst>
+        </p:cNvPr>
+        <p:cNvGrpSpPr/>
+        <p:nvPr/>
+      </p:nvGrpSpPr>
+      <p:grpSpPr>
+        <a:xfrm>
+          <a:off x="0" y="0"/>
+          <a:ext cx="0" cy="0"/>
+          <a:chOff x="0" y="0"/>
+          <a:chExt cx="0" cy="0"/>
+        </a:xfrm>
+      </p:grpSpPr>
+      <p:sp>
+        <p:nvSpPr>
+          <p:cNvPr id="2" name="Başlık 1">
+            <a:extLst>
+              <a:ext uri="{FF2B5EF4-FFF2-40B4-BE49-F238E27FC236}">
+                <a16:creationId xmlns:a16="http://schemas.microsoft.com/office/drawing/2014/main" id="{E0F77567-A569-7A61-D5E1-7F0603E81B4C}"/>
+              </a:ext>
+            </a:extLst>
+          </p:cNvPr>
+          <p:cNvSpPr>
+            <a:spLocks noGrp="1"/>
+          </p:cNvSpPr>
+          <p:nvPr>
+            <p:ph type="title"/>
+          </p:nvPr>
+        </p:nvSpPr>
+        <p:spPr>
+          <a:xfrm>
+            <a:off x="838200" y="365126"/>
+            <a:ext cx="10515600" cy="726256"/>
+          </a:xfrm>
+        </p:spPr>
+        <p:txBody>
+          <a:bodyPr>
+            <a:normAutofit/>
+          </a:bodyPr>
+          <a:lstStyle/>
+          <a:p>
+            <a:r>
+              <a:rPr lang="tr-TR" sz="3600" dirty="0"/>
+              <a:t>Bundan sonraki adım</a:t>
+            </a:r>
+          </a:p>
+        </p:txBody>
+      </p:sp>
+      <p:sp>
+        <p:nvSpPr>
+          <p:cNvPr id="3" name="İçerik Yer Tutucusu 2">
+            <a:extLst>
+              <a:ext uri="{FF2B5EF4-FFF2-40B4-BE49-F238E27FC236}">
+                <a16:creationId xmlns:a16="http://schemas.microsoft.com/office/drawing/2014/main" id="{9D8B09B8-DDF8-8563-058A-E9F7EBD70206}"/>
+              </a:ext>
+            </a:extLst>
+          </p:cNvPr>
+          <p:cNvSpPr>
+            <a:spLocks noGrp="1"/>
+          </p:cNvSpPr>
+          <p:nvPr>
+            <p:ph idx="1"/>
+          </p:nvPr>
+        </p:nvSpPr>
+        <p:spPr>
+          <a:xfrm>
+            <a:off x="838200" y="1303020"/>
+            <a:ext cx="10515600" cy="5009290"/>
+          </a:xfrm>
+        </p:spPr>
+        <p:txBody>
+          <a:bodyPr>
+            <a:normAutofit/>
+          </a:bodyPr>
+          <a:lstStyle/>
+          <a:p>
+            <a:r>
+              <a:rPr lang="tr-TR" dirty="0"/>
+              <a:t>Eğer bu seminer beğenilirse, faydalı görülürse, o zaman devamı da hazırlanabilir. Talebe bağlı.</a:t>
+            </a:r>
+          </a:p>
+          <a:p>
+            <a:endParaRPr lang="tr-TR" dirty="0"/>
+          </a:p>
+        </p:txBody>
+      </p:sp>
+      <p:sp>
+        <p:nvSpPr>
+          <p:cNvPr id="4" name="Veri Yer Tutucusu 3">
+            <a:extLst>
+              <a:ext uri="{FF2B5EF4-FFF2-40B4-BE49-F238E27FC236}">
+                <a16:creationId xmlns:a16="http://schemas.microsoft.com/office/drawing/2014/main" id="{3FA8F0DE-0EC7-90B8-9AC6-FB66D93CBBA8}"/>
+              </a:ext>
+            </a:extLst>
+          </p:cNvPr>
+          <p:cNvSpPr>
+            <a:spLocks noGrp="1"/>
+          </p:cNvSpPr>
+          <p:nvPr>
+            <p:ph type="dt" sz="half" idx="10"/>
+          </p:nvPr>
+        </p:nvSpPr>
+        <p:spPr/>
+        <p:txBody>
+          <a:bodyPr/>
+          <a:lstStyle/>
+          <a:p>
+            <a:fld id="{37D13B1C-06ED-4B08-8DAE-68BE84972603}" type="datetime1">
+              <a:rPr lang="tr-TR" smtClean="0"/>
+              <a:t>4.10.2026</a:t>
+            </a:fld>
+            <a:endParaRPr lang="tr-TR"/>
+          </a:p>
+        </p:txBody>
+      </p:sp>
+      <p:sp>
+        <p:nvSpPr>
+          <p:cNvPr id="5" name="Alt Bilgi Yer Tutucusu 4">
+            <a:extLst>
+              <a:ext uri="{FF2B5EF4-FFF2-40B4-BE49-F238E27FC236}">
+                <a16:creationId xmlns:a16="http://schemas.microsoft.com/office/drawing/2014/main" id="{4624F7CA-7DE4-AEC2-37EB-37C5035DB5A6}"/>
+              </a:ext>
+            </a:extLst>
+          </p:cNvPr>
+          <p:cNvSpPr>
+            <a:spLocks noGrp="1"/>
+          </p:cNvSpPr>
+          <p:nvPr>
+            <p:ph type="ftr" sz="quarter" idx="11"/>
+          </p:nvPr>
+        </p:nvSpPr>
+        <p:spPr/>
+        <p:txBody>
+          <a:bodyPr/>
+          <a:lstStyle/>
+          <a:p>
+            <a:r>
+              <a:rPr lang="tr-TR"/>
+              <a:t>Copyright: Harun Altay</a:t>
+            </a:r>
+          </a:p>
+        </p:txBody>
+      </p:sp>
+      <p:sp>
+        <p:nvSpPr>
+          <p:cNvPr id="6" name="Slayt Numarası Yer Tutucusu 5">
+            <a:extLst>
+              <a:ext uri="{FF2B5EF4-FFF2-40B4-BE49-F238E27FC236}">
+                <a16:creationId xmlns:a16="http://schemas.microsoft.com/office/drawing/2014/main" id="{E85AE4FA-0090-45E8-A0D8-EB5028EBA76E}"/>
+              </a:ext>
+            </a:extLst>
+          </p:cNvPr>
+          <p:cNvSpPr>
+            <a:spLocks noGrp="1"/>
+          </p:cNvSpPr>
+          <p:nvPr>
+            <p:ph type="sldNum" sz="quarter" idx="12"/>
+          </p:nvPr>
+        </p:nvSpPr>
+        <p:spPr/>
+        <p:txBody>
+          <a:bodyPr/>
+          <a:lstStyle/>
+          <a:p>
+            <a:fld id="{556A583B-49D3-4431-A76E-53060577655C}" type="slidenum">
+              <a:rPr lang="tr-TR" smtClean="0"/>
+              <a:t>55</a:t>
+            </a:fld>
+            <a:endParaRPr lang="tr-TR"/>
+          </a:p>
+        </p:txBody>
+      </p:sp>
+    </p:spTree>
+    <p:extLst>
+      <p:ext uri="{BB962C8B-B14F-4D97-AF65-F5344CB8AC3E}">
+        <p14:creationId xmlns:p14="http://schemas.microsoft.com/office/powerpoint/2010/main" val="588949760"/>
+      </p:ext>
+    </p:extLst>
+  </p:cSld>
+  <p:clrMapOvr>
+    <a:masterClrMapping/>
+  </p:clrMapOvr>
+</p:sld>
+</file>
+
+<file path=ppt/slides/slide56.xml><?xml version="1.0" encoding="utf-8"?>
+<p:sld xmlns:a="http://schemas.openxmlformats.org/drawingml/2006/main" xmlns:r="http://schemas.openxmlformats.org/officeDocument/2006/relationships" xmlns:p="http://schemas.openxmlformats.org/presentationml/2006/main">
+  <p:cSld>
+    <p:spTree>
+      <p:nvGrpSpPr>
+        <p:cNvPr id="1" name="">
+          <a:extLst>
+            <a:ext uri="{FF2B5EF4-FFF2-40B4-BE49-F238E27FC236}">
+              <a16:creationId xmlns:a16="http://schemas.microsoft.com/office/drawing/2014/main" id="{C09E59DB-CE48-E2B8-E091-54AF135A95F9}"/>
+            </a:ext>
+          </a:extLst>
+        </p:cNvPr>
+        <p:cNvGrpSpPr/>
+        <p:nvPr/>
+      </p:nvGrpSpPr>
+      <p:grpSpPr>
+        <a:xfrm>
+          <a:off x="0" y="0"/>
+          <a:ext cx="0" cy="0"/>
+          <a:chOff x="0" y="0"/>
+          <a:chExt cx="0" cy="0"/>
+        </a:xfrm>
+      </p:grpSpPr>
+      <p:sp>
+        <p:nvSpPr>
+          <p:cNvPr id="3" name="İçerik Yer Tutucusu 2">
+            <a:extLst>
+              <a:ext uri="{FF2B5EF4-FFF2-40B4-BE49-F238E27FC236}">
+                <a16:creationId xmlns:a16="http://schemas.microsoft.com/office/drawing/2014/main" id="{455E2F0B-990D-0648-DBCD-66353CCDFBAE}"/>
+              </a:ext>
+            </a:extLst>
+          </p:cNvPr>
+          <p:cNvSpPr>
+            <a:spLocks noGrp="1"/>
+          </p:cNvSpPr>
+          <p:nvPr>
+            <p:ph idx="1"/>
+          </p:nvPr>
+        </p:nvSpPr>
+        <p:spPr>
+          <a:xfrm>
+            <a:off x="730045" y="2408902"/>
+            <a:ext cx="10515600" cy="1455175"/>
+          </a:xfrm>
+        </p:spPr>
+        <p:txBody>
+          <a:bodyPr>
+            <a:normAutofit/>
+          </a:bodyPr>
+          <a:lstStyle/>
+          <a:p>
+            <a:pPr algn="ctr"/>
+            <a:r>
+              <a:rPr lang="tr-TR" sz="4800" dirty="0"/>
+              <a:t>Sabırla izlediğiniz için teşekkür ederiz!</a:t>
+            </a:r>
+          </a:p>
+          <a:p>
+            <a:pPr algn="ctr"/>
+            <a:endParaRPr lang="tr-TR" sz="4800" dirty="0"/>
+          </a:p>
+        </p:txBody>
+      </p:sp>
+      <p:sp>
+        <p:nvSpPr>
+          <p:cNvPr id="2" name="Veri Yer Tutucusu 1">
+            <a:extLst>
+              <a:ext uri="{FF2B5EF4-FFF2-40B4-BE49-F238E27FC236}">
+                <a16:creationId xmlns:a16="http://schemas.microsoft.com/office/drawing/2014/main" id="{A6E549C8-520A-BFFF-F177-BEE5CBFBFE91}"/>
+              </a:ext>
+            </a:extLst>
+          </p:cNvPr>
+          <p:cNvSpPr>
+            <a:spLocks noGrp="1"/>
+          </p:cNvSpPr>
+          <p:nvPr>
+            <p:ph type="dt" sz="half" idx="10"/>
+          </p:nvPr>
+        </p:nvSpPr>
+        <p:spPr/>
+        <p:txBody>
+          <a:bodyPr/>
+          <a:lstStyle/>
+          <a:p>
+            <a:fld id="{C143AAC5-8CDF-4095-BD1F-1322883AC1B0}" type="datetime1">
+              <a:rPr lang="tr-TR" smtClean="0"/>
+              <a:t>4.10.2026</a:t>
+            </a:fld>
+            <a:endParaRPr lang="tr-TR"/>
+          </a:p>
+        </p:txBody>
+      </p:sp>
+      <p:sp>
+        <p:nvSpPr>
+          <p:cNvPr id="4" name="Alt Bilgi Yer Tutucusu 3">
+            <a:extLst>
+              <a:ext uri="{FF2B5EF4-FFF2-40B4-BE49-F238E27FC236}">
+                <a16:creationId xmlns:a16="http://schemas.microsoft.com/office/drawing/2014/main" id="{564434AA-A919-0D9B-6D5D-D31D224A71D2}"/>
+              </a:ext>
+            </a:extLst>
+          </p:cNvPr>
+          <p:cNvSpPr>
+            <a:spLocks noGrp="1"/>
+          </p:cNvSpPr>
+          <p:nvPr>
+            <p:ph type="ftr" sz="quarter" idx="11"/>
+          </p:nvPr>
+        </p:nvSpPr>
+        <p:spPr/>
+        <p:txBody>
+          <a:bodyPr/>
+          <a:lstStyle/>
+          <a:p>
+            <a:r>
+              <a:rPr lang="tr-TR"/>
+              <a:t>Copyright: Harun Altay</a:t>
+            </a:r>
+          </a:p>
+        </p:txBody>
+      </p:sp>
+      <p:sp>
+        <p:nvSpPr>
+          <p:cNvPr id="5" name="Slayt Numarası Yer Tutucusu 4">
+            <a:extLst>
+              <a:ext uri="{FF2B5EF4-FFF2-40B4-BE49-F238E27FC236}">
+                <a16:creationId xmlns:a16="http://schemas.microsoft.com/office/drawing/2014/main" id="{F5C13B5C-6512-5FF2-90EF-8AE7B8B9FDAB}"/>
+              </a:ext>
+            </a:extLst>
+          </p:cNvPr>
+          <p:cNvSpPr>
+            <a:spLocks noGrp="1"/>
+          </p:cNvSpPr>
+          <p:nvPr>
+            <p:ph type="sldNum" sz="quarter" idx="12"/>
+          </p:nvPr>
+        </p:nvSpPr>
+        <p:spPr/>
+        <p:txBody>
+          <a:bodyPr/>
+          <a:lstStyle/>
+          <a:p>
+            <a:fld id="{556A583B-49D3-4431-A76E-53060577655C}" type="slidenum">
+              <a:rPr lang="tr-TR" smtClean="0"/>
+              <a:t>56</a:t>
+            </a:fld>
+            <a:endParaRPr lang="tr-TR"/>
+          </a:p>
+        </p:txBody>
+      </p:sp>
+    </p:spTree>
+    <p:extLst>
+      <p:ext uri="{BB962C8B-B14F-4D97-AF65-F5344CB8AC3E}">
+        <p14:creationId xmlns:p14="http://schemas.microsoft.com/office/powerpoint/2010/main" val="2531446554"/>
       </p:ext>
     </p:extLst>
   </p:cSld>
@@ -30409,7 +32230,7 @@
           <a:p>
             <a:fld id="{DD0C0D17-D0F7-4921-92A7-F82ABD37D906}" type="datetime1">
               <a:rPr lang="tr-TR" smtClean="0"/>
-              <a:t>3.10.2026</a:t>
+              <a:t>4.10.2026</a:t>
             </a:fld>
             <a:endParaRPr lang="tr-TR"/>
           </a:p>
@@ -30602,7 +32423,7 @@
           <a:p>
             <a:fld id="{E39A9F3D-0371-49E3-99E7-76A4D5BBDDE8}" type="datetime1">
               <a:rPr lang="tr-TR" smtClean="0"/>
-              <a:t>3.10.2026</a:t>
+              <a:t>4.10.2026</a:t>
             </a:fld>
             <a:endParaRPr lang="tr-TR"/>
           </a:p>
@@ -30859,7 +32680,7 @@
           <a:p>
             <a:fld id="{E9290591-5B3F-4E6A-A4B5-910A3B0B03FF}" type="datetime1">
               <a:rPr lang="tr-TR" smtClean="0"/>
-              <a:t>3.10.2026</a:t>
+              <a:t>4.10.2026</a:t>
             </a:fld>
             <a:endParaRPr lang="tr-TR"/>
           </a:p>
@@ -31052,7 +32873,7 @@
           <a:p>
             <a:fld id="{C1AECFD1-912F-440E-B5D2-E8507637DDA3}" type="datetime1">
               <a:rPr lang="tr-TR" smtClean="0"/>
-              <a:t>3.10.2026</a:t>
+              <a:t>4.10.2026</a:t>
             </a:fld>
             <a:endParaRPr lang="tr-TR"/>
           </a:p>

--- a/prog-diller/yazilim-sunum/Yazilim-Programlama-Dilleri-Giris.pptx
+++ b/prog-diller/yazilim-sunum/Yazilim-Programlama-Dilleri-Giris.pptx
@@ -5,7 +5,7 @@
     <p:sldMasterId id="2147483648" r:id="rId1"/>
   </p:sldMasterIdLst>
   <p:notesMasterIdLst>
-    <p:notesMasterId r:id="rId58"/>
+    <p:notesMasterId r:id="rId61"/>
   </p:notesMasterIdLst>
   <p:sldIdLst>
     <p:sldId id="256" r:id="rId2"/>
@@ -24,46 +24,49 @@
     <p:sldId id="262" r:id="rId15"/>
     <p:sldId id="263" r:id="rId16"/>
     <p:sldId id="264" r:id="rId17"/>
-    <p:sldId id="288" r:id="rId18"/>
-    <p:sldId id="287" r:id="rId19"/>
-    <p:sldId id="286" r:id="rId20"/>
-    <p:sldId id="289" r:id="rId21"/>
-    <p:sldId id="285" r:id="rId22"/>
-    <p:sldId id="265" r:id="rId23"/>
-    <p:sldId id="306" r:id="rId24"/>
-    <p:sldId id="307" r:id="rId25"/>
-    <p:sldId id="304" r:id="rId26"/>
-    <p:sldId id="266" r:id="rId27"/>
-    <p:sldId id="293" r:id="rId28"/>
-    <p:sldId id="294" r:id="rId29"/>
-    <p:sldId id="300" r:id="rId30"/>
-    <p:sldId id="267" r:id="rId31"/>
-    <p:sldId id="268" r:id="rId32"/>
-    <p:sldId id="269" r:id="rId33"/>
-    <p:sldId id="290" r:id="rId34"/>
-    <p:sldId id="291" r:id="rId35"/>
-    <p:sldId id="292" r:id="rId36"/>
-    <p:sldId id="302" r:id="rId37"/>
-    <p:sldId id="271" r:id="rId38"/>
-    <p:sldId id="317" r:id="rId39"/>
-    <p:sldId id="295" r:id="rId40"/>
-    <p:sldId id="296" r:id="rId41"/>
-    <p:sldId id="297" r:id="rId42"/>
-    <p:sldId id="298" r:id="rId43"/>
-    <p:sldId id="316" r:id="rId44"/>
-    <p:sldId id="320" r:id="rId45"/>
-    <p:sldId id="321" r:id="rId46"/>
-    <p:sldId id="323" r:id="rId47"/>
-    <p:sldId id="324" r:id="rId48"/>
-    <p:sldId id="325" r:id="rId49"/>
-    <p:sldId id="326" r:id="rId50"/>
-    <p:sldId id="329" r:id="rId51"/>
-    <p:sldId id="322" r:id="rId52"/>
-    <p:sldId id="328" r:id="rId53"/>
-    <p:sldId id="327" r:id="rId54"/>
-    <p:sldId id="272" r:id="rId55"/>
-    <p:sldId id="301" r:id="rId56"/>
-    <p:sldId id="318" r:id="rId57"/>
+    <p:sldId id="331" r:id="rId18"/>
+    <p:sldId id="330" r:id="rId19"/>
+    <p:sldId id="332" r:id="rId20"/>
+    <p:sldId id="288" r:id="rId21"/>
+    <p:sldId id="287" r:id="rId22"/>
+    <p:sldId id="286" r:id="rId23"/>
+    <p:sldId id="289" r:id="rId24"/>
+    <p:sldId id="285" r:id="rId25"/>
+    <p:sldId id="265" r:id="rId26"/>
+    <p:sldId id="306" r:id="rId27"/>
+    <p:sldId id="307" r:id="rId28"/>
+    <p:sldId id="304" r:id="rId29"/>
+    <p:sldId id="266" r:id="rId30"/>
+    <p:sldId id="293" r:id="rId31"/>
+    <p:sldId id="294" r:id="rId32"/>
+    <p:sldId id="300" r:id="rId33"/>
+    <p:sldId id="267" r:id="rId34"/>
+    <p:sldId id="268" r:id="rId35"/>
+    <p:sldId id="269" r:id="rId36"/>
+    <p:sldId id="290" r:id="rId37"/>
+    <p:sldId id="291" r:id="rId38"/>
+    <p:sldId id="292" r:id="rId39"/>
+    <p:sldId id="302" r:id="rId40"/>
+    <p:sldId id="271" r:id="rId41"/>
+    <p:sldId id="317" r:id="rId42"/>
+    <p:sldId id="295" r:id="rId43"/>
+    <p:sldId id="296" r:id="rId44"/>
+    <p:sldId id="297" r:id="rId45"/>
+    <p:sldId id="298" r:id="rId46"/>
+    <p:sldId id="316" r:id="rId47"/>
+    <p:sldId id="320" r:id="rId48"/>
+    <p:sldId id="321" r:id="rId49"/>
+    <p:sldId id="323" r:id="rId50"/>
+    <p:sldId id="324" r:id="rId51"/>
+    <p:sldId id="325" r:id="rId52"/>
+    <p:sldId id="326" r:id="rId53"/>
+    <p:sldId id="329" r:id="rId54"/>
+    <p:sldId id="322" r:id="rId55"/>
+    <p:sldId id="328" r:id="rId56"/>
+    <p:sldId id="327" r:id="rId57"/>
+    <p:sldId id="272" r:id="rId58"/>
+    <p:sldId id="301" r:id="rId59"/>
+    <p:sldId id="318" r:id="rId60"/>
   </p:sldIdLst>
   <p:sldSz cx="12192000" cy="6858000"/>
   <p:notesSz cx="6858000" cy="9144000"/>
@@ -1767,7 +1770,7 @@
           <a:p>
             <a:fld id="{C1588F4E-3675-40DB-9220-26466038BC35}" type="datetimeFigureOut">
               <a:rPr lang="tr-TR" smtClean="0"/>
-              <a:t>4.10.2026</a:t>
+              <a:t>11.10.2026</a:t>
             </a:fld>
             <a:endParaRPr lang="tr-TR"/>
           </a:p>
@@ -2265,7 +2268,7 @@
           <a:p>
             <a:fld id="{B341F49D-51DC-4353-AA5E-05FE8786A758}" type="datetime1">
               <a:rPr lang="tr-TR" smtClean="0"/>
-              <a:t>4.10.2026</a:t>
+              <a:t>11.10.2026</a:t>
             </a:fld>
             <a:endParaRPr lang="tr-TR"/>
           </a:p>
@@ -2466,7 +2469,7 @@
           <a:p>
             <a:fld id="{E62381A7-30B7-42F3-9FAA-B0CA7D840D09}" type="datetime1">
               <a:rPr lang="tr-TR" smtClean="0"/>
-              <a:t>4.10.2026</a:t>
+              <a:t>11.10.2026</a:t>
             </a:fld>
             <a:endParaRPr lang="tr-TR"/>
           </a:p>
@@ -2677,7 +2680,7 @@
           <a:p>
             <a:fld id="{59DB5FF5-A25E-4962-9109-204BA4BAC34F}" type="datetime1">
               <a:rPr lang="tr-TR" smtClean="0"/>
-              <a:t>4.10.2026</a:t>
+              <a:t>11.10.2026</a:t>
             </a:fld>
             <a:endParaRPr lang="tr-TR"/>
           </a:p>
@@ -2878,7 +2881,7 @@
           <a:p>
             <a:fld id="{E5A72F27-F128-4B68-926B-C496DC38618F}" type="datetime1">
               <a:rPr lang="tr-TR" smtClean="0"/>
-              <a:t>4.10.2026</a:t>
+              <a:t>11.10.2026</a:t>
             </a:fld>
             <a:endParaRPr lang="tr-TR"/>
           </a:p>
@@ -3156,7 +3159,7 @@
           <a:p>
             <a:fld id="{296B5E9F-399B-4CBC-87EE-198C34067A1D}" type="datetime1">
               <a:rPr lang="tr-TR" smtClean="0"/>
-              <a:t>4.10.2026</a:t>
+              <a:t>11.10.2026</a:t>
             </a:fld>
             <a:endParaRPr lang="tr-TR"/>
           </a:p>
@@ -3424,7 +3427,7 @@
           <a:p>
             <a:fld id="{9AEEAF4F-0C2D-439E-BD32-BCCB7DCDA994}" type="datetime1">
               <a:rPr lang="tr-TR" smtClean="0"/>
-              <a:t>4.10.2026</a:t>
+              <a:t>11.10.2026</a:t>
             </a:fld>
             <a:endParaRPr lang="tr-TR"/>
           </a:p>
@@ -3839,7 +3842,7 @@
           <a:p>
             <a:fld id="{0A76AC57-E932-4B31-8A8B-90137E7295CB}" type="datetime1">
               <a:rPr lang="tr-TR" smtClean="0"/>
-              <a:t>4.10.2026</a:t>
+              <a:t>11.10.2026</a:t>
             </a:fld>
             <a:endParaRPr lang="tr-TR"/>
           </a:p>
@@ -3983,7 +3986,7 @@
           <a:p>
             <a:fld id="{53BFBF74-6E94-4323-A735-12508C54A430}" type="datetime1">
               <a:rPr lang="tr-TR" smtClean="0"/>
-              <a:t>4.10.2026</a:t>
+              <a:t>11.10.2026</a:t>
             </a:fld>
             <a:endParaRPr lang="tr-TR"/>
           </a:p>
@@ -4099,7 +4102,7 @@
           <a:p>
             <a:fld id="{8872924C-4DA0-4B68-B1C3-68ED2F1D36BB}" type="datetime1">
               <a:rPr lang="tr-TR" smtClean="0"/>
-              <a:t>4.10.2026</a:t>
+              <a:t>11.10.2026</a:t>
             </a:fld>
             <a:endParaRPr lang="tr-TR"/>
           </a:p>
@@ -4413,7 +4416,7 @@
           <a:p>
             <a:fld id="{A4145484-6478-4CA1-986F-3503D418C519}" type="datetime1">
               <a:rPr lang="tr-TR" smtClean="0"/>
-              <a:t>4.10.2026</a:t>
+              <a:t>11.10.2026</a:t>
             </a:fld>
             <a:endParaRPr lang="tr-TR"/>
           </a:p>
@@ -4704,7 +4707,7 @@
           <a:p>
             <a:fld id="{8EECA174-3F35-4EC9-8602-0BE460802ABF}" type="datetime1">
               <a:rPr lang="tr-TR" smtClean="0"/>
-              <a:t>4.10.2026</a:t>
+              <a:t>11.10.2026</a:t>
             </a:fld>
             <a:endParaRPr lang="tr-TR"/>
           </a:p>
@@ -4948,7 +4951,7 @@
           <a:p>
             <a:fld id="{A8191261-EC42-4438-8A8B-1E35F059B980}" type="datetime1">
               <a:rPr lang="tr-TR" smtClean="0"/>
-              <a:t>4.10.2026</a:t>
+              <a:t>11.10.2026</a:t>
             </a:fld>
             <a:endParaRPr lang="tr-TR"/>
           </a:p>
@@ -5531,13 +5534,8 @@
             <a:pPr algn="l"/>
             <a:r>
               <a:rPr lang="tr-TR" dirty="0"/>
-              <a:t>2026 10 </a:t>
-            </a:r>
-            <a:r>
-              <a:rPr lang="tr-TR"/>
-              <a:t>03 Cumartesi</a:t>
-            </a:r>
-            <a:endParaRPr lang="tr-TR" dirty="0"/>
+              <a:t>2026 10 11 Pazar</a:t>
+            </a:r>
           </a:p>
         </p:txBody>
       </p:sp>
@@ -5783,7 +5781,7 @@
           <a:p>
             <a:fld id="{D91DE6A9-2411-46E2-B574-284264D3EA73}" type="datetime1">
               <a:rPr lang="tr-TR" smtClean="0"/>
-              <a:t>4.10.2026</a:t>
+              <a:t>11.10.2026</a:t>
             </a:fld>
             <a:endParaRPr lang="tr-TR"/>
           </a:p>
@@ -5976,7 +5974,7 @@
           <a:p>
             <a:fld id="{C0AA646A-5437-49DA-951A-D7D791F9EE00}" type="datetime1">
               <a:rPr lang="tr-TR" smtClean="0"/>
-              <a:t>4.10.2026</a:t>
+              <a:t>11.10.2026</a:t>
             </a:fld>
             <a:endParaRPr lang="tr-TR"/>
           </a:p>
@@ -6169,7 +6167,7 @@
           <a:p>
             <a:fld id="{3DCC6A6F-D769-4D7D-90A6-54BF9D528B41}" type="datetime1">
               <a:rPr lang="tr-TR" smtClean="0"/>
-              <a:t>4.10.2026</a:t>
+              <a:t>11.10.2026</a:t>
             </a:fld>
             <a:endParaRPr lang="tr-TR"/>
           </a:p>
@@ -6473,7 +6471,7 @@
           <a:p>
             <a:fld id="{620F5416-4C6E-4457-8D8E-988B56C31E5E}" type="datetime1">
               <a:rPr lang="tr-TR" smtClean="0"/>
-              <a:t>4.10.2026</a:t>
+              <a:t>11.10.2026</a:t>
             </a:fld>
             <a:endParaRPr lang="tr-TR"/>
           </a:p>
@@ -6862,7 +6860,7 @@
           <a:p>
             <a:fld id="{23005A21-DB29-43B5-9F7A-E7F4EEE107FC}" type="datetime1">
               <a:rPr lang="tr-TR" smtClean="0"/>
-              <a:t>4.10.2026</a:t>
+              <a:t>11.10.2026</a:t>
             </a:fld>
             <a:endParaRPr lang="tr-TR"/>
           </a:p>
@@ -7141,7 +7139,7 @@
           <a:p>
             <a:fld id="{CF224AFF-D660-4DD8-B4F6-674FF8433224}" type="datetime1">
               <a:rPr lang="tr-TR" smtClean="0"/>
-              <a:t>4.10.2026</a:t>
+              <a:t>11.10.2026</a:t>
             </a:fld>
             <a:endParaRPr lang="tr-TR"/>
           </a:p>
@@ -7443,6 +7441,32 @@
           </a:p>
           <a:p>
             <a:pPr lvl="1"/>
+            <a:r>
+              <a:rPr lang="tr-TR" dirty="0">
+                <a:hlinkClick r:id="rId2"/>
+              </a:rPr>
+              <a:t>https://pypl.github.io/PYPL.html</a:t>
+            </a:r>
+            <a:r>
+              <a:rPr lang="tr-TR" dirty="0"/>
+              <a:t> </a:t>
+            </a:r>
+          </a:p>
+          <a:p>
+            <a:pPr lvl="1"/>
+            <a:r>
+              <a:rPr lang="tr-TR" dirty="0">
+                <a:hlinkClick r:id="rId3"/>
+              </a:rPr>
+              <a:t>https://trends.google.com</a:t>
+            </a:r>
+            <a:r>
+              <a:rPr lang="tr-TR" dirty="0"/>
+              <a:t> </a:t>
+            </a:r>
+          </a:p>
+          <a:p>
+            <a:pPr lvl="1"/>
             <a:endParaRPr lang="tr-TR" dirty="0"/>
           </a:p>
           <a:p>
@@ -7490,7 +7514,7 @@
           <a:p>
             <a:fld id="{B6BBD6E4-FB31-4A52-9DFC-A484A65B3457}" type="datetime1">
               <a:rPr lang="tr-TR" smtClean="0"/>
-              <a:t>4.10.2026</a:t>
+              <a:t>11.10.2026</a:t>
             </a:fld>
             <a:endParaRPr lang="tr-TR"/>
           </a:p>
@@ -7567,6 +7591,840 @@
 </file>
 
 <file path=ppt/slides/slide17.xml><?xml version="1.0" encoding="utf-8"?>
+<p:sld xmlns:a="http://schemas.openxmlformats.org/drawingml/2006/main" xmlns:r="http://schemas.openxmlformats.org/officeDocument/2006/relationships" xmlns:p="http://schemas.openxmlformats.org/presentationml/2006/main">
+  <p:cSld>
+    <p:spTree>
+      <p:nvGrpSpPr>
+        <p:cNvPr id="1" name="">
+          <a:extLst>
+            <a:ext uri="{FF2B5EF4-FFF2-40B4-BE49-F238E27FC236}">
+              <a16:creationId xmlns:a16="http://schemas.microsoft.com/office/drawing/2014/main" id="{E9CCBB34-A3EE-AB6D-8B92-5AD0615326BB}"/>
+            </a:ext>
+          </a:extLst>
+        </p:cNvPr>
+        <p:cNvGrpSpPr/>
+        <p:nvPr/>
+      </p:nvGrpSpPr>
+      <p:grpSpPr>
+        <a:xfrm>
+          <a:off x="0" y="0"/>
+          <a:ext cx="0" cy="0"/>
+          <a:chOff x="0" y="0"/>
+          <a:chExt cx="0" cy="0"/>
+        </a:xfrm>
+      </p:grpSpPr>
+      <p:sp>
+        <p:nvSpPr>
+          <p:cNvPr id="2" name="Başlık 1">
+            <a:extLst>
+              <a:ext uri="{FF2B5EF4-FFF2-40B4-BE49-F238E27FC236}">
+                <a16:creationId xmlns:a16="http://schemas.microsoft.com/office/drawing/2014/main" id="{3C08FE07-7D7C-E4FA-2CF2-4BD007F9AEA6}"/>
+              </a:ext>
+            </a:extLst>
+          </p:cNvPr>
+          <p:cNvSpPr>
+            <a:spLocks noGrp="1"/>
+          </p:cNvSpPr>
+          <p:nvPr>
+            <p:ph type="title"/>
+          </p:nvPr>
+        </p:nvSpPr>
+        <p:spPr>
+          <a:xfrm>
+            <a:off x="7965736" y="383246"/>
+            <a:ext cx="4032927" cy="1634019"/>
+          </a:xfrm>
+        </p:spPr>
+        <p:txBody>
+          <a:bodyPr/>
+          <a:lstStyle/>
+          <a:p>
+            <a:pPr marL="457200" lvl="1"/>
+            <a:r>
+              <a:rPr lang="tr-TR" dirty="0">
+                <a:hlinkClick r:id="rId2"/>
+              </a:rPr>
+              <a:t>https://pypl.github.io/PYPL.html</a:t>
+            </a:r>
+            <a:r>
+              <a:rPr lang="tr-TR" dirty="0"/>
+              <a:t> </a:t>
+            </a:r>
+            <a:br>
+              <a:rPr lang="tr-TR" dirty="0"/>
+            </a:br>
+            <a:endParaRPr lang="tr-TR" dirty="0"/>
+          </a:p>
+        </p:txBody>
+      </p:sp>
+      <p:sp>
+        <p:nvSpPr>
+          <p:cNvPr id="4" name="Veri Yer Tutucusu 3">
+            <a:extLst>
+              <a:ext uri="{FF2B5EF4-FFF2-40B4-BE49-F238E27FC236}">
+                <a16:creationId xmlns:a16="http://schemas.microsoft.com/office/drawing/2014/main" id="{6C1A6A93-3D6E-FD19-CADB-646AEDDBC0F0}"/>
+              </a:ext>
+            </a:extLst>
+          </p:cNvPr>
+          <p:cNvSpPr>
+            <a:spLocks noGrp="1"/>
+          </p:cNvSpPr>
+          <p:nvPr>
+            <p:ph type="dt" sz="half" idx="10"/>
+          </p:nvPr>
+        </p:nvSpPr>
+        <p:spPr/>
+        <p:txBody>
+          <a:bodyPr/>
+          <a:lstStyle/>
+          <a:p>
+            <a:fld id="{E5A72F27-F128-4B68-926B-C496DC38618F}" type="datetime1">
+              <a:rPr lang="tr-TR" smtClean="0"/>
+              <a:t>11.10.2026</a:t>
+            </a:fld>
+            <a:endParaRPr lang="tr-TR"/>
+          </a:p>
+        </p:txBody>
+      </p:sp>
+      <p:sp>
+        <p:nvSpPr>
+          <p:cNvPr id="5" name="Alt Bilgi Yer Tutucusu 4">
+            <a:extLst>
+              <a:ext uri="{FF2B5EF4-FFF2-40B4-BE49-F238E27FC236}">
+                <a16:creationId xmlns:a16="http://schemas.microsoft.com/office/drawing/2014/main" id="{D4587441-3D4C-7E1C-F016-012D066CF88E}"/>
+              </a:ext>
+            </a:extLst>
+          </p:cNvPr>
+          <p:cNvSpPr>
+            <a:spLocks noGrp="1"/>
+          </p:cNvSpPr>
+          <p:nvPr>
+            <p:ph type="ftr" sz="quarter" idx="11"/>
+          </p:nvPr>
+        </p:nvSpPr>
+        <p:spPr/>
+        <p:txBody>
+          <a:bodyPr/>
+          <a:lstStyle/>
+          <a:p>
+            <a:r>
+              <a:rPr lang="tr-TR"/>
+              <a:t>Copyright: Harun Altay</a:t>
+            </a:r>
+          </a:p>
+        </p:txBody>
+      </p:sp>
+      <p:sp>
+        <p:nvSpPr>
+          <p:cNvPr id="6" name="Slayt Numarası Yer Tutucusu 5">
+            <a:extLst>
+              <a:ext uri="{FF2B5EF4-FFF2-40B4-BE49-F238E27FC236}">
+                <a16:creationId xmlns:a16="http://schemas.microsoft.com/office/drawing/2014/main" id="{3AE02284-24C4-529B-4D75-82B269569FBA}"/>
+              </a:ext>
+            </a:extLst>
+          </p:cNvPr>
+          <p:cNvSpPr>
+            <a:spLocks noGrp="1"/>
+          </p:cNvSpPr>
+          <p:nvPr>
+            <p:ph type="sldNum" sz="quarter" idx="12"/>
+          </p:nvPr>
+        </p:nvSpPr>
+        <p:spPr/>
+        <p:txBody>
+          <a:bodyPr/>
+          <a:lstStyle/>
+          <a:p>
+            <a:fld id="{556A583B-49D3-4431-A76E-53060577655C}" type="slidenum">
+              <a:rPr lang="tr-TR" smtClean="0"/>
+              <a:t>17</a:t>
+            </a:fld>
+            <a:endParaRPr lang="tr-TR"/>
+          </a:p>
+        </p:txBody>
+      </p:sp>
+      <p:pic>
+        <p:nvPicPr>
+          <p:cNvPr id="7" name="Resim 6">
+            <a:extLst>
+              <a:ext uri="{FF2B5EF4-FFF2-40B4-BE49-F238E27FC236}">
+                <a16:creationId xmlns:a16="http://schemas.microsoft.com/office/drawing/2014/main" id="{B1A6CD81-F6FF-3C4D-3836-DC5E4FEB2D03}"/>
+              </a:ext>
+            </a:extLst>
+          </p:cNvPr>
+          <p:cNvPicPr>
+            <a:picLocks noChangeAspect="1"/>
+          </p:cNvPicPr>
+          <p:nvPr/>
+        </p:nvPicPr>
+        <p:blipFill>
+          <a:blip r:embed="rId3">
+            <a:extLst>
+              <a:ext uri="{28A0092B-C50C-407E-A947-70E740481C1C}">
+                <a14:useLocalDpi xmlns:a14="http://schemas.microsoft.com/office/drawing/2010/main" val="0"/>
+              </a:ext>
+            </a:extLst>
+          </a:blip>
+          <a:stretch>
+            <a:fillRect/>
+          </a:stretch>
+        </p:blipFill>
+        <p:spPr>
+          <a:xfrm>
+            <a:off x="1207887" y="0"/>
+            <a:ext cx="4838466" cy="6858000"/>
+          </a:xfrm>
+          <a:prstGeom prst="rect">
+            <a:avLst/>
+          </a:prstGeom>
+        </p:spPr>
+      </p:pic>
+    </p:spTree>
+    <p:extLst>
+      <p:ext uri="{BB962C8B-B14F-4D97-AF65-F5344CB8AC3E}">
+        <p14:creationId xmlns:p14="http://schemas.microsoft.com/office/powerpoint/2010/main" val="2628851849"/>
+      </p:ext>
+    </p:extLst>
+  </p:cSld>
+  <p:clrMapOvr>
+    <a:masterClrMapping/>
+  </p:clrMapOvr>
+</p:sld>
+</file>
+
+<file path=ppt/slides/slide18.xml><?xml version="1.0" encoding="utf-8"?>
+<p:sld xmlns:a="http://schemas.openxmlformats.org/drawingml/2006/main" xmlns:r="http://schemas.openxmlformats.org/officeDocument/2006/relationships" xmlns:p="http://schemas.openxmlformats.org/presentationml/2006/main">
+  <p:cSld>
+    <p:spTree>
+      <p:nvGrpSpPr>
+        <p:cNvPr id="1" name=""/>
+        <p:cNvGrpSpPr/>
+        <p:nvPr/>
+      </p:nvGrpSpPr>
+      <p:grpSpPr>
+        <a:xfrm>
+          <a:off x="0" y="0"/>
+          <a:ext cx="0" cy="0"/>
+          <a:chOff x="0" y="0"/>
+          <a:chExt cx="0" cy="0"/>
+        </a:xfrm>
+      </p:grpSpPr>
+      <p:sp>
+        <p:nvSpPr>
+          <p:cNvPr id="2" name="Başlık 1">
+            <a:extLst>
+              <a:ext uri="{FF2B5EF4-FFF2-40B4-BE49-F238E27FC236}">
+                <a16:creationId xmlns:a16="http://schemas.microsoft.com/office/drawing/2014/main" id="{8126357B-D2EE-E4B7-501E-8A88DED13246}"/>
+              </a:ext>
+            </a:extLst>
+          </p:cNvPr>
+          <p:cNvSpPr>
+            <a:spLocks noGrp="1"/>
+          </p:cNvSpPr>
+          <p:nvPr>
+            <p:ph type="title"/>
+          </p:nvPr>
+        </p:nvSpPr>
+        <p:spPr>
+          <a:xfrm>
+            <a:off x="7965736" y="383246"/>
+            <a:ext cx="4032927" cy="1634019"/>
+          </a:xfrm>
+        </p:spPr>
+        <p:txBody>
+          <a:bodyPr/>
+          <a:lstStyle/>
+          <a:p>
+            <a:pPr marL="457200" lvl="1"/>
+            <a:r>
+              <a:rPr lang="tr-TR" dirty="0">
+                <a:hlinkClick r:id="rId2"/>
+              </a:rPr>
+              <a:t>https://pypl.github.io/PYPL.html</a:t>
+            </a:r>
+            <a:r>
+              <a:rPr lang="tr-TR" dirty="0"/>
+              <a:t> </a:t>
+            </a:r>
+            <a:br>
+              <a:rPr lang="tr-TR" dirty="0"/>
+            </a:br>
+            <a:endParaRPr lang="tr-TR" dirty="0"/>
+          </a:p>
+        </p:txBody>
+      </p:sp>
+      <p:sp>
+        <p:nvSpPr>
+          <p:cNvPr id="4" name="Veri Yer Tutucusu 3">
+            <a:extLst>
+              <a:ext uri="{FF2B5EF4-FFF2-40B4-BE49-F238E27FC236}">
+                <a16:creationId xmlns:a16="http://schemas.microsoft.com/office/drawing/2014/main" id="{1EBF42CF-929B-21E2-44BE-6C87F261AA74}"/>
+              </a:ext>
+            </a:extLst>
+          </p:cNvPr>
+          <p:cNvSpPr>
+            <a:spLocks noGrp="1"/>
+          </p:cNvSpPr>
+          <p:nvPr>
+            <p:ph type="dt" sz="half" idx="10"/>
+          </p:nvPr>
+        </p:nvSpPr>
+        <p:spPr/>
+        <p:txBody>
+          <a:bodyPr/>
+          <a:lstStyle/>
+          <a:p>
+            <a:fld id="{E5A72F27-F128-4B68-926B-C496DC38618F}" type="datetime1">
+              <a:rPr lang="tr-TR" smtClean="0"/>
+              <a:t>11.10.2026</a:t>
+            </a:fld>
+            <a:endParaRPr lang="tr-TR"/>
+          </a:p>
+        </p:txBody>
+      </p:sp>
+      <p:sp>
+        <p:nvSpPr>
+          <p:cNvPr id="5" name="Alt Bilgi Yer Tutucusu 4">
+            <a:extLst>
+              <a:ext uri="{FF2B5EF4-FFF2-40B4-BE49-F238E27FC236}">
+                <a16:creationId xmlns:a16="http://schemas.microsoft.com/office/drawing/2014/main" id="{C5E31F7F-4A69-414D-E6B1-DDCDE9A5F923}"/>
+              </a:ext>
+            </a:extLst>
+          </p:cNvPr>
+          <p:cNvSpPr>
+            <a:spLocks noGrp="1"/>
+          </p:cNvSpPr>
+          <p:nvPr>
+            <p:ph type="ftr" sz="quarter" idx="11"/>
+          </p:nvPr>
+        </p:nvSpPr>
+        <p:spPr/>
+        <p:txBody>
+          <a:bodyPr/>
+          <a:lstStyle/>
+          <a:p>
+            <a:r>
+              <a:rPr lang="tr-TR"/>
+              <a:t>Copyright: Harun Altay</a:t>
+            </a:r>
+          </a:p>
+        </p:txBody>
+      </p:sp>
+      <p:sp>
+        <p:nvSpPr>
+          <p:cNvPr id="6" name="Slayt Numarası Yer Tutucusu 5">
+            <a:extLst>
+              <a:ext uri="{FF2B5EF4-FFF2-40B4-BE49-F238E27FC236}">
+                <a16:creationId xmlns:a16="http://schemas.microsoft.com/office/drawing/2014/main" id="{8269E7BF-4D24-B028-6EEF-EBD9C793A7E1}"/>
+              </a:ext>
+            </a:extLst>
+          </p:cNvPr>
+          <p:cNvSpPr>
+            <a:spLocks noGrp="1"/>
+          </p:cNvSpPr>
+          <p:nvPr>
+            <p:ph type="sldNum" sz="quarter" idx="12"/>
+          </p:nvPr>
+        </p:nvSpPr>
+        <p:spPr/>
+        <p:txBody>
+          <a:bodyPr/>
+          <a:lstStyle/>
+          <a:p>
+            <a:fld id="{556A583B-49D3-4431-A76E-53060577655C}" type="slidenum">
+              <a:rPr lang="tr-TR" smtClean="0"/>
+              <a:t>18</a:t>
+            </a:fld>
+            <a:endParaRPr lang="tr-TR"/>
+          </a:p>
+        </p:txBody>
+      </p:sp>
+      <p:pic>
+        <p:nvPicPr>
+          <p:cNvPr id="8" name="Resim 7">
+            <a:extLst>
+              <a:ext uri="{FF2B5EF4-FFF2-40B4-BE49-F238E27FC236}">
+                <a16:creationId xmlns:a16="http://schemas.microsoft.com/office/drawing/2014/main" id="{994C49F6-E369-E8A4-B1D5-2540A402FED1}"/>
+              </a:ext>
+            </a:extLst>
+          </p:cNvPr>
+          <p:cNvPicPr>
+            <a:picLocks noChangeAspect="1"/>
+          </p:cNvPicPr>
+          <p:nvPr/>
+        </p:nvPicPr>
+        <p:blipFill>
+          <a:blip r:embed="rId3">
+            <a:extLst>
+              <a:ext uri="{28A0092B-C50C-407E-A947-70E740481C1C}">
+                <a14:useLocalDpi xmlns:a14="http://schemas.microsoft.com/office/drawing/2010/main" val="0"/>
+              </a:ext>
+            </a:extLst>
+          </a:blip>
+          <a:stretch>
+            <a:fillRect/>
+          </a:stretch>
+        </p:blipFill>
+        <p:spPr>
+          <a:xfrm>
+            <a:off x="263771" y="674371"/>
+            <a:ext cx="8194968" cy="5390854"/>
+          </a:xfrm>
+          <a:prstGeom prst="rect">
+            <a:avLst/>
+          </a:prstGeom>
+        </p:spPr>
+      </p:pic>
+    </p:spTree>
+    <p:extLst>
+      <p:ext uri="{BB962C8B-B14F-4D97-AF65-F5344CB8AC3E}">
+        <p14:creationId xmlns:p14="http://schemas.microsoft.com/office/powerpoint/2010/main" val="2512864857"/>
+      </p:ext>
+    </p:extLst>
+  </p:cSld>
+  <p:clrMapOvr>
+    <a:masterClrMapping/>
+  </p:clrMapOvr>
+</p:sld>
+</file>
+
+<file path=ppt/slides/slide19.xml><?xml version="1.0" encoding="utf-8"?>
+<p:sld xmlns:a="http://schemas.openxmlformats.org/drawingml/2006/main" xmlns:r="http://schemas.openxmlformats.org/officeDocument/2006/relationships" xmlns:p="http://schemas.openxmlformats.org/presentationml/2006/main">
+  <p:cSld>
+    <p:spTree>
+      <p:nvGrpSpPr>
+        <p:cNvPr id="1" name="">
+          <a:extLst>
+            <a:ext uri="{FF2B5EF4-FFF2-40B4-BE49-F238E27FC236}">
+              <a16:creationId xmlns:a16="http://schemas.microsoft.com/office/drawing/2014/main" id="{1723AC92-47E7-0CBE-8950-A4C82E64C555}"/>
+            </a:ext>
+          </a:extLst>
+        </p:cNvPr>
+        <p:cNvGrpSpPr/>
+        <p:nvPr/>
+      </p:nvGrpSpPr>
+      <p:grpSpPr>
+        <a:xfrm>
+          <a:off x="0" y="0"/>
+          <a:ext cx="0" cy="0"/>
+          <a:chOff x="0" y="0"/>
+          <a:chExt cx="0" cy="0"/>
+        </a:xfrm>
+      </p:grpSpPr>
+      <p:sp>
+        <p:nvSpPr>
+          <p:cNvPr id="2" name="Başlık 1">
+            <a:extLst>
+              <a:ext uri="{FF2B5EF4-FFF2-40B4-BE49-F238E27FC236}">
+                <a16:creationId xmlns:a16="http://schemas.microsoft.com/office/drawing/2014/main" id="{5D2A2D08-845B-4E2E-F84A-5B81BC2137AF}"/>
+              </a:ext>
+            </a:extLst>
+          </p:cNvPr>
+          <p:cNvSpPr>
+            <a:spLocks noGrp="1"/>
+          </p:cNvSpPr>
+          <p:nvPr>
+            <p:ph type="title"/>
+          </p:nvPr>
+        </p:nvSpPr>
+        <p:spPr>
+          <a:xfrm>
+            <a:off x="7679986" y="306559"/>
+            <a:ext cx="4032927" cy="576874"/>
+          </a:xfrm>
+        </p:spPr>
+        <p:txBody>
+          <a:bodyPr>
+            <a:normAutofit/>
+          </a:bodyPr>
+          <a:lstStyle/>
+          <a:p>
+            <a:pPr marL="457200" lvl="1"/>
+            <a:r>
+              <a:rPr lang="tr-TR" dirty="0">
+                <a:hlinkClick r:id="rId2"/>
+              </a:rPr>
+              <a:t>https://trends.google.com</a:t>
+            </a:r>
+            <a:r>
+              <a:rPr lang="tr-TR" dirty="0"/>
+              <a:t> </a:t>
+            </a:r>
+          </a:p>
+        </p:txBody>
+      </p:sp>
+      <p:sp>
+        <p:nvSpPr>
+          <p:cNvPr id="4" name="Veri Yer Tutucusu 3">
+            <a:extLst>
+              <a:ext uri="{FF2B5EF4-FFF2-40B4-BE49-F238E27FC236}">
+                <a16:creationId xmlns:a16="http://schemas.microsoft.com/office/drawing/2014/main" id="{DCA74315-6743-2CA8-6C28-D4078D43454D}"/>
+              </a:ext>
+            </a:extLst>
+          </p:cNvPr>
+          <p:cNvSpPr>
+            <a:spLocks noGrp="1"/>
+          </p:cNvSpPr>
+          <p:nvPr>
+            <p:ph type="dt" sz="half" idx="10"/>
+          </p:nvPr>
+        </p:nvSpPr>
+        <p:spPr/>
+        <p:txBody>
+          <a:bodyPr/>
+          <a:lstStyle/>
+          <a:p>
+            <a:fld id="{E5A72F27-F128-4B68-926B-C496DC38618F}" type="datetime1">
+              <a:rPr lang="tr-TR" smtClean="0"/>
+              <a:t>11.10.2026</a:t>
+            </a:fld>
+            <a:endParaRPr lang="tr-TR"/>
+          </a:p>
+        </p:txBody>
+      </p:sp>
+      <p:sp>
+        <p:nvSpPr>
+          <p:cNvPr id="5" name="Alt Bilgi Yer Tutucusu 4">
+            <a:extLst>
+              <a:ext uri="{FF2B5EF4-FFF2-40B4-BE49-F238E27FC236}">
+                <a16:creationId xmlns:a16="http://schemas.microsoft.com/office/drawing/2014/main" id="{B7A8B87E-FB4C-E64E-FA0E-9B4B8D80E9B7}"/>
+              </a:ext>
+            </a:extLst>
+          </p:cNvPr>
+          <p:cNvSpPr>
+            <a:spLocks noGrp="1"/>
+          </p:cNvSpPr>
+          <p:nvPr>
+            <p:ph type="ftr" sz="quarter" idx="11"/>
+          </p:nvPr>
+        </p:nvSpPr>
+        <p:spPr/>
+        <p:txBody>
+          <a:bodyPr/>
+          <a:lstStyle/>
+          <a:p>
+            <a:r>
+              <a:rPr lang="tr-TR"/>
+              <a:t>Copyright: Harun Altay</a:t>
+            </a:r>
+          </a:p>
+        </p:txBody>
+      </p:sp>
+      <p:sp>
+        <p:nvSpPr>
+          <p:cNvPr id="6" name="Slayt Numarası Yer Tutucusu 5">
+            <a:extLst>
+              <a:ext uri="{FF2B5EF4-FFF2-40B4-BE49-F238E27FC236}">
+                <a16:creationId xmlns:a16="http://schemas.microsoft.com/office/drawing/2014/main" id="{0552A7E3-B9B9-BB25-6DF3-1A9FE60FA848}"/>
+              </a:ext>
+            </a:extLst>
+          </p:cNvPr>
+          <p:cNvSpPr>
+            <a:spLocks noGrp="1"/>
+          </p:cNvSpPr>
+          <p:nvPr>
+            <p:ph type="sldNum" sz="quarter" idx="12"/>
+          </p:nvPr>
+        </p:nvSpPr>
+        <p:spPr/>
+        <p:txBody>
+          <a:bodyPr/>
+          <a:lstStyle/>
+          <a:p>
+            <a:fld id="{556A583B-49D3-4431-A76E-53060577655C}" type="slidenum">
+              <a:rPr lang="tr-TR" smtClean="0"/>
+              <a:t>19</a:t>
+            </a:fld>
+            <a:endParaRPr lang="tr-TR"/>
+          </a:p>
+        </p:txBody>
+      </p:sp>
+      <p:pic>
+        <p:nvPicPr>
+          <p:cNvPr id="7" name="Resim 6">
+            <a:extLst>
+              <a:ext uri="{FF2B5EF4-FFF2-40B4-BE49-F238E27FC236}">
+                <a16:creationId xmlns:a16="http://schemas.microsoft.com/office/drawing/2014/main" id="{34F34C60-F9CF-B541-B73B-81325FE65744}"/>
+              </a:ext>
+            </a:extLst>
+          </p:cNvPr>
+          <p:cNvPicPr>
+            <a:picLocks noChangeAspect="1"/>
+          </p:cNvPicPr>
+          <p:nvPr/>
+        </p:nvPicPr>
+        <p:blipFill>
+          <a:blip r:embed="rId3">
+            <a:extLst>
+              <a:ext uri="{28A0092B-C50C-407E-A947-70E740481C1C}">
+                <a14:useLocalDpi xmlns:a14="http://schemas.microsoft.com/office/drawing/2010/main" val="0"/>
+              </a:ext>
+            </a:extLst>
+          </a:blip>
+          <a:stretch>
+            <a:fillRect/>
+          </a:stretch>
+        </p:blipFill>
+        <p:spPr>
+          <a:xfrm>
+            <a:off x="286477" y="883433"/>
+            <a:ext cx="10451662" cy="5731281"/>
+          </a:xfrm>
+          <a:prstGeom prst="rect">
+            <a:avLst/>
+          </a:prstGeom>
+        </p:spPr>
+      </p:pic>
+    </p:spTree>
+    <p:extLst>
+      <p:ext uri="{BB962C8B-B14F-4D97-AF65-F5344CB8AC3E}">
+        <p14:creationId xmlns:p14="http://schemas.microsoft.com/office/powerpoint/2010/main" val="1260275586"/>
+      </p:ext>
+    </p:extLst>
+  </p:cSld>
+  <p:clrMapOvr>
+    <a:masterClrMapping/>
+  </p:clrMapOvr>
+</p:sld>
+</file>
+
+<file path=ppt/slides/slide2.xml><?xml version="1.0" encoding="utf-8"?>
+<p:sld xmlns:a="http://schemas.openxmlformats.org/drawingml/2006/main" xmlns:r="http://schemas.openxmlformats.org/officeDocument/2006/relationships" xmlns:p="http://schemas.openxmlformats.org/presentationml/2006/main">
+  <p:cSld>
+    <p:spTree>
+      <p:nvGrpSpPr>
+        <p:cNvPr id="1" name="">
+          <a:extLst>
+            <a:ext uri="{FF2B5EF4-FFF2-40B4-BE49-F238E27FC236}">
+              <a16:creationId xmlns:a16="http://schemas.microsoft.com/office/drawing/2014/main" id="{74D4869C-62F0-A023-3A79-1F036E269253}"/>
+            </a:ext>
+          </a:extLst>
+        </p:cNvPr>
+        <p:cNvGrpSpPr/>
+        <p:nvPr/>
+      </p:nvGrpSpPr>
+      <p:grpSpPr>
+        <a:xfrm>
+          <a:off x="0" y="0"/>
+          <a:ext cx="0" cy="0"/>
+          <a:chOff x="0" y="0"/>
+          <a:chExt cx="0" cy="0"/>
+        </a:xfrm>
+      </p:grpSpPr>
+      <p:sp>
+        <p:nvSpPr>
+          <p:cNvPr id="2" name="Başlık 1">
+            <a:extLst>
+              <a:ext uri="{FF2B5EF4-FFF2-40B4-BE49-F238E27FC236}">
+                <a16:creationId xmlns:a16="http://schemas.microsoft.com/office/drawing/2014/main" id="{4F7F74FF-0458-4A70-9889-9A301B1D2A0C}"/>
+              </a:ext>
+            </a:extLst>
+          </p:cNvPr>
+          <p:cNvSpPr>
+            <a:spLocks noGrp="1"/>
+          </p:cNvSpPr>
+          <p:nvPr>
+            <p:ph type="title"/>
+          </p:nvPr>
+        </p:nvSpPr>
+        <p:spPr>
+          <a:xfrm>
+            <a:off x="838200" y="365126"/>
+            <a:ext cx="10515600" cy="726256"/>
+          </a:xfrm>
+        </p:spPr>
+        <p:txBody>
+          <a:bodyPr>
+            <a:normAutofit/>
+          </a:bodyPr>
+          <a:lstStyle/>
+          <a:p>
+            <a:r>
+              <a:rPr lang="tr-TR" sz="3600" dirty="0"/>
+              <a:t>Bu eğitim kimin içindir?</a:t>
+            </a:r>
+          </a:p>
+        </p:txBody>
+      </p:sp>
+      <p:sp>
+        <p:nvSpPr>
+          <p:cNvPr id="3" name="İçerik Yer Tutucusu 2">
+            <a:extLst>
+              <a:ext uri="{FF2B5EF4-FFF2-40B4-BE49-F238E27FC236}">
+                <a16:creationId xmlns:a16="http://schemas.microsoft.com/office/drawing/2014/main" id="{FF481CC2-0E24-822C-166F-C0A82E72999D}"/>
+              </a:ext>
+            </a:extLst>
+          </p:cNvPr>
+          <p:cNvSpPr>
+            <a:spLocks noGrp="1"/>
+          </p:cNvSpPr>
+          <p:nvPr>
+            <p:ph idx="1"/>
+          </p:nvPr>
+        </p:nvSpPr>
+        <p:spPr>
+          <a:xfrm>
+            <a:off x="838200" y="1091382"/>
+            <a:ext cx="10515600" cy="5220928"/>
+          </a:xfrm>
+        </p:spPr>
+        <p:txBody>
+          <a:bodyPr>
+            <a:normAutofit/>
+          </a:bodyPr>
+          <a:lstStyle/>
+          <a:p>
+            <a:r>
+              <a:rPr lang="tr-TR" dirty="0"/>
+              <a:t>Yazılımı geliştirmeyi ve programcılığı hiç bilmeyenler içindir</a:t>
+            </a:r>
+          </a:p>
+          <a:p>
+            <a:r>
+              <a:rPr lang="tr-TR" dirty="0"/>
+              <a:t>İlkokul, orta okul, lise ve üniversite öğrencileri içindir</a:t>
+            </a:r>
+          </a:p>
+          <a:p>
+            <a:r>
+              <a:rPr lang="tr-TR" dirty="0"/>
+              <a:t>Hobi arayan emekliler, ev hanımları ve herkes içindir</a:t>
+            </a:r>
+          </a:p>
+          <a:p>
+            <a:r>
+              <a:rPr lang="tr-TR" dirty="0" err="1"/>
+              <a:t>Yazılımcılık</a:t>
+            </a:r>
+            <a:r>
+              <a:rPr lang="tr-TR" dirty="0"/>
+              <a:t> acaba bana meslek olur mu diyenler içindir</a:t>
+            </a:r>
+          </a:p>
+          <a:p>
+            <a:r>
+              <a:rPr lang="tr-TR" dirty="0" err="1"/>
+              <a:t>Yazılımcılığın</a:t>
+            </a:r>
+            <a:r>
+              <a:rPr lang="tr-TR" dirty="0"/>
+              <a:t> «Yönetici Özetini (</a:t>
+            </a:r>
+            <a:r>
+              <a:rPr lang="tr-TR"/>
+              <a:t>management </a:t>
+            </a:r>
+            <a:r>
+              <a:rPr lang="tr-TR" dirty="0" err="1"/>
+              <a:t>summary</a:t>
+            </a:r>
+            <a:r>
+              <a:rPr lang="tr-TR" dirty="0"/>
+              <a:t>)» görmek isteyenler içindir</a:t>
+            </a:r>
+          </a:p>
+        </p:txBody>
+      </p:sp>
+      <p:sp>
+        <p:nvSpPr>
+          <p:cNvPr id="4" name="Veri Yer Tutucusu 3">
+            <a:extLst>
+              <a:ext uri="{FF2B5EF4-FFF2-40B4-BE49-F238E27FC236}">
+                <a16:creationId xmlns:a16="http://schemas.microsoft.com/office/drawing/2014/main" id="{C2EF1EEE-BF97-7861-D880-10B5DAEA83E5}"/>
+              </a:ext>
+            </a:extLst>
+          </p:cNvPr>
+          <p:cNvSpPr>
+            <a:spLocks noGrp="1"/>
+          </p:cNvSpPr>
+          <p:nvPr>
+            <p:ph type="dt" sz="half" idx="10"/>
+          </p:nvPr>
+        </p:nvSpPr>
+        <p:spPr/>
+        <p:txBody>
+          <a:bodyPr/>
+          <a:lstStyle/>
+          <a:p>
+            <a:fld id="{E9290591-5B3F-4E6A-A4B5-910A3B0B03FF}" type="datetime1">
+              <a:rPr lang="tr-TR" smtClean="0"/>
+              <a:t>11.10.2026</a:t>
+            </a:fld>
+            <a:endParaRPr lang="tr-TR"/>
+          </a:p>
+        </p:txBody>
+      </p:sp>
+      <p:sp>
+        <p:nvSpPr>
+          <p:cNvPr id="5" name="Alt Bilgi Yer Tutucusu 4">
+            <a:extLst>
+              <a:ext uri="{FF2B5EF4-FFF2-40B4-BE49-F238E27FC236}">
+                <a16:creationId xmlns:a16="http://schemas.microsoft.com/office/drawing/2014/main" id="{FD7ABFEB-FCFD-D25C-ABA3-39ECD85546E6}"/>
+              </a:ext>
+            </a:extLst>
+          </p:cNvPr>
+          <p:cNvSpPr>
+            <a:spLocks noGrp="1"/>
+          </p:cNvSpPr>
+          <p:nvPr>
+            <p:ph type="ftr" sz="quarter" idx="11"/>
+          </p:nvPr>
+        </p:nvSpPr>
+        <p:spPr/>
+        <p:txBody>
+          <a:bodyPr/>
+          <a:lstStyle/>
+          <a:p>
+            <a:r>
+              <a:rPr lang="tr-TR"/>
+              <a:t>Copyright: Harun Altay</a:t>
+            </a:r>
+          </a:p>
+        </p:txBody>
+      </p:sp>
+      <p:sp>
+        <p:nvSpPr>
+          <p:cNvPr id="6" name="Slayt Numarası Yer Tutucusu 5">
+            <a:extLst>
+              <a:ext uri="{FF2B5EF4-FFF2-40B4-BE49-F238E27FC236}">
+                <a16:creationId xmlns:a16="http://schemas.microsoft.com/office/drawing/2014/main" id="{CA7BEB0C-B7F1-F1A0-F63A-BDE9E4DE1568}"/>
+              </a:ext>
+            </a:extLst>
+          </p:cNvPr>
+          <p:cNvSpPr>
+            <a:spLocks noGrp="1"/>
+          </p:cNvSpPr>
+          <p:nvPr>
+            <p:ph type="sldNum" sz="quarter" idx="12"/>
+          </p:nvPr>
+        </p:nvSpPr>
+        <p:spPr/>
+        <p:txBody>
+          <a:bodyPr/>
+          <a:lstStyle/>
+          <a:p>
+            <a:fld id="{556A583B-49D3-4431-A76E-53060577655C}" type="slidenum">
+              <a:rPr lang="tr-TR" smtClean="0"/>
+              <a:t>2</a:t>
+            </a:fld>
+            <a:endParaRPr lang="tr-TR"/>
+          </a:p>
+        </p:txBody>
+      </p:sp>
+    </p:spTree>
+    <p:extLst>
+      <p:ext uri="{BB962C8B-B14F-4D97-AF65-F5344CB8AC3E}">
+        <p14:creationId xmlns:p14="http://schemas.microsoft.com/office/powerpoint/2010/main" val="1790205340"/>
+      </p:ext>
+    </p:extLst>
+  </p:cSld>
+  <p:clrMapOvr>
+    <a:masterClrMapping/>
+  </p:clrMapOvr>
+</p:sld>
+</file>
+
+<file path=ppt/slides/slide20.xml><?xml version="1.0" encoding="utf-8"?>
 <p:sld xmlns:a="http://schemas.openxmlformats.org/drawingml/2006/main" xmlns:r="http://schemas.openxmlformats.org/officeDocument/2006/relationships" xmlns:p="http://schemas.openxmlformats.org/presentationml/2006/main">
   <p:cSld>
     <p:spTree>
@@ -7968,7 +8826,7 @@
           <a:p>
             <a:fld id="{EAC09926-1D10-4811-A13B-CDB95D2B1C1B}" type="datetime1">
               <a:rPr lang="tr-TR" smtClean="0"/>
-              <a:t>4.10.2026</a:t>
+              <a:t>11.10.2026</a:t>
             </a:fld>
             <a:endParaRPr lang="tr-TR"/>
           </a:p>
@@ -8025,7 +8883,7 @@
           <a:p>
             <a:fld id="{556A583B-49D3-4431-A76E-53060577655C}" type="slidenum">
               <a:rPr lang="tr-TR" smtClean="0"/>
-              <a:t>17</a:t>
+              <a:t>20</a:t>
             </a:fld>
             <a:endParaRPr lang="tr-TR"/>
           </a:p>
@@ -8044,7 +8902,7 @@
 </p:sld>
 </file>
 
-<file path=ppt/slides/slide18.xml><?xml version="1.0" encoding="utf-8"?>
+<file path=ppt/slides/slide21.xml><?xml version="1.0" encoding="utf-8"?>
 <p:sld xmlns:a="http://schemas.openxmlformats.org/drawingml/2006/main" xmlns:r="http://schemas.openxmlformats.org/officeDocument/2006/relationships" xmlns:p="http://schemas.openxmlformats.org/presentationml/2006/main">
   <p:cSld>
     <p:bg>
@@ -8581,7 +9439,7 @@
           <a:p>
             <a:fld id="{EC2C1FF6-8E02-4E65-991D-10B055A5B89D}" type="datetime1">
               <a:rPr lang="tr-TR" smtClean="0"/>
-              <a:t>4.10.2026</a:t>
+              <a:t>11.10.2026</a:t>
             </a:fld>
             <a:endParaRPr lang="tr-TR"/>
           </a:p>
@@ -8638,7 +9496,7 @@
           <a:p>
             <a:fld id="{556A583B-49D3-4431-A76E-53060577655C}" type="slidenum">
               <a:rPr lang="tr-TR" smtClean="0"/>
-              <a:t>18</a:t>
+              <a:t>21</a:t>
             </a:fld>
             <a:endParaRPr lang="tr-TR"/>
           </a:p>
@@ -8657,7 +9515,7 @@
 </p:sld>
 </file>
 
-<file path=ppt/slides/slide19.xml><?xml version="1.0" encoding="utf-8"?>
+<file path=ppt/slides/slide22.xml><?xml version="1.0" encoding="utf-8"?>
 <p:sld xmlns:a="http://schemas.openxmlformats.org/drawingml/2006/main" xmlns:r="http://schemas.openxmlformats.org/officeDocument/2006/relationships" xmlns:p="http://schemas.openxmlformats.org/presentationml/2006/main">
   <p:cSld>
     <p:spTree>
@@ -8830,7 +9688,7 @@
           <a:p>
             <a:fld id="{6F810ABF-9C50-4724-8918-9A528197358E}" type="datetime1">
               <a:rPr lang="tr-TR" smtClean="0"/>
-              <a:t>4.10.2026</a:t>
+              <a:t>11.10.2026</a:t>
             </a:fld>
             <a:endParaRPr lang="tr-TR"/>
           </a:p>
@@ -8887,7 +9745,7 @@
           <a:p>
             <a:fld id="{556A583B-49D3-4431-A76E-53060577655C}" type="slidenum">
               <a:rPr lang="tr-TR" smtClean="0"/>
-              <a:t>19</a:t>
+              <a:t>22</a:t>
             </a:fld>
             <a:endParaRPr lang="tr-TR"/>
           </a:p>
@@ -8906,243 +9764,7 @@
 </p:sld>
 </file>
 
-<file path=ppt/slides/slide2.xml><?xml version="1.0" encoding="utf-8"?>
-<p:sld xmlns:a="http://schemas.openxmlformats.org/drawingml/2006/main" xmlns:r="http://schemas.openxmlformats.org/officeDocument/2006/relationships" xmlns:p="http://schemas.openxmlformats.org/presentationml/2006/main">
-  <p:cSld>
-    <p:spTree>
-      <p:nvGrpSpPr>
-        <p:cNvPr id="1" name="">
-          <a:extLst>
-            <a:ext uri="{FF2B5EF4-FFF2-40B4-BE49-F238E27FC236}">
-              <a16:creationId xmlns:a16="http://schemas.microsoft.com/office/drawing/2014/main" id="{74D4869C-62F0-A023-3A79-1F036E269253}"/>
-            </a:ext>
-          </a:extLst>
-        </p:cNvPr>
-        <p:cNvGrpSpPr/>
-        <p:nvPr/>
-      </p:nvGrpSpPr>
-      <p:grpSpPr>
-        <a:xfrm>
-          <a:off x="0" y="0"/>
-          <a:ext cx="0" cy="0"/>
-          <a:chOff x="0" y="0"/>
-          <a:chExt cx="0" cy="0"/>
-        </a:xfrm>
-      </p:grpSpPr>
-      <p:sp>
-        <p:nvSpPr>
-          <p:cNvPr id="2" name="Başlık 1">
-            <a:extLst>
-              <a:ext uri="{FF2B5EF4-FFF2-40B4-BE49-F238E27FC236}">
-                <a16:creationId xmlns:a16="http://schemas.microsoft.com/office/drawing/2014/main" id="{4F7F74FF-0458-4A70-9889-9A301B1D2A0C}"/>
-              </a:ext>
-            </a:extLst>
-          </p:cNvPr>
-          <p:cNvSpPr>
-            <a:spLocks noGrp="1"/>
-          </p:cNvSpPr>
-          <p:nvPr>
-            <p:ph type="title"/>
-          </p:nvPr>
-        </p:nvSpPr>
-        <p:spPr>
-          <a:xfrm>
-            <a:off x="838200" y="365126"/>
-            <a:ext cx="10515600" cy="726256"/>
-          </a:xfrm>
-        </p:spPr>
-        <p:txBody>
-          <a:bodyPr>
-            <a:normAutofit/>
-          </a:bodyPr>
-          <a:lstStyle/>
-          <a:p>
-            <a:r>
-              <a:rPr lang="tr-TR" sz="3600" dirty="0"/>
-              <a:t>Bu eğitim kimin içindir?</a:t>
-            </a:r>
-          </a:p>
-        </p:txBody>
-      </p:sp>
-      <p:sp>
-        <p:nvSpPr>
-          <p:cNvPr id="3" name="İçerik Yer Tutucusu 2">
-            <a:extLst>
-              <a:ext uri="{FF2B5EF4-FFF2-40B4-BE49-F238E27FC236}">
-                <a16:creationId xmlns:a16="http://schemas.microsoft.com/office/drawing/2014/main" id="{FF481CC2-0E24-822C-166F-C0A82E72999D}"/>
-              </a:ext>
-            </a:extLst>
-          </p:cNvPr>
-          <p:cNvSpPr>
-            <a:spLocks noGrp="1"/>
-          </p:cNvSpPr>
-          <p:nvPr>
-            <p:ph idx="1"/>
-          </p:nvPr>
-        </p:nvSpPr>
-        <p:spPr>
-          <a:xfrm>
-            <a:off x="838200" y="1091382"/>
-            <a:ext cx="10515600" cy="5220928"/>
-          </a:xfrm>
-        </p:spPr>
-        <p:txBody>
-          <a:bodyPr>
-            <a:normAutofit/>
-          </a:bodyPr>
-          <a:lstStyle/>
-          <a:p>
-            <a:r>
-              <a:rPr lang="tr-TR" dirty="0"/>
-              <a:t>Yazılımı geliştirmeyi ve programcılığı hiç bilmeyenler içindir</a:t>
-            </a:r>
-          </a:p>
-          <a:p>
-            <a:r>
-              <a:rPr lang="tr-TR" dirty="0"/>
-              <a:t>İlkokul, orta okul, lise ve üniversite öğrencileri içindir</a:t>
-            </a:r>
-          </a:p>
-          <a:p>
-            <a:r>
-              <a:rPr lang="tr-TR" dirty="0"/>
-              <a:t>Hobi arayan emekliler, ev hanımları ve herkes içindir</a:t>
-            </a:r>
-          </a:p>
-          <a:p>
-            <a:r>
-              <a:rPr lang="tr-TR" dirty="0" err="1"/>
-              <a:t>Yazılımcılık</a:t>
-            </a:r>
-            <a:r>
-              <a:rPr lang="tr-TR" dirty="0"/>
-              <a:t> acaba bana meslek olur mu diyenler içindir</a:t>
-            </a:r>
-          </a:p>
-          <a:p>
-            <a:r>
-              <a:rPr lang="tr-TR" dirty="0" err="1"/>
-              <a:t>Yazılımcılığın</a:t>
-            </a:r>
-            <a:r>
-              <a:rPr lang="tr-TR" dirty="0"/>
-              <a:t> «Yönetici Özetini (</a:t>
-            </a:r>
-            <a:r>
-              <a:rPr lang="tr-TR"/>
-              <a:t>management </a:t>
-            </a:r>
-            <a:r>
-              <a:rPr lang="tr-TR" dirty="0" err="1"/>
-              <a:t>summary</a:t>
-            </a:r>
-            <a:r>
-              <a:rPr lang="tr-TR" dirty="0"/>
-              <a:t>)» görmek isteyenler içindir</a:t>
-            </a:r>
-          </a:p>
-        </p:txBody>
-      </p:sp>
-      <p:sp>
-        <p:nvSpPr>
-          <p:cNvPr id="4" name="Veri Yer Tutucusu 3">
-            <a:extLst>
-              <a:ext uri="{FF2B5EF4-FFF2-40B4-BE49-F238E27FC236}">
-                <a16:creationId xmlns:a16="http://schemas.microsoft.com/office/drawing/2014/main" id="{C2EF1EEE-BF97-7861-D880-10B5DAEA83E5}"/>
-              </a:ext>
-            </a:extLst>
-          </p:cNvPr>
-          <p:cNvSpPr>
-            <a:spLocks noGrp="1"/>
-          </p:cNvSpPr>
-          <p:nvPr>
-            <p:ph type="dt" sz="half" idx="10"/>
-          </p:nvPr>
-        </p:nvSpPr>
-        <p:spPr/>
-        <p:txBody>
-          <a:bodyPr/>
-          <a:lstStyle/>
-          <a:p>
-            <a:fld id="{E9290591-5B3F-4E6A-A4B5-910A3B0B03FF}" type="datetime1">
-              <a:rPr lang="tr-TR" smtClean="0"/>
-              <a:t>4.10.2026</a:t>
-            </a:fld>
-            <a:endParaRPr lang="tr-TR"/>
-          </a:p>
-        </p:txBody>
-      </p:sp>
-      <p:sp>
-        <p:nvSpPr>
-          <p:cNvPr id="5" name="Alt Bilgi Yer Tutucusu 4">
-            <a:extLst>
-              <a:ext uri="{FF2B5EF4-FFF2-40B4-BE49-F238E27FC236}">
-                <a16:creationId xmlns:a16="http://schemas.microsoft.com/office/drawing/2014/main" id="{FD7ABFEB-FCFD-D25C-ABA3-39ECD85546E6}"/>
-              </a:ext>
-            </a:extLst>
-          </p:cNvPr>
-          <p:cNvSpPr>
-            <a:spLocks noGrp="1"/>
-          </p:cNvSpPr>
-          <p:nvPr>
-            <p:ph type="ftr" sz="quarter" idx="11"/>
-          </p:nvPr>
-        </p:nvSpPr>
-        <p:spPr/>
-        <p:txBody>
-          <a:bodyPr/>
-          <a:lstStyle/>
-          <a:p>
-            <a:r>
-              <a:rPr lang="tr-TR"/>
-              <a:t>Copyright: Harun Altay</a:t>
-            </a:r>
-          </a:p>
-        </p:txBody>
-      </p:sp>
-      <p:sp>
-        <p:nvSpPr>
-          <p:cNvPr id="6" name="Slayt Numarası Yer Tutucusu 5">
-            <a:extLst>
-              <a:ext uri="{FF2B5EF4-FFF2-40B4-BE49-F238E27FC236}">
-                <a16:creationId xmlns:a16="http://schemas.microsoft.com/office/drawing/2014/main" id="{CA7BEB0C-B7F1-F1A0-F63A-BDE9E4DE1568}"/>
-              </a:ext>
-            </a:extLst>
-          </p:cNvPr>
-          <p:cNvSpPr>
-            <a:spLocks noGrp="1"/>
-          </p:cNvSpPr>
-          <p:nvPr>
-            <p:ph type="sldNum" sz="quarter" idx="12"/>
-          </p:nvPr>
-        </p:nvSpPr>
-        <p:spPr/>
-        <p:txBody>
-          <a:bodyPr/>
-          <a:lstStyle/>
-          <a:p>
-            <a:fld id="{556A583B-49D3-4431-A76E-53060577655C}" type="slidenum">
-              <a:rPr lang="tr-TR" smtClean="0"/>
-              <a:t>2</a:t>
-            </a:fld>
-            <a:endParaRPr lang="tr-TR"/>
-          </a:p>
-        </p:txBody>
-      </p:sp>
-    </p:spTree>
-    <p:extLst>
-      <p:ext uri="{BB962C8B-B14F-4D97-AF65-F5344CB8AC3E}">
-        <p14:creationId xmlns:p14="http://schemas.microsoft.com/office/powerpoint/2010/main" val="1790205340"/>
-      </p:ext>
-    </p:extLst>
-  </p:cSld>
-  <p:clrMapOvr>
-    <a:masterClrMapping/>
-  </p:clrMapOvr>
-</p:sld>
-</file>
-
-<file path=ppt/slides/slide20.xml><?xml version="1.0" encoding="utf-8"?>
+<file path=ppt/slides/slide23.xml><?xml version="1.0" encoding="utf-8"?>
 <p:sld xmlns:a="http://schemas.openxmlformats.org/drawingml/2006/main" xmlns:r="http://schemas.openxmlformats.org/officeDocument/2006/relationships" xmlns:p="http://schemas.openxmlformats.org/presentationml/2006/main">
   <p:cSld>
     <p:spTree>
@@ -9457,7 +10079,7 @@
           <a:p>
             <a:fld id="{D30B0625-DE47-4D45-9D3F-083BD941E2E4}" type="datetime1">
               <a:rPr lang="tr-TR" smtClean="0"/>
-              <a:t>4.10.2026</a:t>
+              <a:t>11.10.2026</a:t>
             </a:fld>
             <a:endParaRPr lang="tr-TR"/>
           </a:p>
@@ -9514,7 +10136,7 @@
           <a:p>
             <a:fld id="{556A583B-49D3-4431-A76E-53060577655C}" type="slidenum">
               <a:rPr lang="tr-TR" smtClean="0"/>
-              <a:t>20</a:t>
+              <a:t>23</a:t>
             </a:fld>
             <a:endParaRPr lang="tr-TR"/>
           </a:p>
@@ -9533,7 +10155,7 @@
 </p:sld>
 </file>
 
-<file path=ppt/slides/slide21.xml><?xml version="1.0" encoding="utf-8"?>
+<file path=ppt/slides/slide24.xml><?xml version="1.0" encoding="utf-8"?>
 <p:sld xmlns:a="http://schemas.openxmlformats.org/drawingml/2006/main" xmlns:r="http://schemas.openxmlformats.org/officeDocument/2006/relationships" xmlns:p="http://schemas.openxmlformats.org/presentationml/2006/main">
   <p:cSld>
     <p:spTree>
@@ -9892,7 +10514,7 @@
           <a:p>
             <a:fld id="{D8E885D9-CB74-4EAA-94AA-376736753B75}" type="datetime1">
               <a:rPr lang="tr-TR" smtClean="0"/>
-              <a:t>4.10.2026</a:t>
+              <a:t>11.10.2026</a:t>
             </a:fld>
             <a:endParaRPr lang="tr-TR"/>
           </a:p>
@@ -9949,7 +10571,7 @@
           <a:p>
             <a:fld id="{556A583B-49D3-4431-A76E-53060577655C}" type="slidenum">
               <a:rPr lang="tr-TR" smtClean="0"/>
-              <a:t>21</a:t>
+              <a:t>24</a:t>
             </a:fld>
             <a:endParaRPr lang="tr-TR"/>
           </a:p>
@@ -9968,7 +10590,7 @@
 </p:sld>
 </file>
 
-<file path=ppt/slides/slide22.xml><?xml version="1.0" encoding="utf-8"?>
+<file path=ppt/slides/slide25.xml><?xml version="1.0" encoding="utf-8"?>
 <p:sld xmlns:a="http://schemas.openxmlformats.org/drawingml/2006/main" xmlns:r="http://schemas.openxmlformats.org/officeDocument/2006/relationships" xmlns:p="http://schemas.openxmlformats.org/presentationml/2006/main">
   <p:cSld>
     <p:spTree>
@@ -10115,7 +10737,7 @@
           <a:p>
             <a:fld id="{9DFE37CF-9389-4D95-A5A4-8ABF62880B6D}" type="datetime1">
               <a:rPr lang="tr-TR" smtClean="0"/>
-              <a:t>4.10.2026</a:t>
+              <a:t>11.10.2026</a:t>
             </a:fld>
             <a:endParaRPr lang="tr-TR"/>
           </a:p>
@@ -10172,7 +10794,7 @@
           <a:p>
             <a:fld id="{556A583B-49D3-4431-A76E-53060577655C}" type="slidenum">
               <a:rPr lang="tr-TR" smtClean="0"/>
-              <a:t>22</a:t>
+              <a:t>25</a:t>
             </a:fld>
             <a:endParaRPr lang="tr-TR"/>
           </a:p>
@@ -10191,7 +10813,7 @@
 </p:sld>
 </file>
 
-<file path=ppt/slides/slide23.xml><?xml version="1.0" encoding="utf-8"?>
+<file path=ppt/slides/slide26.xml><?xml version="1.0" encoding="utf-8"?>
 <p:sld xmlns:a="http://schemas.openxmlformats.org/drawingml/2006/main" xmlns:r="http://schemas.openxmlformats.org/officeDocument/2006/relationships" xmlns:p="http://schemas.openxmlformats.org/presentationml/2006/main">
   <p:cSld>
     <p:spTree>
@@ -10338,7 +10960,7 @@
           <a:p>
             <a:fld id="{3CD0A053-38B2-4B21-AD22-D37FE0373FB2}" type="datetime1">
               <a:rPr lang="tr-TR" smtClean="0"/>
-              <a:t>4.10.2026</a:t>
+              <a:t>11.10.2026</a:t>
             </a:fld>
             <a:endParaRPr lang="tr-TR"/>
           </a:p>
@@ -10395,7 +11017,7 @@
           <a:p>
             <a:fld id="{556A583B-49D3-4431-A76E-53060577655C}" type="slidenum">
               <a:rPr lang="tr-TR" smtClean="0"/>
-              <a:t>23</a:t>
+              <a:t>26</a:t>
             </a:fld>
             <a:endParaRPr lang="tr-TR"/>
           </a:p>
@@ -10414,7 +11036,7 @@
 </p:sld>
 </file>
 
-<file path=ppt/slides/slide24.xml><?xml version="1.0" encoding="utf-8"?>
+<file path=ppt/slides/slide27.xml><?xml version="1.0" encoding="utf-8"?>
 <p:sld xmlns:a="http://schemas.openxmlformats.org/drawingml/2006/main" xmlns:r="http://schemas.openxmlformats.org/officeDocument/2006/relationships" xmlns:p="http://schemas.openxmlformats.org/presentationml/2006/main">
   <p:cSld>
     <p:spTree>
@@ -10561,7 +11183,7 @@
           <a:p>
             <a:fld id="{0998C81F-67F8-419F-98BA-11B5239DC92E}" type="datetime1">
               <a:rPr lang="tr-TR" smtClean="0"/>
-              <a:t>4.10.2026</a:t>
+              <a:t>11.10.2026</a:t>
             </a:fld>
             <a:endParaRPr lang="tr-TR"/>
           </a:p>
@@ -10618,7 +11240,7 @@
           <a:p>
             <a:fld id="{556A583B-49D3-4431-A76E-53060577655C}" type="slidenum">
               <a:rPr lang="tr-TR" smtClean="0"/>
-              <a:t>24</a:t>
+              <a:t>27</a:t>
             </a:fld>
             <a:endParaRPr lang="tr-TR"/>
           </a:p>
@@ -10637,7 +11259,7 @@
 </p:sld>
 </file>
 
-<file path=ppt/slides/slide25.xml><?xml version="1.0" encoding="utf-8"?>
+<file path=ppt/slides/slide28.xml><?xml version="1.0" encoding="utf-8"?>
 <p:sld xmlns:a="http://schemas.openxmlformats.org/drawingml/2006/main" xmlns:r="http://schemas.openxmlformats.org/officeDocument/2006/relationships" xmlns:p="http://schemas.openxmlformats.org/presentationml/2006/main">
   <p:cSld>
     <p:spTree>
@@ -11044,7 +11666,7 @@
           <a:p>
             <a:fld id="{F56E870C-C0BF-4C65-BD7A-20752F252FB9}" type="datetime1">
               <a:rPr lang="tr-TR" smtClean="0"/>
-              <a:t>4.10.2026</a:t>
+              <a:t>11.10.2026</a:t>
             </a:fld>
             <a:endParaRPr lang="tr-TR"/>
           </a:p>
@@ -11101,7 +11723,7 @@
           <a:p>
             <a:fld id="{556A583B-49D3-4431-A76E-53060577655C}" type="slidenum">
               <a:rPr lang="tr-TR" smtClean="0"/>
-              <a:t>25</a:t>
+              <a:t>28</a:t>
             </a:fld>
             <a:endParaRPr lang="tr-TR"/>
           </a:p>
@@ -11120,7 +11742,7 @@
 </p:sld>
 </file>
 
-<file path=ppt/slides/slide26.xml><?xml version="1.0" encoding="utf-8"?>
+<file path=ppt/slides/slide29.xml><?xml version="1.0" encoding="utf-8"?>
 <p:sld xmlns:a="http://schemas.openxmlformats.org/drawingml/2006/main" xmlns:r="http://schemas.openxmlformats.org/officeDocument/2006/relationships" xmlns:p="http://schemas.openxmlformats.org/presentationml/2006/main">
   <p:cSld>
     <p:spTree>
@@ -13020,7 +13642,7 @@
           <a:p>
             <a:fld id="{4CCF6595-5809-4331-A82F-8ECD7B658D5D}" type="datetime1">
               <a:rPr lang="tr-TR" smtClean="0"/>
-              <a:t>4.10.2026</a:t>
+              <a:t>11.10.2026</a:t>
             </a:fld>
             <a:endParaRPr lang="tr-TR"/>
           </a:p>
@@ -13077,7 +13699,7 @@
           <a:p>
             <a:fld id="{556A583B-49D3-4431-A76E-53060577655C}" type="slidenum">
               <a:rPr lang="tr-TR" smtClean="0"/>
-              <a:t>26</a:t>
+              <a:t>29</a:t>
             </a:fld>
             <a:endParaRPr lang="tr-TR"/>
           </a:p>
@@ -13096,7 +13718,319 @@
 </p:sld>
 </file>
 
-<file path=ppt/slides/slide27.xml><?xml version="1.0" encoding="utf-8"?>
+<file path=ppt/slides/slide3.xml><?xml version="1.0" encoding="utf-8"?>
+<p:sld xmlns:a="http://schemas.openxmlformats.org/drawingml/2006/main" xmlns:r="http://schemas.openxmlformats.org/officeDocument/2006/relationships" xmlns:p="http://schemas.openxmlformats.org/presentationml/2006/main">
+  <p:cSld>
+    <p:spTree>
+      <p:nvGrpSpPr>
+        <p:cNvPr id="1" name="">
+          <a:extLst>
+            <a:ext uri="{FF2B5EF4-FFF2-40B4-BE49-F238E27FC236}">
+              <a16:creationId xmlns:a16="http://schemas.microsoft.com/office/drawing/2014/main" id="{9AA1B344-9BD0-FF69-9013-86B10D14D368}"/>
+            </a:ext>
+          </a:extLst>
+        </p:cNvPr>
+        <p:cNvGrpSpPr/>
+        <p:nvPr/>
+      </p:nvGrpSpPr>
+      <p:grpSpPr>
+        <a:xfrm>
+          <a:off x="0" y="0"/>
+          <a:ext cx="0" cy="0"/>
+          <a:chOff x="0" y="0"/>
+          <a:chExt cx="0" cy="0"/>
+        </a:xfrm>
+      </p:grpSpPr>
+      <p:sp>
+        <p:nvSpPr>
+          <p:cNvPr id="2" name="Başlık 1">
+            <a:extLst>
+              <a:ext uri="{FF2B5EF4-FFF2-40B4-BE49-F238E27FC236}">
+                <a16:creationId xmlns:a16="http://schemas.microsoft.com/office/drawing/2014/main" id="{87A23293-5DDD-F2F0-DDC8-D0D00F91217C}"/>
+              </a:ext>
+            </a:extLst>
+          </p:cNvPr>
+          <p:cNvSpPr>
+            <a:spLocks noGrp="1"/>
+          </p:cNvSpPr>
+          <p:nvPr>
+            <p:ph type="title"/>
+          </p:nvPr>
+        </p:nvSpPr>
+        <p:spPr>
+          <a:xfrm>
+            <a:off x="838200" y="365126"/>
+            <a:ext cx="10515600" cy="726256"/>
+          </a:xfrm>
+        </p:spPr>
+        <p:txBody>
+          <a:bodyPr>
+            <a:normAutofit/>
+          </a:bodyPr>
+          <a:lstStyle/>
+          <a:p>
+            <a:r>
+              <a:rPr lang="tr-TR" sz="3600" dirty="0"/>
+              <a:t>Yazılıma ve Programlama Dillerine Giriş</a:t>
+            </a:r>
+          </a:p>
+        </p:txBody>
+      </p:sp>
+      <p:sp>
+        <p:nvSpPr>
+          <p:cNvPr id="3" name="İçerik Yer Tutucusu 2">
+            <a:extLst>
+              <a:ext uri="{FF2B5EF4-FFF2-40B4-BE49-F238E27FC236}">
+                <a16:creationId xmlns:a16="http://schemas.microsoft.com/office/drawing/2014/main" id="{3B276425-024C-3BFD-A1A3-C9AA6AFEDECC}"/>
+              </a:ext>
+            </a:extLst>
+          </p:cNvPr>
+          <p:cNvSpPr>
+            <a:spLocks noGrp="1"/>
+          </p:cNvSpPr>
+          <p:nvPr>
+            <p:ph idx="1"/>
+          </p:nvPr>
+        </p:nvSpPr>
+        <p:spPr>
+          <a:xfrm>
+            <a:off x="838200" y="1091382"/>
+            <a:ext cx="10515600" cy="5220928"/>
+          </a:xfrm>
+        </p:spPr>
+        <p:txBody>
+          <a:bodyPr>
+            <a:normAutofit fontScale="70000" lnSpcReduction="20000"/>
+          </a:bodyPr>
+          <a:lstStyle/>
+          <a:p>
+            <a:r>
+              <a:rPr lang="tr-TR" dirty="0"/>
+              <a:t>Bu eğitim kimin içindir?</a:t>
+            </a:r>
+          </a:p>
+          <a:p>
+            <a:r>
+              <a:rPr lang="tr-TR" dirty="0"/>
+              <a:t>Bu eğitimin/seminerin web sayfası </a:t>
+            </a:r>
+          </a:p>
+          <a:p>
+            <a:r>
+              <a:rPr lang="tr-TR" dirty="0"/>
+              <a:t>Öğrenme kaynaklarımız nelerdir? </a:t>
+            </a:r>
+          </a:p>
+          <a:p>
+            <a:r>
+              <a:rPr lang="tr-TR" dirty="0"/>
+              <a:t>Yazılım nerelerde ve nasıl kullanılır?</a:t>
+            </a:r>
+          </a:p>
+          <a:p>
+            <a:r>
+              <a:rPr lang="tr-TR" dirty="0"/>
+              <a:t>Hangi programlama dili, hangi alanlarda, ne için kullanılır?</a:t>
+            </a:r>
+          </a:p>
+          <a:p>
+            <a:r>
+              <a:rPr lang="tr-TR" dirty="0"/>
+              <a:t>Popüler Programlama dilleri hangileridir? </a:t>
+            </a:r>
+          </a:p>
+          <a:p>
+            <a:r>
+              <a:rPr lang="tr-TR" dirty="0"/>
+              <a:t>Bir program nasıl ve nerede çalıştırılır?</a:t>
+            </a:r>
+          </a:p>
+          <a:p>
+            <a:r>
+              <a:rPr lang="tr-TR" dirty="0"/>
+              <a:t>Merhaba Dünya programı ne demektir?</a:t>
+            </a:r>
+          </a:p>
+          <a:p>
+            <a:r>
+              <a:rPr lang="tr-TR" dirty="0"/>
+              <a:t>Bilgisayarımızda yapmamız gereken ayarlar. </a:t>
+            </a:r>
+          </a:p>
+          <a:p>
+            <a:r>
+              <a:rPr lang="tr-TR" dirty="0"/>
+              <a:t>Bu eğitimde hangi programlama dillerini göreceğiz? </a:t>
+            </a:r>
+          </a:p>
+          <a:p>
+            <a:pPr lvl="1"/>
+            <a:r>
+              <a:rPr lang="tr-TR" dirty="0"/>
+              <a:t>Python</a:t>
+            </a:r>
+          </a:p>
+          <a:p>
+            <a:pPr lvl="1"/>
+            <a:r>
+              <a:rPr lang="tr-TR" dirty="0"/>
+              <a:t>Java</a:t>
+            </a:r>
+          </a:p>
+          <a:p>
+            <a:pPr lvl="1"/>
+            <a:r>
+              <a:rPr lang="tr-TR" dirty="0"/>
+              <a:t>C# (.NET)</a:t>
+            </a:r>
+          </a:p>
+          <a:p>
+            <a:r>
+              <a:rPr lang="tr-TR" dirty="0"/>
+              <a:t>Örnek Giriş Programları (</a:t>
+            </a:r>
+            <a:r>
+              <a:rPr lang="tr-TR" dirty="0" err="1"/>
+              <a:t>if</a:t>
+            </a:r>
+            <a:r>
+              <a:rPr lang="tr-TR" dirty="0"/>
+              <a:t>, </a:t>
+            </a:r>
+            <a:r>
+              <a:rPr lang="tr-TR" dirty="0" err="1"/>
+              <a:t>for</a:t>
+            </a:r>
+            <a:r>
+              <a:rPr lang="tr-TR" dirty="0"/>
+              <a:t>, </a:t>
+            </a:r>
+            <a:r>
+              <a:rPr lang="tr-TR" dirty="0" err="1"/>
+              <a:t>while</a:t>
+            </a:r>
+            <a:r>
+              <a:rPr lang="tr-TR" dirty="0"/>
+              <a:t>)</a:t>
+            </a:r>
+          </a:p>
+          <a:p>
+            <a:r>
+              <a:rPr lang="tr-TR" dirty="0"/>
+              <a:t>Bu seminerde neler yoktur?</a:t>
+            </a:r>
+          </a:p>
+          <a:p>
+            <a:r>
+              <a:rPr lang="tr-TR" dirty="0"/>
+              <a:t>Bir sonraki adım</a:t>
+            </a:r>
+          </a:p>
+          <a:p>
+            <a:endParaRPr lang="tr-TR" dirty="0"/>
+          </a:p>
+        </p:txBody>
+      </p:sp>
+      <p:sp>
+        <p:nvSpPr>
+          <p:cNvPr id="4" name="Veri Yer Tutucusu 3">
+            <a:extLst>
+              <a:ext uri="{FF2B5EF4-FFF2-40B4-BE49-F238E27FC236}">
+                <a16:creationId xmlns:a16="http://schemas.microsoft.com/office/drawing/2014/main" id="{5937DCAD-63DA-ABDB-20B5-39864956D7D4}"/>
+              </a:ext>
+            </a:extLst>
+          </p:cNvPr>
+          <p:cNvSpPr>
+            <a:spLocks noGrp="1"/>
+          </p:cNvSpPr>
+          <p:nvPr>
+            <p:ph type="dt" sz="half" idx="10"/>
+          </p:nvPr>
+        </p:nvSpPr>
+        <p:spPr/>
+        <p:txBody>
+          <a:bodyPr/>
+          <a:lstStyle/>
+          <a:p>
+            <a:fld id="{EC2B6ACD-0C76-4F71-96B9-0FCA794ADD48}" type="datetime1">
+              <a:rPr lang="tr-TR" smtClean="0"/>
+              <a:t>11.10.2026</a:t>
+            </a:fld>
+            <a:endParaRPr lang="tr-TR"/>
+          </a:p>
+        </p:txBody>
+      </p:sp>
+      <p:sp>
+        <p:nvSpPr>
+          <p:cNvPr id="5" name="Alt Bilgi Yer Tutucusu 4">
+            <a:extLst>
+              <a:ext uri="{FF2B5EF4-FFF2-40B4-BE49-F238E27FC236}">
+                <a16:creationId xmlns:a16="http://schemas.microsoft.com/office/drawing/2014/main" id="{61463C24-5356-7329-9ED8-C875BC997A60}"/>
+              </a:ext>
+            </a:extLst>
+          </p:cNvPr>
+          <p:cNvSpPr>
+            <a:spLocks noGrp="1"/>
+          </p:cNvSpPr>
+          <p:nvPr>
+            <p:ph type="ftr" sz="quarter" idx="11"/>
+          </p:nvPr>
+        </p:nvSpPr>
+        <p:spPr/>
+        <p:txBody>
+          <a:bodyPr/>
+          <a:lstStyle/>
+          <a:p>
+            <a:r>
+              <a:rPr lang="tr-TR"/>
+              <a:t>Copyright: Harun Altay</a:t>
+            </a:r>
+          </a:p>
+        </p:txBody>
+      </p:sp>
+      <p:sp>
+        <p:nvSpPr>
+          <p:cNvPr id="6" name="Slayt Numarası Yer Tutucusu 5">
+            <a:extLst>
+              <a:ext uri="{FF2B5EF4-FFF2-40B4-BE49-F238E27FC236}">
+                <a16:creationId xmlns:a16="http://schemas.microsoft.com/office/drawing/2014/main" id="{F08D76BF-F4A3-66DD-651E-301E4C7EC7EB}"/>
+              </a:ext>
+            </a:extLst>
+          </p:cNvPr>
+          <p:cNvSpPr>
+            <a:spLocks noGrp="1"/>
+          </p:cNvSpPr>
+          <p:nvPr>
+            <p:ph type="sldNum" sz="quarter" idx="12"/>
+          </p:nvPr>
+        </p:nvSpPr>
+        <p:spPr/>
+        <p:txBody>
+          <a:bodyPr/>
+          <a:lstStyle/>
+          <a:p>
+            <a:fld id="{556A583B-49D3-4431-A76E-53060577655C}" type="slidenum">
+              <a:rPr lang="tr-TR" smtClean="0"/>
+              <a:t>3</a:t>
+            </a:fld>
+            <a:endParaRPr lang="tr-TR"/>
+          </a:p>
+        </p:txBody>
+      </p:sp>
+    </p:spTree>
+    <p:extLst>
+      <p:ext uri="{BB962C8B-B14F-4D97-AF65-F5344CB8AC3E}">
+        <p14:creationId xmlns:p14="http://schemas.microsoft.com/office/powerpoint/2010/main" val="527220079"/>
+      </p:ext>
+    </p:extLst>
+  </p:cSld>
+  <p:clrMapOvr>
+    <a:masterClrMapping/>
+  </p:clrMapOvr>
+</p:sld>
+</file>
+
+<file path=ppt/slides/slide30.xml><?xml version="1.0" encoding="utf-8"?>
 <p:sld xmlns:a="http://schemas.openxmlformats.org/drawingml/2006/main" xmlns:r="http://schemas.openxmlformats.org/officeDocument/2006/relationships" xmlns:p="http://schemas.openxmlformats.org/presentationml/2006/main">
   <p:cSld>
     <p:spTree>
@@ -13964,7 +14898,7 @@
           <a:p>
             <a:fld id="{141FD688-8E0B-4917-93B2-78EE6D6B57D6}" type="datetime1">
               <a:rPr lang="tr-TR" smtClean="0"/>
-              <a:t>4.10.2026</a:t>
+              <a:t>11.10.2026</a:t>
             </a:fld>
             <a:endParaRPr lang="tr-TR"/>
           </a:p>
@@ -14021,7 +14955,7 @@
           <a:p>
             <a:fld id="{556A583B-49D3-4431-A76E-53060577655C}" type="slidenum">
               <a:rPr lang="tr-TR" smtClean="0"/>
-              <a:t>27</a:t>
+              <a:t>30</a:t>
             </a:fld>
             <a:endParaRPr lang="tr-TR"/>
           </a:p>
@@ -14040,7 +14974,7 @@
 </p:sld>
 </file>
 
-<file path=ppt/slides/slide28.xml><?xml version="1.0" encoding="utf-8"?>
+<file path=ppt/slides/slide31.xml><?xml version="1.0" encoding="utf-8"?>
 <p:sld xmlns:a="http://schemas.openxmlformats.org/drawingml/2006/main" xmlns:r="http://schemas.openxmlformats.org/officeDocument/2006/relationships" xmlns:p="http://schemas.openxmlformats.org/presentationml/2006/main">
   <p:cSld>
     <p:spTree>
@@ -15373,7 +16307,7 @@
           <a:p>
             <a:fld id="{9177C320-059E-4DC3-8059-CCDED2AD416A}" type="datetime1">
               <a:rPr lang="tr-TR" smtClean="0"/>
-              <a:t>4.10.2026</a:t>
+              <a:t>11.10.2026</a:t>
             </a:fld>
             <a:endParaRPr lang="tr-TR"/>
           </a:p>
@@ -15430,7 +16364,7 @@
           <a:p>
             <a:fld id="{556A583B-49D3-4431-A76E-53060577655C}" type="slidenum">
               <a:rPr lang="tr-TR" smtClean="0"/>
-              <a:t>28</a:t>
+              <a:t>31</a:t>
             </a:fld>
             <a:endParaRPr lang="tr-TR"/>
           </a:p>
@@ -15449,7 +16383,7 @@
 </p:sld>
 </file>
 
-<file path=ppt/slides/slide29.xml><?xml version="1.0" encoding="utf-8"?>
+<file path=ppt/slides/slide32.xml><?xml version="1.0" encoding="utf-8"?>
 <p:sld xmlns:a="http://schemas.openxmlformats.org/drawingml/2006/main" xmlns:r="http://schemas.openxmlformats.org/officeDocument/2006/relationships" xmlns:p="http://schemas.openxmlformats.org/presentationml/2006/main">
   <p:cSld>
     <p:spTree>
@@ -15566,7 +16500,7 @@
           <a:p>
             <a:fld id="{8473EE66-3B5B-40DD-8C05-2B867A749528}" type="datetime1">
               <a:rPr lang="tr-TR" smtClean="0"/>
-              <a:t>4.10.2026</a:t>
+              <a:t>11.10.2026</a:t>
             </a:fld>
             <a:endParaRPr lang="tr-TR"/>
           </a:p>
@@ -15623,7 +16557,7 @@
           <a:p>
             <a:fld id="{556A583B-49D3-4431-A76E-53060577655C}" type="slidenum">
               <a:rPr lang="tr-TR" smtClean="0"/>
-              <a:t>29</a:t>
+              <a:t>32</a:t>
             </a:fld>
             <a:endParaRPr lang="tr-TR"/>
           </a:p>
@@ -15642,319 +16576,7 @@
 </p:sld>
 </file>
 
-<file path=ppt/slides/slide3.xml><?xml version="1.0" encoding="utf-8"?>
-<p:sld xmlns:a="http://schemas.openxmlformats.org/drawingml/2006/main" xmlns:r="http://schemas.openxmlformats.org/officeDocument/2006/relationships" xmlns:p="http://schemas.openxmlformats.org/presentationml/2006/main">
-  <p:cSld>
-    <p:spTree>
-      <p:nvGrpSpPr>
-        <p:cNvPr id="1" name="">
-          <a:extLst>
-            <a:ext uri="{FF2B5EF4-FFF2-40B4-BE49-F238E27FC236}">
-              <a16:creationId xmlns:a16="http://schemas.microsoft.com/office/drawing/2014/main" id="{9AA1B344-9BD0-FF69-9013-86B10D14D368}"/>
-            </a:ext>
-          </a:extLst>
-        </p:cNvPr>
-        <p:cNvGrpSpPr/>
-        <p:nvPr/>
-      </p:nvGrpSpPr>
-      <p:grpSpPr>
-        <a:xfrm>
-          <a:off x="0" y="0"/>
-          <a:ext cx="0" cy="0"/>
-          <a:chOff x="0" y="0"/>
-          <a:chExt cx="0" cy="0"/>
-        </a:xfrm>
-      </p:grpSpPr>
-      <p:sp>
-        <p:nvSpPr>
-          <p:cNvPr id="2" name="Başlık 1">
-            <a:extLst>
-              <a:ext uri="{FF2B5EF4-FFF2-40B4-BE49-F238E27FC236}">
-                <a16:creationId xmlns:a16="http://schemas.microsoft.com/office/drawing/2014/main" id="{87A23293-5DDD-F2F0-DDC8-D0D00F91217C}"/>
-              </a:ext>
-            </a:extLst>
-          </p:cNvPr>
-          <p:cNvSpPr>
-            <a:spLocks noGrp="1"/>
-          </p:cNvSpPr>
-          <p:nvPr>
-            <p:ph type="title"/>
-          </p:nvPr>
-        </p:nvSpPr>
-        <p:spPr>
-          <a:xfrm>
-            <a:off x="838200" y="365126"/>
-            <a:ext cx="10515600" cy="726256"/>
-          </a:xfrm>
-        </p:spPr>
-        <p:txBody>
-          <a:bodyPr>
-            <a:normAutofit/>
-          </a:bodyPr>
-          <a:lstStyle/>
-          <a:p>
-            <a:r>
-              <a:rPr lang="tr-TR" sz="3600" dirty="0"/>
-              <a:t>Yazılıma ve Programlama Dillerine Giriş</a:t>
-            </a:r>
-          </a:p>
-        </p:txBody>
-      </p:sp>
-      <p:sp>
-        <p:nvSpPr>
-          <p:cNvPr id="3" name="İçerik Yer Tutucusu 2">
-            <a:extLst>
-              <a:ext uri="{FF2B5EF4-FFF2-40B4-BE49-F238E27FC236}">
-                <a16:creationId xmlns:a16="http://schemas.microsoft.com/office/drawing/2014/main" id="{3B276425-024C-3BFD-A1A3-C9AA6AFEDECC}"/>
-              </a:ext>
-            </a:extLst>
-          </p:cNvPr>
-          <p:cNvSpPr>
-            <a:spLocks noGrp="1"/>
-          </p:cNvSpPr>
-          <p:nvPr>
-            <p:ph idx="1"/>
-          </p:nvPr>
-        </p:nvSpPr>
-        <p:spPr>
-          <a:xfrm>
-            <a:off x="838200" y="1091382"/>
-            <a:ext cx="10515600" cy="5220928"/>
-          </a:xfrm>
-        </p:spPr>
-        <p:txBody>
-          <a:bodyPr>
-            <a:normAutofit fontScale="70000" lnSpcReduction="20000"/>
-          </a:bodyPr>
-          <a:lstStyle/>
-          <a:p>
-            <a:r>
-              <a:rPr lang="tr-TR" dirty="0"/>
-              <a:t>Bu eğitim kimin içindir?</a:t>
-            </a:r>
-          </a:p>
-          <a:p>
-            <a:r>
-              <a:rPr lang="tr-TR" dirty="0"/>
-              <a:t>Bu eğitimin/seminerin web sayfası </a:t>
-            </a:r>
-          </a:p>
-          <a:p>
-            <a:r>
-              <a:rPr lang="tr-TR" dirty="0"/>
-              <a:t>Öğrenme kaynaklarımız nelerdir? </a:t>
-            </a:r>
-          </a:p>
-          <a:p>
-            <a:r>
-              <a:rPr lang="tr-TR" dirty="0"/>
-              <a:t>Yazılım nerelerde ve nasıl kullanılır?</a:t>
-            </a:r>
-          </a:p>
-          <a:p>
-            <a:r>
-              <a:rPr lang="tr-TR" dirty="0"/>
-              <a:t>Hangi programlama dili, hangi alanlarda, ne için kullanılır?</a:t>
-            </a:r>
-          </a:p>
-          <a:p>
-            <a:r>
-              <a:rPr lang="tr-TR" dirty="0"/>
-              <a:t>Popüler Programlama dilleri hangileridir? </a:t>
-            </a:r>
-          </a:p>
-          <a:p>
-            <a:r>
-              <a:rPr lang="tr-TR" dirty="0"/>
-              <a:t>Bir program nasıl ve nerede çalıştırılır?</a:t>
-            </a:r>
-          </a:p>
-          <a:p>
-            <a:r>
-              <a:rPr lang="tr-TR" dirty="0"/>
-              <a:t>Merhaba Dünya programı ne demektir?</a:t>
-            </a:r>
-          </a:p>
-          <a:p>
-            <a:r>
-              <a:rPr lang="tr-TR" dirty="0"/>
-              <a:t>Bilgisayarımızda yapmamız gereken ayarlar. </a:t>
-            </a:r>
-          </a:p>
-          <a:p>
-            <a:r>
-              <a:rPr lang="tr-TR" dirty="0"/>
-              <a:t>Bu eğitimde hangi programlama dillerini göreceğiz? </a:t>
-            </a:r>
-          </a:p>
-          <a:p>
-            <a:pPr lvl="1"/>
-            <a:r>
-              <a:rPr lang="tr-TR" dirty="0"/>
-              <a:t>Python</a:t>
-            </a:r>
-          </a:p>
-          <a:p>
-            <a:pPr lvl="1"/>
-            <a:r>
-              <a:rPr lang="tr-TR" dirty="0"/>
-              <a:t>Java</a:t>
-            </a:r>
-          </a:p>
-          <a:p>
-            <a:pPr lvl="1"/>
-            <a:r>
-              <a:rPr lang="tr-TR" dirty="0"/>
-              <a:t>C# (.NET)</a:t>
-            </a:r>
-          </a:p>
-          <a:p>
-            <a:r>
-              <a:rPr lang="tr-TR" dirty="0"/>
-              <a:t>Örnek Giriş Programları (</a:t>
-            </a:r>
-            <a:r>
-              <a:rPr lang="tr-TR" dirty="0" err="1"/>
-              <a:t>if</a:t>
-            </a:r>
-            <a:r>
-              <a:rPr lang="tr-TR" dirty="0"/>
-              <a:t>, </a:t>
-            </a:r>
-            <a:r>
-              <a:rPr lang="tr-TR" dirty="0" err="1"/>
-              <a:t>for</a:t>
-            </a:r>
-            <a:r>
-              <a:rPr lang="tr-TR" dirty="0"/>
-              <a:t>, </a:t>
-            </a:r>
-            <a:r>
-              <a:rPr lang="tr-TR" dirty="0" err="1"/>
-              <a:t>while</a:t>
-            </a:r>
-            <a:r>
-              <a:rPr lang="tr-TR" dirty="0"/>
-              <a:t>)</a:t>
-            </a:r>
-          </a:p>
-          <a:p>
-            <a:r>
-              <a:rPr lang="tr-TR" dirty="0"/>
-              <a:t>Bu seminerde neler yoktur?</a:t>
-            </a:r>
-          </a:p>
-          <a:p>
-            <a:r>
-              <a:rPr lang="tr-TR" dirty="0"/>
-              <a:t>Bir sonraki adım</a:t>
-            </a:r>
-          </a:p>
-          <a:p>
-            <a:endParaRPr lang="tr-TR" dirty="0"/>
-          </a:p>
-        </p:txBody>
-      </p:sp>
-      <p:sp>
-        <p:nvSpPr>
-          <p:cNvPr id="4" name="Veri Yer Tutucusu 3">
-            <a:extLst>
-              <a:ext uri="{FF2B5EF4-FFF2-40B4-BE49-F238E27FC236}">
-                <a16:creationId xmlns:a16="http://schemas.microsoft.com/office/drawing/2014/main" id="{5937DCAD-63DA-ABDB-20B5-39864956D7D4}"/>
-              </a:ext>
-            </a:extLst>
-          </p:cNvPr>
-          <p:cNvSpPr>
-            <a:spLocks noGrp="1"/>
-          </p:cNvSpPr>
-          <p:nvPr>
-            <p:ph type="dt" sz="half" idx="10"/>
-          </p:nvPr>
-        </p:nvSpPr>
-        <p:spPr/>
-        <p:txBody>
-          <a:bodyPr/>
-          <a:lstStyle/>
-          <a:p>
-            <a:fld id="{EC2B6ACD-0C76-4F71-96B9-0FCA794ADD48}" type="datetime1">
-              <a:rPr lang="tr-TR" smtClean="0"/>
-              <a:t>4.10.2026</a:t>
-            </a:fld>
-            <a:endParaRPr lang="tr-TR"/>
-          </a:p>
-        </p:txBody>
-      </p:sp>
-      <p:sp>
-        <p:nvSpPr>
-          <p:cNvPr id="5" name="Alt Bilgi Yer Tutucusu 4">
-            <a:extLst>
-              <a:ext uri="{FF2B5EF4-FFF2-40B4-BE49-F238E27FC236}">
-                <a16:creationId xmlns:a16="http://schemas.microsoft.com/office/drawing/2014/main" id="{61463C24-5356-7329-9ED8-C875BC997A60}"/>
-              </a:ext>
-            </a:extLst>
-          </p:cNvPr>
-          <p:cNvSpPr>
-            <a:spLocks noGrp="1"/>
-          </p:cNvSpPr>
-          <p:nvPr>
-            <p:ph type="ftr" sz="quarter" idx="11"/>
-          </p:nvPr>
-        </p:nvSpPr>
-        <p:spPr/>
-        <p:txBody>
-          <a:bodyPr/>
-          <a:lstStyle/>
-          <a:p>
-            <a:r>
-              <a:rPr lang="tr-TR"/>
-              <a:t>Copyright: Harun Altay</a:t>
-            </a:r>
-          </a:p>
-        </p:txBody>
-      </p:sp>
-      <p:sp>
-        <p:nvSpPr>
-          <p:cNvPr id="6" name="Slayt Numarası Yer Tutucusu 5">
-            <a:extLst>
-              <a:ext uri="{FF2B5EF4-FFF2-40B4-BE49-F238E27FC236}">
-                <a16:creationId xmlns:a16="http://schemas.microsoft.com/office/drawing/2014/main" id="{F08D76BF-F4A3-66DD-651E-301E4C7EC7EB}"/>
-              </a:ext>
-            </a:extLst>
-          </p:cNvPr>
-          <p:cNvSpPr>
-            <a:spLocks noGrp="1"/>
-          </p:cNvSpPr>
-          <p:nvPr>
-            <p:ph type="sldNum" sz="quarter" idx="12"/>
-          </p:nvPr>
-        </p:nvSpPr>
-        <p:spPr/>
-        <p:txBody>
-          <a:bodyPr/>
-          <a:lstStyle/>
-          <a:p>
-            <a:fld id="{556A583B-49D3-4431-A76E-53060577655C}" type="slidenum">
-              <a:rPr lang="tr-TR" smtClean="0"/>
-              <a:t>3</a:t>
-            </a:fld>
-            <a:endParaRPr lang="tr-TR"/>
-          </a:p>
-        </p:txBody>
-      </p:sp>
-    </p:spTree>
-    <p:extLst>
-      <p:ext uri="{BB962C8B-B14F-4D97-AF65-F5344CB8AC3E}">
-        <p14:creationId xmlns:p14="http://schemas.microsoft.com/office/powerpoint/2010/main" val="527220079"/>
-      </p:ext>
-    </p:extLst>
-  </p:cSld>
-  <p:clrMapOvr>
-    <a:masterClrMapping/>
-  </p:clrMapOvr>
-</p:sld>
-</file>
-
-<file path=ppt/slides/slide30.xml><?xml version="1.0" encoding="utf-8"?>
+<file path=ppt/slides/slide33.xml><?xml version="1.0" encoding="utf-8"?>
 <p:sld xmlns:a="http://schemas.openxmlformats.org/drawingml/2006/main" xmlns:r="http://schemas.openxmlformats.org/officeDocument/2006/relationships" xmlns:p="http://schemas.openxmlformats.org/presentationml/2006/main">
   <p:cSld>
     <p:spTree>
@@ -16249,7 +16871,7 @@
           <a:p>
             <a:fld id="{85CC3776-6893-40B5-BFB7-819CEB1620E0}" type="datetime1">
               <a:rPr lang="tr-TR" smtClean="0"/>
-              <a:t>4.10.2026</a:t>
+              <a:t>11.10.2026</a:t>
             </a:fld>
             <a:endParaRPr lang="tr-TR"/>
           </a:p>
@@ -16306,7 +16928,7 @@
           <a:p>
             <a:fld id="{556A583B-49D3-4431-A76E-53060577655C}" type="slidenum">
               <a:rPr lang="tr-TR" smtClean="0"/>
-              <a:t>30</a:t>
+              <a:t>33</a:t>
             </a:fld>
             <a:endParaRPr lang="tr-TR"/>
           </a:p>
@@ -16325,7 +16947,7 @@
 </p:sld>
 </file>
 
-<file path=ppt/slides/slide31.xml><?xml version="1.0" encoding="utf-8"?>
+<file path=ppt/slides/slide34.xml><?xml version="1.0" encoding="utf-8"?>
 <p:sld xmlns:a="http://schemas.openxmlformats.org/drawingml/2006/main" xmlns:r="http://schemas.openxmlformats.org/officeDocument/2006/relationships" xmlns:p="http://schemas.openxmlformats.org/presentationml/2006/main">
   <p:cSld>
     <p:spTree>
@@ -16540,7 +17162,7 @@
           <a:p>
             <a:fld id="{1372925D-DBC8-405C-89B5-49F8D2BDFEEE}" type="datetime1">
               <a:rPr lang="tr-TR" smtClean="0"/>
-              <a:t>4.10.2026</a:t>
+              <a:t>11.10.2026</a:t>
             </a:fld>
             <a:endParaRPr lang="tr-TR"/>
           </a:p>
@@ -16597,7 +17219,7 @@
           <a:p>
             <a:fld id="{556A583B-49D3-4431-A76E-53060577655C}" type="slidenum">
               <a:rPr lang="tr-TR" smtClean="0"/>
-              <a:t>31</a:t>
+              <a:t>34</a:t>
             </a:fld>
             <a:endParaRPr lang="tr-TR"/>
           </a:p>
@@ -16616,7 +17238,7 @@
 </p:sld>
 </file>
 
-<file path=ppt/slides/slide32.xml><?xml version="1.0" encoding="utf-8"?>
+<file path=ppt/slides/slide35.xml><?xml version="1.0" encoding="utf-8"?>
 <p:sld xmlns:a="http://schemas.openxmlformats.org/drawingml/2006/main" xmlns:r="http://schemas.openxmlformats.org/officeDocument/2006/relationships" xmlns:p="http://schemas.openxmlformats.org/presentationml/2006/main">
   <p:cSld>
     <p:spTree>
@@ -17175,7 +17797,7 @@
           <a:p>
             <a:fld id="{E90BAD1F-2DE4-4A75-97B2-F99461682000}" type="datetime1">
               <a:rPr lang="tr-TR" smtClean="0"/>
-              <a:t>4.10.2026</a:t>
+              <a:t>11.10.2026</a:t>
             </a:fld>
             <a:endParaRPr lang="tr-TR"/>
           </a:p>
@@ -17232,7 +17854,7 @@
           <a:p>
             <a:fld id="{556A583B-49D3-4431-A76E-53060577655C}" type="slidenum">
               <a:rPr lang="tr-TR" smtClean="0"/>
-              <a:t>32</a:t>
+              <a:t>35</a:t>
             </a:fld>
             <a:endParaRPr lang="tr-TR"/>
           </a:p>
@@ -17251,7 +17873,7 @@
 </p:sld>
 </file>
 
-<file path=ppt/slides/slide33.xml><?xml version="1.0" encoding="utf-8"?>
+<file path=ppt/slides/slide36.xml><?xml version="1.0" encoding="utf-8"?>
 <p:sld xmlns:a="http://schemas.openxmlformats.org/drawingml/2006/main" xmlns:r="http://schemas.openxmlformats.org/officeDocument/2006/relationships" xmlns:p="http://schemas.openxmlformats.org/presentationml/2006/main">
   <p:cSld>
     <p:spTree>
@@ -17808,7 +18430,7 @@
           <a:p>
             <a:fld id="{08AA18FA-F30F-4A34-A5F2-5F6B237A9E7A}" type="datetime1">
               <a:rPr lang="tr-TR" smtClean="0"/>
-              <a:t>4.10.2026</a:t>
+              <a:t>11.10.2026</a:t>
             </a:fld>
             <a:endParaRPr lang="tr-TR"/>
           </a:p>
@@ -17865,7 +18487,7 @@
           <a:p>
             <a:fld id="{556A583B-49D3-4431-A76E-53060577655C}" type="slidenum">
               <a:rPr lang="tr-TR" smtClean="0"/>
-              <a:t>33</a:t>
+              <a:t>36</a:t>
             </a:fld>
             <a:endParaRPr lang="tr-TR"/>
           </a:p>
@@ -17884,7 +18506,7 @@
 </p:sld>
 </file>
 
-<file path=ppt/slides/slide34.xml><?xml version="1.0" encoding="utf-8"?>
+<file path=ppt/slides/slide37.xml><?xml version="1.0" encoding="utf-8"?>
 <p:sld xmlns:a="http://schemas.openxmlformats.org/drawingml/2006/main" xmlns:r="http://schemas.openxmlformats.org/officeDocument/2006/relationships" xmlns:p="http://schemas.openxmlformats.org/presentationml/2006/main">
   <p:cSld>
     <p:spTree>
@@ -18414,7 +19036,7 @@
           <a:p>
             <a:fld id="{042AF11C-9859-454C-A0DA-12524618C623}" type="datetime1">
               <a:rPr lang="tr-TR" smtClean="0"/>
-              <a:t>4.10.2026</a:t>
+              <a:t>11.10.2026</a:t>
             </a:fld>
             <a:endParaRPr lang="tr-TR"/>
           </a:p>
@@ -18471,7 +19093,7 @@
           <a:p>
             <a:fld id="{556A583B-49D3-4431-A76E-53060577655C}" type="slidenum">
               <a:rPr lang="tr-TR" smtClean="0"/>
-              <a:t>34</a:t>
+              <a:t>37</a:t>
             </a:fld>
             <a:endParaRPr lang="tr-TR"/>
           </a:p>
@@ -18490,7 +19112,7 @@
 </p:sld>
 </file>
 
-<file path=ppt/slides/slide35.xml><?xml version="1.0" encoding="utf-8"?>
+<file path=ppt/slides/slide38.xml><?xml version="1.0" encoding="utf-8"?>
 <p:sld xmlns:a="http://schemas.openxmlformats.org/drawingml/2006/main" xmlns:r="http://schemas.openxmlformats.org/officeDocument/2006/relationships" xmlns:p="http://schemas.openxmlformats.org/presentationml/2006/main">
   <p:cSld>
     <p:spTree>
@@ -18748,7 +19370,7 @@
           <a:p>
             <a:fld id="{A29100A3-B5D3-4AF3-8C60-D4A6445A5245}" type="datetime1">
               <a:rPr lang="tr-TR" smtClean="0"/>
-              <a:t>4.10.2026</a:t>
+              <a:t>11.10.2026</a:t>
             </a:fld>
             <a:endParaRPr lang="tr-TR"/>
           </a:p>
@@ -18805,7 +19427,7 @@
           <a:p>
             <a:fld id="{556A583B-49D3-4431-A76E-53060577655C}" type="slidenum">
               <a:rPr lang="tr-TR" smtClean="0"/>
-              <a:t>35</a:t>
+              <a:t>38</a:t>
             </a:fld>
             <a:endParaRPr lang="tr-TR"/>
           </a:p>
@@ -18824,7 +19446,7 @@
 </p:sld>
 </file>
 
-<file path=ppt/slides/slide36.xml><?xml version="1.0" encoding="utf-8"?>
+<file path=ppt/slides/slide39.xml><?xml version="1.0" encoding="utf-8"?>
 <p:sld xmlns:a="http://schemas.openxmlformats.org/drawingml/2006/main" xmlns:r="http://schemas.openxmlformats.org/officeDocument/2006/relationships" xmlns:p="http://schemas.openxmlformats.org/presentationml/2006/main">
   <p:cSld>
     <p:spTree>
@@ -18961,7 +19583,7 @@
           <a:p>
             <a:fld id="{C8538EAB-DF79-497D-BA70-2B74B6C10086}" type="datetime1">
               <a:rPr lang="tr-TR" smtClean="0"/>
-              <a:t>4.10.2026</a:t>
+              <a:t>11.10.2026</a:t>
             </a:fld>
             <a:endParaRPr lang="tr-TR"/>
           </a:p>
@@ -19018,7 +19640,7 @@
           <a:p>
             <a:fld id="{556A583B-49D3-4431-A76E-53060577655C}" type="slidenum">
               <a:rPr lang="tr-TR" smtClean="0"/>
-              <a:t>36</a:t>
+              <a:t>39</a:t>
             </a:fld>
             <a:endParaRPr lang="tr-TR"/>
           </a:p>
@@ -19037,7 +19659,205 @@
 </p:sld>
 </file>
 
-<file path=ppt/slides/slide37.xml><?xml version="1.0" encoding="utf-8"?>
+<file path=ppt/slides/slide4.xml><?xml version="1.0" encoding="utf-8"?>
+<p:sld xmlns:a="http://schemas.openxmlformats.org/drawingml/2006/main" xmlns:r="http://schemas.openxmlformats.org/officeDocument/2006/relationships" xmlns:p="http://schemas.openxmlformats.org/presentationml/2006/main">
+  <p:cSld>
+    <p:spTree>
+      <p:nvGrpSpPr>
+        <p:cNvPr id="1" name="">
+          <a:extLst>
+            <a:ext uri="{FF2B5EF4-FFF2-40B4-BE49-F238E27FC236}">
+              <a16:creationId xmlns:a16="http://schemas.microsoft.com/office/drawing/2014/main" id="{1CABAE07-294C-F097-A42D-EDF9268C1565}"/>
+            </a:ext>
+          </a:extLst>
+        </p:cNvPr>
+        <p:cNvGrpSpPr/>
+        <p:nvPr/>
+      </p:nvGrpSpPr>
+      <p:grpSpPr>
+        <a:xfrm>
+          <a:off x="0" y="0"/>
+          <a:ext cx="0" cy="0"/>
+          <a:chOff x="0" y="0"/>
+          <a:chExt cx="0" cy="0"/>
+        </a:xfrm>
+      </p:grpSpPr>
+      <p:sp>
+        <p:nvSpPr>
+          <p:cNvPr id="3" name="Metin kutusu 2">
+            <a:extLst>
+              <a:ext uri="{FF2B5EF4-FFF2-40B4-BE49-F238E27FC236}">
+                <a16:creationId xmlns:a16="http://schemas.microsoft.com/office/drawing/2014/main" id="{AD1CFB61-EA21-4355-182E-8B560C34852C}"/>
+              </a:ext>
+            </a:extLst>
+          </p:cNvPr>
+          <p:cNvSpPr txBox="1"/>
+          <p:nvPr/>
+        </p:nvSpPr>
+        <p:spPr>
+          <a:xfrm>
+            <a:off x="7541342" y="400664"/>
+            <a:ext cx="3764595" cy="1384995"/>
+          </a:xfrm>
+          <a:prstGeom prst="rect">
+            <a:avLst/>
+          </a:prstGeom>
+          <a:noFill/>
+        </p:spPr>
+        <p:txBody>
+          <a:bodyPr wrap="square" rtlCol="0">
+            <a:spAutoFit/>
+          </a:bodyPr>
+          <a:lstStyle/>
+          <a:p>
+            <a:r>
+              <a:rPr lang="tr-TR" sz="2800" dirty="0"/>
+              <a:t>Google: </a:t>
+            </a:r>
+            <a:r>
+              <a:rPr lang="en-US" sz="2800" dirty="0"/>
+              <a:t>what are the 10 richest companies in the world</a:t>
+            </a:r>
+            <a:endParaRPr lang="tr-TR" sz="2800" dirty="0"/>
+          </a:p>
+        </p:txBody>
+      </p:sp>
+      <p:pic>
+        <p:nvPicPr>
+          <p:cNvPr id="8" name="Resim 7">
+            <a:extLst>
+              <a:ext uri="{FF2B5EF4-FFF2-40B4-BE49-F238E27FC236}">
+                <a16:creationId xmlns:a16="http://schemas.microsoft.com/office/drawing/2014/main" id="{EA8D7916-682F-DBCA-3FFF-766555EC290C}"/>
+              </a:ext>
+            </a:extLst>
+          </p:cNvPr>
+          <p:cNvPicPr>
+            <a:picLocks noChangeAspect="1"/>
+          </p:cNvPicPr>
+          <p:nvPr/>
+        </p:nvPicPr>
+        <p:blipFill>
+          <a:blip r:embed="rId2">
+            <a:extLst>
+              <a:ext uri="{28A0092B-C50C-407E-A947-70E740481C1C}">
+                <a14:useLocalDpi xmlns:a14="http://schemas.microsoft.com/office/drawing/2010/main" val="0"/>
+              </a:ext>
+            </a:extLst>
+          </a:blip>
+          <a:stretch>
+            <a:fillRect/>
+          </a:stretch>
+        </p:blipFill>
+        <p:spPr>
+          <a:xfrm>
+            <a:off x="886063" y="0"/>
+            <a:ext cx="5482114" cy="6858000"/>
+          </a:xfrm>
+          <a:prstGeom prst="rect">
+            <a:avLst/>
+          </a:prstGeom>
+        </p:spPr>
+      </p:pic>
+      <p:sp>
+        <p:nvSpPr>
+          <p:cNvPr id="2" name="Veri Yer Tutucusu 1">
+            <a:extLst>
+              <a:ext uri="{FF2B5EF4-FFF2-40B4-BE49-F238E27FC236}">
+                <a16:creationId xmlns:a16="http://schemas.microsoft.com/office/drawing/2014/main" id="{54D03920-07D5-DC2C-EC22-F2CEBBE393BC}"/>
+              </a:ext>
+            </a:extLst>
+          </p:cNvPr>
+          <p:cNvSpPr>
+            <a:spLocks noGrp="1"/>
+          </p:cNvSpPr>
+          <p:nvPr>
+            <p:ph type="dt" sz="half" idx="10"/>
+          </p:nvPr>
+        </p:nvSpPr>
+        <p:spPr/>
+        <p:txBody>
+          <a:bodyPr/>
+          <a:lstStyle/>
+          <a:p>
+            <a:fld id="{7B1B89AA-5FB4-493D-B316-F46593A9A95F}" type="datetime1">
+              <a:rPr lang="tr-TR" smtClean="0"/>
+              <a:t>11.10.2026</a:t>
+            </a:fld>
+            <a:endParaRPr lang="tr-TR"/>
+          </a:p>
+        </p:txBody>
+      </p:sp>
+      <p:sp>
+        <p:nvSpPr>
+          <p:cNvPr id="4" name="Alt Bilgi Yer Tutucusu 3">
+            <a:extLst>
+              <a:ext uri="{FF2B5EF4-FFF2-40B4-BE49-F238E27FC236}">
+                <a16:creationId xmlns:a16="http://schemas.microsoft.com/office/drawing/2014/main" id="{A77591FE-4584-A809-E335-3D17B66CFE84}"/>
+              </a:ext>
+            </a:extLst>
+          </p:cNvPr>
+          <p:cNvSpPr>
+            <a:spLocks noGrp="1"/>
+          </p:cNvSpPr>
+          <p:nvPr>
+            <p:ph type="ftr" sz="quarter" idx="11"/>
+          </p:nvPr>
+        </p:nvSpPr>
+        <p:spPr/>
+        <p:txBody>
+          <a:bodyPr/>
+          <a:lstStyle/>
+          <a:p>
+            <a:r>
+              <a:rPr lang="tr-TR"/>
+              <a:t>Copyright: Harun Altay</a:t>
+            </a:r>
+          </a:p>
+        </p:txBody>
+      </p:sp>
+      <p:sp>
+        <p:nvSpPr>
+          <p:cNvPr id="5" name="Slayt Numarası Yer Tutucusu 4">
+            <a:extLst>
+              <a:ext uri="{FF2B5EF4-FFF2-40B4-BE49-F238E27FC236}">
+                <a16:creationId xmlns:a16="http://schemas.microsoft.com/office/drawing/2014/main" id="{25592B3D-83CF-A7BB-220D-A0494BA4B63F}"/>
+              </a:ext>
+            </a:extLst>
+          </p:cNvPr>
+          <p:cNvSpPr>
+            <a:spLocks noGrp="1"/>
+          </p:cNvSpPr>
+          <p:nvPr>
+            <p:ph type="sldNum" sz="quarter" idx="12"/>
+          </p:nvPr>
+        </p:nvSpPr>
+        <p:spPr/>
+        <p:txBody>
+          <a:bodyPr/>
+          <a:lstStyle/>
+          <a:p>
+            <a:fld id="{556A583B-49D3-4431-A76E-53060577655C}" type="slidenum">
+              <a:rPr lang="tr-TR" smtClean="0"/>
+              <a:t>4</a:t>
+            </a:fld>
+            <a:endParaRPr lang="tr-TR"/>
+          </a:p>
+        </p:txBody>
+      </p:sp>
+    </p:spTree>
+    <p:extLst>
+      <p:ext uri="{BB962C8B-B14F-4D97-AF65-F5344CB8AC3E}">
+        <p14:creationId xmlns:p14="http://schemas.microsoft.com/office/powerpoint/2010/main" val="219443333"/>
+      </p:ext>
+    </p:extLst>
+  </p:cSld>
+  <p:clrMapOvr>
+    <a:masterClrMapping/>
+  </p:clrMapOvr>
+</p:sld>
+</file>
+
+<file path=ppt/slides/slide40.xml><?xml version="1.0" encoding="utf-8"?>
 <p:sld xmlns:a="http://schemas.openxmlformats.org/drawingml/2006/main" xmlns:r="http://schemas.openxmlformats.org/officeDocument/2006/relationships" xmlns:p="http://schemas.openxmlformats.org/presentationml/2006/main">
   <p:cSld>
     <p:spTree>
@@ -19209,7 +20029,7 @@
           <a:p>
             <a:fld id="{E63A8578-5729-4698-B75A-697A7B849C6B}" type="datetime1">
               <a:rPr lang="tr-TR" smtClean="0"/>
-              <a:t>4.10.2026</a:t>
+              <a:t>11.10.2026</a:t>
             </a:fld>
             <a:endParaRPr lang="tr-TR"/>
           </a:p>
@@ -19266,7 +20086,7 @@
           <a:p>
             <a:fld id="{556A583B-49D3-4431-A76E-53060577655C}" type="slidenum">
               <a:rPr lang="tr-TR" smtClean="0"/>
-              <a:t>37</a:t>
+              <a:t>40</a:t>
             </a:fld>
             <a:endParaRPr lang="tr-TR"/>
           </a:p>
@@ -19285,7 +20105,7 @@
 </p:sld>
 </file>
 
-<file path=ppt/slides/slide38.xml><?xml version="1.0" encoding="utf-8"?>
+<file path=ppt/slides/slide41.xml><?xml version="1.0" encoding="utf-8"?>
 <p:sld xmlns:a="http://schemas.openxmlformats.org/drawingml/2006/main" xmlns:r="http://schemas.openxmlformats.org/officeDocument/2006/relationships" xmlns:p="http://schemas.openxmlformats.org/presentationml/2006/main">
   <p:cSld>
     <p:spTree>
@@ -21411,7 +22231,7 @@
           <a:p>
             <a:fld id="{9BA91D5A-8F65-43FB-8387-B591ADB0FFD0}" type="datetime1">
               <a:rPr lang="tr-TR" smtClean="0"/>
-              <a:t>4.10.2026</a:t>
+              <a:t>11.10.2026</a:t>
             </a:fld>
             <a:endParaRPr lang="tr-TR"/>
           </a:p>
@@ -21468,7 +22288,7 @@
           <a:p>
             <a:fld id="{556A583B-49D3-4431-A76E-53060577655C}" type="slidenum">
               <a:rPr lang="tr-TR" smtClean="0"/>
-              <a:t>38</a:t>
+              <a:t>41</a:t>
             </a:fld>
             <a:endParaRPr lang="tr-TR"/>
           </a:p>
@@ -21487,7 +22307,7 @@
 </p:sld>
 </file>
 
-<file path=ppt/slides/slide39.xml><?xml version="1.0" encoding="utf-8"?>
+<file path=ppt/slides/slide42.xml><?xml version="1.0" encoding="utf-8"?>
 <p:sld xmlns:a="http://schemas.openxmlformats.org/drawingml/2006/main" xmlns:r="http://schemas.openxmlformats.org/officeDocument/2006/relationships" xmlns:p="http://schemas.openxmlformats.org/presentationml/2006/main">
   <p:cSld>
     <p:spTree>
@@ -23677,7 +24497,7 @@
           <a:p>
             <a:fld id="{0E10597F-D483-4BFD-B2B0-1D4F7E5A9B84}" type="datetime1">
               <a:rPr lang="tr-TR" smtClean="0"/>
-              <a:t>4.10.2026</a:t>
+              <a:t>11.10.2026</a:t>
             </a:fld>
             <a:endParaRPr lang="tr-TR"/>
           </a:p>
@@ -23734,7 +24554,7 @@
           <a:p>
             <a:fld id="{556A583B-49D3-4431-A76E-53060577655C}" type="slidenum">
               <a:rPr lang="tr-TR" smtClean="0"/>
-              <a:t>39</a:t>
+              <a:t>42</a:t>
             </a:fld>
             <a:endParaRPr lang="tr-TR"/>
           </a:p>
@@ -23753,205 +24573,7 @@
 </p:sld>
 </file>
 
-<file path=ppt/slides/slide4.xml><?xml version="1.0" encoding="utf-8"?>
-<p:sld xmlns:a="http://schemas.openxmlformats.org/drawingml/2006/main" xmlns:r="http://schemas.openxmlformats.org/officeDocument/2006/relationships" xmlns:p="http://schemas.openxmlformats.org/presentationml/2006/main">
-  <p:cSld>
-    <p:spTree>
-      <p:nvGrpSpPr>
-        <p:cNvPr id="1" name="">
-          <a:extLst>
-            <a:ext uri="{FF2B5EF4-FFF2-40B4-BE49-F238E27FC236}">
-              <a16:creationId xmlns:a16="http://schemas.microsoft.com/office/drawing/2014/main" id="{1CABAE07-294C-F097-A42D-EDF9268C1565}"/>
-            </a:ext>
-          </a:extLst>
-        </p:cNvPr>
-        <p:cNvGrpSpPr/>
-        <p:nvPr/>
-      </p:nvGrpSpPr>
-      <p:grpSpPr>
-        <a:xfrm>
-          <a:off x="0" y="0"/>
-          <a:ext cx="0" cy="0"/>
-          <a:chOff x="0" y="0"/>
-          <a:chExt cx="0" cy="0"/>
-        </a:xfrm>
-      </p:grpSpPr>
-      <p:sp>
-        <p:nvSpPr>
-          <p:cNvPr id="3" name="Metin kutusu 2">
-            <a:extLst>
-              <a:ext uri="{FF2B5EF4-FFF2-40B4-BE49-F238E27FC236}">
-                <a16:creationId xmlns:a16="http://schemas.microsoft.com/office/drawing/2014/main" id="{AD1CFB61-EA21-4355-182E-8B560C34852C}"/>
-              </a:ext>
-            </a:extLst>
-          </p:cNvPr>
-          <p:cNvSpPr txBox="1"/>
-          <p:nvPr/>
-        </p:nvSpPr>
-        <p:spPr>
-          <a:xfrm>
-            <a:off x="7541342" y="400664"/>
-            <a:ext cx="3764595" cy="1384995"/>
-          </a:xfrm>
-          <a:prstGeom prst="rect">
-            <a:avLst/>
-          </a:prstGeom>
-          <a:noFill/>
-        </p:spPr>
-        <p:txBody>
-          <a:bodyPr wrap="square" rtlCol="0">
-            <a:spAutoFit/>
-          </a:bodyPr>
-          <a:lstStyle/>
-          <a:p>
-            <a:r>
-              <a:rPr lang="tr-TR" sz="2800" dirty="0"/>
-              <a:t>Google: </a:t>
-            </a:r>
-            <a:r>
-              <a:rPr lang="en-US" sz="2800" dirty="0"/>
-              <a:t>what are the 10 richest companies in the world</a:t>
-            </a:r>
-            <a:endParaRPr lang="tr-TR" sz="2800" dirty="0"/>
-          </a:p>
-        </p:txBody>
-      </p:sp>
-      <p:pic>
-        <p:nvPicPr>
-          <p:cNvPr id="8" name="Resim 7">
-            <a:extLst>
-              <a:ext uri="{FF2B5EF4-FFF2-40B4-BE49-F238E27FC236}">
-                <a16:creationId xmlns:a16="http://schemas.microsoft.com/office/drawing/2014/main" id="{EA8D7916-682F-DBCA-3FFF-766555EC290C}"/>
-              </a:ext>
-            </a:extLst>
-          </p:cNvPr>
-          <p:cNvPicPr>
-            <a:picLocks noChangeAspect="1"/>
-          </p:cNvPicPr>
-          <p:nvPr/>
-        </p:nvPicPr>
-        <p:blipFill>
-          <a:blip r:embed="rId2">
-            <a:extLst>
-              <a:ext uri="{28A0092B-C50C-407E-A947-70E740481C1C}">
-                <a14:useLocalDpi xmlns:a14="http://schemas.microsoft.com/office/drawing/2010/main" val="0"/>
-              </a:ext>
-            </a:extLst>
-          </a:blip>
-          <a:stretch>
-            <a:fillRect/>
-          </a:stretch>
-        </p:blipFill>
-        <p:spPr>
-          <a:xfrm>
-            <a:off x="886063" y="0"/>
-            <a:ext cx="5482114" cy="6858000"/>
-          </a:xfrm>
-          <a:prstGeom prst="rect">
-            <a:avLst/>
-          </a:prstGeom>
-        </p:spPr>
-      </p:pic>
-      <p:sp>
-        <p:nvSpPr>
-          <p:cNvPr id="2" name="Veri Yer Tutucusu 1">
-            <a:extLst>
-              <a:ext uri="{FF2B5EF4-FFF2-40B4-BE49-F238E27FC236}">
-                <a16:creationId xmlns:a16="http://schemas.microsoft.com/office/drawing/2014/main" id="{54D03920-07D5-DC2C-EC22-F2CEBBE393BC}"/>
-              </a:ext>
-            </a:extLst>
-          </p:cNvPr>
-          <p:cNvSpPr>
-            <a:spLocks noGrp="1"/>
-          </p:cNvSpPr>
-          <p:nvPr>
-            <p:ph type="dt" sz="half" idx="10"/>
-          </p:nvPr>
-        </p:nvSpPr>
-        <p:spPr/>
-        <p:txBody>
-          <a:bodyPr/>
-          <a:lstStyle/>
-          <a:p>
-            <a:fld id="{7B1B89AA-5FB4-493D-B316-F46593A9A95F}" type="datetime1">
-              <a:rPr lang="tr-TR" smtClean="0"/>
-              <a:t>4.10.2026</a:t>
-            </a:fld>
-            <a:endParaRPr lang="tr-TR"/>
-          </a:p>
-        </p:txBody>
-      </p:sp>
-      <p:sp>
-        <p:nvSpPr>
-          <p:cNvPr id="4" name="Alt Bilgi Yer Tutucusu 3">
-            <a:extLst>
-              <a:ext uri="{FF2B5EF4-FFF2-40B4-BE49-F238E27FC236}">
-                <a16:creationId xmlns:a16="http://schemas.microsoft.com/office/drawing/2014/main" id="{A77591FE-4584-A809-E335-3D17B66CFE84}"/>
-              </a:ext>
-            </a:extLst>
-          </p:cNvPr>
-          <p:cNvSpPr>
-            <a:spLocks noGrp="1"/>
-          </p:cNvSpPr>
-          <p:nvPr>
-            <p:ph type="ftr" sz="quarter" idx="11"/>
-          </p:nvPr>
-        </p:nvSpPr>
-        <p:spPr/>
-        <p:txBody>
-          <a:bodyPr/>
-          <a:lstStyle/>
-          <a:p>
-            <a:r>
-              <a:rPr lang="tr-TR"/>
-              <a:t>Copyright: Harun Altay</a:t>
-            </a:r>
-          </a:p>
-        </p:txBody>
-      </p:sp>
-      <p:sp>
-        <p:nvSpPr>
-          <p:cNvPr id="5" name="Slayt Numarası Yer Tutucusu 4">
-            <a:extLst>
-              <a:ext uri="{FF2B5EF4-FFF2-40B4-BE49-F238E27FC236}">
-                <a16:creationId xmlns:a16="http://schemas.microsoft.com/office/drawing/2014/main" id="{25592B3D-83CF-A7BB-220D-A0494BA4B63F}"/>
-              </a:ext>
-            </a:extLst>
-          </p:cNvPr>
-          <p:cNvSpPr>
-            <a:spLocks noGrp="1"/>
-          </p:cNvSpPr>
-          <p:nvPr>
-            <p:ph type="sldNum" sz="quarter" idx="12"/>
-          </p:nvPr>
-        </p:nvSpPr>
-        <p:spPr/>
-        <p:txBody>
-          <a:bodyPr/>
-          <a:lstStyle/>
-          <a:p>
-            <a:fld id="{556A583B-49D3-4431-A76E-53060577655C}" type="slidenum">
-              <a:rPr lang="tr-TR" smtClean="0"/>
-              <a:t>4</a:t>
-            </a:fld>
-            <a:endParaRPr lang="tr-TR"/>
-          </a:p>
-        </p:txBody>
-      </p:sp>
-    </p:spTree>
-    <p:extLst>
-      <p:ext uri="{BB962C8B-B14F-4D97-AF65-F5344CB8AC3E}">
-        <p14:creationId xmlns:p14="http://schemas.microsoft.com/office/powerpoint/2010/main" val="219443333"/>
-      </p:ext>
-    </p:extLst>
-  </p:cSld>
-  <p:clrMapOvr>
-    <a:masterClrMapping/>
-  </p:clrMapOvr>
-</p:sld>
-</file>
-
-<file path=ppt/slides/slide40.xml><?xml version="1.0" encoding="utf-8"?>
+<file path=ppt/slides/slide43.xml><?xml version="1.0" encoding="utf-8"?>
 <p:sld xmlns:a="http://schemas.openxmlformats.org/drawingml/2006/main" xmlns:r="http://schemas.openxmlformats.org/officeDocument/2006/relationships" xmlns:p="http://schemas.openxmlformats.org/presentationml/2006/main">
   <p:cSld>
     <p:spTree>
@@ -25080,7 +25702,7 @@
           <a:p>
             <a:fld id="{5853EFAC-713B-4191-9ABC-0BBAF9FE73FC}" type="datetime1">
               <a:rPr lang="tr-TR" smtClean="0"/>
-              <a:t>4.10.2026</a:t>
+              <a:t>11.10.2026</a:t>
             </a:fld>
             <a:endParaRPr lang="tr-TR"/>
           </a:p>
@@ -25137,7 +25759,7 @@
           <a:p>
             <a:fld id="{556A583B-49D3-4431-A76E-53060577655C}" type="slidenum">
               <a:rPr lang="tr-TR" smtClean="0"/>
-              <a:t>40</a:t>
+              <a:t>43</a:t>
             </a:fld>
             <a:endParaRPr lang="tr-TR"/>
           </a:p>
@@ -25156,7 +25778,7 @@
 </p:sld>
 </file>
 
-<file path=ppt/slides/slide41.xml><?xml version="1.0" encoding="utf-8"?>
+<file path=ppt/slides/slide44.xml><?xml version="1.0" encoding="utf-8"?>
 <p:sld xmlns:a="http://schemas.openxmlformats.org/drawingml/2006/main" xmlns:r="http://schemas.openxmlformats.org/officeDocument/2006/relationships" xmlns:p="http://schemas.openxmlformats.org/presentationml/2006/main">
   <p:cSld>
     <p:spTree>
@@ -26273,7 +26895,7 @@
           <a:p>
             <a:fld id="{D3D34EA4-C8F4-4552-BADA-D01235E7140F}" type="datetime1">
               <a:rPr lang="tr-TR" smtClean="0"/>
-              <a:t>4.10.2026</a:t>
+              <a:t>11.10.2026</a:t>
             </a:fld>
             <a:endParaRPr lang="tr-TR"/>
           </a:p>
@@ -26330,7 +26952,7 @@
           <a:p>
             <a:fld id="{556A583B-49D3-4431-A76E-53060577655C}" type="slidenum">
               <a:rPr lang="tr-TR" smtClean="0"/>
-              <a:t>41</a:t>
+              <a:t>44</a:t>
             </a:fld>
             <a:endParaRPr lang="tr-TR"/>
           </a:p>
@@ -26349,7 +26971,7 @@
 </p:sld>
 </file>
 
-<file path=ppt/slides/slide42.xml><?xml version="1.0" encoding="utf-8"?>
+<file path=ppt/slides/slide45.xml><?xml version="1.0" encoding="utf-8"?>
 <p:sld xmlns:a="http://schemas.openxmlformats.org/drawingml/2006/main" xmlns:r="http://schemas.openxmlformats.org/officeDocument/2006/relationships" xmlns:p="http://schemas.openxmlformats.org/presentationml/2006/main">
   <p:cSld>
     <p:spTree>
@@ -27792,7 +28414,7 @@
           <a:p>
             <a:fld id="{5509749A-2EB7-4F9E-AD7B-0F3BBF606F33}" type="datetime1">
               <a:rPr lang="tr-TR" smtClean="0"/>
-              <a:t>4.10.2026</a:t>
+              <a:t>11.10.2026</a:t>
             </a:fld>
             <a:endParaRPr lang="tr-TR"/>
           </a:p>
@@ -27849,7 +28471,7 @@
           <a:p>
             <a:fld id="{556A583B-49D3-4431-A76E-53060577655C}" type="slidenum">
               <a:rPr lang="tr-TR" smtClean="0"/>
-              <a:t>42</a:t>
+              <a:t>45</a:t>
             </a:fld>
             <a:endParaRPr lang="tr-TR"/>
           </a:p>
@@ -27868,7 +28490,7 @@
 </p:sld>
 </file>
 
-<file path=ppt/slides/slide43.xml><?xml version="1.0" encoding="utf-8"?>
+<file path=ppt/slides/slide46.xml><?xml version="1.0" encoding="utf-8"?>
 <p:sld xmlns:a="http://schemas.openxmlformats.org/drawingml/2006/main" xmlns:r="http://schemas.openxmlformats.org/officeDocument/2006/relationships" xmlns:p="http://schemas.openxmlformats.org/presentationml/2006/main">
   <p:cSld>
     <p:spTree>
@@ -29401,7 +30023,7 @@
           <a:p>
             <a:fld id="{A817920D-3E93-4E06-A30C-5B5C0E8598E5}" type="datetime1">
               <a:rPr lang="tr-TR" smtClean="0"/>
-              <a:t>4.10.2026</a:t>
+              <a:t>11.10.2026</a:t>
             </a:fld>
             <a:endParaRPr lang="tr-TR"/>
           </a:p>
@@ -29458,7 +30080,7 @@
           <a:p>
             <a:fld id="{556A583B-49D3-4431-A76E-53060577655C}" type="slidenum">
               <a:rPr lang="tr-TR" smtClean="0"/>
-              <a:t>43</a:t>
+              <a:t>46</a:t>
             </a:fld>
             <a:endParaRPr lang="tr-TR"/>
           </a:p>
@@ -29477,7 +30099,7 @@
 </p:sld>
 </file>
 
-<file path=ppt/slides/slide44.xml><?xml version="1.0" encoding="utf-8"?>
+<file path=ppt/slides/slide47.xml><?xml version="1.0" encoding="utf-8"?>
 <p:sld xmlns:a="http://schemas.openxmlformats.org/drawingml/2006/main" xmlns:r="http://schemas.openxmlformats.org/officeDocument/2006/relationships" xmlns:p="http://schemas.openxmlformats.org/presentationml/2006/main">
   <p:cSld>
     <p:spTree>
@@ -29575,7 +30197,7 @@
           <a:p>
             <a:fld id="{E5A72F27-F128-4B68-926B-C496DC38618F}" type="datetime1">
               <a:rPr lang="tr-TR" smtClean="0"/>
-              <a:t>4.10.2026</a:t>
+              <a:t>11.10.2026</a:t>
             </a:fld>
             <a:endParaRPr lang="tr-TR"/>
           </a:p>
@@ -29632,7 +30254,7 @@
           <a:p>
             <a:fld id="{556A583B-49D3-4431-A76E-53060577655C}" type="slidenum">
               <a:rPr lang="tr-TR" smtClean="0"/>
-              <a:t>44</a:t>
+              <a:t>47</a:t>
             </a:fld>
             <a:endParaRPr lang="tr-TR"/>
           </a:p>
@@ -29651,7 +30273,7 @@
 </p:sld>
 </file>
 
-<file path=ppt/slides/slide45.xml><?xml version="1.0" encoding="utf-8"?>
+<file path=ppt/slides/slide48.xml><?xml version="1.0" encoding="utf-8"?>
 <p:sld xmlns:a="http://schemas.openxmlformats.org/drawingml/2006/main" xmlns:r="http://schemas.openxmlformats.org/officeDocument/2006/relationships" xmlns:p="http://schemas.openxmlformats.org/presentationml/2006/main">
   <p:cSld>
     <p:spTree>
@@ -29755,7 +30377,7 @@
           <a:p>
             <a:fld id="{E5A72F27-F128-4B68-926B-C496DC38618F}" type="datetime1">
               <a:rPr lang="tr-TR" smtClean="0"/>
-              <a:t>4.10.2026</a:t>
+              <a:t>11.10.2026</a:t>
             </a:fld>
             <a:endParaRPr lang="tr-TR"/>
           </a:p>
@@ -29812,7 +30434,7 @@
           <a:p>
             <a:fld id="{556A583B-49D3-4431-A76E-53060577655C}" type="slidenum">
               <a:rPr lang="tr-TR" smtClean="0"/>
-              <a:t>45</a:t>
+              <a:t>48</a:t>
             </a:fld>
             <a:endParaRPr lang="tr-TR"/>
           </a:p>
@@ -29831,7 +30453,7 @@
 </p:sld>
 </file>
 
-<file path=ppt/slides/slide46.xml><?xml version="1.0" encoding="utf-8"?>
+<file path=ppt/slides/slide49.xml><?xml version="1.0" encoding="utf-8"?>
 <p:sld xmlns:a="http://schemas.openxmlformats.org/drawingml/2006/main" xmlns:r="http://schemas.openxmlformats.org/officeDocument/2006/relationships" xmlns:p="http://schemas.openxmlformats.org/presentationml/2006/main">
   <p:cSld>
     <p:spTree>
@@ -29943,7 +30565,7 @@
           <a:p>
             <a:fld id="{E5A72F27-F128-4B68-926B-C496DC38618F}" type="datetime1">
               <a:rPr lang="tr-TR" smtClean="0"/>
-              <a:t>4.10.2026</a:t>
+              <a:t>11.10.2026</a:t>
             </a:fld>
             <a:endParaRPr lang="tr-TR"/>
           </a:p>
@@ -29983,546 +30605,6 @@
             <a:extLst>
               <a:ext uri="{FF2B5EF4-FFF2-40B4-BE49-F238E27FC236}">
                 <a16:creationId xmlns:a16="http://schemas.microsoft.com/office/drawing/2014/main" id="{76B6371E-D351-EDEA-D0F7-8A8019A2A795}"/>
-              </a:ext>
-            </a:extLst>
-          </p:cNvPr>
-          <p:cNvSpPr>
-            <a:spLocks noGrp="1"/>
-          </p:cNvSpPr>
-          <p:nvPr>
-            <p:ph type="sldNum" sz="quarter" idx="12"/>
-          </p:nvPr>
-        </p:nvSpPr>
-        <p:spPr/>
-        <p:txBody>
-          <a:bodyPr/>
-          <a:lstStyle/>
-          <a:p>
-            <a:fld id="{556A583B-49D3-4431-A76E-53060577655C}" type="slidenum">
-              <a:rPr lang="tr-TR" smtClean="0"/>
-              <a:t>46</a:t>
-            </a:fld>
-            <a:endParaRPr lang="tr-TR"/>
-          </a:p>
-        </p:txBody>
-      </p:sp>
-    </p:spTree>
-    <p:extLst>
-      <p:ext uri="{BB962C8B-B14F-4D97-AF65-F5344CB8AC3E}">
-        <p14:creationId xmlns:p14="http://schemas.microsoft.com/office/powerpoint/2010/main" val="454016312"/>
-      </p:ext>
-    </p:extLst>
-  </p:cSld>
-  <p:clrMapOvr>
-    <a:masterClrMapping/>
-  </p:clrMapOvr>
-</p:sld>
-</file>
-
-<file path=ppt/slides/slide47.xml><?xml version="1.0" encoding="utf-8"?>
-<p:sld xmlns:a="http://schemas.openxmlformats.org/drawingml/2006/main" xmlns:r="http://schemas.openxmlformats.org/officeDocument/2006/relationships" xmlns:p="http://schemas.openxmlformats.org/presentationml/2006/main">
-  <p:cSld>
-    <p:spTree>
-      <p:nvGrpSpPr>
-        <p:cNvPr id="1" name="">
-          <a:extLst>
-            <a:ext uri="{FF2B5EF4-FFF2-40B4-BE49-F238E27FC236}">
-              <a16:creationId xmlns:a16="http://schemas.microsoft.com/office/drawing/2014/main" id="{CED4DE73-23B7-95E8-F432-04B974A3FB8C}"/>
-            </a:ext>
-          </a:extLst>
-        </p:cNvPr>
-        <p:cNvGrpSpPr/>
-        <p:nvPr/>
-      </p:nvGrpSpPr>
-      <p:grpSpPr>
-        <a:xfrm>
-          <a:off x="0" y="0"/>
-          <a:ext cx="0" cy="0"/>
-          <a:chOff x="0" y="0"/>
-          <a:chExt cx="0" cy="0"/>
-        </a:xfrm>
-      </p:grpSpPr>
-      <p:sp>
-        <p:nvSpPr>
-          <p:cNvPr id="2" name="Başlık 1">
-            <a:extLst>
-              <a:ext uri="{FF2B5EF4-FFF2-40B4-BE49-F238E27FC236}">
-                <a16:creationId xmlns:a16="http://schemas.microsoft.com/office/drawing/2014/main" id="{5BF2B6D4-6B1D-4380-BF22-F73138BBFB92}"/>
-              </a:ext>
-            </a:extLst>
-          </p:cNvPr>
-          <p:cNvSpPr>
-            <a:spLocks noGrp="1"/>
-          </p:cNvSpPr>
-          <p:nvPr>
-            <p:ph type="title"/>
-          </p:nvPr>
-        </p:nvSpPr>
-        <p:spPr/>
-        <p:txBody>
-          <a:bodyPr>
-            <a:normAutofit/>
-          </a:bodyPr>
-          <a:lstStyle/>
-          <a:p>
-            <a:r>
-              <a:rPr lang="tr-TR" sz="2800" dirty="0"/>
-              <a:t>Kod: Metni tersten yazdırma</a:t>
-            </a:r>
-          </a:p>
-        </p:txBody>
-      </p:sp>
-      <p:sp>
-        <p:nvSpPr>
-          <p:cNvPr id="3" name="İçerik Yer Tutucusu 2">
-            <a:extLst>
-              <a:ext uri="{FF2B5EF4-FFF2-40B4-BE49-F238E27FC236}">
-                <a16:creationId xmlns:a16="http://schemas.microsoft.com/office/drawing/2014/main" id="{BC1AC6BB-301A-FDF2-FE29-C80379A7D09E}"/>
-              </a:ext>
-            </a:extLst>
-          </p:cNvPr>
-          <p:cNvSpPr>
-            <a:spLocks noGrp="1"/>
-          </p:cNvSpPr>
-          <p:nvPr>
-            <p:ph idx="1"/>
-          </p:nvPr>
-        </p:nvSpPr>
-        <p:spPr/>
-        <p:txBody>
-          <a:bodyPr/>
-          <a:lstStyle/>
-          <a:p>
-            <a:r>
-              <a:rPr lang="tr-TR" dirty="0"/>
-              <a:t>Çamoğlu 3, 149</a:t>
-            </a:r>
-          </a:p>
-        </p:txBody>
-      </p:sp>
-      <p:sp>
-        <p:nvSpPr>
-          <p:cNvPr id="4" name="Veri Yer Tutucusu 3">
-            <a:extLst>
-              <a:ext uri="{FF2B5EF4-FFF2-40B4-BE49-F238E27FC236}">
-                <a16:creationId xmlns:a16="http://schemas.microsoft.com/office/drawing/2014/main" id="{9E31C6BA-1998-014D-DF7C-42A13C5A2FB2}"/>
-              </a:ext>
-            </a:extLst>
-          </p:cNvPr>
-          <p:cNvSpPr>
-            <a:spLocks noGrp="1"/>
-          </p:cNvSpPr>
-          <p:nvPr>
-            <p:ph type="dt" sz="half" idx="10"/>
-          </p:nvPr>
-        </p:nvSpPr>
-        <p:spPr/>
-        <p:txBody>
-          <a:bodyPr/>
-          <a:lstStyle/>
-          <a:p>
-            <a:fld id="{E5A72F27-F128-4B68-926B-C496DC38618F}" type="datetime1">
-              <a:rPr lang="tr-TR" smtClean="0"/>
-              <a:t>4.10.2026</a:t>
-            </a:fld>
-            <a:endParaRPr lang="tr-TR"/>
-          </a:p>
-        </p:txBody>
-      </p:sp>
-      <p:sp>
-        <p:nvSpPr>
-          <p:cNvPr id="5" name="Alt Bilgi Yer Tutucusu 4">
-            <a:extLst>
-              <a:ext uri="{FF2B5EF4-FFF2-40B4-BE49-F238E27FC236}">
-                <a16:creationId xmlns:a16="http://schemas.microsoft.com/office/drawing/2014/main" id="{5A1D0F8D-AD83-B7BF-0E90-E9DB50F7B101}"/>
-              </a:ext>
-            </a:extLst>
-          </p:cNvPr>
-          <p:cNvSpPr>
-            <a:spLocks noGrp="1"/>
-          </p:cNvSpPr>
-          <p:nvPr>
-            <p:ph type="ftr" sz="quarter" idx="11"/>
-          </p:nvPr>
-        </p:nvSpPr>
-        <p:spPr/>
-        <p:txBody>
-          <a:bodyPr/>
-          <a:lstStyle/>
-          <a:p>
-            <a:r>
-              <a:rPr lang="tr-TR"/>
-              <a:t>Copyright: Harun Altay</a:t>
-            </a:r>
-          </a:p>
-        </p:txBody>
-      </p:sp>
-      <p:sp>
-        <p:nvSpPr>
-          <p:cNvPr id="6" name="Slayt Numarası Yer Tutucusu 5">
-            <a:extLst>
-              <a:ext uri="{FF2B5EF4-FFF2-40B4-BE49-F238E27FC236}">
-                <a16:creationId xmlns:a16="http://schemas.microsoft.com/office/drawing/2014/main" id="{C2FFF1C9-5826-20F5-2AF1-E28D98A352D9}"/>
-              </a:ext>
-            </a:extLst>
-          </p:cNvPr>
-          <p:cNvSpPr>
-            <a:spLocks noGrp="1"/>
-          </p:cNvSpPr>
-          <p:nvPr>
-            <p:ph type="sldNum" sz="quarter" idx="12"/>
-          </p:nvPr>
-        </p:nvSpPr>
-        <p:spPr/>
-        <p:txBody>
-          <a:bodyPr/>
-          <a:lstStyle/>
-          <a:p>
-            <a:fld id="{556A583B-49D3-4431-A76E-53060577655C}" type="slidenum">
-              <a:rPr lang="tr-TR" smtClean="0"/>
-              <a:t>47</a:t>
-            </a:fld>
-            <a:endParaRPr lang="tr-TR"/>
-          </a:p>
-        </p:txBody>
-      </p:sp>
-    </p:spTree>
-    <p:extLst>
-      <p:ext uri="{BB962C8B-B14F-4D97-AF65-F5344CB8AC3E}">
-        <p14:creationId xmlns:p14="http://schemas.microsoft.com/office/powerpoint/2010/main" val="2184441089"/>
-      </p:ext>
-    </p:extLst>
-  </p:cSld>
-  <p:clrMapOvr>
-    <a:masterClrMapping/>
-  </p:clrMapOvr>
-</p:sld>
-</file>
-
-<file path=ppt/slides/slide48.xml><?xml version="1.0" encoding="utf-8"?>
-<p:sld xmlns:a="http://schemas.openxmlformats.org/drawingml/2006/main" xmlns:r="http://schemas.openxmlformats.org/officeDocument/2006/relationships" xmlns:p="http://schemas.openxmlformats.org/presentationml/2006/main">
-  <p:cSld>
-    <p:spTree>
-      <p:nvGrpSpPr>
-        <p:cNvPr id="1" name="">
-          <a:extLst>
-            <a:ext uri="{FF2B5EF4-FFF2-40B4-BE49-F238E27FC236}">
-              <a16:creationId xmlns:a16="http://schemas.microsoft.com/office/drawing/2014/main" id="{390FA761-B1E4-9F50-5633-31DE57909661}"/>
-            </a:ext>
-          </a:extLst>
-        </p:cNvPr>
-        <p:cNvGrpSpPr/>
-        <p:nvPr/>
-      </p:nvGrpSpPr>
-      <p:grpSpPr>
-        <a:xfrm>
-          <a:off x="0" y="0"/>
-          <a:ext cx="0" cy="0"/>
-          <a:chOff x="0" y="0"/>
-          <a:chExt cx="0" cy="0"/>
-        </a:xfrm>
-      </p:grpSpPr>
-      <p:sp>
-        <p:nvSpPr>
-          <p:cNvPr id="2" name="Başlık 1">
-            <a:extLst>
-              <a:ext uri="{FF2B5EF4-FFF2-40B4-BE49-F238E27FC236}">
-                <a16:creationId xmlns:a16="http://schemas.microsoft.com/office/drawing/2014/main" id="{76F7AF56-F591-92A7-5DA8-30B0099CB88F}"/>
-              </a:ext>
-            </a:extLst>
-          </p:cNvPr>
-          <p:cNvSpPr>
-            <a:spLocks noGrp="1"/>
-          </p:cNvSpPr>
-          <p:nvPr>
-            <p:ph type="title"/>
-          </p:nvPr>
-        </p:nvSpPr>
-        <p:spPr/>
-        <p:txBody>
-          <a:bodyPr>
-            <a:normAutofit/>
-          </a:bodyPr>
-          <a:lstStyle/>
-          <a:p>
-            <a:r>
-              <a:rPr lang="tr-TR" sz="2800" dirty="0"/>
-              <a:t>Kod: Simetrik metin</a:t>
-            </a:r>
-          </a:p>
-        </p:txBody>
-      </p:sp>
-      <p:sp>
-        <p:nvSpPr>
-          <p:cNvPr id="3" name="İçerik Yer Tutucusu 2">
-            <a:extLst>
-              <a:ext uri="{FF2B5EF4-FFF2-40B4-BE49-F238E27FC236}">
-                <a16:creationId xmlns:a16="http://schemas.microsoft.com/office/drawing/2014/main" id="{55258F42-4BF2-179C-8ED4-CB773D672E5A}"/>
-              </a:ext>
-            </a:extLst>
-          </p:cNvPr>
-          <p:cNvSpPr>
-            <a:spLocks noGrp="1"/>
-          </p:cNvSpPr>
-          <p:nvPr>
-            <p:ph idx="1"/>
-          </p:nvPr>
-        </p:nvSpPr>
-        <p:spPr/>
-        <p:txBody>
-          <a:bodyPr/>
-          <a:lstStyle/>
-          <a:p>
-            <a:r>
-              <a:rPr lang="tr-TR" dirty="0"/>
-              <a:t>Çamoğlu 3, 151</a:t>
-            </a:r>
-          </a:p>
-        </p:txBody>
-      </p:sp>
-      <p:sp>
-        <p:nvSpPr>
-          <p:cNvPr id="4" name="Veri Yer Tutucusu 3">
-            <a:extLst>
-              <a:ext uri="{FF2B5EF4-FFF2-40B4-BE49-F238E27FC236}">
-                <a16:creationId xmlns:a16="http://schemas.microsoft.com/office/drawing/2014/main" id="{B66442F7-9339-ACDE-364E-932BBD486DB5}"/>
-              </a:ext>
-            </a:extLst>
-          </p:cNvPr>
-          <p:cNvSpPr>
-            <a:spLocks noGrp="1"/>
-          </p:cNvSpPr>
-          <p:nvPr>
-            <p:ph type="dt" sz="half" idx="10"/>
-          </p:nvPr>
-        </p:nvSpPr>
-        <p:spPr/>
-        <p:txBody>
-          <a:bodyPr/>
-          <a:lstStyle/>
-          <a:p>
-            <a:fld id="{E5A72F27-F128-4B68-926B-C496DC38618F}" type="datetime1">
-              <a:rPr lang="tr-TR" smtClean="0"/>
-              <a:t>4.10.2026</a:t>
-            </a:fld>
-            <a:endParaRPr lang="tr-TR"/>
-          </a:p>
-        </p:txBody>
-      </p:sp>
-      <p:sp>
-        <p:nvSpPr>
-          <p:cNvPr id="5" name="Alt Bilgi Yer Tutucusu 4">
-            <a:extLst>
-              <a:ext uri="{FF2B5EF4-FFF2-40B4-BE49-F238E27FC236}">
-                <a16:creationId xmlns:a16="http://schemas.microsoft.com/office/drawing/2014/main" id="{B26F6513-C9C8-EE74-E089-43FF0BF1A63D}"/>
-              </a:ext>
-            </a:extLst>
-          </p:cNvPr>
-          <p:cNvSpPr>
-            <a:spLocks noGrp="1"/>
-          </p:cNvSpPr>
-          <p:nvPr>
-            <p:ph type="ftr" sz="quarter" idx="11"/>
-          </p:nvPr>
-        </p:nvSpPr>
-        <p:spPr/>
-        <p:txBody>
-          <a:bodyPr/>
-          <a:lstStyle/>
-          <a:p>
-            <a:r>
-              <a:rPr lang="tr-TR"/>
-              <a:t>Copyright: Harun Altay</a:t>
-            </a:r>
-          </a:p>
-        </p:txBody>
-      </p:sp>
-      <p:sp>
-        <p:nvSpPr>
-          <p:cNvPr id="6" name="Slayt Numarası Yer Tutucusu 5">
-            <a:extLst>
-              <a:ext uri="{FF2B5EF4-FFF2-40B4-BE49-F238E27FC236}">
-                <a16:creationId xmlns:a16="http://schemas.microsoft.com/office/drawing/2014/main" id="{D0D5E862-AD7F-6D3E-0E17-C3C145065FC5}"/>
-              </a:ext>
-            </a:extLst>
-          </p:cNvPr>
-          <p:cNvSpPr>
-            <a:spLocks noGrp="1"/>
-          </p:cNvSpPr>
-          <p:nvPr>
-            <p:ph type="sldNum" sz="quarter" idx="12"/>
-          </p:nvPr>
-        </p:nvSpPr>
-        <p:spPr/>
-        <p:txBody>
-          <a:bodyPr/>
-          <a:lstStyle/>
-          <a:p>
-            <a:fld id="{556A583B-49D3-4431-A76E-53060577655C}" type="slidenum">
-              <a:rPr lang="tr-TR" smtClean="0"/>
-              <a:t>48</a:t>
-            </a:fld>
-            <a:endParaRPr lang="tr-TR"/>
-          </a:p>
-        </p:txBody>
-      </p:sp>
-    </p:spTree>
-    <p:extLst>
-      <p:ext uri="{BB962C8B-B14F-4D97-AF65-F5344CB8AC3E}">
-        <p14:creationId xmlns:p14="http://schemas.microsoft.com/office/powerpoint/2010/main" val="2225521562"/>
-      </p:ext>
-    </p:extLst>
-  </p:cSld>
-  <p:clrMapOvr>
-    <a:masterClrMapping/>
-  </p:clrMapOvr>
-</p:sld>
-</file>
-
-<file path=ppt/slides/slide49.xml><?xml version="1.0" encoding="utf-8"?>
-<p:sld xmlns:a="http://schemas.openxmlformats.org/drawingml/2006/main" xmlns:r="http://schemas.openxmlformats.org/officeDocument/2006/relationships" xmlns:p="http://schemas.openxmlformats.org/presentationml/2006/main">
-  <p:cSld>
-    <p:spTree>
-      <p:nvGrpSpPr>
-        <p:cNvPr id="1" name="">
-          <a:extLst>
-            <a:ext uri="{FF2B5EF4-FFF2-40B4-BE49-F238E27FC236}">
-              <a16:creationId xmlns:a16="http://schemas.microsoft.com/office/drawing/2014/main" id="{67CACFC1-81CA-6215-4EED-1EC16B302484}"/>
-            </a:ext>
-          </a:extLst>
-        </p:cNvPr>
-        <p:cNvGrpSpPr/>
-        <p:nvPr/>
-      </p:nvGrpSpPr>
-      <p:grpSpPr>
-        <a:xfrm>
-          <a:off x="0" y="0"/>
-          <a:ext cx="0" cy="0"/>
-          <a:chOff x="0" y="0"/>
-          <a:chExt cx="0" cy="0"/>
-        </a:xfrm>
-      </p:grpSpPr>
-      <p:sp>
-        <p:nvSpPr>
-          <p:cNvPr id="2" name="Başlık 1">
-            <a:extLst>
-              <a:ext uri="{FF2B5EF4-FFF2-40B4-BE49-F238E27FC236}">
-                <a16:creationId xmlns:a16="http://schemas.microsoft.com/office/drawing/2014/main" id="{71C459B9-B532-DFD3-CA94-37675B45BF75}"/>
-              </a:ext>
-            </a:extLst>
-          </p:cNvPr>
-          <p:cNvSpPr>
-            <a:spLocks noGrp="1"/>
-          </p:cNvSpPr>
-          <p:nvPr>
-            <p:ph type="title"/>
-          </p:nvPr>
-        </p:nvSpPr>
-        <p:spPr/>
-        <p:txBody>
-          <a:bodyPr>
-            <a:normAutofit/>
-          </a:bodyPr>
-          <a:lstStyle/>
-          <a:p>
-            <a:r>
-              <a:rPr lang="tr-TR" sz="2800" dirty="0"/>
-              <a:t>Kod: Asal sayılar</a:t>
-            </a:r>
-          </a:p>
-        </p:txBody>
-      </p:sp>
-      <p:sp>
-        <p:nvSpPr>
-          <p:cNvPr id="3" name="İçerik Yer Tutucusu 2">
-            <a:extLst>
-              <a:ext uri="{FF2B5EF4-FFF2-40B4-BE49-F238E27FC236}">
-                <a16:creationId xmlns:a16="http://schemas.microsoft.com/office/drawing/2014/main" id="{141836A8-C5A2-54B5-1D18-B8CAB0AFA536}"/>
-              </a:ext>
-            </a:extLst>
-          </p:cNvPr>
-          <p:cNvSpPr>
-            <a:spLocks noGrp="1"/>
-          </p:cNvSpPr>
-          <p:nvPr>
-            <p:ph idx="1"/>
-          </p:nvPr>
-        </p:nvSpPr>
-        <p:spPr/>
-        <p:txBody>
-          <a:bodyPr/>
-          <a:lstStyle/>
-          <a:p>
-            <a:r>
-              <a:rPr lang="tr-TR" dirty="0"/>
-              <a:t>Çamoğlu 3, 154</a:t>
-            </a:r>
-          </a:p>
-        </p:txBody>
-      </p:sp>
-      <p:sp>
-        <p:nvSpPr>
-          <p:cNvPr id="4" name="Veri Yer Tutucusu 3">
-            <a:extLst>
-              <a:ext uri="{FF2B5EF4-FFF2-40B4-BE49-F238E27FC236}">
-                <a16:creationId xmlns:a16="http://schemas.microsoft.com/office/drawing/2014/main" id="{E363FF4A-0FED-968B-92DB-C79A627D7410}"/>
-              </a:ext>
-            </a:extLst>
-          </p:cNvPr>
-          <p:cNvSpPr>
-            <a:spLocks noGrp="1"/>
-          </p:cNvSpPr>
-          <p:nvPr>
-            <p:ph type="dt" sz="half" idx="10"/>
-          </p:nvPr>
-        </p:nvSpPr>
-        <p:spPr/>
-        <p:txBody>
-          <a:bodyPr/>
-          <a:lstStyle/>
-          <a:p>
-            <a:fld id="{E5A72F27-F128-4B68-926B-C496DC38618F}" type="datetime1">
-              <a:rPr lang="tr-TR" smtClean="0"/>
-              <a:t>4.10.2026</a:t>
-            </a:fld>
-            <a:endParaRPr lang="tr-TR"/>
-          </a:p>
-        </p:txBody>
-      </p:sp>
-      <p:sp>
-        <p:nvSpPr>
-          <p:cNvPr id="5" name="Alt Bilgi Yer Tutucusu 4">
-            <a:extLst>
-              <a:ext uri="{FF2B5EF4-FFF2-40B4-BE49-F238E27FC236}">
-                <a16:creationId xmlns:a16="http://schemas.microsoft.com/office/drawing/2014/main" id="{28243D1F-0CDF-BEA0-D9B1-3C60D0FF704E}"/>
-              </a:ext>
-            </a:extLst>
-          </p:cNvPr>
-          <p:cNvSpPr>
-            <a:spLocks noGrp="1"/>
-          </p:cNvSpPr>
-          <p:nvPr>
-            <p:ph type="ftr" sz="quarter" idx="11"/>
-          </p:nvPr>
-        </p:nvSpPr>
-        <p:spPr/>
-        <p:txBody>
-          <a:bodyPr/>
-          <a:lstStyle/>
-          <a:p>
-            <a:r>
-              <a:rPr lang="tr-TR"/>
-              <a:t>Copyright: Harun Altay</a:t>
-            </a:r>
-          </a:p>
-        </p:txBody>
-      </p:sp>
-      <p:sp>
-        <p:nvSpPr>
-          <p:cNvPr id="6" name="Slayt Numarası Yer Tutucusu 5">
-            <a:extLst>
-              <a:ext uri="{FF2B5EF4-FFF2-40B4-BE49-F238E27FC236}">
-                <a16:creationId xmlns:a16="http://schemas.microsoft.com/office/drawing/2014/main" id="{E551E622-617D-EDFE-F239-0BF5DC5F5335}"/>
               </a:ext>
             </a:extLst>
           </p:cNvPr>
@@ -30549,7 +30631,7 @@
     </p:spTree>
     <p:extLst>
       <p:ext uri="{BB962C8B-B14F-4D97-AF65-F5344CB8AC3E}">
-        <p14:creationId xmlns:p14="http://schemas.microsoft.com/office/powerpoint/2010/main" val="2983040801"/>
+        <p14:creationId xmlns:p14="http://schemas.microsoft.com/office/powerpoint/2010/main" val="454016312"/>
       </p:ext>
     </p:extLst>
   </p:cSld>
@@ -30681,7 +30763,7 @@
           <a:p>
             <a:fld id="{1FCC30DB-9A9A-407B-8F85-2EF59053FD42}" type="datetime1">
               <a:rPr lang="tr-TR" smtClean="0"/>
-              <a:t>4.10.2026</a:t>
+              <a:t>11.10.2026</a:t>
             </a:fld>
             <a:endParaRPr lang="tr-TR"/>
           </a:p>
@@ -30758,6 +30840,546 @@
 </file>
 
 <file path=ppt/slides/slide50.xml><?xml version="1.0" encoding="utf-8"?>
+<p:sld xmlns:a="http://schemas.openxmlformats.org/drawingml/2006/main" xmlns:r="http://schemas.openxmlformats.org/officeDocument/2006/relationships" xmlns:p="http://schemas.openxmlformats.org/presentationml/2006/main">
+  <p:cSld>
+    <p:spTree>
+      <p:nvGrpSpPr>
+        <p:cNvPr id="1" name="">
+          <a:extLst>
+            <a:ext uri="{FF2B5EF4-FFF2-40B4-BE49-F238E27FC236}">
+              <a16:creationId xmlns:a16="http://schemas.microsoft.com/office/drawing/2014/main" id="{CED4DE73-23B7-95E8-F432-04B974A3FB8C}"/>
+            </a:ext>
+          </a:extLst>
+        </p:cNvPr>
+        <p:cNvGrpSpPr/>
+        <p:nvPr/>
+      </p:nvGrpSpPr>
+      <p:grpSpPr>
+        <a:xfrm>
+          <a:off x="0" y="0"/>
+          <a:ext cx="0" cy="0"/>
+          <a:chOff x="0" y="0"/>
+          <a:chExt cx="0" cy="0"/>
+        </a:xfrm>
+      </p:grpSpPr>
+      <p:sp>
+        <p:nvSpPr>
+          <p:cNvPr id="2" name="Başlık 1">
+            <a:extLst>
+              <a:ext uri="{FF2B5EF4-FFF2-40B4-BE49-F238E27FC236}">
+                <a16:creationId xmlns:a16="http://schemas.microsoft.com/office/drawing/2014/main" id="{5BF2B6D4-6B1D-4380-BF22-F73138BBFB92}"/>
+              </a:ext>
+            </a:extLst>
+          </p:cNvPr>
+          <p:cNvSpPr>
+            <a:spLocks noGrp="1"/>
+          </p:cNvSpPr>
+          <p:nvPr>
+            <p:ph type="title"/>
+          </p:nvPr>
+        </p:nvSpPr>
+        <p:spPr/>
+        <p:txBody>
+          <a:bodyPr>
+            <a:normAutofit/>
+          </a:bodyPr>
+          <a:lstStyle/>
+          <a:p>
+            <a:r>
+              <a:rPr lang="tr-TR" sz="2800" dirty="0"/>
+              <a:t>Kod: Metni tersten yazdırma</a:t>
+            </a:r>
+          </a:p>
+        </p:txBody>
+      </p:sp>
+      <p:sp>
+        <p:nvSpPr>
+          <p:cNvPr id="3" name="İçerik Yer Tutucusu 2">
+            <a:extLst>
+              <a:ext uri="{FF2B5EF4-FFF2-40B4-BE49-F238E27FC236}">
+                <a16:creationId xmlns:a16="http://schemas.microsoft.com/office/drawing/2014/main" id="{BC1AC6BB-301A-FDF2-FE29-C80379A7D09E}"/>
+              </a:ext>
+            </a:extLst>
+          </p:cNvPr>
+          <p:cNvSpPr>
+            <a:spLocks noGrp="1"/>
+          </p:cNvSpPr>
+          <p:nvPr>
+            <p:ph idx="1"/>
+          </p:nvPr>
+        </p:nvSpPr>
+        <p:spPr/>
+        <p:txBody>
+          <a:bodyPr/>
+          <a:lstStyle/>
+          <a:p>
+            <a:r>
+              <a:rPr lang="tr-TR" dirty="0"/>
+              <a:t>Çamoğlu 3, 149</a:t>
+            </a:r>
+          </a:p>
+        </p:txBody>
+      </p:sp>
+      <p:sp>
+        <p:nvSpPr>
+          <p:cNvPr id="4" name="Veri Yer Tutucusu 3">
+            <a:extLst>
+              <a:ext uri="{FF2B5EF4-FFF2-40B4-BE49-F238E27FC236}">
+                <a16:creationId xmlns:a16="http://schemas.microsoft.com/office/drawing/2014/main" id="{9E31C6BA-1998-014D-DF7C-42A13C5A2FB2}"/>
+              </a:ext>
+            </a:extLst>
+          </p:cNvPr>
+          <p:cNvSpPr>
+            <a:spLocks noGrp="1"/>
+          </p:cNvSpPr>
+          <p:nvPr>
+            <p:ph type="dt" sz="half" idx="10"/>
+          </p:nvPr>
+        </p:nvSpPr>
+        <p:spPr/>
+        <p:txBody>
+          <a:bodyPr/>
+          <a:lstStyle/>
+          <a:p>
+            <a:fld id="{E5A72F27-F128-4B68-926B-C496DC38618F}" type="datetime1">
+              <a:rPr lang="tr-TR" smtClean="0"/>
+              <a:t>11.10.2026</a:t>
+            </a:fld>
+            <a:endParaRPr lang="tr-TR"/>
+          </a:p>
+        </p:txBody>
+      </p:sp>
+      <p:sp>
+        <p:nvSpPr>
+          <p:cNvPr id="5" name="Alt Bilgi Yer Tutucusu 4">
+            <a:extLst>
+              <a:ext uri="{FF2B5EF4-FFF2-40B4-BE49-F238E27FC236}">
+                <a16:creationId xmlns:a16="http://schemas.microsoft.com/office/drawing/2014/main" id="{5A1D0F8D-AD83-B7BF-0E90-E9DB50F7B101}"/>
+              </a:ext>
+            </a:extLst>
+          </p:cNvPr>
+          <p:cNvSpPr>
+            <a:spLocks noGrp="1"/>
+          </p:cNvSpPr>
+          <p:nvPr>
+            <p:ph type="ftr" sz="quarter" idx="11"/>
+          </p:nvPr>
+        </p:nvSpPr>
+        <p:spPr/>
+        <p:txBody>
+          <a:bodyPr/>
+          <a:lstStyle/>
+          <a:p>
+            <a:r>
+              <a:rPr lang="tr-TR"/>
+              <a:t>Copyright: Harun Altay</a:t>
+            </a:r>
+          </a:p>
+        </p:txBody>
+      </p:sp>
+      <p:sp>
+        <p:nvSpPr>
+          <p:cNvPr id="6" name="Slayt Numarası Yer Tutucusu 5">
+            <a:extLst>
+              <a:ext uri="{FF2B5EF4-FFF2-40B4-BE49-F238E27FC236}">
+                <a16:creationId xmlns:a16="http://schemas.microsoft.com/office/drawing/2014/main" id="{C2FFF1C9-5826-20F5-2AF1-E28D98A352D9}"/>
+              </a:ext>
+            </a:extLst>
+          </p:cNvPr>
+          <p:cNvSpPr>
+            <a:spLocks noGrp="1"/>
+          </p:cNvSpPr>
+          <p:nvPr>
+            <p:ph type="sldNum" sz="quarter" idx="12"/>
+          </p:nvPr>
+        </p:nvSpPr>
+        <p:spPr/>
+        <p:txBody>
+          <a:bodyPr/>
+          <a:lstStyle/>
+          <a:p>
+            <a:fld id="{556A583B-49D3-4431-A76E-53060577655C}" type="slidenum">
+              <a:rPr lang="tr-TR" smtClean="0"/>
+              <a:t>50</a:t>
+            </a:fld>
+            <a:endParaRPr lang="tr-TR"/>
+          </a:p>
+        </p:txBody>
+      </p:sp>
+    </p:spTree>
+    <p:extLst>
+      <p:ext uri="{BB962C8B-B14F-4D97-AF65-F5344CB8AC3E}">
+        <p14:creationId xmlns:p14="http://schemas.microsoft.com/office/powerpoint/2010/main" val="2184441089"/>
+      </p:ext>
+    </p:extLst>
+  </p:cSld>
+  <p:clrMapOvr>
+    <a:masterClrMapping/>
+  </p:clrMapOvr>
+</p:sld>
+</file>
+
+<file path=ppt/slides/slide51.xml><?xml version="1.0" encoding="utf-8"?>
+<p:sld xmlns:a="http://schemas.openxmlformats.org/drawingml/2006/main" xmlns:r="http://schemas.openxmlformats.org/officeDocument/2006/relationships" xmlns:p="http://schemas.openxmlformats.org/presentationml/2006/main">
+  <p:cSld>
+    <p:spTree>
+      <p:nvGrpSpPr>
+        <p:cNvPr id="1" name="">
+          <a:extLst>
+            <a:ext uri="{FF2B5EF4-FFF2-40B4-BE49-F238E27FC236}">
+              <a16:creationId xmlns:a16="http://schemas.microsoft.com/office/drawing/2014/main" id="{390FA761-B1E4-9F50-5633-31DE57909661}"/>
+            </a:ext>
+          </a:extLst>
+        </p:cNvPr>
+        <p:cNvGrpSpPr/>
+        <p:nvPr/>
+      </p:nvGrpSpPr>
+      <p:grpSpPr>
+        <a:xfrm>
+          <a:off x="0" y="0"/>
+          <a:ext cx="0" cy="0"/>
+          <a:chOff x="0" y="0"/>
+          <a:chExt cx="0" cy="0"/>
+        </a:xfrm>
+      </p:grpSpPr>
+      <p:sp>
+        <p:nvSpPr>
+          <p:cNvPr id="2" name="Başlık 1">
+            <a:extLst>
+              <a:ext uri="{FF2B5EF4-FFF2-40B4-BE49-F238E27FC236}">
+                <a16:creationId xmlns:a16="http://schemas.microsoft.com/office/drawing/2014/main" id="{76F7AF56-F591-92A7-5DA8-30B0099CB88F}"/>
+              </a:ext>
+            </a:extLst>
+          </p:cNvPr>
+          <p:cNvSpPr>
+            <a:spLocks noGrp="1"/>
+          </p:cNvSpPr>
+          <p:nvPr>
+            <p:ph type="title"/>
+          </p:nvPr>
+        </p:nvSpPr>
+        <p:spPr/>
+        <p:txBody>
+          <a:bodyPr>
+            <a:normAutofit/>
+          </a:bodyPr>
+          <a:lstStyle/>
+          <a:p>
+            <a:r>
+              <a:rPr lang="tr-TR" sz="2800" dirty="0"/>
+              <a:t>Kod: Simetrik metin</a:t>
+            </a:r>
+          </a:p>
+        </p:txBody>
+      </p:sp>
+      <p:sp>
+        <p:nvSpPr>
+          <p:cNvPr id="3" name="İçerik Yer Tutucusu 2">
+            <a:extLst>
+              <a:ext uri="{FF2B5EF4-FFF2-40B4-BE49-F238E27FC236}">
+                <a16:creationId xmlns:a16="http://schemas.microsoft.com/office/drawing/2014/main" id="{55258F42-4BF2-179C-8ED4-CB773D672E5A}"/>
+              </a:ext>
+            </a:extLst>
+          </p:cNvPr>
+          <p:cNvSpPr>
+            <a:spLocks noGrp="1"/>
+          </p:cNvSpPr>
+          <p:nvPr>
+            <p:ph idx="1"/>
+          </p:nvPr>
+        </p:nvSpPr>
+        <p:spPr/>
+        <p:txBody>
+          <a:bodyPr/>
+          <a:lstStyle/>
+          <a:p>
+            <a:r>
+              <a:rPr lang="tr-TR" dirty="0"/>
+              <a:t>Çamoğlu 3, 151</a:t>
+            </a:r>
+          </a:p>
+        </p:txBody>
+      </p:sp>
+      <p:sp>
+        <p:nvSpPr>
+          <p:cNvPr id="4" name="Veri Yer Tutucusu 3">
+            <a:extLst>
+              <a:ext uri="{FF2B5EF4-FFF2-40B4-BE49-F238E27FC236}">
+                <a16:creationId xmlns:a16="http://schemas.microsoft.com/office/drawing/2014/main" id="{B66442F7-9339-ACDE-364E-932BBD486DB5}"/>
+              </a:ext>
+            </a:extLst>
+          </p:cNvPr>
+          <p:cNvSpPr>
+            <a:spLocks noGrp="1"/>
+          </p:cNvSpPr>
+          <p:nvPr>
+            <p:ph type="dt" sz="half" idx="10"/>
+          </p:nvPr>
+        </p:nvSpPr>
+        <p:spPr/>
+        <p:txBody>
+          <a:bodyPr/>
+          <a:lstStyle/>
+          <a:p>
+            <a:fld id="{E5A72F27-F128-4B68-926B-C496DC38618F}" type="datetime1">
+              <a:rPr lang="tr-TR" smtClean="0"/>
+              <a:t>11.10.2026</a:t>
+            </a:fld>
+            <a:endParaRPr lang="tr-TR"/>
+          </a:p>
+        </p:txBody>
+      </p:sp>
+      <p:sp>
+        <p:nvSpPr>
+          <p:cNvPr id="5" name="Alt Bilgi Yer Tutucusu 4">
+            <a:extLst>
+              <a:ext uri="{FF2B5EF4-FFF2-40B4-BE49-F238E27FC236}">
+                <a16:creationId xmlns:a16="http://schemas.microsoft.com/office/drawing/2014/main" id="{B26F6513-C9C8-EE74-E089-43FF0BF1A63D}"/>
+              </a:ext>
+            </a:extLst>
+          </p:cNvPr>
+          <p:cNvSpPr>
+            <a:spLocks noGrp="1"/>
+          </p:cNvSpPr>
+          <p:nvPr>
+            <p:ph type="ftr" sz="quarter" idx="11"/>
+          </p:nvPr>
+        </p:nvSpPr>
+        <p:spPr/>
+        <p:txBody>
+          <a:bodyPr/>
+          <a:lstStyle/>
+          <a:p>
+            <a:r>
+              <a:rPr lang="tr-TR"/>
+              <a:t>Copyright: Harun Altay</a:t>
+            </a:r>
+          </a:p>
+        </p:txBody>
+      </p:sp>
+      <p:sp>
+        <p:nvSpPr>
+          <p:cNvPr id="6" name="Slayt Numarası Yer Tutucusu 5">
+            <a:extLst>
+              <a:ext uri="{FF2B5EF4-FFF2-40B4-BE49-F238E27FC236}">
+                <a16:creationId xmlns:a16="http://schemas.microsoft.com/office/drawing/2014/main" id="{D0D5E862-AD7F-6D3E-0E17-C3C145065FC5}"/>
+              </a:ext>
+            </a:extLst>
+          </p:cNvPr>
+          <p:cNvSpPr>
+            <a:spLocks noGrp="1"/>
+          </p:cNvSpPr>
+          <p:nvPr>
+            <p:ph type="sldNum" sz="quarter" idx="12"/>
+          </p:nvPr>
+        </p:nvSpPr>
+        <p:spPr/>
+        <p:txBody>
+          <a:bodyPr/>
+          <a:lstStyle/>
+          <a:p>
+            <a:fld id="{556A583B-49D3-4431-A76E-53060577655C}" type="slidenum">
+              <a:rPr lang="tr-TR" smtClean="0"/>
+              <a:t>51</a:t>
+            </a:fld>
+            <a:endParaRPr lang="tr-TR"/>
+          </a:p>
+        </p:txBody>
+      </p:sp>
+    </p:spTree>
+    <p:extLst>
+      <p:ext uri="{BB962C8B-B14F-4D97-AF65-F5344CB8AC3E}">
+        <p14:creationId xmlns:p14="http://schemas.microsoft.com/office/powerpoint/2010/main" val="2225521562"/>
+      </p:ext>
+    </p:extLst>
+  </p:cSld>
+  <p:clrMapOvr>
+    <a:masterClrMapping/>
+  </p:clrMapOvr>
+</p:sld>
+</file>
+
+<file path=ppt/slides/slide52.xml><?xml version="1.0" encoding="utf-8"?>
+<p:sld xmlns:a="http://schemas.openxmlformats.org/drawingml/2006/main" xmlns:r="http://schemas.openxmlformats.org/officeDocument/2006/relationships" xmlns:p="http://schemas.openxmlformats.org/presentationml/2006/main">
+  <p:cSld>
+    <p:spTree>
+      <p:nvGrpSpPr>
+        <p:cNvPr id="1" name="">
+          <a:extLst>
+            <a:ext uri="{FF2B5EF4-FFF2-40B4-BE49-F238E27FC236}">
+              <a16:creationId xmlns:a16="http://schemas.microsoft.com/office/drawing/2014/main" id="{67CACFC1-81CA-6215-4EED-1EC16B302484}"/>
+            </a:ext>
+          </a:extLst>
+        </p:cNvPr>
+        <p:cNvGrpSpPr/>
+        <p:nvPr/>
+      </p:nvGrpSpPr>
+      <p:grpSpPr>
+        <a:xfrm>
+          <a:off x="0" y="0"/>
+          <a:ext cx="0" cy="0"/>
+          <a:chOff x="0" y="0"/>
+          <a:chExt cx="0" cy="0"/>
+        </a:xfrm>
+      </p:grpSpPr>
+      <p:sp>
+        <p:nvSpPr>
+          <p:cNvPr id="2" name="Başlık 1">
+            <a:extLst>
+              <a:ext uri="{FF2B5EF4-FFF2-40B4-BE49-F238E27FC236}">
+                <a16:creationId xmlns:a16="http://schemas.microsoft.com/office/drawing/2014/main" id="{71C459B9-B532-DFD3-CA94-37675B45BF75}"/>
+              </a:ext>
+            </a:extLst>
+          </p:cNvPr>
+          <p:cNvSpPr>
+            <a:spLocks noGrp="1"/>
+          </p:cNvSpPr>
+          <p:nvPr>
+            <p:ph type="title"/>
+          </p:nvPr>
+        </p:nvSpPr>
+        <p:spPr/>
+        <p:txBody>
+          <a:bodyPr>
+            <a:normAutofit/>
+          </a:bodyPr>
+          <a:lstStyle/>
+          <a:p>
+            <a:r>
+              <a:rPr lang="tr-TR" sz="2800" dirty="0"/>
+              <a:t>Kod: Asal sayılar</a:t>
+            </a:r>
+          </a:p>
+        </p:txBody>
+      </p:sp>
+      <p:sp>
+        <p:nvSpPr>
+          <p:cNvPr id="3" name="İçerik Yer Tutucusu 2">
+            <a:extLst>
+              <a:ext uri="{FF2B5EF4-FFF2-40B4-BE49-F238E27FC236}">
+                <a16:creationId xmlns:a16="http://schemas.microsoft.com/office/drawing/2014/main" id="{141836A8-C5A2-54B5-1D18-B8CAB0AFA536}"/>
+              </a:ext>
+            </a:extLst>
+          </p:cNvPr>
+          <p:cNvSpPr>
+            <a:spLocks noGrp="1"/>
+          </p:cNvSpPr>
+          <p:nvPr>
+            <p:ph idx="1"/>
+          </p:nvPr>
+        </p:nvSpPr>
+        <p:spPr/>
+        <p:txBody>
+          <a:bodyPr/>
+          <a:lstStyle/>
+          <a:p>
+            <a:r>
+              <a:rPr lang="tr-TR" dirty="0"/>
+              <a:t>Çamoğlu 3, 154</a:t>
+            </a:r>
+          </a:p>
+        </p:txBody>
+      </p:sp>
+      <p:sp>
+        <p:nvSpPr>
+          <p:cNvPr id="4" name="Veri Yer Tutucusu 3">
+            <a:extLst>
+              <a:ext uri="{FF2B5EF4-FFF2-40B4-BE49-F238E27FC236}">
+                <a16:creationId xmlns:a16="http://schemas.microsoft.com/office/drawing/2014/main" id="{E363FF4A-0FED-968B-92DB-C79A627D7410}"/>
+              </a:ext>
+            </a:extLst>
+          </p:cNvPr>
+          <p:cNvSpPr>
+            <a:spLocks noGrp="1"/>
+          </p:cNvSpPr>
+          <p:nvPr>
+            <p:ph type="dt" sz="half" idx="10"/>
+          </p:nvPr>
+        </p:nvSpPr>
+        <p:spPr/>
+        <p:txBody>
+          <a:bodyPr/>
+          <a:lstStyle/>
+          <a:p>
+            <a:fld id="{E5A72F27-F128-4B68-926B-C496DC38618F}" type="datetime1">
+              <a:rPr lang="tr-TR" smtClean="0"/>
+              <a:t>11.10.2026</a:t>
+            </a:fld>
+            <a:endParaRPr lang="tr-TR"/>
+          </a:p>
+        </p:txBody>
+      </p:sp>
+      <p:sp>
+        <p:nvSpPr>
+          <p:cNvPr id="5" name="Alt Bilgi Yer Tutucusu 4">
+            <a:extLst>
+              <a:ext uri="{FF2B5EF4-FFF2-40B4-BE49-F238E27FC236}">
+                <a16:creationId xmlns:a16="http://schemas.microsoft.com/office/drawing/2014/main" id="{28243D1F-0CDF-BEA0-D9B1-3C60D0FF704E}"/>
+              </a:ext>
+            </a:extLst>
+          </p:cNvPr>
+          <p:cNvSpPr>
+            <a:spLocks noGrp="1"/>
+          </p:cNvSpPr>
+          <p:nvPr>
+            <p:ph type="ftr" sz="quarter" idx="11"/>
+          </p:nvPr>
+        </p:nvSpPr>
+        <p:spPr/>
+        <p:txBody>
+          <a:bodyPr/>
+          <a:lstStyle/>
+          <a:p>
+            <a:r>
+              <a:rPr lang="tr-TR"/>
+              <a:t>Copyright: Harun Altay</a:t>
+            </a:r>
+          </a:p>
+        </p:txBody>
+      </p:sp>
+      <p:sp>
+        <p:nvSpPr>
+          <p:cNvPr id="6" name="Slayt Numarası Yer Tutucusu 5">
+            <a:extLst>
+              <a:ext uri="{FF2B5EF4-FFF2-40B4-BE49-F238E27FC236}">
+                <a16:creationId xmlns:a16="http://schemas.microsoft.com/office/drawing/2014/main" id="{E551E622-617D-EDFE-F239-0BF5DC5F5335}"/>
+              </a:ext>
+            </a:extLst>
+          </p:cNvPr>
+          <p:cNvSpPr>
+            <a:spLocks noGrp="1"/>
+          </p:cNvSpPr>
+          <p:nvPr>
+            <p:ph type="sldNum" sz="quarter" idx="12"/>
+          </p:nvPr>
+        </p:nvSpPr>
+        <p:spPr/>
+        <p:txBody>
+          <a:bodyPr/>
+          <a:lstStyle/>
+          <a:p>
+            <a:fld id="{556A583B-49D3-4431-A76E-53060577655C}" type="slidenum">
+              <a:rPr lang="tr-TR" smtClean="0"/>
+              <a:t>52</a:t>
+            </a:fld>
+            <a:endParaRPr lang="tr-TR"/>
+          </a:p>
+        </p:txBody>
+      </p:sp>
+    </p:spTree>
+    <p:extLst>
+      <p:ext uri="{BB962C8B-B14F-4D97-AF65-F5344CB8AC3E}">
+        <p14:creationId xmlns:p14="http://schemas.microsoft.com/office/powerpoint/2010/main" val="2983040801"/>
+      </p:ext>
+    </p:extLst>
+  </p:cSld>
+  <p:clrMapOvr>
+    <a:masterClrMapping/>
+  </p:clrMapOvr>
+</p:sld>
+</file>
+
+<file path=ppt/slides/slide53.xml><?xml version="1.0" encoding="utf-8"?>
 <p:sld xmlns:a="http://schemas.openxmlformats.org/drawingml/2006/main" xmlns:r="http://schemas.openxmlformats.org/officeDocument/2006/relationships" xmlns:p="http://schemas.openxmlformats.org/presentationml/2006/main">
   <p:cSld>
     <p:spTree>
@@ -30861,7 +31483,7 @@
           <a:p>
             <a:fld id="{E5A72F27-F128-4B68-926B-C496DC38618F}" type="datetime1">
               <a:rPr lang="tr-TR" smtClean="0"/>
-              <a:t>4.10.2026</a:t>
+              <a:t>11.10.2026</a:t>
             </a:fld>
             <a:endParaRPr lang="tr-TR"/>
           </a:p>
@@ -30918,7 +31540,7 @@
           <a:p>
             <a:fld id="{556A583B-49D3-4431-A76E-53060577655C}" type="slidenum">
               <a:rPr lang="tr-TR" smtClean="0"/>
-              <a:t>50</a:t>
+              <a:t>53</a:t>
             </a:fld>
             <a:endParaRPr lang="tr-TR"/>
           </a:p>
@@ -30937,7 +31559,7 @@
 </p:sld>
 </file>
 
-<file path=ppt/slides/slide51.xml><?xml version="1.0" encoding="utf-8"?>
+<file path=ppt/slides/slide54.xml><?xml version="1.0" encoding="utf-8"?>
 <p:sld xmlns:a="http://schemas.openxmlformats.org/drawingml/2006/main" xmlns:r="http://schemas.openxmlformats.org/officeDocument/2006/relationships" xmlns:p="http://schemas.openxmlformats.org/presentationml/2006/main">
   <p:cSld>
     <p:spTree>
@@ -31041,7 +31663,7 @@
           <a:p>
             <a:fld id="{E5A72F27-F128-4B68-926B-C496DC38618F}" type="datetime1">
               <a:rPr lang="tr-TR" smtClean="0"/>
-              <a:t>4.10.2026</a:t>
+              <a:t>11.10.2026</a:t>
             </a:fld>
             <a:endParaRPr lang="tr-TR"/>
           </a:p>
@@ -31098,7 +31720,7 @@
           <a:p>
             <a:fld id="{556A583B-49D3-4431-A76E-53060577655C}" type="slidenum">
               <a:rPr lang="tr-TR" smtClean="0"/>
-              <a:t>51</a:t>
+              <a:t>54</a:t>
             </a:fld>
             <a:endParaRPr lang="tr-TR"/>
           </a:p>
@@ -31117,7 +31739,7 @@
 </p:sld>
 </file>
 
-<file path=ppt/slides/slide52.xml><?xml version="1.0" encoding="utf-8"?>
+<file path=ppt/slides/slide55.xml><?xml version="1.0" encoding="utf-8"?>
 <p:sld xmlns:a="http://schemas.openxmlformats.org/drawingml/2006/main" xmlns:r="http://schemas.openxmlformats.org/officeDocument/2006/relationships" xmlns:p="http://schemas.openxmlformats.org/presentationml/2006/main">
   <p:cSld>
     <p:spTree>
@@ -31229,7 +31851,7 @@
           <a:p>
             <a:fld id="{E5A72F27-F128-4B68-926B-C496DC38618F}" type="datetime1">
               <a:rPr lang="tr-TR" smtClean="0"/>
-              <a:t>4.10.2026</a:t>
+              <a:t>11.10.2026</a:t>
             </a:fld>
             <a:endParaRPr lang="tr-TR"/>
           </a:p>
@@ -31286,7 +31908,7 @@
           <a:p>
             <a:fld id="{556A583B-49D3-4431-A76E-53060577655C}" type="slidenum">
               <a:rPr lang="tr-TR" smtClean="0"/>
-              <a:t>52</a:t>
+              <a:t>55</a:t>
             </a:fld>
             <a:endParaRPr lang="tr-TR"/>
           </a:p>
@@ -31305,7 +31927,7 @@
 </p:sld>
 </file>
 
-<file path=ppt/slides/slide53.xml><?xml version="1.0" encoding="utf-8"?>
+<file path=ppt/slides/slide56.xml><?xml version="1.0" encoding="utf-8"?>
 <p:sld xmlns:a="http://schemas.openxmlformats.org/drawingml/2006/main" xmlns:r="http://schemas.openxmlformats.org/officeDocument/2006/relationships" xmlns:p="http://schemas.openxmlformats.org/presentationml/2006/main">
   <p:cSld>
     <p:spTree>
@@ -31409,7 +32031,7 @@
           <a:p>
             <a:fld id="{E5A72F27-F128-4B68-926B-C496DC38618F}" type="datetime1">
               <a:rPr lang="tr-TR" smtClean="0"/>
-              <a:t>4.10.2026</a:t>
+              <a:t>11.10.2026</a:t>
             </a:fld>
             <a:endParaRPr lang="tr-TR"/>
           </a:p>
@@ -31466,7 +32088,7 @@
           <a:p>
             <a:fld id="{556A583B-49D3-4431-A76E-53060577655C}" type="slidenum">
               <a:rPr lang="tr-TR" smtClean="0"/>
-              <a:t>53</a:t>
+              <a:t>56</a:t>
             </a:fld>
             <a:endParaRPr lang="tr-TR"/>
           </a:p>
@@ -31485,7 +32107,7 @@
 </p:sld>
 </file>
 
-<file path=ppt/slides/slide54.xml><?xml version="1.0" encoding="utf-8"?>
+<file path=ppt/slides/slide57.xml><?xml version="1.0" encoding="utf-8"?>
 <p:sld xmlns:a="http://schemas.openxmlformats.org/drawingml/2006/main" xmlns:r="http://schemas.openxmlformats.org/officeDocument/2006/relationships" xmlns:p="http://schemas.openxmlformats.org/presentationml/2006/main">
   <p:cSld>
     <p:spTree>
@@ -31686,7 +32308,7 @@
           <a:p>
             <a:fld id="{44392EB0-EBAD-438A-B064-5F30060F1D41}" type="datetime1">
               <a:rPr lang="tr-TR" smtClean="0"/>
-              <a:t>4.10.2026</a:t>
+              <a:t>11.10.2026</a:t>
             </a:fld>
             <a:endParaRPr lang="tr-TR"/>
           </a:p>
@@ -31743,7 +32365,7 @@
           <a:p>
             <a:fld id="{556A583B-49D3-4431-A76E-53060577655C}" type="slidenum">
               <a:rPr lang="tr-TR" smtClean="0"/>
-              <a:t>54</a:t>
+              <a:t>57</a:t>
             </a:fld>
             <a:endParaRPr lang="tr-TR"/>
           </a:p>
@@ -31762,7 +32384,7 @@
 </p:sld>
 </file>
 
-<file path=ppt/slides/slide55.xml><?xml version="1.0" encoding="utf-8"?>
+<file path=ppt/slides/slide58.xml><?xml version="1.0" encoding="utf-8"?>
 <p:sld xmlns:a="http://schemas.openxmlformats.org/drawingml/2006/main" xmlns:r="http://schemas.openxmlformats.org/officeDocument/2006/relationships" xmlns:p="http://schemas.openxmlformats.org/presentationml/2006/main">
   <p:cSld>
     <p:spTree>
@@ -31881,7 +32503,7 @@
           <a:p>
             <a:fld id="{37D13B1C-06ED-4B08-8DAE-68BE84972603}" type="datetime1">
               <a:rPr lang="tr-TR" smtClean="0"/>
-              <a:t>4.10.2026</a:t>
+              <a:t>11.10.2026</a:t>
             </a:fld>
             <a:endParaRPr lang="tr-TR"/>
           </a:p>
@@ -31938,7 +32560,7 @@
           <a:p>
             <a:fld id="{556A583B-49D3-4431-A76E-53060577655C}" type="slidenum">
               <a:rPr lang="tr-TR" smtClean="0"/>
-              <a:t>55</a:t>
+              <a:t>58</a:t>
             </a:fld>
             <a:endParaRPr lang="tr-TR"/>
           </a:p>
@@ -31957,7 +32579,7 @@
 </p:sld>
 </file>
 
-<file path=ppt/slides/slide56.xml><?xml version="1.0" encoding="utf-8"?>
+<file path=ppt/slides/slide59.xml><?xml version="1.0" encoding="utf-8"?>
 <p:sld xmlns:a="http://schemas.openxmlformats.org/drawingml/2006/main" xmlns:r="http://schemas.openxmlformats.org/officeDocument/2006/relationships" xmlns:p="http://schemas.openxmlformats.org/presentationml/2006/main">
   <p:cSld>
     <p:spTree>
@@ -32043,7 +32665,7 @@
           <a:p>
             <a:fld id="{C143AAC5-8CDF-4095-BD1F-1322883AC1B0}" type="datetime1">
               <a:rPr lang="tr-TR" smtClean="0"/>
-              <a:t>4.10.2026</a:t>
+              <a:t>11.10.2026</a:t>
             </a:fld>
             <a:endParaRPr lang="tr-TR"/>
           </a:p>
@@ -32100,7 +32722,7 @@
           <a:p>
             <a:fld id="{556A583B-49D3-4431-A76E-53060577655C}" type="slidenum">
               <a:rPr lang="tr-TR" smtClean="0"/>
-              <a:t>56</a:t>
+              <a:t>59</a:t>
             </a:fld>
             <a:endParaRPr lang="tr-TR"/>
           </a:p>
@@ -32230,7 +32852,7 @@
           <a:p>
             <a:fld id="{DD0C0D17-D0F7-4921-92A7-F82ABD37D906}" type="datetime1">
               <a:rPr lang="tr-TR" smtClean="0"/>
-              <a:t>4.10.2026</a:t>
+              <a:t>11.10.2026</a:t>
             </a:fld>
             <a:endParaRPr lang="tr-TR"/>
           </a:p>
@@ -32423,7 +33045,7 @@
           <a:p>
             <a:fld id="{E39A9F3D-0371-49E3-99E7-76A4D5BBDDE8}" type="datetime1">
               <a:rPr lang="tr-TR" smtClean="0"/>
-              <a:t>4.10.2026</a:t>
+              <a:t>11.10.2026</a:t>
             </a:fld>
             <a:endParaRPr lang="tr-TR"/>
           </a:p>
@@ -32680,7 +33302,7 @@
           <a:p>
             <a:fld id="{E9290591-5B3F-4E6A-A4B5-910A3B0B03FF}" type="datetime1">
               <a:rPr lang="tr-TR" smtClean="0"/>
-              <a:t>4.10.2026</a:t>
+              <a:t>11.10.2026</a:t>
             </a:fld>
             <a:endParaRPr lang="tr-TR"/>
           </a:p>
@@ -32873,7 +33495,7 @@
           <a:p>
             <a:fld id="{C1AECFD1-912F-440E-B5D2-E8507637DDA3}" type="datetime1">
               <a:rPr lang="tr-TR" smtClean="0"/>
-              <a:t>4.10.2026</a:t>
+              <a:t>11.10.2026</a:t>
             </a:fld>
             <a:endParaRPr lang="tr-TR"/>
           </a:p>

--- a/prog-diller/yazilim-sunum/Yazilim-Programlama-Dilleri-Giris.pptx
+++ b/prog-diller/yazilim-sunum/Yazilim-Programlama-Dilleri-Giris.pptx
@@ -26,7 +26,7 @@
     <p:sldId id="264" r:id="rId17"/>
     <p:sldId id="331" r:id="rId18"/>
     <p:sldId id="330" r:id="rId19"/>
-    <p:sldId id="332" r:id="rId20"/>
+    <p:sldId id="333" r:id="rId20"/>
     <p:sldId id="288" r:id="rId21"/>
     <p:sldId id="287" r:id="rId22"/>
     <p:sldId id="286" r:id="rId23"/>
@@ -7996,7 +7996,7 @@
         <p:cNvPr id="1" name="">
           <a:extLst>
             <a:ext uri="{FF2B5EF4-FFF2-40B4-BE49-F238E27FC236}">
-              <a16:creationId xmlns:a16="http://schemas.microsoft.com/office/drawing/2014/main" id="{1723AC92-47E7-0CBE-8950-A4C82E64C555}"/>
+              <a16:creationId xmlns:a16="http://schemas.microsoft.com/office/drawing/2014/main" id="{A7D860EF-9193-300D-E172-9F42F549E125}"/>
             </a:ext>
           </a:extLst>
         </p:cNvPr>
@@ -8016,7 +8016,7 @@
           <p:cNvPr id="2" name="Başlık 1">
             <a:extLst>
               <a:ext uri="{FF2B5EF4-FFF2-40B4-BE49-F238E27FC236}">
-                <a16:creationId xmlns:a16="http://schemas.microsoft.com/office/drawing/2014/main" id="{5D2A2D08-845B-4E2E-F84A-5B81BC2137AF}"/>
+                <a16:creationId xmlns:a16="http://schemas.microsoft.com/office/drawing/2014/main" id="{40E6FC78-97BA-C33C-FBC2-E9D7172937CB}"/>
               </a:ext>
             </a:extLst>
           </p:cNvPr>
@@ -8058,7 +8058,7 @@
           <p:cNvPr id="4" name="Veri Yer Tutucusu 3">
             <a:extLst>
               <a:ext uri="{FF2B5EF4-FFF2-40B4-BE49-F238E27FC236}">
-                <a16:creationId xmlns:a16="http://schemas.microsoft.com/office/drawing/2014/main" id="{DCA74315-6743-2CA8-6C28-D4078D43454D}"/>
+                <a16:creationId xmlns:a16="http://schemas.microsoft.com/office/drawing/2014/main" id="{F3CFF489-02E4-0482-769C-F8A66F455AF5}"/>
               </a:ext>
             </a:extLst>
           </p:cNvPr>
@@ -8087,7 +8087,7 @@
           <p:cNvPr id="5" name="Alt Bilgi Yer Tutucusu 4">
             <a:extLst>
               <a:ext uri="{FF2B5EF4-FFF2-40B4-BE49-F238E27FC236}">
-                <a16:creationId xmlns:a16="http://schemas.microsoft.com/office/drawing/2014/main" id="{B7A8B87E-FB4C-E64E-FA0E-9B4B8D80E9B7}"/>
+                <a16:creationId xmlns:a16="http://schemas.microsoft.com/office/drawing/2014/main" id="{EC4F6AFD-C89E-3302-4473-44B2638DDDA3}"/>
               </a:ext>
             </a:extLst>
           </p:cNvPr>
@@ -8115,7 +8115,7 @@
           <p:cNvPr id="6" name="Slayt Numarası Yer Tutucusu 5">
             <a:extLst>
               <a:ext uri="{FF2B5EF4-FFF2-40B4-BE49-F238E27FC236}">
-                <a16:creationId xmlns:a16="http://schemas.microsoft.com/office/drawing/2014/main" id="{0552A7E3-B9B9-BB25-6DF3-1A9FE60FA848}"/>
+                <a16:creationId xmlns:a16="http://schemas.microsoft.com/office/drawing/2014/main" id="{BA236870-85F1-7B63-539C-26B4175B6AAB}"/>
               </a:ext>
             </a:extLst>
           </p:cNvPr>
@@ -8141,10 +8141,10 @@
       </p:sp>
       <p:pic>
         <p:nvPicPr>
-          <p:cNvPr id="7" name="Resim 6">
-            <a:extLst>
-              <a:ext uri="{FF2B5EF4-FFF2-40B4-BE49-F238E27FC236}">
-                <a16:creationId xmlns:a16="http://schemas.microsoft.com/office/drawing/2014/main" id="{34F34C60-F9CF-B541-B73B-81325FE65744}"/>
+          <p:cNvPr id="8" name="Resim 7">
+            <a:extLst>
+              <a:ext uri="{FF2B5EF4-FFF2-40B4-BE49-F238E27FC236}">
+                <a16:creationId xmlns:a16="http://schemas.microsoft.com/office/drawing/2014/main" id="{4572A3D3-0A92-0966-E3CE-78A58E011866}"/>
               </a:ext>
             </a:extLst>
           </p:cNvPr>
@@ -8167,8 +8167,8 @@
         </p:blipFill>
         <p:spPr>
           <a:xfrm>
-            <a:off x="286477" y="883433"/>
-            <a:ext cx="10451662" cy="5731281"/>
+            <a:off x="365350" y="934443"/>
+            <a:ext cx="11178950" cy="5069096"/>
           </a:xfrm>
           <a:prstGeom prst="rect">
             <a:avLst/>
@@ -8178,7 +8178,7 @@
     </p:spTree>
     <p:extLst>
       <p:ext uri="{BB962C8B-B14F-4D97-AF65-F5344CB8AC3E}">
-        <p14:creationId xmlns:p14="http://schemas.microsoft.com/office/powerpoint/2010/main" val="1260275586"/>
+        <p14:creationId xmlns:p14="http://schemas.microsoft.com/office/powerpoint/2010/main" val="3217377310"/>
       </p:ext>
     </p:extLst>
   </p:cSld>

--- a/prog-diller/yazilim-sunum/Yazilim-Programlama-Dilleri-Giris.pptx
+++ b/prog-diller/yazilim-sunum/Yazilim-Programlama-Dilleri-Giris.pptx
@@ -5,7 +5,7 @@
     <p:sldMasterId id="2147483648" r:id="rId1"/>
   </p:sldMasterIdLst>
   <p:notesMasterIdLst>
-    <p:notesMasterId r:id="rId61"/>
+    <p:notesMasterId r:id="rId62"/>
   </p:notesMasterIdLst>
   <p:sldIdLst>
     <p:sldId id="256" r:id="rId2"/>
@@ -36,37 +36,38 @@
     <p:sldId id="306" r:id="rId27"/>
     <p:sldId id="307" r:id="rId28"/>
     <p:sldId id="304" r:id="rId29"/>
-    <p:sldId id="266" r:id="rId30"/>
-    <p:sldId id="293" r:id="rId31"/>
-    <p:sldId id="294" r:id="rId32"/>
-    <p:sldId id="300" r:id="rId33"/>
-    <p:sldId id="267" r:id="rId34"/>
-    <p:sldId id="268" r:id="rId35"/>
-    <p:sldId id="269" r:id="rId36"/>
-    <p:sldId id="290" r:id="rId37"/>
-    <p:sldId id="291" r:id="rId38"/>
-    <p:sldId id="292" r:id="rId39"/>
-    <p:sldId id="302" r:id="rId40"/>
-    <p:sldId id="271" r:id="rId41"/>
-    <p:sldId id="317" r:id="rId42"/>
-    <p:sldId id="295" r:id="rId43"/>
-    <p:sldId id="296" r:id="rId44"/>
-    <p:sldId id="297" r:id="rId45"/>
-    <p:sldId id="298" r:id="rId46"/>
-    <p:sldId id="316" r:id="rId47"/>
-    <p:sldId id="320" r:id="rId48"/>
-    <p:sldId id="321" r:id="rId49"/>
-    <p:sldId id="323" r:id="rId50"/>
-    <p:sldId id="324" r:id="rId51"/>
-    <p:sldId id="325" r:id="rId52"/>
-    <p:sldId id="326" r:id="rId53"/>
-    <p:sldId id="329" r:id="rId54"/>
-    <p:sldId id="322" r:id="rId55"/>
-    <p:sldId id="328" r:id="rId56"/>
-    <p:sldId id="327" r:id="rId57"/>
-    <p:sldId id="272" r:id="rId58"/>
-    <p:sldId id="301" r:id="rId59"/>
-    <p:sldId id="318" r:id="rId60"/>
+    <p:sldId id="334" r:id="rId30"/>
+    <p:sldId id="266" r:id="rId31"/>
+    <p:sldId id="293" r:id="rId32"/>
+    <p:sldId id="294" r:id="rId33"/>
+    <p:sldId id="300" r:id="rId34"/>
+    <p:sldId id="267" r:id="rId35"/>
+    <p:sldId id="268" r:id="rId36"/>
+    <p:sldId id="269" r:id="rId37"/>
+    <p:sldId id="290" r:id="rId38"/>
+    <p:sldId id="291" r:id="rId39"/>
+    <p:sldId id="292" r:id="rId40"/>
+    <p:sldId id="302" r:id="rId41"/>
+    <p:sldId id="271" r:id="rId42"/>
+    <p:sldId id="317" r:id="rId43"/>
+    <p:sldId id="295" r:id="rId44"/>
+    <p:sldId id="296" r:id="rId45"/>
+    <p:sldId id="297" r:id="rId46"/>
+    <p:sldId id="298" r:id="rId47"/>
+    <p:sldId id="316" r:id="rId48"/>
+    <p:sldId id="320" r:id="rId49"/>
+    <p:sldId id="321" r:id="rId50"/>
+    <p:sldId id="323" r:id="rId51"/>
+    <p:sldId id="324" r:id="rId52"/>
+    <p:sldId id="325" r:id="rId53"/>
+    <p:sldId id="326" r:id="rId54"/>
+    <p:sldId id="329" r:id="rId55"/>
+    <p:sldId id="322" r:id="rId56"/>
+    <p:sldId id="328" r:id="rId57"/>
+    <p:sldId id="327" r:id="rId58"/>
+    <p:sldId id="272" r:id="rId59"/>
+    <p:sldId id="301" r:id="rId60"/>
+    <p:sldId id="318" r:id="rId61"/>
   </p:sldIdLst>
   <p:sldSz cx="12192000" cy="6858000"/>
   <p:notesSz cx="6858000" cy="9144000"/>
@@ -11750,7 +11751,7 @@
         <p:cNvPr id="1" name="">
           <a:extLst>
             <a:ext uri="{FF2B5EF4-FFF2-40B4-BE49-F238E27FC236}">
-              <a16:creationId xmlns:a16="http://schemas.microsoft.com/office/drawing/2014/main" id="{35EF3F5F-325D-F723-F7CC-62EADFE3C628}"/>
+              <a16:creationId xmlns:a16="http://schemas.microsoft.com/office/drawing/2014/main" id="{BD4AD551-F43D-E9CB-F13A-D5ED31EDAB1C}"/>
             </a:ext>
           </a:extLst>
         </p:cNvPr>
@@ -11770,7 +11771,7 @@
           <p:cNvPr id="2" name="Başlık 1">
             <a:extLst>
               <a:ext uri="{FF2B5EF4-FFF2-40B4-BE49-F238E27FC236}">
-                <a16:creationId xmlns:a16="http://schemas.microsoft.com/office/drawing/2014/main" id="{6C51B030-A99D-7799-EA19-159316BC46DA}"/>
+                <a16:creationId xmlns:a16="http://schemas.microsoft.com/office/drawing/2014/main" id="{5F9106EE-509D-F80D-158F-E0EB5F6141DE}"/>
               </a:ext>
             </a:extLst>
           </p:cNvPr>
@@ -11794,1837 +11795,27 @@
           <a:lstStyle/>
           <a:p>
             <a:r>
+              <a:rPr lang="tr-TR" sz="3600" dirty="0" err="1"/>
+              <a:t>Tutorial’ler</a:t>
+            </a:r>
+            <a:r>
               <a:rPr lang="tr-TR" sz="3600" dirty="0"/>
-              <a:t>«Merhaba Dünya» programı ne demektir?</a:t>
-            </a:r>
-          </a:p>
-        </p:txBody>
-      </p:sp>
-      <p:sp>
-        <p:nvSpPr>
-          <p:cNvPr id="4" name="Metin kutusu 3">
-            <a:extLst>
-              <a:ext uri="{FF2B5EF4-FFF2-40B4-BE49-F238E27FC236}">
-                <a16:creationId xmlns:a16="http://schemas.microsoft.com/office/drawing/2014/main" id="{D70B57A6-D080-5B67-A1AB-199DF1C60F12}"/>
-              </a:ext>
-            </a:extLst>
-          </p:cNvPr>
-          <p:cNvSpPr txBox="1"/>
-          <p:nvPr/>
-        </p:nvSpPr>
-        <p:spPr>
-          <a:xfrm>
-            <a:off x="5149645" y="5041294"/>
-            <a:ext cx="2553929" cy="1238929"/>
-          </a:xfrm>
-          <a:prstGeom prst="rect">
-            <a:avLst/>
-          </a:prstGeom>
-          <a:noFill/>
-        </p:spPr>
-        <p:txBody>
-          <a:bodyPr wrap="square" rtlCol="0">
-            <a:spAutoFit/>
-          </a:bodyPr>
-          <a:lstStyle/>
-          <a:p>
-            <a:r>
-              <a:rPr lang="tr-TR" sz="1400" dirty="0"/>
-              <a:t>Python:</a:t>
-            </a:r>
-          </a:p>
-          <a:p>
-            <a:endParaRPr lang="tr-TR" sz="1400" dirty="0"/>
-          </a:p>
-          <a:p>
-            <a:pPr>
-              <a:lnSpc>
-                <a:spcPct val="113095"/>
-              </a:lnSpc>
-              <a:buNone/>
-            </a:pPr>
-            <a:r>
-              <a:rPr lang="tr-TR" sz="1400" b="0" dirty="0" err="1">
-                <a:solidFill>
-                  <a:srgbClr val="795E26"/>
-                </a:solidFill>
-                <a:effectLst/>
-                <a:latin typeface="Consolas" panose="020B0609020204030204" pitchFamily="49" charset="0"/>
-              </a:rPr>
-              <a:t>print</a:t>
-            </a:r>
-            <a:r>
-              <a:rPr lang="tr-TR" sz="1400" b="0" dirty="0">
-                <a:solidFill>
-                  <a:srgbClr val="000000"/>
-                </a:solidFill>
-                <a:effectLst/>
-                <a:latin typeface="Consolas" panose="020B0609020204030204" pitchFamily="49" charset="0"/>
-              </a:rPr>
-              <a:t>(</a:t>
-            </a:r>
-            <a:r>
-              <a:rPr lang="tr-TR" sz="1400" b="0" dirty="0">
-                <a:solidFill>
-                  <a:srgbClr val="A31515"/>
-                </a:solidFill>
-                <a:effectLst/>
-                <a:latin typeface="Consolas" panose="020B0609020204030204" pitchFamily="49" charset="0"/>
-              </a:rPr>
-              <a:t>"Merhaba Dünya!"</a:t>
-            </a:r>
-            <a:r>
-              <a:rPr lang="tr-TR" sz="1400" b="0" dirty="0">
-                <a:solidFill>
-                  <a:srgbClr val="000000"/>
-                </a:solidFill>
-                <a:effectLst/>
-                <a:latin typeface="Consolas" panose="020B0609020204030204" pitchFamily="49" charset="0"/>
-              </a:rPr>
-              <a:t>)</a:t>
-            </a:r>
-          </a:p>
-          <a:p>
-            <a:pPr>
-              <a:lnSpc>
-                <a:spcPct val="113095"/>
-              </a:lnSpc>
-              <a:buNone/>
-            </a:pPr>
-            <a:r>
-              <a:rPr lang="tr-TR" sz="1400" b="0" dirty="0" err="1">
-                <a:solidFill>
-                  <a:srgbClr val="795E26"/>
-                </a:solidFill>
-                <a:effectLst/>
-                <a:latin typeface="Consolas" panose="020B0609020204030204" pitchFamily="49" charset="0"/>
-              </a:rPr>
-              <a:t>print</a:t>
-            </a:r>
-            <a:r>
-              <a:rPr lang="tr-TR" sz="1400" b="0" dirty="0">
-                <a:solidFill>
-                  <a:srgbClr val="000000"/>
-                </a:solidFill>
-                <a:effectLst/>
-                <a:latin typeface="Consolas" panose="020B0609020204030204" pitchFamily="49" charset="0"/>
-              </a:rPr>
-              <a:t>(</a:t>
-            </a:r>
-            <a:r>
-              <a:rPr lang="tr-TR" sz="1400" b="0" dirty="0">
-                <a:solidFill>
-                  <a:srgbClr val="A31515"/>
-                </a:solidFill>
-                <a:effectLst/>
-                <a:latin typeface="Consolas" panose="020B0609020204030204" pitchFamily="49" charset="0"/>
-              </a:rPr>
-              <a:t>"Merhaba!"</a:t>
-            </a:r>
-            <a:r>
-              <a:rPr lang="tr-TR" sz="1400" b="0" dirty="0">
-                <a:solidFill>
-                  <a:srgbClr val="000000"/>
-                </a:solidFill>
-                <a:effectLst/>
-                <a:latin typeface="Consolas" panose="020B0609020204030204" pitchFamily="49" charset="0"/>
-              </a:rPr>
-              <a:t>)</a:t>
-            </a:r>
-          </a:p>
-          <a:p>
-            <a:pPr>
-              <a:lnSpc>
-                <a:spcPct val="113095"/>
-              </a:lnSpc>
-              <a:buNone/>
-            </a:pPr>
-            <a:r>
-              <a:rPr lang="tr-TR" sz="1400" b="0" dirty="0" err="1">
-                <a:solidFill>
-                  <a:srgbClr val="795E26"/>
-                </a:solidFill>
-                <a:effectLst/>
-                <a:latin typeface="Consolas" panose="020B0609020204030204" pitchFamily="49" charset="0"/>
-              </a:rPr>
-              <a:t>print</a:t>
-            </a:r>
-            <a:r>
-              <a:rPr lang="tr-TR" sz="1400" b="0" dirty="0">
-                <a:solidFill>
-                  <a:srgbClr val="000000"/>
-                </a:solidFill>
-                <a:effectLst/>
-                <a:latin typeface="Consolas" panose="020B0609020204030204" pitchFamily="49" charset="0"/>
-              </a:rPr>
-              <a:t>(</a:t>
-            </a:r>
-            <a:r>
-              <a:rPr lang="tr-TR" sz="1400" b="0" dirty="0">
-                <a:solidFill>
-                  <a:srgbClr val="A31515"/>
-                </a:solidFill>
-                <a:effectLst/>
-                <a:latin typeface="Consolas" panose="020B0609020204030204" pitchFamily="49" charset="0"/>
-              </a:rPr>
-              <a:t>"Merhabalar!"</a:t>
-            </a:r>
-            <a:r>
-              <a:rPr lang="tr-TR" sz="1400" b="0" dirty="0">
-                <a:solidFill>
-                  <a:srgbClr val="000000"/>
-                </a:solidFill>
-                <a:effectLst/>
-                <a:latin typeface="Consolas" panose="020B0609020204030204" pitchFamily="49" charset="0"/>
-              </a:rPr>
-              <a:t>)</a:t>
-            </a:r>
-          </a:p>
-        </p:txBody>
-      </p:sp>
-      <p:sp>
-        <p:nvSpPr>
-          <p:cNvPr id="5" name="Metin kutusu 4">
-            <a:extLst>
-              <a:ext uri="{FF2B5EF4-FFF2-40B4-BE49-F238E27FC236}">
-                <a16:creationId xmlns:a16="http://schemas.microsoft.com/office/drawing/2014/main" id="{A683C778-5789-7E44-E510-2E86EA0DC103}"/>
-              </a:ext>
-            </a:extLst>
-          </p:cNvPr>
-          <p:cNvSpPr txBox="1"/>
-          <p:nvPr/>
-        </p:nvSpPr>
-        <p:spPr>
-          <a:xfrm>
-            <a:off x="371170" y="1435509"/>
-            <a:ext cx="5105398" cy="4703467"/>
-          </a:xfrm>
-          <a:prstGeom prst="rect">
-            <a:avLst/>
-          </a:prstGeom>
-          <a:noFill/>
-        </p:spPr>
-        <p:txBody>
-          <a:bodyPr wrap="square" rtlCol="0">
-            <a:spAutoFit/>
-          </a:bodyPr>
-          <a:lstStyle/>
-          <a:p>
-            <a:pPr>
-              <a:lnSpc>
-                <a:spcPct val="113095"/>
-              </a:lnSpc>
-              <a:buNone/>
-            </a:pPr>
-            <a:r>
-              <a:rPr lang="tr-TR" sz="1400" dirty="0">
-                <a:solidFill>
-                  <a:srgbClr val="000000"/>
-                </a:solidFill>
-                <a:latin typeface="Consolas" panose="020B0609020204030204" pitchFamily="49" charset="0"/>
-              </a:rPr>
-              <a:t>C# .NET: </a:t>
-            </a:r>
-          </a:p>
-          <a:p>
-            <a:pPr>
-              <a:lnSpc>
-                <a:spcPct val="113095"/>
-              </a:lnSpc>
-              <a:buNone/>
-            </a:pPr>
-            <a:endParaRPr lang="tr-TR" sz="1400" b="0" dirty="0">
-              <a:solidFill>
-                <a:srgbClr val="000000"/>
-              </a:solidFill>
-              <a:effectLst/>
-              <a:latin typeface="Consolas" panose="020B0609020204030204" pitchFamily="49" charset="0"/>
-            </a:endParaRPr>
-          </a:p>
-          <a:p>
-            <a:pPr>
-              <a:lnSpc>
-                <a:spcPct val="113095"/>
-              </a:lnSpc>
-              <a:buNone/>
-            </a:pPr>
-            <a:r>
-              <a:rPr lang="tr-TR" sz="1400" b="0" dirty="0" err="1">
-                <a:solidFill>
-                  <a:srgbClr val="AF00DB"/>
-                </a:solidFill>
-                <a:effectLst/>
-                <a:latin typeface="Consolas" panose="020B0609020204030204" pitchFamily="49" charset="0"/>
-              </a:rPr>
-              <a:t>using</a:t>
-            </a:r>
-            <a:r>
-              <a:rPr lang="tr-TR" sz="1400" b="0" dirty="0">
-                <a:solidFill>
-                  <a:srgbClr val="000000"/>
-                </a:solidFill>
-                <a:effectLst/>
-                <a:latin typeface="Consolas" panose="020B0609020204030204" pitchFamily="49" charset="0"/>
-              </a:rPr>
-              <a:t> </a:t>
-            </a:r>
-            <a:r>
-              <a:rPr lang="tr-TR" sz="1400" b="0" dirty="0" err="1">
-                <a:solidFill>
-                  <a:srgbClr val="267F99"/>
-                </a:solidFill>
-                <a:effectLst/>
-                <a:latin typeface="Consolas" panose="020B0609020204030204" pitchFamily="49" charset="0"/>
-              </a:rPr>
-              <a:t>System</a:t>
-            </a:r>
-            <a:r>
-              <a:rPr lang="tr-TR" sz="1400" b="0" dirty="0">
-                <a:solidFill>
-                  <a:srgbClr val="000000"/>
-                </a:solidFill>
-                <a:effectLst/>
-                <a:latin typeface="Consolas" panose="020B0609020204030204" pitchFamily="49" charset="0"/>
-              </a:rPr>
-              <a:t>;</a:t>
-            </a:r>
-          </a:p>
-          <a:p>
-            <a:pPr>
-              <a:lnSpc>
-                <a:spcPct val="113095"/>
-              </a:lnSpc>
-              <a:buNone/>
-            </a:pPr>
-            <a:r>
-              <a:rPr lang="tr-TR" sz="1400" b="0" dirty="0" err="1">
-                <a:solidFill>
-                  <a:srgbClr val="AF00DB"/>
-                </a:solidFill>
-                <a:effectLst/>
-                <a:latin typeface="Consolas" panose="020B0609020204030204" pitchFamily="49" charset="0"/>
-              </a:rPr>
-              <a:t>using</a:t>
-            </a:r>
-            <a:r>
-              <a:rPr lang="tr-TR" sz="1400" b="0" dirty="0">
-                <a:solidFill>
-                  <a:srgbClr val="000000"/>
-                </a:solidFill>
-                <a:effectLst/>
-                <a:latin typeface="Consolas" panose="020B0609020204030204" pitchFamily="49" charset="0"/>
-              </a:rPr>
-              <a:t> </a:t>
-            </a:r>
-            <a:r>
-              <a:rPr lang="tr-TR" sz="1400" b="0" dirty="0" err="1">
-                <a:solidFill>
-                  <a:srgbClr val="267F99"/>
-                </a:solidFill>
-                <a:effectLst/>
-                <a:latin typeface="Consolas" panose="020B0609020204030204" pitchFamily="49" charset="0"/>
-              </a:rPr>
-              <a:t>System</a:t>
-            </a:r>
-            <a:r>
-              <a:rPr lang="tr-TR" sz="1400" b="0" dirty="0" err="1">
-                <a:solidFill>
-                  <a:srgbClr val="000000"/>
-                </a:solidFill>
-                <a:effectLst/>
-                <a:latin typeface="Consolas" panose="020B0609020204030204" pitchFamily="49" charset="0"/>
-              </a:rPr>
-              <a:t>.</a:t>
-            </a:r>
-            <a:r>
-              <a:rPr lang="tr-TR" sz="1400" b="0" dirty="0" err="1">
-                <a:solidFill>
-                  <a:srgbClr val="267F99"/>
-                </a:solidFill>
-                <a:effectLst/>
-                <a:latin typeface="Consolas" panose="020B0609020204030204" pitchFamily="49" charset="0"/>
-              </a:rPr>
-              <a:t>Collections</a:t>
-            </a:r>
-            <a:r>
-              <a:rPr lang="tr-TR" sz="1400" b="0" dirty="0" err="1">
-                <a:solidFill>
-                  <a:srgbClr val="000000"/>
-                </a:solidFill>
-                <a:effectLst/>
-                <a:latin typeface="Consolas" panose="020B0609020204030204" pitchFamily="49" charset="0"/>
-              </a:rPr>
-              <a:t>.</a:t>
-            </a:r>
-            <a:r>
-              <a:rPr lang="tr-TR" sz="1400" b="0" dirty="0" err="1">
-                <a:solidFill>
-                  <a:srgbClr val="267F99"/>
-                </a:solidFill>
-                <a:effectLst/>
-                <a:latin typeface="Consolas" panose="020B0609020204030204" pitchFamily="49" charset="0"/>
-              </a:rPr>
-              <a:t>Generic</a:t>
-            </a:r>
-            <a:r>
-              <a:rPr lang="tr-TR" sz="1400" b="0" dirty="0">
-                <a:solidFill>
-                  <a:srgbClr val="000000"/>
-                </a:solidFill>
-                <a:effectLst/>
-                <a:latin typeface="Consolas" panose="020B0609020204030204" pitchFamily="49" charset="0"/>
-              </a:rPr>
-              <a:t>;</a:t>
-            </a:r>
-          </a:p>
-          <a:p>
-            <a:pPr>
-              <a:lnSpc>
-                <a:spcPct val="113095"/>
-              </a:lnSpc>
-              <a:buNone/>
-            </a:pPr>
-            <a:r>
-              <a:rPr lang="tr-TR" sz="1400" b="0" dirty="0" err="1">
-                <a:solidFill>
-                  <a:srgbClr val="AF00DB"/>
-                </a:solidFill>
-                <a:effectLst/>
-                <a:latin typeface="Consolas" panose="020B0609020204030204" pitchFamily="49" charset="0"/>
-              </a:rPr>
-              <a:t>using</a:t>
-            </a:r>
-            <a:r>
-              <a:rPr lang="tr-TR" sz="1400" b="0" dirty="0">
-                <a:solidFill>
-                  <a:srgbClr val="000000"/>
-                </a:solidFill>
-                <a:effectLst/>
-                <a:latin typeface="Consolas" panose="020B0609020204030204" pitchFamily="49" charset="0"/>
-              </a:rPr>
-              <a:t> </a:t>
-            </a:r>
-            <a:r>
-              <a:rPr lang="tr-TR" sz="1400" b="0" dirty="0" err="1">
-                <a:solidFill>
-                  <a:srgbClr val="267F99"/>
-                </a:solidFill>
-                <a:effectLst/>
-                <a:latin typeface="Consolas" panose="020B0609020204030204" pitchFamily="49" charset="0"/>
-              </a:rPr>
-              <a:t>System</a:t>
-            </a:r>
-            <a:r>
-              <a:rPr lang="tr-TR" sz="1400" b="0" dirty="0" err="1">
-                <a:solidFill>
-                  <a:srgbClr val="000000"/>
-                </a:solidFill>
-                <a:effectLst/>
-                <a:latin typeface="Consolas" panose="020B0609020204030204" pitchFamily="49" charset="0"/>
-              </a:rPr>
-              <a:t>.</a:t>
-            </a:r>
-            <a:r>
-              <a:rPr lang="tr-TR" sz="1400" b="0" dirty="0" err="1">
-                <a:solidFill>
-                  <a:srgbClr val="267F99"/>
-                </a:solidFill>
-                <a:effectLst/>
-                <a:latin typeface="Consolas" panose="020B0609020204030204" pitchFamily="49" charset="0"/>
-              </a:rPr>
-              <a:t>Linq</a:t>
-            </a:r>
-            <a:r>
-              <a:rPr lang="tr-TR" sz="1400" b="0" dirty="0">
-                <a:solidFill>
-                  <a:srgbClr val="000000"/>
-                </a:solidFill>
-                <a:effectLst/>
-                <a:latin typeface="Consolas" panose="020B0609020204030204" pitchFamily="49" charset="0"/>
-              </a:rPr>
-              <a:t>;</a:t>
-            </a:r>
-          </a:p>
-          <a:p>
-            <a:pPr>
-              <a:lnSpc>
-                <a:spcPct val="113095"/>
-              </a:lnSpc>
-              <a:buNone/>
-            </a:pPr>
-            <a:r>
-              <a:rPr lang="tr-TR" sz="1400" b="0" dirty="0" err="1">
-                <a:solidFill>
-                  <a:srgbClr val="AF00DB"/>
-                </a:solidFill>
-                <a:effectLst/>
-                <a:latin typeface="Consolas" panose="020B0609020204030204" pitchFamily="49" charset="0"/>
-              </a:rPr>
-              <a:t>using</a:t>
-            </a:r>
-            <a:r>
-              <a:rPr lang="tr-TR" sz="1400" b="0" dirty="0">
-                <a:solidFill>
-                  <a:srgbClr val="000000"/>
-                </a:solidFill>
-                <a:effectLst/>
-                <a:latin typeface="Consolas" panose="020B0609020204030204" pitchFamily="49" charset="0"/>
-              </a:rPr>
-              <a:t> </a:t>
-            </a:r>
-            <a:r>
-              <a:rPr lang="tr-TR" sz="1400" b="0" dirty="0" err="1">
-                <a:solidFill>
-                  <a:srgbClr val="267F99"/>
-                </a:solidFill>
-                <a:effectLst/>
-                <a:latin typeface="Consolas" panose="020B0609020204030204" pitchFamily="49" charset="0"/>
-              </a:rPr>
-              <a:t>System</a:t>
-            </a:r>
-            <a:r>
-              <a:rPr lang="tr-TR" sz="1400" b="0" dirty="0" err="1">
-                <a:solidFill>
-                  <a:srgbClr val="000000"/>
-                </a:solidFill>
-                <a:effectLst/>
-                <a:latin typeface="Consolas" panose="020B0609020204030204" pitchFamily="49" charset="0"/>
-              </a:rPr>
-              <a:t>.</a:t>
-            </a:r>
-            <a:r>
-              <a:rPr lang="tr-TR" sz="1400" b="0" dirty="0" err="1">
-                <a:solidFill>
-                  <a:srgbClr val="267F99"/>
-                </a:solidFill>
-                <a:effectLst/>
-                <a:latin typeface="Consolas" panose="020B0609020204030204" pitchFamily="49" charset="0"/>
-              </a:rPr>
-              <a:t>Text</a:t>
-            </a:r>
-            <a:r>
-              <a:rPr lang="tr-TR" sz="1400" b="0" dirty="0" err="1">
-                <a:solidFill>
-                  <a:srgbClr val="000000"/>
-                </a:solidFill>
-                <a:effectLst/>
-                <a:latin typeface="Consolas" panose="020B0609020204030204" pitchFamily="49" charset="0"/>
-              </a:rPr>
-              <a:t>.</a:t>
-            </a:r>
-            <a:r>
-              <a:rPr lang="tr-TR" sz="1400" b="0" dirty="0" err="1">
-                <a:solidFill>
-                  <a:srgbClr val="267F99"/>
-                </a:solidFill>
-                <a:effectLst/>
-                <a:latin typeface="Consolas" panose="020B0609020204030204" pitchFamily="49" charset="0"/>
-              </a:rPr>
-              <a:t>RegularExpressions</a:t>
-            </a:r>
-            <a:r>
-              <a:rPr lang="tr-TR" sz="1400" b="0" dirty="0">
-                <a:solidFill>
-                  <a:srgbClr val="000000"/>
-                </a:solidFill>
-                <a:effectLst/>
-                <a:latin typeface="Consolas" panose="020B0609020204030204" pitchFamily="49" charset="0"/>
-              </a:rPr>
-              <a:t>;</a:t>
-            </a:r>
-          </a:p>
-          <a:p>
-            <a:pPr>
-              <a:lnSpc>
-                <a:spcPct val="113095"/>
-              </a:lnSpc>
-              <a:buNone/>
-            </a:pPr>
-            <a:br>
-              <a:rPr lang="tr-TR" sz="1400" b="0" dirty="0">
-                <a:solidFill>
-                  <a:srgbClr val="000000"/>
-                </a:solidFill>
-                <a:effectLst/>
-                <a:latin typeface="Consolas" panose="020B0609020204030204" pitchFamily="49" charset="0"/>
-              </a:rPr>
-            </a:br>
-            <a:r>
-              <a:rPr lang="tr-TR" sz="1400" b="0" dirty="0" err="1">
-                <a:solidFill>
-                  <a:srgbClr val="0000FF"/>
-                </a:solidFill>
-                <a:effectLst/>
-                <a:latin typeface="Consolas" panose="020B0609020204030204" pitchFamily="49" charset="0"/>
-              </a:rPr>
-              <a:t>namespace</a:t>
-            </a:r>
-            <a:r>
-              <a:rPr lang="tr-TR" sz="1400" b="0" dirty="0">
-                <a:solidFill>
-                  <a:srgbClr val="000000"/>
-                </a:solidFill>
-                <a:effectLst/>
-                <a:latin typeface="Consolas" panose="020B0609020204030204" pitchFamily="49" charset="0"/>
-              </a:rPr>
-              <a:t> </a:t>
-            </a:r>
-            <a:r>
-              <a:rPr lang="tr-TR" sz="1400" b="0" dirty="0" err="1">
-                <a:solidFill>
-                  <a:srgbClr val="267F99"/>
-                </a:solidFill>
-                <a:effectLst/>
-                <a:latin typeface="Consolas" panose="020B0609020204030204" pitchFamily="49" charset="0"/>
-              </a:rPr>
-              <a:t>HelloWorld</a:t>
-            </a:r>
-            <a:endParaRPr lang="tr-TR" sz="1400" b="0" dirty="0">
-              <a:solidFill>
-                <a:srgbClr val="000000"/>
-              </a:solidFill>
-              <a:effectLst/>
-              <a:latin typeface="Consolas" panose="020B0609020204030204" pitchFamily="49" charset="0"/>
-            </a:endParaRPr>
-          </a:p>
-          <a:p>
-            <a:pPr>
-              <a:lnSpc>
-                <a:spcPct val="113095"/>
-              </a:lnSpc>
-              <a:buNone/>
-            </a:pPr>
-            <a:r>
-              <a:rPr lang="tr-TR" sz="1400" b="0" dirty="0">
-                <a:solidFill>
-                  <a:srgbClr val="000000"/>
-                </a:solidFill>
-                <a:effectLst/>
-                <a:latin typeface="Consolas" panose="020B0609020204030204" pitchFamily="49" charset="0"/>
-              </a:rPr>
-              <a:t>{</a:t>
-            </a:r>
-          </a:p>
-          <a:p>
-            <a:pPr>
-              <a:lnSpc>
-                <a:spcPct val="113095"/>
-              </a:lnSpc>
-              <a:buNone/>
-            </a:pPr>
-            <a:r>
-              <a:rPr lang="tr-TR" sz="1400" b="0" dirty="0">
-                <a:solidFill>
-                  <a:srgbClr val="000000"/>
-                </a:solidFill>
-                <a:effectLst/>
-                <a:latin typeface="Consolas" panose="020B0609020204030204" pitchFamily="49" charset="0"/>
-              </a:rPr>
-              <a:t>    </a:t>
-            </a:r>
-            <a:r>
-              <a:rPr lang="tr-TR" sz="1400" b="0" dirty="0" err="1">
-                <a:solidFill>
-                  <a:srgbClr val="0000FF"/>
-                </a:solidFill>
-                <a:effectLst/>
-                <a:latin typeface="Consolas" panose="020B0609020204030204" pitchFamily="49" charset="0"/>
-              </a:rPr>
-              <a:t>public</a:t>
-            </a:r>
-            <a:r>
-              <a:rPr lang="tr-TR" sz="1400" b="0" dirty="0">
-                <a:solidFill>
-                  <a:srgbClr val="000000"/>
-                </a:solidFill>
-                <a:effectLst/>
-                <a:latin typeface="Consolas" panose="020B0609020204030204" pitchFamily="49" charset="0"/>
-              </a:rPr>
-              <a:t> </a:t>
-            </a:r>
-            <a:r>
-              <a:rPr lang="tr-TR" sz="1400" b="0" dirty="0" err="1">
-                <a:solidFill>
-                  <a:srgbClr val="0000FF"/>
-                </a:solidFill>
-                <a:effectLst/>
-                <a:latin typeface="Consolas" panose="020B0609020204030204" pitchFamily="49" charset="0"/>
-              </a:rPr>
-              <a:t>class</a:t>
-            </a:r>
-            <a:r>
-              <a:rPr lang="tr-TR" sz="1400" b="0" dirty="0">
-                <a:solidFill>
-                  <a:srgbClr val="000000"/>
-                </a:solidFill>
-                <a:effectLst/>
-                <a:latin typeface="Consolas" panose="020B0609020204030204" pitchFamily="49" charset="0"/>
-              </a:rPr>
-              <a:t> </a:t>
-            </a:r>
-            <a:r>
-              <a:rPr lang="tr-TR" sz="1400" b="0" dirty="0">
-                <a:solidFill>
-                  <a:srgbClr val="267F99"/>
-                </a:solidFill>
-                <a:effectLst/>
-                <a:latin typeface="Consolas" panose="020B0609020204030204" pitchFamily="49" charset="0"/>
-              </a:rPr>
-              <a:t>Program</a:t>
-            </a:r>
-            <a:endParaRPr lang="tr-TR" sz="1400" b="0" dirty="0">
-              <a:solidFill>
-                <a:srgbClr val="000000"/>
-              </a:solidFill>
-              <a:effectLst/>
-              <a:latin typeface="Consolas" panose="020B0609020204030204" pitchFamily="49" charset="0"/>
-            </a:endParaRPr>
-          </a:p>
-          <a:p>
-            <a:pPr>
-              <a:lnSpc>
-                <a:spcPct val="113095"/>
-              </a:lnSpc>
-              <a:buNone/>
-            </a:pPr>
-            <a:r>
-              <a:rPr lang="tr-TR" sz="1400" b="0" dirty="0">
-                <a:solidFill>
-                  <a:srgbClr val="000000"/>
-                </a:solidFill>
-                <a:effectLst/>
-                <a:latin typeface="Consolas" panose="020B0609020204030204" pitchFamily="49" charset="0"/>
-              </a:rPr>
-              <a:t>    {</a:t>
-            </a:r>
-          </a:p>
-          <a:p>
-            <a:pPr>
-              <a:lnSpc>
-                <a:spcPct val="113095"/>
-              </a:lnSpc>
-              <a:buNone/>
-            </a:pPr>
-            <a:r>
-              <a:rPr lang="tr-TR" sz="1400" b="0" dirty="0">
-                <a:solidFill>
-                  <a:srgbClr val="000000"/>
-                </a:solidFill>
-                <a:effectLst/>
-                <a:latin typeface="Consolas" panose="020B0609020204030204" pitchFamily="49" charset="0"/>
-              </a:rPr>
-              <a:t>        </a:t>
-            </a:r>
-            <a:r>
-              <a:rPr lang="tr-TR" sz="1400" b="0" dirty="0" err="1">
-                <a:solidFill>
-                  <a:srgbClr val="0000FF"/>
-                </a:solidFill>
-                <a:effectLst/>
-                <a:latin typeface="Consolas" panose="020B0609020204030204" pitchFamily="49" charset="0"/>
-              </a:rPr>
-              <a:t>public</a:t>
-            </a:r>
-            <a:r>
-              <a:rPr lang="tr-TR" sz="1400" b="0" dirty="0">
-                <a:solidFill>
-                  <a:srgbClr val="000000"/>
-                </a:solidFill>
-                <a:effectLst/>
-                <a:latin typeface="Consolas" panose="020B0609020204030204" pitchFamily="49" charset="0"/>
-              </a:rPr>
-              <a:t> </a:t>
-            </a:r>
-            <a:r>
-              <a:rPr lang="tr-TR" sz="1400" b="0" dirty="0" err="1">
-                <a:solidFill>
-                  <a:srgbClr val="0000FF"/>
-                </a:solidFill>
-                <a:effectLst/>
-                <a:latin typeface="Consolas" panose="020B0609020204030204" pitchFamily="49" charset="0"/>
-              </a:rPr>
-              <a:t>static</a:t>
-            </a:r>
-            <a:r>
-              <a:rPr lang="tr-TR" sz="1400" b="0" dirty="0">
-                <a:solidFill>
-                  <a:srgbClr val="000000"/>
-                </a:solidFill>
-                <a:effectLst/>
-                <a:latin typeface="Consolas" panose="020B0609020204030204" pitchFamily="49" charset="0"/>
-              </a:rPr>
-              <a:t> </a:t>
-            </a:r>
-            <a:r>
-              <a:rPr lang="tr-TR" sz="1400" b="0" dirty="0" err="1">
-                <a:solidFill>
-                  <a:srgbClr val="0000FF"/>
-                </a:solidFill>
-                <a:effectLst/>
-                <a:latin typeface="Consolas" panose="020B0609020204030204" pitchFamily="49" charset="0"/>
-              </a:rPr>
-              <a:t>void</a:t>
-            </a:r>
-            <a:r>
-              <a:rPr lang="tr-TR" sz="1400" b="0" dirty="0">
-                <a:solidFill>
-                  <a:srgbClr val="000000"/>
-                </a:solidFill>
-                <a:effectLst/>
-                <a:latin typeface="Consolas" panose="020B0609020204030204" pitchFamily="49" charset="0"/>
-              </a:rPr>
-              <a:t> </a:t>
-            </a:r>
-            <a:r>
-              <a:rPr lang="tr-TR" sz="1400" b="0" dirty="0">
-                <a:solidFill>
-                  <a:srgbClr val="795E26"/>
-                </a:solidFill>
-                <a:effectLst/>
-                <a:latin typeface="Consolas" panose="020B0609020204030204" pitchFamily="49" charset="0"/>
-              </a:rPr>
-              <a:t>Main</a:t>
-            </a:r>
-            <a:r>
-              <a:rPr lang="tr-TR" sz="1400" b="0" dirty="0">
-                <a:solidFill>
-                  <a:srgbClr val="000000"/>
-                </a:solidFill>
-                <a:effectLst/>
-                <a:latin typeface="Consolas" panose="020B0609020204030204" pitchFamily="49" charset="0"/>
-              </a:rPr>
-              <a:t>(</a:t>
-            </a:r>
-            <a:r>
-              <a:rPr lang="tr-TR" sz="1400" b="0" dirty="0" err="1">
-                <a:solidFill>
-                  <a:srgbClr val="0000FF"/>
-                </a:solidFill>
-                <a:effectLst/>
-                <a:latin typeface="Consolas" panose="020B0609020204030204" pitchFamily="49" charset="0"/>
-              </a:rPr>
-              <a:t>string</a:t>
-            </a:r>
-            <a:r>
-              <a:rPr lang="tr-TR" sz="1400" b="0" dirty="0">
-                <a:solidFill>
-                  <a:srgbClr val="000000"/>
-                </a:solidFill>
-                <a:effectLst/>
-                <a:latin typeface="Consolas" panose="020B0609020204030204" pitchFamily="49" charset="0"/>
-              </a:rPr>
-              <a:t>[] </a:t>
-            </a:r>
-            <a:r>
-              <a:rPr lang="tr-TR" sz="1400" b="0" dirty="0" err="1">
-                <a:solidFill>
-                  <a:srgbClr val="001080"/>
-                </a:solidFill>
-                <a:effectLst/>
-                <a:latin typeface="Consolas" panose="020B0609020204030204" pitchFamily="49" charset="0"/>
-              </a:rPr>
-              <a:t>args</a:t>
-            </a:r>
-            <a:r>
-              <a:rPr lang="tr-TR" sz="1400" b="0" dirty="0">
-                <a:solidFill>
-                  <a:srgbClr val="000000"/>
-                </a:solidFill>
-                <a:effectLst/>
-                <a:latin typeface="Consolas" panose="020B0609020204030204" pitchFamily="49" charset="0"/>
-              </a:rPr>
-              <a:t>)</a:t>
-            </a:r>
-          </a:p>
-          <a:p>
-            <a:pPr>
-              <a:lnSpc>
-                <a:spcPct val="113095"/>
-              </a:lnSpc>
-              <a:buNone/>
-            </a:pPr>
-            <a:r>
-              <a:rPr lang="tr-TR" sz="1400" b="0" dirty="0">
-                <a:solidFill>
-                  <a:srgbClr val="000000"/>
-                </a:solidFill>
-                <a:effectLst/>
-                <a:latin typeface="Consolas" panose="020B0609020204030204" pitchFamily="49" charset="0"/>
-              </a:rPr>
-              <a:t>        {</a:t>
-            </a:r>
-          </a:p>
-          <a:p>
-            <a:pPr>
-              <a:lnSpc>
-                <a:spcPct val="113095"/>
-              </a:lnSpc>
-              <a:buNone/>
-            </a:pPr>
-            <a:r>
-              <a:rPr lang="tr-TR" sz="1400" b="0" dirty="0">
-                <a:solidFill>
-                  <a:srgbClr val="000000"/>
-                </a:solidFill>
-                <a:effectLst/>
-                <a:latin typeface="Consolas" panose="020B0609020204030204" pitchFamily="49" charset="0"/>
-              </a:rPr>
-              <a:t>            </a:t>
-            </a:r>
-            <a:r>
-              <a:rPr lang="tr-TR" sz="1400" b="0" dirty="0" err="1">
-                <a:solidFill>
-                  <a:srgbClr val="001080"/>
-                </a:solidFill>
-                <a:effectLst/>
-                <a:latin typeface="Consolas" panose="020B0609020204030204" pitchFamily="49" charset="0"/>
-              </a:rPr>
-              <a:t>Console</a:t>
-            </a:r>
-            <a:r>
-              <a:rPr lang="tr-TR" sz="1400" b="0" dirty="0" err="1">
-                <a:solidFill>
-                  <a:srgbClr val="000000"/>
-                </a:solidFill>
-                <a:effectLst/>
-                <a:latin typeface="Consolas" panose="020B0609020204030204" pitchFamily="49" charset="0"/>
-              </a:rPr>
-              <a:t>.</a:t>
-            </a:r>
-            <a:r>
-              <a:rPr lang="tr-TR" sz="1400" b="0" dirty="0" err="1">
-                <a:solidFill>
-                  <a:srgbClr val="795E26"/>
-                </a:solidFill>
-                <a:effectLst/>
-                <a:latin typeface="Consolas" panose="020B0609020204030204" pitchFamily="49" charset="0"/>
-              </a:rPr>
-              <a:t>WriteLine</a:t>
-            </a:r>
-            <a:r>
-              <a:rPr lang="tr-TR" sz="1400" b="0" dirty="0">
-                <a:solidFill>
-                  <a:srgbClr val="000000"/>
-                </a:solidFill>
-                <a:effectLst/>
-                <a:latin typeface="Consolas" panose="020B0609020204030204" pitchFamily="49" charset="0"/>
-              </a:rPr>
-              <a:t>(</a:t>
-            </a:r>
-            <a:r>
-              <a:rPr lang="tr-TR" sz="1400" dirty="0">
-                <a:solidFill>
-                  <a:srgbClr val="A31515"/>
-                </a:solidFill>
-                <a:latin typeface="Consolas" panose="020B0609020204030204" pitchFamily="49" charset="0"/>
-              </a:rPr>
-              <a:t>"Merhaba </a:t>
-            </a:r>
-            <a:r>
-              <a:rPr lang="tr-TR" sz="1400" b="0" dirty="0">
-                <a:solidFill>
-                  <a:srgbClr val="A31515"/>
-                </a:solidFill>
-                <a:effectLst/>
-                <a:latin typeface="Consolas" panose="020B0609020204030204" pitchFamily="49" charset="0"/>
-              </a:rPr>
-              <a:t>Dünya!"</a:t>
-            </a:r>
-            <a:r>
-              <a:rPr lang="tr-TR" sz="1400" b="0" dirty="0">
-                <a:solidFill>
-                  <a:srgbClr val="000000"/>
-                </a:solidFill>
-                <a:effectLst/>
-                <a:latin typeface="Consolas" panose="020B0609020204030204" pitchFamily="49" charset="0"/>
-              </a:rPr>
-              <a:t>);</a:t>
-            </a:r>
-          </a:p>
-          <a:p>
-            <a:pPr>
-              <a:lnSpc>
-                <a:spcPct val="113095"/>
-              </a:lnSpc>
-              <a:buNone/>
-            </a:pPr>
-            <a:r>
-              <a:rPr lang="tr-TR" sz="1400" b="0" dirty="0">
-                <a:solidFill>
-                  <a:srgbClr val="000000"/>
-                </a:solidFill>
-                <a:effectLst/>
-                <a:latin typeface="Consolas" panose="020B0609020204030204" pitchFamily="49" charset="0"/>
-              </a:rPr>
-              <a:t>            </a:t>
-            </a:r>
-            <a:r>
-              <a:rPr lang="tr-TR" sz="1400" b="0" dirty="0" err="1">
-                <a:solidFill>
-                  <a:srgbClr val="001080"/>
-                </a:solidFill>
-                <a:effectLst/>
-                <a:latin typeface="Consolas" panose="020B0609020204030204" pitchFamily="49" charset="0"/>
-              </a:rPr>
-              <a:t>Console</a:t>
-            </a:r>
-            <a:r>
-              <a:rPr lang="tr-TR" sz="1400" b="0" dirty="0" err="1">
-                <a:solidFill>
-                  <a:srgbClr val="000000"/>
-                </a:solidFill>
-                <a:effectLst/>
-                <a:latin typeface="Consolas" panose="020B0609020204030204" pitchFamily="49" charset="0"/>
-              </a:rPr>
-              <a:t>.</a:t>
-            </a:r>
-            <a:r>
-              <a:rPr lang="tr-TR" sz="1400" b="0" dirty="0" err="1">
-                <a:solidFill>
-                  <a:srgbClr val="795E26"/>
-                </a:solidFill>
-                <a:effectLst/>
-                <a:latin typeface="Consolas" panose="020B0609020204030204" pitchFamily="49" charset="0"/>
-              </a:rPr>
-              <a:t>WriteLine</a:t>
-            </a:r>
-            <a:r>
-              <a:rPr lang="tr-TR" sz="1400" b="0" dirty="0">
-                <a:solidFill>
-                  <a:srgbClr val="000000"/>
-                </a:solidFill>
-                <a:effectLst/>
-                <a:latin typeface="Consolas" panose="020B0609020204030204" pitchFamily="49" charset="0"/>
-              </a:rPr>
-              <a:t>(</a:t>
-            </a:r>
-            <a:r>
-              <a:rPr lang="tr-TR" sz="1400" b="0" dirty="0">
-                <a:solidFill>
-                  <a:srgbClr val="A31515"/>
-                </a:solidFill>
-                <a:effectLst/>
-                <a:latin typeface="Consolas" panose="020B0609020204030204" pitchFamily="49" charset="0"/>
-              </a:rPr>
-              <a:t>"Merhaba"</a:t>
-            </a:r>
-            <a:r>
-              <a:rPr lang="tr-TR" sz="1400" b="0" dirty="0">
-                <a:solidFill>
-                  <a:srgbClr val="000000"/>
-                </a:solidFill>
-                <a:effectLst/>
-                <a:latin typeface="Consolas" panose="020B0609020204030204" pitchFamily="49" charset="0"/>
-              </a:rPr>
-              <a:t>);</a:t>
-            </a:r>
-          </a:p>
-          <a:p>
-            <a:pPr>
-              <a:lnSpc>
-                <a:spcPct val="113095"/>
-              </a:lnSpc>
-              <a:buNone/>
-            </a:pPr>
-            <a:r>
-              <a:rPr lang="tr-TR" sz="1400" b="0" dirty="0">
-                <a:solidFill>
-                  <a:srgbClr val="000000"/>
-                </a:solidFill>
-                <a:effectLst/>
-                <a:latin typeface="Consolas" panose="020B0609020204030204" pitchFamily="49" charset="0"/>
-              </a:rPr>
-              <a:t>            </a:t>
-            </a:r>
-            <a:r>
-              <a:rPr lang="tr-TR" sz="1400" b="0" dirty="0" err="1">
-                <a:solidFill>
-                  <a:srgbClr val="001080"/>
-                </a:solidFill>
-                <a:effectLst/>
-                <a:latin typeface="Consolas" panose="020B0609020204030204" pitchFamily="49" charset="0"/>
-              </a:rPr>
-              <a:t>Console</a:t>
-            </a:r>
-            <a:r>
-              <a:rPr lang="tr-TR" sz="1400" b="0" dirty="0" err="1">
-                <a:solidFill>
-                  <a:srgbClr val="000000"/>
-                </a:solidFill>
-                <a:effectLst/>
-                <a:latin typeface="Consolas" panose="020B0609020204030204" pitchFamily="49" charset="0"/>
-              </a:rPr>
-              <a:t>.</a:t>
-            </a:r>
-            <a:r>
-              <a:rPr lang="tr-TR" sz="1400" b="0" dirty="0" err="1">
-                <a:solidFill>
-                  <a:srgbClr val="795E26"/>
-                </a:solidFill>
-                <a:effectLst/>
-                <a:latin typeface="Consolas" panose="020B0609020204030204" pitchFamily="49" charset="0"/>
-              </a:rPr>
-              <a:t>WriteLine</a:t>
-            </a:r>
-            <a:r>
-              <a:rPr lang="tr-TR" sz="1400" b="0" dirty="0">
-                <a:solidFill>
-                  <a:srgbClr val="000000"/>
-                </a:solidFill>
-                <a:effectLst/>
-                <a:latin typeface="Consolas" panose="020B0609020204030204" pitchFamily="49" charset="0"/>
-              </a:rPr>
-              <a:t>(</a:t>
-            </a:r>
-            <a:r>
-              <a:rPr lang="tr-TR" sz="1400" b="0" dirty="0">
-                <a:solidFill>
-                  <a:srgbClr val="A31515"/>
-                </a:solidFill>
-                <a:effectLst/>
-                <a:latin typeface="Consolas" panose="020B0609020204030204" pitchFamily="49" charset="0"/>
-              </a:rPr>
-              <a:t>"Merhabalar"</a:t>
-            </a:r>
-            <a:r>
-              <a:rPr lang="tr-TR" sz="1400" b="0" dirty="0">
-                <a:solidFill>
-                  <a:srgbClr val="000000"/>
-                </a:solidFill>
-                <a:effectLst/>
-                <a:latin typeface="Consolas" panose="020B0609020204030204" pitchFamily="49" charset="0"/>
-              </a:rPr>
-              <a:t>);</a:t>
-            </a:r>
-          </a:p>
-          <a:p>
-            <a:pPr>
-              <a:lnSpc>
-                <a:spcPct val="113095"/>
-              </a:lnSpc>
-              <a:buNone/>
-            </a:pPr>
-            <a:r>
-              <a:rPr lang="tr-TR" sz="1400" b="0" dirty="0">
-                <a:solidFill>
-                  <a:srgbClr val="000000"/>
-                </a:solidFill>
-                <a:effectLst/>
-                <a:latin typeface="Consolas" panose="020B0609020204030204" pitchFamily="49" charset="0"/>
-              </a:rPr>
-              <a:t>        }</a:t>
-            </a:r>
-          </a:p>
-          <a:p>
-            <a:pPr>
-              <a:lnSpc>
-                <a:spcPct val="113095"/>
-              </a:lnSpc>
-              <a:buNone/>
-            </a:pPr>
-            <a:r>
-              <a:rPr lang="tr-TR" sz="1400" b="0" dirty="0">
-                <a:solidFill>
-                  <a:srgbClr val="000000"/>
-                </a:solidFill>
-                <a:effectLst/>
-                <a:latin typeface="Consolas" panose="020B0609020204030204" pitchFamily="49" charset="0"/>
-              </a:rPr>
-              <a:t>    }</a:t>
-            </a:r>
-          </a:p>
-          <a:p>
-            <a:pPr>
-              <a:lnSpc>
-                <a:spcPct val="113095"/>
-              </a:lnSpc>
-              <a:buNone/>
-            </a:pPr>
-            <a:r>
-              <a:rPr lang="tr-TR" sz="1400" b="0" dirty="0">
-                <a:solidFill>
-                  <a:srgbClr val="000000"/>
-                </a:solidFill>
-                <a:effectLst/>
-                <a:latin typeface="Consolas" panose="020B0609020204030204" pitchFamily="49" charset="0"/>
-              </a:rPr>
-              <a:t>}</a:t>
-            </a:r>
-          </a:p>
-        </p:txBody>
-      </p:sp>
-      <p:sp>
-        <p:nvSpPr>
-          <p:cNvPr id="6" name="Metin kutusu 5">
-            <a:extLst>
-              <a:ext uri="{FF2B5EF4-FFF2-40B4-BE49-F238E27FC236}">
-                <a16:creationId xmlns:a16="http://schemas.microsoft.com/office/drawing/2014/main" id="{C285EDBB-11EC-C7CB-7875-716FC198682B}"/>
-              </a:ext>
-            </a:extLst>
-          </p:cNvPr>
-          <p:cNvSpPr txBox="1"/>
-          <p:nvPr/>
-        </p:nvSpPr>
-        <p:spPr>
-          <a:xfrm>
-            <a:off x="4520380" y="1294262"/>
-            <a:ext cx="4166419" cy="2565702"/>
-          </a:xfrm>
-          <a:prstGeom prst="rect">
-            <a:avLst/>
-          </a:prstGeom>
-          <a:noFill/>
-        </p:spPr>
-        <p:txBody>
-          <a:bodyPr wrap="square" rtlCol="0">
-            <a:spAutoFit/>
-          </a:bodyPr>
-          <a:lstStyle/>
-          <a:p>
-            <a:pPr>
-              <a:lnSpc>
-                <a:spcPct val="113095"/>
-              </a:lnSpc>
-            </a:pPr>
-            <a:r>
-              <a:rPr lang="tr-TR" sz="1300" dirty="0">
-                <a:solidFill>
-                  <a:srgbClr val="000000"/>
-                </a:solidFill>
-                <a:latin typeface="Consolas" panose="020B0609020204030204" pitchFamily="49" charset="0"/>
-              </a:rPr>
-              <a:t>Java:</a:t>
-            </a:r>
-          </a:p>
-          <a:p>
-            <a:pPr>
-              <a:lnSpc>
-                <a:spcPct val="113095"/>
-              </a:lnSpc>
-            </a:pPr>
-            <a:endParaRPr lang="tr-TR" sz="1300" dirty="0">
-              <a:solidFill>
-                <a:srgbClr val="000000"/>
-              </a:solidFill>
-              <a:latin typeface="Consolas" panose="020B0609020204030204" pitchFamily="49" charset="0"/>
-            </a:endParaRPr>
-          </a:p>
-          <a:p>
-            <a:pPr>
-              <a:lnSpc>
-                <a:spcPct val="113095"/>
-              </a:lnSpc>
-              <a:buNone/>
-            </a:pPr>
-            <a:r>
-              <a:rPr lang="tr-TR" sz="1300" b="0" dirty="0" err="1">
-                <a:solidFill>
-                  <a:srgbClr val="0000FF"/>
-                </a:solidFill>
-                <a:effectLst/>
-                <a:latin typeface="Consolas" panose="020B0609020204030204" pitchFamily="49" charset="0"/>
-              </a:rPr>
-              <a:t>import</a:t>
-            </a:r>
-            <a:r>
-              <a:rPr lang="tr-TR" sz="1300" b="0" dirty="0">
-                <a:solidFill>
-                  <a:srgbClr val="000000"/>
-                </a:solidFill>
-                <a:effectLst/>
-                <a:latin typeface="Consolas" panose="020B0609020204030204" pitchFamily="49" charset="0"/>
-              </a:rPr>
-              <a:t> </a:t>
-            </a:r>
-            <a:r>
-              <a:rPr lang="tr-TR" sz="1300" b="0" dirty="0" err="1">
-                <a:solidFill>
-                  <a:srgbClr val="000000"/>
-                </a:solidFill>
-                <a:effectLst/>
-                <a:latin typeface="Consolas" panose="020B0609020204030204" pitchFamily="49" charset="0"/>
-              </a:rPr>
-              <a:t>java.util</a:t>
-            </a:r>
-            <a:r>
-              <a:rPr lang="tr-TR" sz="1300" b="0" dirty="0">
-                <a:solidFill>
-                  <a:srgbClr val="000000"/>
-                </a:solidFill>
-                <a:effectLst/>
-                <a:latin typeface="Consolas" panose="020B0609020204030204" pitchFamily="49" charset="0"/>
-              </a:rPr>
-              <a:t>.*;</a:t>
-            </a:r>
-          </a:p>
-          <a:p>
-            <a:pPr>
-              <a:lnSpc>
-                <a:spcPct val="113095"/>
-              </a:lnSpc>
-              <a:buNone/>
-            </a:pPr>
-            <a:endParaRPr lang="tr-TR" sz="1300" b="0" dirty="0">
-              <a:solidFill>
-                <a:srgbClr val="000000"/>
-              </a:solidFill>
-              <a:effectLst/>
-              <a:latin typeface="Consolas" panose="020B0609020204030204" pitchFamily="49" charset="0"/>
-            </a:endParaRPr>
-          </a:p>
-          <a:p>
-            <a:pPr>
-              <a:lnSpc>
-                <a:spcPct val="113095"/>
-              </a:lnSpc>
-              <a:buNone/>
-            </a:pPr>
-            <a:r>
-              <a:rPr lang="tr-TR" sz="1300" b="0" dirty="0" err="1">
-                <a:solidFill>
-                  <a:srgbClr val="0000FF"/>
-                </a:solidFill>
-                <a:effectLst/>
-                <a:latin typeface="Consolas" panose="020B0609020204030204" pitchFamily="49" charset="0"/>
-              </a:rPr>
-              <a:t>public</a:t>
-            </a:r>
-            <a:r>
-              <a:rPr lang="tr-TR" sz="1300" b="0" dirty="0">
-                <a:solidFill>
-                  <a:srgbClr val="000000"/>
-                </a:solidFill>
-                <a:effectLst/>
-                <a:latin typeface="Consolas" panose="020B0609020204030204" pitchFamily="49" charset="0"/>
-              </a:rPr>
-              <a:t> </a:t>
-            </a:r>
-            <a:r>
-              <a:rPr lang="tr-TR" sz="1300" b="0" dirty="0" err="1">
-                <a:solidFill>
-                  <a:srgbClr val="0000FF"/>
-                </a:solidFill>
-                <a:effectLst/>
-                <a:latin typeface="Consolas" panose="020B0609020204030204" pitchFamily="49" charset="0"/>
-              </a:rPr>
-              <a:t>class</a:t>
-            </a:r>
-            <a:r>
-              <a:rPr lang="tr-TR" sz="1300" b="0" dirty="0">
-                <a:solidFill>
-                  <a:srgbClr val="000000"/>
-                </a:solidFill>
-                <a:effectLst/>
-                <a:latin typeface="Consolas" panose="020B0609020204030204" pitchFamily="49" charset="0"/>
-              </a:rPr>
-              <a:t> </a:t>
-            </a:r>
-            <a:r>
-              <a:rPr lang="tr-TR" sz="1300" b="0" dirty="0">
-                <a:solidFill>
-                  <a:srgbClr val="267F99"/>
-                </a:solidFill>
-                <a:effectLst/>
-                <a:latin typeface="Consolas" panose="020B0609020204030204" pitchFamily="49" charset="0"/>
-              </a:rPr>
-              <a:t>Main</a:t>
-            </a:r>
-            <a:r>
-              <a:rPr lang="tr-TR" sz="1300" b="0" dirty="0">
-                <a:solidFill>
-                  <a:srgbClr val="000000"/>
-                </a:solidFill>
-                <a:effectLst/>
-                <a:latin typeface="Consolas" panose="020B0609020204030204" pitchFamily="49" charset="0"/>
-              </a:rPr>
-              <a:t> {</a:t>
-            </a:r>
-          </a:p>
-          <a:p>
-            <a:pPr>
-              <a:lnSpc>
-                <a:spcPct val="113095"/>
-              </a:lnSpc>
-              <a:buNone/>
-            </a:pPr>
-            <a:r>
-              <a:rPr lang="tr-TR" sz="1300" b="0" dirty="0">
-                <a:solidFill>
-                  <a:srgbClr val="000000"/>
-                </a:solidFill>
-                <a:effectLst/>
-                <a:latin typeface="Consolas" panose="020B0609020204030204" pitchFamily="49" charset="0"/>
-              </a:rPr>
-              <a:t>    </a:t>
-            </a:r>
-            <a:r>
-              <a:rPr lang="tr-TR" sz="1300" b="0" dirty="0" err="1">
-                <a:solidFill>
-                  <a:srgbClr val="0000FF"/>
-                </a:solidFill>
-                <a:effectLst/>
-                <a:latin typeface="Consolas" panose="020B0609020204030204" pitchFamily="49" charset="0"/>
-              </a:rPr>
-              <a:t>public</a:t>
-            </a:r>
-            <a:r>
-              <a:rPr lang="tr-TR" sz="1300" b="0" dirty="0">
-                <a:solidFill>
-                  <a:srgbClr val="000000"/>
-                </a:solidFill>
-                <a:effectLst/>
-                <a:latin typeface="Consolas" panose="020B0609020204030204" pitchFamily="49" charset="0"/>
-              </a:rPr>
-              <a:t> </a:t>
-            </a:r>
-            <a:r>
-              <a:rPr lang="tr-TR" sz="1300" b="0" dirty="0" err="1">
-                <a:solidFill>
-                  <a:srgbClr val="0000FF"/>
-                </a:solidFill>
-                <a:effectLst/>
-                <a:latin typeface="Consolas" panose="020B0609020204030204" pitchFamily="49" charset="0"/>
-              </a:rPr>
-              <a:t>static</a:t>
-            </a:r>
-            <a:r>
-              <a:rPr lang="tr-TR" sz="1300" b="0" dirty="0">
-                <a:solidFill>
-                  <a:srgbClr val="000000"/>
-                </a:solidFill>
-                <a:effectLst/>
-                <a:latin typeface="Consolas" panose="020B0609020204030204" pitchFamily="49" charset="0"/>
-              </a:rPr>
-              <a:t> </a:t>
-            </a:r>
-            <a:r>
-              <a:rPr lang="tr-TR" sz="1300" b="0" dirty="0" err="1">
-                <a:solidFill>
-                  <a:srgbClr val="267F99"/>
-                </a:solidFill>
-                <a:effectLst/>
-                <a:latin typeface="Consolas" panose="020B0609020204030204" pitchFamily="49" charset="0"/>
-              </a:rPr>
-              <a:t>void</a:t>
-            </a:r>
-            <a:r>
-              <a:rPr lang="tr-TR" sz="1300" b="0" dirty="0">
-                <a:solidFill>
-                  <a:srgbClr val="000000"/>
-                </a:solidFill>
-                <a:effectLst/>
-                <a:latin typeface="Consolas" panose="020B0609020204030204" pitchFamily="49" charset="0"/>
-              </a:rPr>
-              <a:t> </a:t>
-            </a:r>
-            <a:r>
-              <a:rPr lang="tr-TR" sz="1300" b="0" dirty="0">
-                <a:solidFill>
-                  <a:srgbClr val="795E26"/>
-                </a:solidFill>
-                <a:effectLst/>
-                <a:latin typeface="Consolas" panose="020B0609020204030204" pitchFamily="49" charset="0"/>
-              </a:rPr>
-              <a:t>main</a:t>
-            </a:r>
-            <a:r>
-              <a:rPr lang="tr-TR" sz="1300" b="0" dirty="0">
-                <a:solidFill>
-                  <a:srgbClr val="000000"/>
-                </a:solidFill>
-                <a:effectLst/>
-                <a:latin typeface="Consolas" panose="020B0609020204030204" pitchFamily="49" charset="0"/>
-              </a:rPr>
-              <a:t>(</a:t>
-            </a:r>
-            <a:r>
-              <a:rPr lang="tr-TR" sz="1300" b="0" dirty="0" err="1">
-                <a:solidFill>
-                  <a:srgbClr val="267F99"/>
-                </a:solidFill>
-                <a:effectLst/>
-                <a:latin typeface="Consolas" panose="020B0609020204030204" pitchFamily="49" charset="0"/>
-              </a:rPr>
-              <a:t>String</a:t>
-            </a:r>
-            <a:r>
-              <a:rPr lang="tr-TR" sz="1300" b="0" dirty="0">
-                <a:solidFill>
-                  <a:srgbClr val="000000"/>
-                </a:solidFill>
-                <a:effectLst/>
-                <a:latin typeface="Consolas" panose="020B0609020204030204" pitchFamily="49" charset="0"/>
-              </a:rPr>
-              <a:t>[] </a:t>
-            </a:r>
-            <a:r>
-              <a:rPr lang="tr-TR" sz="1300" b="0" dirty="0" err="1">
-                <a:solidFill>
-                  <a:srgbClr val="001080"/>
-                </a:solidFill>
-                <a:effectLst/>
-                <a:latin typeface="Consolas" panose="020B0609020204030204" pitchFamily="49" charset="0"/>
-              </a:rPr>
-              <a:t>args</a:t>
-            </a:r>
-            <a:r>
-              <a:rPr lang="tr-TR" sz="1300" b="0" dirty="0">
-                <a:solidFill>
-                  <a:srgbClr val="000000"/>
-                </a:solidFill>
-                <a:effectLst/>
-                <a:latin typeface="Consolas" panose="020B0609020204030204" pitchFamily="49" charset="0"/>
-              </a:rPr>
-              <a:t>) {</a:t>
-            </a:r>
-          </a:p>
-          <a:p>
-            <a:pPr>
-              <a:lnSpc>
-                <a:spcPct val="113095"/>
-              </a:lnSpc>
-              <a:buNone/>
-            </a:pPr>
-            <a:r>
-              <a:rPr lang="tr-TR" sz="1300" b="0" dirty="0">
-                <a:solidFill>
-                  <a:srgbClr val="000000"/>
-                </a:solidFill>
-                <a:effectLst/>
-                <a:latin typeface="Consolas" panose="020B0609020204030204" pitchFamily="49" charset="0"/>
-              </a:rPr>
-              <a:t>      </a:t>
-            </a:r>
-            <a:r>
-              <a:rPr lang="tr-TR" sz="1300" b="0" dirty="0" err="1">
-                <a:solidFill>
-                  <a:srgbClr val="001080"/>
-                </a:solidFill>
-                <a:effectLst/>
-                <a:latin typeface="Consolas" panose="020B0609020204030204" pitchFamily="49" charset="0"/>
-              </a:rPr>
-              <a:t>System</a:t>
-            </a:r>
-            <a:r>
-              <a:rPr lang="tr-TR" sz="1300" b="0" dirty="0" err="1">
-                <a:solidFill>
-                  <a:srgbClr val="000000"/>
-                </a:solidFill>
-                <a:effectLst/>
-                <a:latin typeface="Consolas" panose="020B0609020204030204" pitchFamily="49" charset="0"/>
-              </a:rPr>
-              <a:t>.</a:t>
-            </a:r>
-            <a:r>
-              <a:rPr lang="tr-TR" sz="1300" b="0" dirty="0" err="1">
-                <a:solidFill>
-                  <a:srgbClr val="001080"/>
-                </a:solidFill>
-                <a:effectLst/>
-                <a:latin typeface="Consolas" panose="020B0609020204030204" pitchFamily="49" charset="0"/>
-              </a:rPr>
-              <a:t>out</a:t>
-            </a:r>
-            <a:r>
-              <a:rPr lang="tr-TR" sz="1300" b="0" dirty="0" err="1">
-                <a:solidFill>
-                  <a:srgbClr val="000000"/>
-                </a:solidFill>
-                <a:effectLst/>
-                <a:latin typeface="Consolas" panose="020B0609020204030204" pitchFamily="49" charset="0"/>
-              </a:rPr>
-              <a:t>.</a:t>
-            </a:r>
-            <a:r>
-              <a:rPr lang="tr-TR" sz="1300" b="0" dirty="0" err="1">
-                <a:solidFill>
-                  <a:srgbClr val="795E26"/>
-                </a:solidFill>
-                <a:effectLst/>
-                <a:latin typeface="Consolas" panose="020B0609020204030204" pitchFamily="49" charset="0"/>
-              </a:rPr>
-              <a:t>println</a:t>
-            </a:r>
-            <a:r>
-              <a:rPr lang="tr-TR" sz="1300" b="0" dirty="0">
-                <a:solidFill>
-                  <a:srgbClr val="000000"/>
-                </a:solidFill>
-                <a:effectLst/>
-                <a:latin typeface="Consolas" panose="020B0609020204030204" pitchFamily="49" charset="0"/>
-              </a:rPr>
-              <a:t>(</a:t>
-            </a:r>
-            <a:r>
-              <a:rPr lang="tr-TR" sz="1200" dirty="0">
-                <a:solidFill>
-                  <a:srgbClr val="A31515"/>
-                </a:solidFill>
-                <a:latin typeface="Consolas" panose="020B0609020204030204" pitchFamily="49" charset="0"/>
-              </a:rPr>
-              <a:t>"</a:t>
-            </a:r>
-            <a:r>
-              <a:rPr lang="tr-TR" sz="1300" b="0" dirty="0">
-                <a:solidFill>
-                  <a:srgbClr val="A31515"/>
-                </a:solidFill>
-                <a:effectLst/>
-                <a:latin typeface="Consolas" panose="020B0609020204030204" pitchFamily="49" charset="0"/>
-              </a:rPr>
-              <a:t>Merhaba Dünya!"</a:t>
-            </a:r>
-            <a:r>
-              <a:rPr lang="tr-TR" sz="1300" b="0" dirty="0">
-                <a:solidFill>
-                  <a:srgbClr val="000000"/>
-                </a:solidFill>
-                <a:effectLst/>
-                <a:latin typeface="Consolas" panose="020B0609020204030204" pitchFamily="49" charset="0"/>
-              </a:rPr>
-              <a:t>);</a:t>
-            </a:r>
-          </a:p>
-          <a:p>
-            <a:pPr>
-              <a:lnSpc>
-                <a:spcPct val="113095"/>
-              </a:lnSpc>
-              <a:buNone/>
-            </a:pPr>
-            <a:r>
-              <a:rPr lang="tr-TR" sz="1300" b="0" dirty="0">
-                <a:solidFill>
-                  <a:srgbClr val="000000"/>
-                </a:solidFill>
-                <a:effectLst/>
-                <a:latin typeface="Consolas" panose="020B0609020204030204" pitchFamily="49" charset="0"/>
-              </a:rPr>
-              <a:t>      </a:t>
-            </a:r>
-            <a:r>
-              <a:rPr lang="tr-TR" sz="1300" b="0" dirty="0" err="1">
-                <a:solidFill>
-                  <a:srgbClr val="001080"/>
-                </a:solidFill>
-                <a:effectLst/>
-                <a:latin typeface="Consolas" panose="020B0609020204030204" pitchFamily="49" charset="0"/>
-              </a:rPr>
-              <a:t>System</a:t>
-            </a:r>
-            <a:r>
-              <a:rPr lang="tr-TR" sz="1300" b="0" dirty="0" err="1">
-                <a:solidFill>
-                  <a:srgbClr val="000000"/>
-                </a:solidFill>
-                <a:effectLst/>
-                <a:latin typeface="Consolas" panose="020B0609020204030204" pitchFamily="49" charset="0"/>
-              </a:rPr>
-              <a:t>.</a:t>
-            </a:r>
-            <a:r>
-              <a:rPr lang="tr-TR" sz="1300" b="0" dirty="0" err="1">
-                <a:solidFill>
-                  <a:srgbClr val="001080"/>
-                </a:solidFill>
-                <a:effectLst/>
-                <a:latin typeface="Consolas" panose="020B0609020204030204" pitchFamily="49" charset="0"/>
-              </a:rPr>
-              <a:t>out</a:t>
-            </a:r>
-            <a:r>
-              <a:rPr lang="tr-TR" sz="1300" b="0" dirty="0" err="1">
-                <a:solidFill>
-                  <a:srgbClr val="000000"/>
-                </a:solidFill>
-                <a:effectLst/>
-                <a:latin typeface="Consolas" panose="020B0609020204030204" pitchFamily="49" charset="0"/>
-              </a:rPr>
-              <a:t>.</a:t>
-            </a:r>
-            <a:r>
-              <a:rPr lang="tr-TR" sz="1300" b="0" dirty="0" err="1">
-                <a:solidFill>
-                  <a:srgbClr val="795E26"/>
-                </a:solidFill>
-                <a:effectLst/>
-                <a:latin typeface="Consolas" panose="020B0609020204030204" pitchFamily="49" charset="0"/>
-              </a:rPr>
-              <a:t>println</a:t>
-            </a:r>
-            <a:r>
-              <a:rPr lang="tr-TR" sz="1300" b="0" dirty="0">
-                <a:solidFill>
-                  <a:srgbClr val="000000"/>
-                </a:solidFill>
-                <a:effectLst/>
-                <a:latin typeface="Consolas" panose="020B0609020204030204" pitchFamily="49" charset="0"/>
-              </a:rPr>
-              <a:t>(</a:t>
-            </a:r>
-            <a:r>
-              <a:rPr lang="tr-TR" sz="1300" b="0" dirty="0">
-                <a:solidFill>
-                  <a:srgbClr val="A31515"/>
-                </a:solidFill>
-                <a:effectLst/>
-                <a:latin typeface="Consolas" panose="020B0609020204030204" pitchFamily="49" charset="0"/>
-              </a:rPr>
-              <a:t>"Merhaba!"</a:t>
-            </a:r>
-            <a:r>
-              <a:rPr lang="tr-TR" sz="1300" b="0" dirty="0">
-                <a:solidFill>
-                  <a:srgbClr val="000000"/>
-                </a:solidFill>
-                <a:effectLst/>
-                <a:latin typeface="Consolas" panose="020B0609020204030204" pitchFamily="49" charset="0"/>
-              </a:rPr>
-              <a:t>);</a:t>
-            </a:r>
-          </a:p>
-          <a:p>
-            <a:pPr>
-              <a:lnSpc>
-                <a:spcPct val="113095"/>
-              </a:lnSpc>
-              <a:buNone/>
-            </a:pPr>
-            <a:r>
-              <a:rPr lang="tr-TR" sz="1300" b="0" dirty="0">
-                <a:solidFill>
-                  <a:srgbClr val="000000"/>
-                </a:solidFill>
-                <a:effectLst/>
-                <a:latin typeface="Consolas" panose="020B0609020204030204" pitchFamily="49" charset="0"/>
-              </a:rPr>
-              <a:t>      </a:t>
-            </a:r>
-            <a:r>
-              <a:rPr lang="tr-TR" sz="1300" b="0" dirty="0" err="1">
-                <a:solidFill>
-                  <a:srgbClr val="001080"/>
-                </a:solidFill>
-                <a:effectLst/>
-                <a:latin typeface="Consolas" panose="020B0609020204030204" pitchFamily="49" charset="0"/>
-              </a:rPr>
-              <a:t>System</a:t>
-            </a:r>
-            <a:r>
-              <a:rPr lang="tr-TR" sz="1300" b="0" dirty="0" err="1">
-                <a:solidFill>
-                  <a:srgbClr val="000000"/>
-                </a:solidFill>
-                <a:effectLst/>
-                <a:latin typeface="Consolas" panose="020B0609020204030204" pitchFamily="49" charset="0"/>
-              </a:rPr>
-              <a:t>.</a:t>
-            </a:r>
-            <a:r>
-              <a:rPr lang="tr-TR" sz="1300" b="0" dirty="0" err="1">
-                <a:solidFill>
-                  <a:srgbClr val="001080"/>
-                </a:solidFill>
-                <a:effectLst/>
-                <a:latin typeface="Consolas" panose="020B0609020204030204" pitchFamily="49" charset="0"/>
-              </a:rPr>
-              <a:t>out</a:t>
-            </a:r>
-            <a:r>
-              <a:rPr lang="tr-TR" sz="1300" b="0" dirty="0" err="1">
-                <a:solidFill>
-                  <a:srgbClr val="000000"/>
-                </a:solidFill>
-                <a:effectLst/>
-                <a:latin typeface="Consolas" panose="020B0609020204030204" pitchFamily="49" charset="0"/>
-              </a:rPr>
-              <a:t>.</a:t>
-            </a:r>
-            <a:r>
-              <a:rPr lang="tr-TR" sz="1300" b="0" dirty="0" err="1">
-                <a:solidFill>
-                  <a:srgbClr val="795E26"/>
-                </a:solidFill>
-                <a:effectLst/>
-                <a:latin typeface="Consolas" panose="020B0609020204030204" pitchFamily="49" charset="0"/>
-              </a:rPr>
-              <a:t>println</a:t>
-            </a:r>
-            <a:r>
-              <a:rPr lang="tr-TR" sz="1300" b="0" dirty="0">
-                <a:solidFill>
-                  <a:srgbClr val="000000"/>
-                </a:solidFill>
-                <a:effectLst/>
-                <a:latin typeface="Consolas" panose="020B0609020204030204" pitchFamily="49" charset="0"/>
-              </a:rPr>
-              <a:t>(</a:t>
-            </a:r>
-            <a:r>
-              <a:rPr lang="tr-TR" sz="1300" b="0" dirty="0">
-                <a:solidFill>
-                  <a:srgbClr val="A31515"/>
-                </a:solidFill>
-                <a:effectLst/>
-                <a:latin typeface="Consolas" panose="020B0609020204030204" pitchFamily="49" charset="0"/>
-              </a:rPr>
-              <a:t>"Merhabalar!"</a:t>
-            </a:r>
-            <a:r>
-              <a:rPr lang="tr-TR" sz="1300" b="0" dirty="0">
-                <a:solidFill>
-                  <a:srgbClr val="000000"/>
-                </a:solidFill>
-                <a:effectLst/>
-                <a:latin typeface="Consolas" panose="020B0609020204030204" pitchFamily="49" charset="0"/>
-              </a:rPr>
-              <a:t>);</a:t>
-            </a:r>
-          </a:p>
-          <a:p>
-            <a:pPr>
-              <a:lnSpc>
-                <a:spcPct val="113095"/>
-              </a:lnSpc>
-              <a:buNone/>
-            </a:pPr>
-            <a:r>
-              <a:rPr lang="tr-TR" sz="1300" b="0" dirty="0">
-                <a:solidFill>
-                  <a:srgbClr val="000000"/>
-                </a:solidFill>
-                <a:effectLst/>
-                <a:latin typeface="Consolas" panose="020B0609020204030204" pitchFamily="49" charset="0"/>
-              </a:rPr>
-              <a:t>    }</a:t>
-            </a:r>
-          </a:p>
-          <a:p>
-            <a:pPr>
-              <a:lnSpc>
-                <a:spcPct val="113095"/>
-              </a:lnSpc>
-              <a:buNone/>
-            </a:pPr>
-            <a:r>
-              <a:rPr lang="tr-TR" sz="1300" b="0" dirty="0">
-                <a:solidFill>
-                  <a:srgbClr val="000000"/>
-                </a:solidFill>
-                <a:effectLst/>
-                <a:latin typeface="Consolas" panose="020B0609020204030204" pitchFamily="49" charset="0"/>
-              </a:rPr>
-              <a:t>}</a:t>
-            </a:r>
-          </a:p>
-        </p:txBody>
-      </p:sp>
-      <p:sp>
-        <p:nvSpPr>
-          <p:cNvPr id="3" name="Veri Yer Tutucusu 2">
-            <a:extLst>
-              <a:ext uri="{FF2B5EF4-FFF2-40B4-BE49-F238E27FC236}">
-                <a16:creationId xmlns:a16="http://schemas.microsoft.com/office/drawing/2014/main" id="{C6FFB745-6D38-36AB-1489-A95553CF451E}"/>
+              <a:t> ve Online </a:t>
+            </a:r>
+            <a:r>
+              <a:rPr lang="tr-TR" sz="3600" dirty="0" err="1"/>
+              <a:t>Compiler’ler</a:t>
+            </a:r>
+            <a:endParaRPr lang="tr-TR" sz="3600" dirty="0"/>
+          </a:p>
+        </p:txBody>
+      </p:sp>
+      <p:sp>
+        <p:nvSpPr>
+          <p:cNvPr id="3" name="İçerik Yer Tutucusu 2">
+            <a:extLst>
+              <a:ext uri="{FF2B5EF4-FFF2-40B4-BE49-F238E27FC236}">
+                <a16:creationId xmlns:a16="http://schemas.microsoft.com/office/drawing/2014/main" id="{694C6609-B85C-C22A-E018-937762C5DD55}"/>
               </a:ext>
             </a:extLst>
           </p:cNvPr>
@@ -13632,6 +11823,177 @@
             <a:spLocks noGrp="1"/>
           </p:cNvSpPr>
           <p:nvPr>
+            <p:ph idx="1"/>
+          </p:nvPr>
+        </p:nvSpPr>
+        <p:spPr>
+          <a:xfrm>
+            <a:off x="838200" y="1091382"/>
+            <a:ext cx="6427839" cy="5220928"/>
+          </a:xfrm>
+        </p:spPr>
+        <p:txBody>
+          <a:bodyPr>
+            <a:normAutofit fontScale="77500" lnSpcReduction="20000"/>
+          </a:bodyPr>
+          <a:lstStyle/>
+          <a:p>
+            <a:endParaRPr lang="tr-TR" dirty="0"/>
+          </a:p>
+          <a:p>
+            <a:r>
+              <a:rPr lang="tr-TR" dirty="0"/>
+              <a:t>Google ara: </a:t>
+            </a:r>
+            <a:r>
+              <a:rPr lang="tr-TR" dirty="0" err="1"/>
+              <a:t>Tutorial</a:t>
+            </a:r>
+            <a:r>
+              <a:rPr lang="tr-TR" dirty="0"/>
+              <a:t> Python Java C#</a:t>
+            </a:r>
+          </a:p>
+          <a:p>
+            <a:endParaRPr lang="tr-TR" dirty="0"/>
+          </a:p>
+          <a:p>
+            <a:r>
+              <a:rPr lang="tr-TR" sz="3800" dirty="0">
+                <a:hlinkClick r:id="rId2"/>
+              </a:rPr>
+              <a:t>https://www.w3schools.com/</a:t>
+            </a:r>
+            <a:endParaRPr lang="tr-TR" sz="3800" dirty="0"/>
+          </a:p>
+          <a:p>
+            <a:pPr lvl="2"/>
+            <a:r>
+              <a:rPr lang="tr-TR" sz="2100" dirty="0">
+                <a:hlinkClick r:id="rId3"/>
+              </a:rPr>
+              <a:t>https://www.w3schools.com/python/</a:t>
+            </a:r>
+          </a:p>
+          <a:p>
+            <a:pPr lvl="2"/>
+            <a:r>
+              <a:rPr lang="tr-TR" sz="2100" dirty="0">
+                <a:hlinkClick r:id="rId3"/>
+              </a:rPr>
+              <a:t>https://www.w3schools.com/java/</a:t>
+            </a:r>
+          </a:p>
+          <a:p>
+            <a:pPr lvl="2"/>
+            <a:r>
+              <a:rPr lang="tr-TR" sz="2100" dirty="0">
+                <a:hlinkClick r:id="rId3"/>
+              </a:rPr>
+              <a:t>https://www.w3schools.com/cs/</a:t>
+            </a:r>
+            <a:endParaRPr lang="tr-TR" sz="2100" dirty="0"/>
+          </a:p>
+          <a:p>
+            <a:pPr lvl="2"/>
+            <a:r>
+              <a:rPr lang="tr-TR" sz="2400" dirty="0">
+                <a:hlinkClick r:id="rId4"/>
+              </a:rPr>
+              <a:t>www.w3schools.com</a:t>
+            </a:r>
+            <a:r>
+              <a:rPr lang="tr-TR" sz="2400" dirty="0"/>
+              <a:t> ‘da </a:t>
+            </a:r>
+            <a:r>
+              <a:rPr lang="tr-TR" sz="2400" dirty="0" err="1"/>
+              <a:t>compiler</a:t>
+            </a:r>
+            <a:r>
+              <a:rPr lang="tr-TR" sz="2400" dirty="0"/>
+              <a:t> de var</a:t>
+            </a:r>
+          </a:p>
+          <a:p>
+            <a:endParaRPr lang="tr-TR" dirty="0"/>
+          </a:p>
+          <a:p>
+            <a:r>
+              <a:rPr lang="tr-TR" dirty="0">
+                <a:hlinkClick r:id="rId5"/>
+              </a:rPr>
+              <a:t>https://www.tutorialspoint.com/</a:t>
+            </a:r>
+            <a:r>
+              <a:rPr lang="tr-TR" dirty="0"/>
+              <a:t> </a:t>
+            </a:r>
+          </a:p>
+          <a:p>
+            <a:endParaRPr lang="tr-TR" dirty="0"/>
+          </a:p>
+          <a:p>
+            <a:r>
+              <a:rPr lang="tr-TR" dirty="0"/>
+              <a:t>Google ara: Online Compiler</a:t>
+            </a:r>
+          </a:p>
+          <a:p>
+            <a:r>
+              <a:rPr lang="tr-TR" dirty="0">
+                <a:hlinkClick r:id="rId6"/>
+              </a:rPr>
+              <a:t>https://onecompiler.com/</a:t>
+            </a:r>
+            <a:endParaRPr lang="tr-TR" dirty="0"/>
+          </a:p>
+          <a:p>
+            <a:pPr lvl="2"/>
+            <a:r>
+              <a:rPr lang="tr-TR" dirty="0"/>
+              <a:t>Python</a:t>
+            </a:r>
+          </a:p>
+          <a:p>
+            <a:pPr lvl="2"/>
+            <a:r>
+              <a:rPr lang="tr-TR" dirty="0"/>
+              <a:t>Java</a:t>
+            </a:r>
+          </a:p>
+          <a:p>
+            <a:pPr lvl="2"/>
+            <a:r>
+              <a:rPr lang="tr-TR" dirty="0"/>
+              <a:t>C# .NET</a:t>
+            </a:r>
+          </a:p>
+          <a:p>
+            <a:pPr lvl="2"/>
+            <a:r>
+              <a:rPr lang="tr-TR" dirty="0"/>
+              <a:t>Ve daha 100 tane dil</a:t>
+            </a:r>
+          </a:p>
+          <a:p>
+            <a:endParaRPr lang="tr-TR" dirty="0"/>
+          </a:p>
+        </p:txBody>
+      </p:sp>
+      <p:sp>
+        <p:nvSpPr>
+          <p:cNvPr id="4" name="Veri Yer Tutucusu 3">
+            <a:extLst>
+              <a:ext uri="{FF2B5EF4-FFF2-40B4-BE49-F238E27FC236}">
+                <a16:creationId xmlns:a16="http://schemas.microsoft.com/office/drawing/2014/main" id="{DD110CA2-030E-A2E7-D721-2389F6793BF3}"/>
+              </a:ext>
+            </a:extLst>
+          </p:cNvPr>
+          <p:cNvSpPr>
+            <a:spLocks noGrp="1"/>
+          </p:cNvSpPr>
+          <p:nvPr>
             <p:ph type="dt" sz="half" idx="10"/>
           </p:nvPr>
         </p:nvSpPr>
@@ -13640,7 +12002,7 @@
           <a:bodyPr/>
           <a:lstStyle/>
           <a:p>
-            <a:fld id="{4CCF6595-5809-4331-A82F-8ECD7B658D5D}" type="datetime1">
+            <a:fld id="{A29100A3-B5D3-4AF3-8C60-D4A6445A5245}" type="datetime1">
               <a:rPr lang="tr-TR" smtClean="0"/>
               <a:t>11.10.2026</a:t>
             </a:fld>
@@ -13650,10 +12012,10 @@
       </p:sp>
       <p:sp>
         <p:nvSpPr>
-          <p:cNvPr id="7" name="Alt Bilgi Yer Tutucusu 6">
-            <a:extLst>
-              <a:ext uri="{FF2B5EF4-FFF2-40B4-BE49-F238E27FC236}">
-                <a16:creationId xmlns:a16="http://schemas.microsoft.com/office/drawing/2014/main" id="{9591F2F2-6954-505C-1C5C-CF711C441970}"/>
+          <p:cNvPr id="5" name="Alt Bilgi Yer Tutucusu 4">
+            <a:extLst>
+              <a:ext uri="{FF2B5EF4-FFF2-40B4-BE49-F238E27FC236}">
+                <a16:creationId xmlns:a16="http://schemas.microsoft.com/office/drawing/2014/main" id="{7ED5F5A1-3D4F-745E-37B9-36C926924A92}"/>
               </a:ext>
             </a:extLst>
           </p:cNvPr>
@@ -13678,10 +12040,10 @@
       </p:sp>
       <p:sp>
         <p:nvSpPr>
-          <p:cNvPr id="8" name="Slayt Numarası Yer Tutucusu 7">
-            <a:extLst>
-              <a:ext uri="{FF2B5EF4-FFF2-40B4-BE49-F238E27FC236}">
-                <a16:creationId xmlns:a16="http://schemas.microsoft.com/office/drawing/2014/main" id="{11682571-E38E-FAA4-E6F1-5E6BDB0579A3}"/>
+          <p:cNvPr id="6" name="Slayt Numarası Yer Tutucusu 5">
+            <a:extLst>
+              <a:ext uri="{FF2B5EF4-FFF2-40B4-BE49-F238E27FC236}">
+                <a16:creationId xmlns:a16="http://schemas.microsoft.com/office/drawing/2014/main" id="{E139156D-1F05-A88F-2B0B-B4A80824829E}"/>
               </a:ext>
             </a:extLst>
           </p:cNvPr>
@@ -13708,7 +12070,7 @@
     </p:spTree>
     <p:extLst>
       <p:ext uri="{BB962C8B-B14F-4D97-AF65-F5344CB8AC3E}">
-        <p14:creationId xmlns:p14="http://schemas.microsoft.com/office/powerpoint/2010/main" val="609196615"/>
+        <p14:creationId xmlns:p14="http://schemas.microsoft.com/office/powerpoint/2010/main" val="1307542200"/>
       </p:ext>
     </p:extLst>
   </p:cSld>
@@ -14038,6 +12400,1982 @@
         <p:cNvPr id="1" name="">
           <a:extLst>
             <a:ext uri="{FF2B5EF4-FFF2-40B4-BE49-F238E27FC236}">
+              <a16:creationId xmlns:a16="http://schemas.microsoft.com/office/drawing/2014/main" id="{35EF3F5F-325D-F723-F7CC-62EADFE3C628}"/>
+            </a:ext>
+          </a:extLst>
+        </p:cNvPr>
+        <p:cNvGrpSpPr/>
+        <p:nvPr/>
+      </p:nvGrpSpPr>
+      <p:grpSpPr>
+        <a:xfrm>
+          <a:off x="0" y="0"/>
+          <a:ext cx="0" cy="0"/>
+          <a:chOff x="0" y="0"/>
+          <a:chExt cx="0" cy="0"/>
+        </a:xfrm>
+      </p:grpSpPr>
+      <p:sp>
+        <p:nvSpPr>
+          <p:cNvPr id="2" name="Başlık 1">
+            <a:extLst>
+              <a:ext uri="{FF2B5EF4-FFF2-40B4-BE49-F238E27FC236}">
+                <a16:creationId xmlns:a16="http://schemas.microsoft.com/office/drawing/2014/main" id="{6C51B030-A99D-7799-EA19-159316BC46DA}"/>
+              </a:ext>
+            </a:extLst>
+          </p:cNvPr>
+          <p:cNvSpPr>
+            <a:spLocks noGrp="1"/>
+          </p:cNvSpPr>
+          <p:nvPr>
+            <p:ph type="title"/>
+          </p:nvPr>
+        </p:nvSpPr>
+        <p:spPr>
+          <a:xfrm>
+            <a:off x="838200" y="365126"/>
+            <a:ext cx="10515600" cy="726256"/>
+          </a:xfrm>
+        </p:spPr>
+        <p:txBody>
+          <a:bodyPr>
+            <a:normAutofit/>
+          </a:bodyPr>
+          <a:lstStyle/>
+          <a:p>
+            <a:r>
+              <a:rPr lang="tr-TR" sz="3600" dirty="0"/>
+              <a:t>«Merhaba Dünya» programı ne demektir?</a:t>
+            </a:r>
+          </a:p>
+        </p:txBody>
+      </p:sp>
+      <p:sp>
+        <p:nvSpPr>
+          <p:cNvPr id="4" name="Metin kutusu 3">
+            <a:extLst>
+              <a:ext uri="{FF2B5EF4-FFF2-40B4-BE49-F238E27FC236}">
+                <a16:creationId xmlns:a16="http://schemas.microsoft.com/office/drawing/2014/main" id="{D70B57A6-D080-5B67-A1AB-199DF1C60F12}"/>
+              </a:ext>
+            </a:extLst>
+          </p:cNvPr>
+          <p:cNvSpPr txBox="1"/>
+          <p:nvPr/>
+        </p:nvSpPr>
+        <p:spPr>
+          <a:xfrm>
+            <a:off x="5149645" y="5041294"/>
+            <a:ext cx="2553929" cy="1238929"/>
+          </a:xfrm>
+          <a:prstGeom prst="rect">
+            <a:avLst/>
+          </a:prstGeom>
+          <a:noFill/>
+        </p:spPr>
+        <p:txBody>
+          <a:bodyPr wrap="square" rtlCol="0">
+            <a:spAutoFit/>
+          </a:bodyPr>
+          <a:lstStyle/>
+          <a:p>
+            <a:r>
+              <a:rPr lang="tr-TR" sz="1400" dirty="0"/>
+              <a:t>Python:</a:t>
+            </a:r>
+          </a:p>
+          <a:p>
+            <a:endParaRPr lang="tr-TR" sz="1400" dirty="0"/>
+          </a:p>
+          <a:p>
+            <a:pPr>
+              <a:lnSpc>
+                <a:spcPct val="113095"/>
+              </a:lnSpc>
+              <a:buNone/>
+            </a:pPr>
+            <a:r>
+              <a:rPr lang="tr-TR" sz="1400" b="0" dirty="0" err="1">
+                <a:solidFill>
+                  <a:srgbClr val="795E26"/>
+                </a:solidFill>
+                <a:effectLst/>
+                <a:latin typeface="Consolas" panose="020B0609020204030204" pitchFamily="49" charset="0"/>
+              </a:rPr>
+              <a:t>print</a:t>
+            </a:r>
+            <a:r>
+              <a:rPr lang="tr-TR" sz="1400" b="0" dirty="0">
+                <a:solidFill>
+                  <a:srgbClr val="000000"/>
+                </a:solidFill>
+                <a:effectLst/>
+                <a:latin typeface="Consolas" panose="020B0609020204030204" pitchFamily="49" charset="0"/>
+              </a:rPr>
+              <a:t>(</a:t>
+            </a:r>
+            <a:r>
+              <a:rPr lang="tr-TR" sz="1400" b="0" dirty="0">
+                <a:solidFill>
+                  <a:srgbClr val="A31515"/>
+                </a:solidFill>
+                <a:effectLst/>
+                <a:latin typeface="Consolas" panose="020B0609020204030204" pitchFamily="49" charset="0"/>
+              </a:rPr>
+              <a:t>"Merhaba Dünya!"</a:t>
+            </a:r>
+            <a:r>
+              <a:rPr lang="tr-TR" sz="1400" b="0" dirty="0">
+                <a:solidFill>
+                  <a:srgbClr val="000000"/>
+                </a:solidFill>
+                <a:effectLst/>
+                <a:latin typeface="Consolas" panose="020B0609020204030204" pitchFamily="49" charset="0"/>
+              </a:rPr>
+              <a:t>)</a:t>
+            </a:r>
+          </a:p>
+          <a:p>
+            <a:pPr>
+              <a:lnSpc>
+                <a:spcPct val="113095"/>
+              </a:lnSpc>
+              <a:buNone/>
+            </a:pPr>
+            <a:r>
+              <a:rPr lang="tr-TR" sz="1400" b="0" dirty="0" err="1">
+                <a:solidFill>
+                  <a:srgbClr val="795E26"/>
+                </a:solidFill>
+                <a:effectLst/>
+                <a:latin typeface="Consolas" panose="020B0609020204030204" pitchFamily="49" charset="0"/>
+              </a:rPr>
+              <a:t>print</a:t>
+            </a:r>
+            <a:r>
+              <a:rPr lang="tr-TR" sz="1400" b="0" dirty="0">
+                <a:solidFill>
+                  <a:srgbClr val="000000"/>
+                </a:solidFill>
+                <a:effectLst/>
+                <a:latin typeface="Consolas" panose="020B0609020204030204" pitchFamily="49" charset="0"/>
+              </a:rPr>
+              <a:t>(</a:t>
+            </a:r>
+            <a:r>
+              <a:rPr lang="tr-TR" sz="1400" b="0" dirty="0">
+                <a:solidFill>
+                  <a:srgbClr val="A31515"/>
+                </a:solidFill>
+                <a:effectLst/>
+                <a:latin typeface="Consolas" panose="020B0609020204030204" pitchFamily="49" charset="0"/>
+              </a:rPr>
+              <a:t>"Merhaba!"</a:t>
+            </a:r>
+            <a:r>
+              <a:rPr lang="tr-TR" sz="1400" b="0" dirty="0">
+                <a:solidFill>
+                  <a:srgbClr val="000000"/>
+                </a:solidFill>
+                <a:effectLst/>
+                <a:latin typeface="Consolas" panose="020B0609020204030204" pitchFamily="49" charset="0"/>
+              </a:rPr>
+              <a:t>)</a:t>
+            </a:r>
+          </a:p>
+          <a:p>
+            <a:pPr>
+              <a:lnSpc>
+                <a:spcPct val="113095"/>
+              </a:lnSpc>
+              <a:buNone/>
+            </a:pPr>
+            <a:r>
+              <a:rPr lang="tr-TR" sz="1400" b="0" dirty="0" err="1">
+                <a:solidFill>
+                  <a:srgbClr val="795E26"/>
+                </a:solidFill>
+                <a:effectLst/>
+                <a:latin typeface="Consolas" panose="020B0609020204030204" pitchFamily="49" charset="0"/>
+              </a:rPr>
+              <a:t>print</a:t>
+            </a:r>
+            <a:r>
+              <a:rPr lang="tr-TR" sz="1400" b="0" dirty="0">
+                <a:solidFill>
+                  <a:srgbClr val="000000"/>
+                </a:solidFill>
+                <a:effectLst/>
+                <a:latin typeface="Consolas" panose="020B0609020204030204" pitchFamily="49" charset="0"/>
+              </a:rPr>
+              <a:t>(</a:t>
+            </a:r>
+            <a:r>
+              <a:rPr lang="tr-TR" sz="1400" b="0" dirty="0">
+                <a:solidFill>
+                  <a:srgbClr val="A31515"/>
+                </a:solidFill>
+                <a:effectLst/>
+                <a:latin typeface="Consolas" panose="020B0609020204030204" pitchFamily="49" charset="0"/>
+              </a:rPr>
+              <a:t>"Merhabalar!"</a:t>
+            </a:r>
+            <a:r>
+              <a:rPr lang="tr-TR" sz="1400" b="0" dirty="0">
+                <a:solidFill>
+                  <a:srgbClr val="000000"/>
+                </a:solidFill>
+                <a:effectLst/>
+                <a:latin typeface="Consolas" panose="020B0609020204030204" pitchFamily="49" charset="0"/>
+              </a:rPr>
+              <a:t>)</a:t>
+            </a:r>
+          </a:p>
+        </p:txBody>
+      </p:sp>
+      <p:sp>
+        <p:nvSpPr>
+          <p:cNvPr id="5" name="Metin kutusu 4">
+            <a:extLst>
+              <a:ext uri="{FF2B5EF4-FFF2-40B4-BE49-F238E27FC236}">
+                <a16:creationId xmlns:a16="http://schemas.microsoft.com/office/drawing/2014/main" id="{A683C778-5789-7E44-E510-2E86EA0DC103}"/>
+              </a:ext>
+            </a:extLst>
+          </p:cNvPr>
+          <p:cNvSpPr txBox="1"/>
+          <p:nvPr/>
+        </p:nvSpPr>
+        <p:spPr>
+          <a:xfrm>
+            <a:off x="371170" y="1435509"/>
+            <a:ext cx="5105398" cy="4703467"/>
+          </a:xfrm>
+          <a:prstGeom prst="rect">
+            <a:avLst/>
+          </a:prstGeom>
+          <a:noFill/>
+        </p:spPr>
+        <p:txBody>
+          <a:bodyPr wrap="square" rtlCol="0">
+            <a:spAutoFit/>
+          </a:bodyPr>
+          <a:lstStyle/>
+          <a:p>
+            <a:pPr>
+              <a:lnSpc>
+                <a:spcPct val="113095"/>
+              </a:lnSpc>
+              <a:buNone/>
+            </a:pPr>
+            <a:r>
+              <a:rPr lang="tr-TR" sz="1400" dirty="0">
+                <a:solidFill>
+                  <a:srgbClr val="000000"/>
+                </a:solidFill>
+                <a:latin typeface="Consolas" panose="020B0609020204030204" pitchFamily="49" charset="0"/>
+              </a:rPr>
+              <a:t>C# .NET: </a:t>
+            </a:r>
+          </a:p>
+          <a:p>
+            <a:pPr>
+              <a:lnSpc>
+                <a:spcPct val="113095"/>
+              </a:lnSpc>
+              <a:buNone/>
+            </a:pPr>
+            <a:endParaRPr lang="tr-TR" sz="1400" b="0" dirty="0">
+              <a:solidFill>
+                <a:srgbClr val="000000"/>
+              </a:solidFill>
+              <a:effectLst/>
+              <a:latin typeface="Consolas" panose="020B0609020204030204" pitchFamily="49" charset="0"/>
+            </a:endParaRPr>
+          </a:p>
+          <a:p>
+            <a:pPr>
+              <a:lnSpc>
+                <a:spcPct val="113095"/>
+              </a:lnSpc>
+              <a:buNone/>
+            </a:pPr>
+            <a:r>
+              <a:rPr lang="tr-TR" sz="1400" b="0" dirty="0" err="1">
+                <a:solidFill>
+                  <a:srgbClr val="AF00DB"/>
+                </a:solidFill>
+                <a:effectLst/>
+                <a:latin typeface="Consolas" panose="020B0609020204030204" pitchFamily="49" charset="0"/>
+              </a:rPr>
+              <a:t>using</a:t>
+            </a:r>
+            <a:r>
+              <a:rPr lang="tr-TR" sz="1400" b="0" dirty="0">
+                <a:solidFill>
+                  <a:srgbClr val="000000"/>
+                </a:solidFill>
+                <a:effectLst/>
+                <a:latin typeface="Consolas" panose="020B0609020204030204" pitchFamily="49" charset="0"/>
+              </a:rPr>
+              <a:t> </a:t>
+            </a:r>
+            <a:r>
+              <a:rPr lang="tr-TR" sz="1400" b="0" dirty="0" err="1">
+                <a:solidFill>
+                  <a:srgbClr val="267F99"/>
+                </a:solidFill>
+                <a:effectLst/>
+                <a:latin typeface="Consolas" panose="020B0609020204030204" pitchFamily="49" charset="0"/>
+              </a:rPr>
+              <a:t>System</a:t>
+            </a:r>
+            <a:r>
+              <a:rPr lang="tr-TR" sz="1400" b="0" dirty="0">
+                <a:solidFill>
+                  <a:srgbClr val="000000"/>
+                </a:solidFill>
+                <a:effectLst/>
+                <a:latin typeface="Consolas" panose="020B0609020204030204" pitchFamily="49" charset="0"/>
+              </a:rPr>
+              <a:t>;</a:t>
+            </a:r>
+          </a:p>
+          <a:p>
+            <a:pPr>
+              <a:lnSpc>
+                <a:spcPct val="113095"/>
+              </a:lnSpc>
+              <a:buNone/>
+            </a:pPr>
+            <a:r>
+              <a:rPr lang="tr-TR" sz="1400" b="0" dirty="0" err="1">
+                <a:solidFill>
+                  <a:srgbClr val="AF00DB"/>
+                </a:solidFill>
+                <a:effectLst/>
+                <a:latin typeface="Consolas" panose="020B0609020204030204" pitchFamily="49" charset="0"/>
+              </a:rPr>
+              <a:t>using</a:t>
+            </a:r>
+            <a:r>
+              <a:rPr lang="tr-TR" sz="1400" b="0" dirty="0">
+                <a:solidFill>
+                  <a:srgbClr val="000000"/>
+                </a:solidFill>
+                <a:effectLst/>
+                <a:latin typeface="Consolas" panose="020B0609020204030204" pitchFamily="49" charset="0"/>
+              </a:rPr>
+              <a:t> </a:t>
+            </a:r>
+            <a:r>
+              <a:rPr lang="tr-TR" sz="1400" b="0" dirty="0" err="1">
+                <a:solidFill>
+                  <a:srgbClr val="267F99"/>
+                </a:solidFill>
+                <a:effectLst/>
+                <a:latin typeface="Consolas" panose="020B0609020204030204" pitchFamily="49" charset="0"/>
+              </a:rPr>
+              <a:t>System</a:t>
+            </a:r>
+            <a:r>
+              <a:rPr lang="tr-TR" sz="1400" b="0" dirty="0" err="1">
+                <a:solidFill>
+                  <a:srgbClr val="000000"/>
+                </a:solidFill>
+                <a:effectLst/>
+                <a:latin typeface="Consolas" panose="020B0609020204030204" pitchFamily="49" charset="0"/>
+              </a:rPr>
+              <a:t>.</a:t>
+            </a:r>
+            <a:r>
+              <a:rPr lang="tr-TR" sz="1400" b="0" dirty="0" err="1">
+                <a:solidFill>
+                  <a:srgbClr val="267F99"/>
+                </a:solidFill>
+                <a:effectLst/>
+                <a:latin typeface="Consolas" panose="020B0609020204030204" pitchFamily="49" charset="0"/>
+              </a:rPr>
+              <a:t>Collections</a:t>
+            </a:r>
+            <a:r>
+              <a:rPr lang="tr-TR" sz="1400" b="0" dirty="0" err="1">
+                <a:solidFill>
+                  <a:srgbClr val="000000"/>
+                </a:solidFill>
+                <a:effectLst/>
+                <a:latin typeface="Consolas" panose="020B0609020204030204" pitchFamily="49" charset="0"/>
+              </a:rPr>
+              <a:t>.</a:t>
+            </a:r>
+            <a:r>
+              <a:rPr lang="tr-TR" sz="1400" b="0" dirty="0" err="1">
+                <a:solidFill>
+                  <a:srgbClr val="267F99"/>
+                </a:solidFill>
+                <a:effectLst/>
+                <a:latin typeface="Consolas" panose="020B0609020204030204" pitchFamily="49" charset="0"/>
+              </a:rPr>
+              <a:t>Generic</a:t>
+            </a:r>
+            <a:r>
+              <a:rPr lang="tr-TR" sz="1400" b="0" dirty="0">
+                <a:solidFill>
+                  <a:srgbClr val="000000"/>
+                </a:solidFill>
+                <a:effectLst/>
+                <a:latin typeface="Consolas" panose="020B0609020204030204" pitchFamily="49" charset="0"/>
+              </a:rPr>
+              <a:t>;</a:t>
+            </a:r>
+          </a:p>
+          <a:p>
+            <a:pPr>
+              <a:lnSpc>
+                <a:spcPct val="113095"/>
+              </a:lnSpc>
+              <a:buNone/>
+            </a:pPr>
+            <a:r>
+              <a:rPr lang="tr-TR" sz="1400" b="0" dirty="0" err="1">
+                <a:solidFill>
+                  <a:srgbClr val="AF00DB"/>
+                </a:solidFill>
+                <a:effectLst/>
+                <a:latin typeface="Consolas" panose="020B0609020204030204" pitchFamily="49" charset="0"/>
+              </a:rPr>
+              <a:t>using</a:t>
+            </a:r>
+            <a:r>
+              <a:rPr lang="tr-TR" sz="1400" b="0" dirty="0">
+                <a:solidFill>
+                  <a:srgbClr val="000000"/>
+                </a:solidFill>
+                <a:effectLst/>
+                <a:latin typeface="Consolas" panose="020B0609020204030204" pitchFamily="49" charset="0"/>
+              </a:rPr>
+              <a:t> </a:t>
+            </a:r>
+            <a:r>
+              <a:rPr lang="tr-TR" sz="1400" b="0" dirty="0" err="1">
+                <a:solidFill>
+                  <a:srgbClr val="267F99"/>
+                </a:solidFill>
+                <a:effectLst/>
+                <a:latin typeface="Consolas" panose="020B0609020204030204" pitchFamily="49" charset="0"/>
+              </a:rPr>
+              <a:t>System</a:t>
+            </a:r>
+            <a:r>
+              <a:rPr lang="tr-TR" sz="1400" b="0" dirty="0" err="1">
+                <a:solidFill>
+                  <a:srgbClr val="000000"/>
+                </a:solidFill>
+                <a:effectLst/>
+                <a:latin typeface="Consolas" panose="020B0609020204030204" pitchFamily="49" charset="0"/>
+              </a:rPr>
+              <a:t>.</a:t>
+            </a:r>
+            <a:r>
+              <a:rPr lang="tr-TR" sz="1400" b="0" dirty="0" err="1">
+                <a:solidFill>
+                  <a:srgbClr val="267F99"/>
+                </a:solidFill>
+                <a:effectLst/>
+                <a:latin typeface="Consolas" panose="020B0609020204030204" pitchFamily="49" charset="0"/>
+              </a:rPr>
+              <a:t>Linq</a:t>
+            </a:r>
+            <a:r>
+              <a:rPr lang="tr-TR" sz="1400" b="0" dirty="0">
+                <a:solidFill>
+                  <a:srgbClr val="000000"/>
+                </a:solidFill>
+                <a:effectLst/>
+                <a:latin typeface="Consolas" panose="020B0609020204030204" pitchFamily="49" charset="0"/>
+              </a:rPr>
+              <a:t>;</a:t>
+            </a:r>
+          </a:p>
+          <a:p>
+            <a:pPr>
+              <a:lnSpc>
+                <a:spcPct val="113095"/>
+              </a:lnSpc>
+              <a:buNone/>
+            </a:pPr>
+            <a:r>
+              <a:rPr lang="tr-TR" sz="1400" b="0" dirty="0" err="1">
+                <a:solidFill>
+                  <a:srgbClr val="AF00DB"/>
+                </a:solidFill>
+                <a:effectLst/>
+                <a:latin typeface="Consolas" panose="020B0609020204030204" pitchFamily="49" charset="0"/>
+              </a:rPr>
+              <a:t>using</a:t>
+            </a:r>
+            <a:r>
+              <a:rPr lang="tr-TR" sz="1400" b="0" dirty="0">
+                <a:solidFill>
+                  <a:srgbClr val="000000"/>
+                </a:solidFill>
+                <a:effectLst/>
+                <a:latin typeface="Consolas" panose="020B0609020204030204" pitchFamily="49" charset="0"/>
+              </a:rPr>
+              <a:t> </a:t>
+            </a:r>
+            <a:r>
+              <a:rPr lang="tr-TR" sz="1400" b="0" dirty="0" err="1">
+                <a:solidFill>
+                  <a:srgbClr val="267F99"/>
+                </a:solidFill>
+                <a:effectLst/>
+                <a:latin typeface="Consolas" panose="020B0609020204030204" pitchFamily="49" charset="0"/>
+              </a:rPr>
+              <a:t>System</a:t>
+            </a:r>
+            <a:r>
+              <a:rPr lang="tr-TR" sz="1400" b="0" dirty="0" err="1">
+                <a:solidFill>
+                  <a:srgbClr val="000000"/>
+                </a:solidFill>
+                <a:effectLst/>
+                <a:latin typeface="Consolas" panose="020B0609020204030204" pitchFamily="49" charset="0"/>
+              </a:rPr>
+              <a:t>.</a:t>
+            </a:r>
+            <a:r>
+              <a:rPr lang="tr-TR" sz="1400" b="0" dirty="0" err="1">
+                <a:solidFill>
+                  <a:srgbClr val="267F99"/>
+                </a:solidFill>
+                <a:effectLst/>
+                <a:latin typeface="Consolas" panose="020B0609020204030204" pitchFamily="49" charset="0"/>
+              </a:rPr>
+              <a:t>Text</a:t>
+            </a:r>
+            <a:r>
+              <a:rPr lang="tr-TR" sz="1400" b="0" dirty="0" err="1">
+                <a:solidFill>
+                  <a:srgbClr val="000000"/>
+                </a:solidFill>
+                <a:effectLst/>
+                <a:latin typeface="Consolas" panose="020B0609020204030204" pitchFamily="49" charset="0"/>
+              </a:rPr>
+              <a:t>.</a:t>
+            </a:r>
+            <a:r>
+              <a:rPr lang="tr-TR" sz="1400" b="0" dirty="0" err="1">
+                <a:solidFill>
+                  <a:srgbClr val="267F99"/>
+                </a:solidFill>
+                <a:effectLst/>
+                <a:latin typeface="Consolas" panose="020B0609020204030204" pitchFamily="49" charset="0"/>
+              </a:rPr>
+              <a:t>RegularExpressions</a:t>
+            </a:r>
+            <a:r>
+              <a:rPr lang="tr-TR" sz="1400" b="0" dirty="0">
+                <a:solidFill>
+                  <a:srgbClr val="000000"/>
+                </a:solidFill>
+                <a:effectLst/>
+                <a:latin typeface="Consolas" panose="020B0609020204030204" pitchFamily="49" charset="0"/>
+              </a:rPr>
+              <a:t>;</a:t>
+            </a:r>
+          </a:p>
+          <a:p>
+            <a:pPr>
+              <a:lnSpc>
+                <a:spcPct val="113095"/>
+              </a:lnSpc>
+              <a:buNone/>
+            </a:pPr>
+            <a:br>
+              <a:rPr lang="tr-TR" sz="1400" b="0" dirty="0">
+                <a:solidFill>
+                  <a:srgbClr val="000000"/>
+                </a:solidFill>
+                <a:effectLst/>
+                <a:latin typeface="Consolas" panose="020B0609020204030204" pitchFamily="49" charset="0"/>
+              </a:rPr>
+            </a:br>
+            <a:r>
+              <a:rPr lang="tr-TR" sz="1400" b="0" dirty="0" err="1">
+                <a:solidFill>
+                  <a:srgbClr val="0000FF"/>
+                </a:solidFill>
+                <a:effectLst/>
+                <a:latin typeface="Consolas" panose="020B0609020204030204" pitchFamily="49" charset="0"/>
+              </a:rPr>
+              <a:t>namespace</a:t>
+            </a:r>
+            <a:r>
+              <a:rPr lang="tr-TR" sz="1400" b="0" dirty="0">
+                <a:solidFill>
+                  <a:srgbClr val="000000"/>
+                </a:solidFill>
+                <a:effectLst/>
+                <a:latin typeface="Consolas" panose="020B0609020204030204" pitchFamily="49" charset="0"/>
+              </a:rPr>
+              <a:t> </a:t>
+            </a:r>
+            <a:r>
+              <a:rPr lang="tr-TR" sz="1400" b="0" dirty="0" err="1">
+                <a:solidFill>
+                  <a:srgbClr val="267F99"/>
+                </a:solidFill>
+                <a:effectLst/>
+                <a:latin typeface="Consolas" panose="020B0609020204030204" pitchFamily="49" charset="0"/>
+              </a:rPr>
+              <a:t>HelloWorld</a:t>
+            </a:r>
+            <a:endParaRPr lang="tr-TR" sz="1400" b="0" dirty="0">
+              <a:solidFill>
+                <a:srgbClr val="000000"/>
+              </a:solidFill>
+              <a:effectLst/>
+              <a:latin typeface="Consolas" panose="020B0609020204030204" pitchFamily="49" charset="0"/>
+            </a:endParaRPr>
+          </a:p>
+          <a:p>
+            <a:pPr>
+              <a:lnSpc>
+                <a:spcPct val="113095"/>
+              </a:lnSpc>
+              <a:buNone/>
+            </a:pPr>
+            <a:r>
+              <a:rPr lang="tr-TR" sz="1400" b="0" dirty="0">
+                <a:solidFill>
+                  <a:srgbClr val="000000"/>
+                </a:solidFill>
+                <a:effectLst/>
+                <a:latin typeface="Consolas" panose="020B0609020204030204" pitchFamily="49" charset="0"/>
+              </a:rPr>
+              <a:t>{</a:t>
+            </a:r>
+          </a:p>
+          <a:p>
+            <a:pPr>
+              <a:lnSpc>
+                <a:spcPct val="113095"/>
+              </a:lnSpc>
+              <a:buNone/>
+            </a:pPr>
+            <a:r>
+              <a:rPr lang="tr-TR" sz="1400" b="0" dirty="0">
+                <a:solidFill>
+                  <a:srgbClr val="000000"/>
+                </a:solidFill>
+                <a:effectLst/>
+                <a:latin typeface="Consolas" panose="020B0609020204030204" pitchFamily="49" charset="0"/>
+              </a:rPr>
+              <a:t>    </a:t>
+            </a:r>
+            <a:r>
+              <a:rPr lang="tr-TR" sz="1400" b="0" dirty="0" err="1">
+                <a:solidFill>
+                  <a:srgbClr val="0000FF"/>
+                </a:solidFill>
+                <a:effectLst/>
+                <a:latin typeface="Consolas" panose="020B0609020204030204" pitchFamily="49" charset="0"/>
+              </a:rPr>
+              <a:t>public</a:t>
+            </a:r>
+            <a:r>
+              <a:rPr lang="tr-TR" sz="1400" b="0" dirty="0">
+                <a:solidFill>
+                  <a:srgbClr val="000000"/>
+                </a:solidFill>
+                <a:effectLst/>
+                <a:latin typeface="Consolas" panose="020B0609020204030204" pitchFamily="49" charset="0"/>
+              </a:rPr>
+              <a:t> </a:t>
+            </a:r>
+            <a:r>
+              <a:rPr lang="tr-TR" sz="1400" b="0" dirty="0" err="1">
+                <a:solidFill>
+                  <a:srgbClr val="0000FF"/>
+                </a:solidFill>
+                <a:effectLst/>
+                <a:latin typeface="Consolas" panose="020B0609020204030204" pitchFamily="49" charset="0"/>
+              </a:rPr>
+              <a:t>class</a:t>
+            </a:r>
+            <a:r>
+              <a:rPr lang="tr-TR" sz="1400" b="0" dirty="0">
+                <a:solidFill>
+                  <a:srgbClr val="000000"/>
+                </a:solidFill>
+                <a:effectLst/>
+                <a:latin typeface="Consolas" panose="020B0609020204030204" pitchFamily="49" charset="0"/>
+              </a:rPr>
+              <a:t> </a:t>
+            </a:r>
+            <a:r>
+              <a:rPr lang="tr-TR" sz="1400" b="0" dirty="0">
+                <a:solidFill>
+                  <a:srgbClr val="267F99"/>
+                </a:solidFill>
+                <a:effectLst/>
+                <a:latin typeface="Consolas" panose="020B0609020204030204" pitchFamily="49" charset="0"/>
+              </a:rPr>
+              <a:t>Program</a:t>
+            </a:r>
+            <a:endParaRPr lang="tr-TR" sz="1400" b="0" dirty="0">
+              <a:solidFill>
+                <a:srgbClr val="000000"/>
+              </a:solidFill>
+              <a:effectLst/>
+              <a:latin typeface="Consolas" panose="020B0609020204030204" pitchFamily="49" charset="0"/>
+            </a:endParaRPr>
+          </a:p>
+          <a:p>
+            <a:pPr>
+              <a:lnSpc>
+                <a:spcPct val="113095"/>
+              </a:lnSpc>
+              <a:buNone/>
+            </a:pPr>
+            <a:r>
+              <a:rPr lang="tr-TR" sz="1400" b="0" dirty="0">
+                <a:solidFill>
+                  <a:srgbClr val="000000"/>
+                </a:solidFill>
+                <a:effectLst/>
+                <a:latin typeface="Consolas" panose="020B0609020204030204" pitchFamily="49" charset="0"/>
+              </a:rPr>
+              <a:t>    {</a:t>
+            </a:r>
+          </a:p>
+          <a:p>
+            <a:pPr>
+              <a:lnSpc>
+                <a:spcPct val="113095"/>
+              </a:lnSpc>
+              <a:buNone/>
+            </a:pPr>
+            <a:r>
+              <a:rPr lang="tr-TR" sz="1400" b="0" dirty="0">
+                <a:solidFill>
+                  <a:srgbClr val="000000"/>
+                </a:solidFill>
+                <a:effectLst/>
+                <a:latin typeface="Consolas" panose="020B0609020204030204" pitchFamily="49" charset="0"/>
+              </a:rPr>
+              <a:t>        </a:t>
+            </a:r>
+            <a:r>
+              <a:rPr lang="tr-TR" sz="1400" b="0" dirty="0" err="1">
+                <a:solidFill>
+                  <a:srgbClr val="0000FF"/>
+                </a:solidFill>
+                <a:effectLst/>
+                <a:latin typeface="Consolas" panose="020B0609020204030204" pitchFamily="49" charset="0"/>
+              </a:rPr>
+              <a:t>public</a:t>
+            </a:r>
+            <a:r>
+              <a:rPr lang="tr-TR" sz="1400" b="0" dirty="0">
+                <a:solidFill>
+                  <a:srgbClr val="000000"/>
+                </a:solidFill>
+                <a:effectLst/>
+                <a:latin typeface="Consolas" panose="020B0609020204030204" pitchFamily="49" charset="0"/>
+              </a:rPr>
+              <a:t> </a:t>
+            </a:r>
+            <a:r>
+              <a:rPr lang="tr-TR" sz="1400" b="0" dirty="0" err="1">
+                <a:solidFill>
+                  <a:srgbClr val="0000FF"/>
+                </a:solidFill>
+                <a:effectLst/>
+                <a:latin typeface="Consolas" panose="020B0609020204030204" pitchFamily="49" charset="0"/>
+              </a:rPr>
+              <a:t>static</a:t>
+            </a:r>
+            <a:r>
+              <a:rPr lang="tr-TR" sz="1400" b="0" dirty="0">
+                <a:solidFill>
+                  <a:srgbClr val="000000"/>
+                </a:solidFill>
+                <a:effectLst/>
+                <a:latin typeface="Consolas" panose="020B0609020204030204" pitchFamily="49" charset="0"/>
+              </a:rPr>
+              <a:t> </a:t>
+            </a:r>
+            <a:r>
+              <a:rPr lang="tr-TR" sz="1400" b="0" dirty="0" err="1">
+                <a:solidFill>
+                  <a:srgbClr val="0000FF"/>
+                </a:solidFill>
+                <a:effectLst/>
+                <a:latin typeface="Consolas" panose="020B0609020204030204" pitchFamily="49" charset="0"/>
+              </a:rPr>
+              <a:t>void</a:t>
+            </a:r>
+            <a:r>
+              <a:rPr lang="tr-TR" sz="1400" b="0" dirty="0">
+                <a:solidFill>
+                  <a:srgbClr val="000000"/>
+                </a:solidFill>
+                <a:effectLst/>
+                <a:latin typeface="Consolas" panose="020B0609020204030204" pitchFamily="49" charset="0"/>
+              </a:rPr>
+              <a:t> </a:t>
+            </a:r>
+            <a:r>
+              <a:rPr lang="tr-TR" sz="1400" b="0" dirty="0">
+                <a:solidFill>
+                  <a:srgbClr val="795E26"/>
+                </a:solidFill>
+                <a:effectLst/>
+                <a:latin typeface="Consolas" panose="020B0609020204030204" pitchFamily="49" charset="0"/>
+              </a:rPr>
+              <a:t>Main</a:t>
+            </a:r>
+            <a:r>
+              <a:rPr lang="tr-TR" sz="1400" b="0" dirty="0">
+                <a:solidFill>
+                  <a:srgbClr val="000000"/>
+                </a:solidFill>
+                <a:effectLst/>
+                <a:latin typeface="Consolas" panose="020B0609020204030204" pitchFamily="49" charset="0"/>
+              </a:rPr>
+              <a:t>(</a:t>
+            </a:r>
+            <a:r>
+              <a:rPr lang="tr-TR" sz="1400" b="0" dirty="0" err="1">
+                <a:solidFill>
+                  <a:srgbClr val="0000FF"/>
+                </a:solidFill>
+                <a:effectLst/>
+                <a:latin typeface="Consolas" panose="020B0609020204030204" pitchFamily="49" charset="0"/>
+              </a:rPr>
+              <a:t>string</a:t>
+            </a:r>
+            <a:r>
+              <a:rPr lang="tr-TR" sz="1400" b="0" dirty="0">
+                <a:solidFill>
+                  <a:srgbClr val="000000"/>
+                </a:solidFill>
+                <a:effectLst/>
+                <a:latin typeface="Consolas" panose="020B0609020204030204" pitchFamily="49" charset="0"/>
+              </a:rPr>
+              <a:t>[] </a:t>
+            </a:r>
+            <a:r>
+              <a:rPr lang="tr-TR" sz="1400" b="0" dirty="0" err="1">
+                <a:solidFill>
+                  <a:srgbClr val="001080"/>
+                </a:solidFill>
+                <a:effectLst/>
+                <a:latin typeface="Consolas" panose="020B0609020204030204" pitchFamily="49" charset="0"/>
+              </a:rPr>
+              <a:t>args</a:t>
+            </a:r>
+            <a:r>
+              <a:rPr lang="tr-TR" sz="1400" b="0" dirty="0">
+                <a:solidFill>
+                  <a:srgbClr val="000000"/>
+                </a:solidFill>
+                <a:effectLst/>
+                <a:latin typeface="Consolas" panose="020B0609020204030204" pitchFamily="49" charset="0"/>
+              </a:rPr>
+              <a:t>)</a:t>
+            </a:r>
+          </a:p>
+          <a:p>
+            <a:pPr>
+              <a:lnSpc>
+                <a:spcPct val="113095"/>
+              </a:lnSpc>
+              <a:buNone/>
+            </a:pPr>
+            <a:r>
+              <a:rPr lang="tr-TR" sz="1400" b="0" dirty="0">
+                <a:solidFill>
+                  <a:srgbClr val="000000"/>
+                </a:solidFill>
+                <a:effectLst/>
+                <a:latin typeface="Consolas" panose="020B0609020204030204" pitchFamily="49" charset="0"/>
+              </a:rPr>
+              <a:t>        {</a:t>
+            </a:r>
+          </a:p>
+          <a:p>
+            <a:pPr>
+              <a:lnSpc>
+                <a:spcPct val="113095"/>
+              </a:lnSpc>
+              <a:buNone/>
+            </a:pPr>
+            <a:r>
+              <a:rPr lang="tr-TR" sz="1400" b="0" dirty="0">
+                <a:solidFill>
+                  <a:srgbClr val="000000"/>
+                </a:solidFill>
+                <a:effectLst/>
+                <a:latin typeface="Consolas" panose="020B0609020204030204" pitchFamily="49" charset="0"/>
+              </a:rPr>
+              <a:t>            </a:t>
+            </a:r>
+            <a:r>
+              <a:rPr lang="tr-TR" sz="1400" b="0" dirty="0" err="1">
+                <a:solidFill>
+                  <a:srgbClr val="001080"/>
+                </a:solidFill>
+                <a:effectLst/>
+                <a:latin typeface="Consolas" panose="020B0609020204030204" pitchFamily="49" charset="0"/>
+              </a:rPr>
+              <a:t>Console</a:t>
+            </a:r>
+            <a:r>
+              <a:rPr lang="tr-TR" sz="1400" b="0" dirty="0" err="1">
+                <a:solidFill>
+                  <a:srgbClr val="000000"/>
+                </a:solidFill>
+                <a:effectLst/>
+                <a:latin typeface="Consolas" panose="020B0609020204030204" pitchFamily="49" charset="0"/>
+              </a:rPr>
+              <a:t>.</a:t>
+            </a:r>
+            <a:r>
+              <a:rPr lang="tr-TR" sz="1400" b="0" dirty="0" err="1">
+                <a:solidFill>
+                  <a:srgbClr val="795E26"/>
+                </a:solidFill>
+                <a:effectLst/>
+                <a:latin typeface="Consolas" panose="020B0609020204030204" pitchFamily="49" charset="0"/>
+              </a:rPr>
+              <a:t>WriteLine</a:t>
+            </a:r>
+            <a:r>
+              <a:rPr lang="tr-TR" sz="1400" b="0" dirty="0">
+                <a:solidFill>
+                  <a:srgbClr val="000000"/>
+                </a:solidFill>
+                <a:effectLst/>
+                <a:latin typeface="Consolas" panose="020B0609020204030204" pitchFamily="49" charset="0"/>
+              </a:rPr>
+              <a:t>(</a:t>
+            </a:r>
+            <a:r>
+              <a:rPr lang="tr-TR" sz="1400" dirty="0">
+                <a:solidFill>
+                  <a:srgbClr val="A31515"/>
+                </a:solidFill>
+                <a:latin typeface="Consolas" panose="020B0609020204030204" pitchFamily="49" charset="0"/>
+              </a:rPr>
+              <a:t>"Merhaba </a:t>
+            </a:r>
+            <a:r>
+              <a:rPr lang="tr-TR" sz="1400" b="0" dirty="0">
+                <a:solidFill>
+                  <a:srgbClr val="A31515"/>
+                </a:solidFill>
+                <a:effectLst/>
+                <a:latin typeface="Consolas" panose="020B0609020204030204" pitchFamily="49" charset="0"/>
+              </a:rPr>
+              <a:t>Dünya!"</a:t>
+            </a:r>
+            <a:r>
+              <a:rPr lang="tr-TR" sz="1400" b="0" dirty="0">
+                <a:solidFill>
+                  <a:srgbClr val="000000"/>
+                </a:solidFill>
+                <a:effectLst/>
+                <a:latin typeface="Consolas" panose="020B0609020204030204" pitchFamily="49" charset="0"/>
+              </a:rPr>
+              <a:t>);</a:t>
+            </a:r>
+          </a:p>
+          <a:p>
+            <a:pPr>
+              <a:lnSpc>
+                <a:spcPct val="113095"/>
+              </a:lnSpc>
+              <a:buNone/>
+            </a:pPr>
+            <a:r>
+              <a:rPr lang="tr-TR" sz="1400" b="0" dirty="0">
+                <a:solidFill>
+                  <a:srgbClr val="000000"/>
+                </a:solidFill>
+                <a:effectLst/>
+                <a:latin typeface="Consolas" panose="020B0609020204030204" pitchFamily="49" charset="0"/>
+              </a:rPr>
+              <a:t>            </a:t>
+            </a:r>
+            <a:r>
+              <a:rPr lang="tr-TR" sz="1400" b="0" dirty="0" err="1">
+                <a:solidFill>
+                  <a:srgbClr val="001080"/>
+                </a:solidFill>
+                <a:effectLst/>
+                <a:latin typeface="Consolas" panose="020B0609020204030204" pitchFamily="49" charset="0"/>
+              </a:rPr>
+              <a:t>Console</a:t>
+            </a:r>
+            <a:r>
+              <a:rPr lang="tr-TR" sz="1400" b="0" dirty="0" err="1">
+                <a:solidFill>
+                  <a:srgbClr val="000000"/>
+                </a:solidFill>
+                <a:effectLst/>
+                <a:latin typeface="Consolas" panose="020B0609020204030204" pitchFamily="49" charset="0"/>
+              </a:rPr>
+              <a:t>.</a:t>
+            </a:r>
+            <a:r>
+              <a:rPr lang="tr-TR" sz="1400" b="0" dirty="0" err="1">
+                <a:solidFill>
+                  <a:srgbClr val="795E26"/>
+                </a:solidFill>
+                <a:effectLst/>
+                <a:latin typeface="Consolas" panose="020B0609020204030204" pitchFamily="49" charset="0"/>
+              </a:rPr>
+              <a:t>WriteLine</a:t>
+            </a:r>
+            <a:r>
+              <a:rPr lang="tr-TR" sz="1400" b="0" dirty="0">
+                <a:solidFill>
+                  <a:srgbClr val="000000"/>
+                </a:solidFill>
+                <a:effectLst/>
+                <a:latin typeface="Consolas" panose="020B0609020204030204" pitchFamily="49" charset="0"/>
+              </a:rPr>
+              <a:t>(</a:t>
+            </a:r>
+            <a:r>
+              <a:rPr lang="tr-TR" sz="1400" b="0" dirty="0">
+                <a:solidFill>
+                  <a:srgbClr val="A31515"/>
+                </a:solidFill>
+                <a:effectLst/>
+                <a:latin typeface="Consolas" panose="020B0609020204030204" pitchFamily="49" charset="0"/>
+              </a:rPr>
+              <a:t>"Merhaba"</a:t>
+            </a:r>
+            <a:r>
+              <a:rPr lang="tr-TR" sz="1400" b="0" dirty="0">
+                <a:solidFill>
+                  <a:srgbClr val="000000"/>
+                </a:solidFill>
+                <a:effectLst/>
+                <a:latin typeface="Consolas" panose="020B0609020204030204" pitchFamily="49" charset="0"/>
+              </a:rPr>
+              <a:t>);</a:t>
+            </a:r>
+          </a:p>
+          <a:p>
+            <a:pPr>
+              <a:lnSpc>
+                <a:spcPct val="113095"/>
+              </a:lnSpc>
+              <a:buNone/>
+            </a:pPr>
+            <a:r>
+              <a:rPr lang="tr-TR" sz="1400" b="0" dirty="0">
+                <a:solidFill>
+                  <a:srgbClr val="000000"/>
+                </a:solidFill>
+                <a:effectLst/>
+                <a:latin typeface="Consolas" panose="020B0609020204030204" pitchFamily="49" charset="0"/>
+              </a:rPr>
+              <a:t>            </a:t>
+            </a:r>
+            <a:r>
+              <a:rPr lang="tr-TR" sz="1400" b="0" dirty="0" err="1">
+                <a:solidFill>
+                  <a:srgbClr val="001080"/>
+                </a:solidFill>
+                <a:effectLst/>
+                <a:latin typeface="Consolas" panose="020B0609020204030204" pitchFamily="49" charset="0"/>
+              </a:rPr>
+              <a:t>Console</a:t>
+            </a:r>
+            <a:r>
+              <a:rPr lang="tr-TR" sz="1400" b="0" dirty="0" err="1">
+                <a:solidFill>
+                  <a:srgbClr val="000000"/>
+                </a:solidFill>
+                <a:effectLst/>
+                <a:latin typeface="Consolas" panose="020B0609020204030204" pitchFamily="49" charset="0"/>
+              </a:rPr>
+              <a:t>.</a:t>
+            </a:r>
+            <a:r>
+              <a:rPr lang="tr-TR" sz="1400" b="0" dirty="0" err="1">
+                <a:solidFill>
+                  <a:srgbClr val="795E26"/>
+                </a:solidFill>
+                <a:effectLst/>
+                <a:latin typeface="Consolas" panose="020B0609020204030204" pitchFamily="49" charset="0"/>
+              </a:rPr>
+              <a:t>WriteLine</a:t>
+            </a:r>
+            <a:r>
+              <a:rPr lang="tr-TR" sz="1400" b="0" dirty="0">
+                <a:solidFill>
+                  <a:srgbClr val="000000"/>
+                </a:solidFill>
+                <a:effectLst/>
+                <a:latin typeface="Consolas" panose="020B0609020204030204" pitchFamily="49" charset="0"/>
+              </a:rPr>
+              <a:t>(</a:t>
+            </a:r>
+            <a:r>
+              <a:rPr lang="tr-TR" sz="1400" b="0" dirty="0">
+                <a:solidFill>
+                  <a:srgbClr val="A31515"/>
+                </a:solidFill>
+                <a:effectLst/>
+                <a:latin typeface="Consolas" panose="020B0609020204030204" pitchFamily="49" charset="0"/>
+              </a:rPr>
+              <a:t>"Merhabalar"</a:t>
+            </a:r>
+            <a:r>
+              <a:rPr lang="tr-TR" sz="1400" b="0" dirty="0">
+                <a:solidFill>
+                  <a:srgbClr val="000000"/>
+                </a:solidFill>
+                <a:effectLst/>
+                <a:latin typeface="Consolas" panose="020B0609020204030204" pitchFamily="49" charset="0"/>
+              </a:rPr>
+              <a:t>);</a:t>
+            </a:r>
+          </a:p>
+          <a:p>
+            <a:pPr>
+              <a:lnSpc>
+                <a:spcPct val="113095"/>
+              </a:lnSpc>
+              <a:buNone/>
+            </a:pPr>
+            <a:r>
+              <a:rPr lang="tr-TR" sz="1400" b="0" dirty="0">
+                <a:solidFill>
+                  <a:srgbClr val="000000"/>
+                </a:solidFill>
+                <a:effectLst/>
+                <a:latin typeface="Consolas" panose="020B0609020204030204" pitchFamily="49" charset="0"/>
+              </a:rPr>
+              <a:t>        }</a:t>
+            </a:r>
+          </a:p>
+          <a:p>
+            <a:pPr>
+              <a:lnSpc>
+                <a:spcPct val="113095"/>
+              </a:lnSpc>
+              <a:buNone/>
+            </a:pPr>
+            <a:r>
+              <a:rPr lang="tr-TR" sz="1400" b="0" dirty="0">
+                <a:solidFill>
+                  <a:srgbClr val="000000"/>
+                </a:solidFill>
+                <a:effectLst/>
+                <a:latin typeface="Consolas" panose="020B0609020204030204" pitchFamily="49" charset="0"/>
+              </a:rPr>
+              <a:t>    }</a:t>
+            </a:r>
+          </a:p>
+          <a:p>
+            <a:pPr>
+              <a:lnSpc>
+                <a:spcPct val="113095"/>
+              </a:lnSpc>
+              <a:buNone/>
+            </a:pPr>
+            <a:r>
+              <a:rPr lang="tr-TR" sz="1400" b="0" dirty="0">
+                <a:solidFill>
+                  <a:srgbClr val="000000"/>
+                </a:solidFill>
+                <a:effectLst/>
+                <a:latin typeface="Consolas" panose="020B0609020204030204" pitchFamily="49" charset="0"/>
+              </a:rPr>
+              <a:t>}</a:t>
+            </a:r>
+          </a:p>
+        </p:txBody>
+      </p:sp>
+      <p:sp>
+        <p:nvSpPr>
+          <p:cNvPr id="6" name="Metin kutusu 5">
+            <a:extLst>
+              <a:ext uri="{FF2B5EF4-FFF2-40B4-BE49-F238E27FC236}">
+                <a16:creationId xmlns:a16="http://schemas.microsoft.com/office/drawing/2014/main" id="{C285EDBB-11EC-C7CB-7875-716FC198682B}"/>
+              </a:ext>
+            </a:extLst>
+          </p:cNvPr>
+          <p:cNvSpPr txBox="1"/>
+          <p:nvPr/>
+        </p:nvSpPr>
+        <p:spPr>
+          <a:xfrm>
+            <a:off x="4520380" y="1294262"/>
+            <a:ext cx="4166419" cy="2565702"/>
+          </a:xfrm>
+          <a:prstGeom prst="rect">
+            <a:avLst/>
+          </a:prstGeom>
+          <a:noFill/>
+        </p:spPr>
+        <p:txBody>
+          <a:bodyPr wrap="square" rtlCol="0">
+            <a:spAutoFit/>
+          </a:bodyPr>
+          <a:lstStyle/>
+          <a:p>
+            <a:pPr>
+              <a:lnSpc>
+                <a:spcPct val="113095"/>
+              </a:lnSpc>
+            </a:pPr>
+            <a:r>
+              <a:rPr lang="tr-TR" sz="1300" dirty="0">
+                <a:solidFill>
+                  <a:srgbClr val="000000"/>
+                </a:solidFill>
+                <a:latin typeface="Consolas" panose="020B0609020204030204" pitchFamily="49" charset="0"/>
+              </a:rPr>
+              <a:t>Java:</a:t>
+            </a:r>
+          </a:p>
+          <a:p>
+            <a:pPr>
+              <a:lnSpc>
+                <a:spcPct val="113095"/>
+              </a:lnSpc>
+            </a:pPr>
+            <a:endParaRPr lang="tr-TR" sz="1300" dirty="0">
+              <a:solidFill>
+                <a:srgbClr val="000000"/>
+              </a:solidFill>
+              <a:latin typeface="Consolas" panose="020B0609020204030204" pitchFamily="49" charset="0"/>
+            </a:endParaRPr>
+          </a:p>
+          <a:p>
+            <a:pPr>
+              <a:lnSpc>
+                <a:spcPct val="113095"/>
+              </a:lnSpc>
+              <a:buNone/>
+            </a:pPr>
+            <a:r>
+              <a:rPr lang="tr-TR" sz="1300" b="0" dirty="0" err="1">
+                <a:solidFill>
+                  <a:srgbClr val="0000FF"/>
+                </a:solidFill>
+                <a:effectLst/>
+                <a:latin typeface="Consolas" panose="020B0609020204030204" pitchFamily="49" charset="0"/>
+              </a:rPr>
+              <a:t>import</a:t>
+            </a:r>
+            <a:r>
+              <a:rPr lang="tr-TR" sz="1300" b="0" dirty="0">
+                <a:solidFill>
+                  <a:srgbClr val="000000"/>
+                </a:solidFill>
+                <a:effectLst/>
+                <a:latin typeface="Consolas" panose="020B0609020204030204" pitchFamily="49" charset="0"/>
+              </a:rPr>
+              <a:t> </a:t>
+            </a:r>
+            <a:r>
+              <a:rPr lang="tr-TR" sz="1300" b="0" dirty="0" err="1">
+                <a:solidFill>
+                  <a:srgbClr val="000000"/>
+                </a:solidFill>
+                <a:effectLst/>
+                <a:latin typeface="Consolas" panose="020B0609020204030204" pitchFamily="49" charset="0"/>
+              </a:rPr>
+              <a:t>java.util</a:t>
+            </a:r>
+            <a:r>
+              <a:rPr lang="tr-TR" sz="1300" b="0" dirty="0">
+                <a:solidFill>
+                  <a:srgbClr val="000000"/>
+                </a:solidFill>
+                <a:effectLst/>
+                <a:latin typeface="Consolas" panose="020B0609020204030204" pitchFamily="49" charset="0"/>
+              </a:rPr>
+              <a:t>.*;</a:t>
+            </a:r>
+          </a:p>
+          <a:p>
+            <a:pPr>
+              <a:lnSpc>
+                <a:spcPct val="113095"/>
+              </a:lnSpc>
+              <a:buNone/>
+            </a:pPr>
+            <a:endParaRPr lang="tr-TR" sz="1300" b="0" dirty="0">
+              <a:solidFill>
+                <a:srgbClr val="000000"/>
+              </a:solidFill>
+              <a:effectLst/>
+              <a:latin typeface="Consolas" panose="020B0609020204030204" pitchFamily="49" charset="0"/>
+            </a:endParaRPr>
+          </a:p>
+          <a:p>
+            <a:pPr>
+              <a:lnSpc>
+                <a:spcPct val="113095"/>
+              </a:lnSpc>
+              <a:buNone/>
+            </a:pPr>
+            <a:r>
+              <a:rPr lang="tr-TR" sz="1300" b="0" dirty="0" err="1">
+                <a:solidFill>
+                  <a:srgbClr val="0000FF"/>
+                </a:solidFill>
+                <a:effectLst/>
+                <a:latin typeface="Consolas" panose="020B0609020204030204" pitchFamily="49" charset="0"/>
+              </a:rPr>
+              <a:t>public</a:t>
+            </a:r>
+            <a:r>
+              <a:rPr lang="tr-TR" sz="1300" b="0" dirty="0">
+                <a:solidFill>
+                  <a:srgbClr val="000000"/>
+                </a:solidFill>
+                <a:effectLst/>
+                <a:latin typeface="Consolas" panose="020B0609020204030204" pitchFamily="49" charset="0"/>
+              </a:rPr>
+              <a:t> </a:t>
+            </a:r>
+            <a:r>
+              <a:rPr lang="tr-TR" sz="1300" b="0" dirty="0" err="1">
+                <a:solidFill>
+                  <a:srgbClr val="0000FF"/>
+                </a:solidFill>
+                <a:effectLst/>
+                <a:latin typeface="Consolas" panose="020B0609020204030204" pitchFamily="49" charset="0"/>
+              </a:rPr>
+              <a:t>class</a:t>
+            </a:r>
+            <a:r>
+              <a:rPr lang="tr-TR" sz="1300" b="0" dirty="0">
+                <a:solidFill>
+                  <a:srgbClr val="000000"/>
+                </a:solidFill>
+                <a:effectLst/>
+                <a:latin typeface="Consolas" panose="020B0609020204030204" pitchFamily="49" charset="0"/>
+              </a:rPr>
+              <a:t> </a:t>
+            </a:r>
+            <a:r>
+              <a:rPr lang="tr-TR" sz="1300" b="0" dirty="0">
+                <a:solidFill>
+                  <a:srgbClr val="267F99"/>
+                </a:solidFill>
+                <a:effectLst/>
+                <a:latin typeface="Consolas" panose="020B0609020204030204" pitchFamily="49" charset="0"/>
+              </a:rPr>
+              <a:t>Main</a:t>
+            </a:r>
+            <a:r>
+              <a:rPr lang="tr-TR" sz="1300" b="0" dirty="0">
+                <a:solidFill>
+                  <a:srgbClr val="000000"/>
+                </a:solidFill>
+                <a:effectLst/>
+                <a:latin typeface="Consolas" panose="020B0609020204030204" pitchFamily="49" charset="0"/>
+              </a:rPr>
+              <a:t> {</a:t>
+            </a:r>
+          </a:p>
+          <a:p>
+            <a:pPr>
+              <a:lnSpc>
+                <a:spcPct val="113095"/>
+              </a:lnSpc>
+              <a:buNone/>
+            </a:pPr>
+            <a:r>
+              <a:rPr lang="tr-TR" sz="1300" b="0" dirty="0">
+                <a:solidFill>
+                  <a:srgbClr val="000000"/>
+                </a:solidFill>
+                <a:effectLst/>
+                <a:latin typeface="Consolas" panose="020B0609020204030204" pitchFamily="49" charset="0"/>
+              </a:rPr>
+              <a:t>    </a:t>
+            </a:r>
+            <a:r>
+              <a:rPr lang="tr-TR" sz="1300" b="0" dirty="0" err="1">
+                <a:solidFill>
+                  <a:srgbClr val="0000FF"/>
+                </a:solidFill>
+                <a:effectLst/>
+                <a:latin typeface="Consolas" panose="020B0609020204030204" pitchFamily="49" charset="0"/>
+              </a:rPr>
+              <a:t>public</a:t>
+            </a:r>
+            <a:r>
+              <a:rPr lang="tr-TR" sz="1300" b="0" dirty="0">
+                <a:solidFill>
+                  <a:srgbClr val="000000"/>
+                </a:solidFill>
+                <a:effectLst/>
+                <a:latin typeface="Consolas" panose="020B0609020204030204" pitchFamily="49" charset="0"/>
+              </a:rPr>
+              <a:t> </a:t>
+            </a:r>
+            <a:r>
+              <a:rPr lang="tr-TR" sz="1300" b="0" dirty="0" err="1">
+                <a:solidFill>
+                  <a:srgbClr val="0000FF"/>
+                </a:solidFill>
+                <a:effectLst/>
+                <a:latin typeface="Consolas" panose="020B0609020204030204" pitchFamily="49" charset="0"/>
+              </a:rPr>
+              <a:t>static</a:t>
+            </a:r>
+            <a:r>
+              <a:rPr lang="tr-TR" sz="1300" b="0" dirty="0">
+                <a:solidFill>
+                  <a:srgbClr val="000000"/>
+                </a:solidFill>
+                <a:effectLst/>
+                <a:latin typeface="Consolas" panose="020B0609020204030204" pitchFamily="49" charset="0"/>
+              </a:rPr>
+              <a:t> </a:t>
+            </a:r>
+            <a:r>
+              <a:rPr lang="tr-TR" sz="1300" b="0" dirty="0" err="1">
+                <a:solidFill>
+                  <a:srgbClr val="267F99"/>
+                </a:solidFill>
+                <a:effectLst/>
+                <a:latin typeface="Consolas" panose="020B0609020204030204" pitchFamily="49" charset="0"/>
+              </a:rPr>
+              <a:t>void</a:t>
+            </a:r>
+            <a:r>
+              <a:rPr lang="tr-TR" sz="1300" b="0" dirty="0">
+                <a:solidFill>
+                  <a:srgbClr val="000000"/>
+                </a:solidFill>
+                <a:effectLst/>
+                <a:latin typeface="Consolas" panose="020B0609020204030204" pitchFamily="49" charset="0"/>
+              </a:rPr>
+              <a:t> </a:t>
+            </a:r>
+            <a:r>
+              <a:rPr lang="tr-TR" sz="1300" b="0" dirty="0">
+                <a:solidFill>
+                  <a:srgbClr val="795E26"/>
+                </a:solidFill>
+                <a:effectLst/>
+                <a:latin typeface="Consolas" panose="020B0609020204030204" pitchFamily="49" charset="0"/>
+              </a:rPr>
+              <a:t>main</a:t>
+            </a:r>
+            <a:r>
+              <a:rPr lang="tr-TR" sz="1300" b="0" dirty="0">
+                <a:solidFill>
+                  <a:srgbClr val="000000"/>
+                </a:solidFill>
+                <a:effectLst/>
+                <a:latin typeface="Consolas" panose="020B0609020204030204" pitchFamily="49" charset="0"/>
+              </a:rPr>
+              <a:t>(</a:t>
+            </a:r>
+            <a:r>
+              <a:rPr lang="tr-TR" sz="1300" b="0" dirty="0" err="1">
+                <a:solidFill>
+                  <a:srgbClr val="267F99"/>
+                </a:solidFill>
+                <a:effectLst/>
+                <a:latin typeface="Consolas" panose="020B0609020204030204" pitchFamily="49" charset="0"/>
+              </a:rPr>
+              <a:t>String</a:t>
+            </a:r>
+            <a:r>
+              <a:rPr lang="tr-TR" sz="1300" b="0" dirty="0">
+                <a:solidFill>
+                  <a:srgbClr val="000000"/>
+                </a:solidFill>
+                <a:effectLst/>
+                <a:latin typeface="Consolas" panose="020B0609020204030204" pitchFamily="49" charset="0"/>
+              </a:rPr>
+              <a:t>[] </a:t>
+            </a:r>
+            <a:r>
+              <a:rPr lang="tr-TR" sz="1300" b="0" dirty="0" err="1">
+                <a:solidFill>
+                  <a:srgbClr val="001080"/>
+                </a:solidFill>
+                <a:effectLst/>
+                <a:latin typeface="Consolas" panose="020B0609020204030204" pitchFamily="49" charset="0"/>
+              </a:rPr>
+              <a:t>args</a:t>
+            </a:r>
+            <a:r>
+              <a:rPr lang="tr-TR" sz="1300" b="0" dirty="0">
+                <a:solidFill>
+                  <a:srgbClr val="000000"/>
+                </a:solidFill>
+                <a:effectLst/>
+                <a:latin typeface="Consolas" panose="020B0609020204030204" pitchFamily="49" charset="0"/>
+              </a:rPr>
+              <a:t>) {</a:t>
+            </a:r>
+          </a:p>
+          <a:p>
+            <a:pPr>
+              <a:lnSpc>
+                <a:spcPct val="113095"/>
+              </a:lnSpc>
+              <a:buNone/>
+            </a:pPr>
+            <a:r>
+              <a:rPr lang="tr-TR" sz="1300" b="0" dirty="0">
+                <a:solidFill>
+                  <a:srgbClr val="000000"/>
+                </a:solidFill>
+                <a:effectLst/>
+                <a:latin typeface="Consolas" panose="020B0609020204030204" pitchFamily="49" charset="0"/>
+              </a:rPr>
+              <a:t>      </a:t>
+            </a:r>
+            <a:r>
+              <a:rPr lang="tr-TR" sz="1300" b="0" dirty="0" err="1">
+                <a:solidFill>
+                  <a:srgbClr val="001080"/>
+                </a:solidFill>
+                <a:effectLst/>
+                <a:latin typeface="Consolas" panose="020B0609020204030204" pitchFamily="49" charset="0"/>
+              </a:rPr>
+              <a:t>System</a:t>
+            </a:r>
+            <a:r>
+              <a:rPr lang="tr-TR" sz="1300" b="0" dirty="0" err="1">
+                <a:solidFill>
+                  <a:srgbClr val="000000"/>
+                </a:solidFill>
+                <a:effectLst/>
+                <a:latin typeface="Consolas" panose="020B0609020204030204" pitchFamily="49" charset="0"/>
+              </a:rPr>
+              <a:t>.</a:t>
+            </a:r>
+            <a:r>
+              <a:rPr lang="tr-TR" sz="1300" b="0" dirty="0" err="1">
+                <a:solidFill>
+                  <a:srgbClr val="001080"/>
+                </a:solidFill>
+                <a:effectLst/>
+                <a:latin typeface="Consolas" panose="020B0609020204030204" pitchFamily="49" charset="0"/>
+              </a:rPr>
+              <a:t>out</a:t>
+            </a:r>
+            <a:r>
+              <a:rPr lang="tr-TR" sz="1300" b="0" dirty="0" err="1">
+                <a:solidFill>
+                  <a:srgbClr val="000000"/>
+                </a:solidFill>
+                <a:effectLst/>
+                <a:latin typeface="Consolas" panose="020B0609020204030204" pitchFamily="49" charset="0"/>
+              </a:rPr>
+              <a:t>.</a:t>
+            </a:r>
+            <a:r>
+              <a:rPr lang="tr-TR" sz="1300" b="0" dirty="0" err="1">
+                <a:solidFill>
+                  <a:srgbClr val="795E26"/>
+                </a:solidFill>
+                <a:effectLst/>
+                <a:latin typeface="Consolas" panose="020B0609020204030204" pitchFamily="49" charset="0"/>
+              </a:rPr>
+              <a:t>println</a:t>
+            </a:r>
+            <a:r>
+              <a:rPr lang="tr-TR" sz="1300" b="0" dirty="0">
+                <a:solidFill>
+                  <a:srgbClr val="000000"/>
+                </a:solidFill>
+                <a:effectLst/>
+                <a:latin typeface="Consolas" panose="020B0609020204030204" pitchFamily="49" charset="0"/>
+              </a:rPr>
+              <a:t>(</a:t>
+            </a:r>
+            <a:r>
+              <a:rPr lang="tr-TR" sz="1200" dirty="0">
+                <a:solidFill>
+                  <a:srgbClr val="A31515"/>
+                </a:solidFill>
+                <a:latin typeface="Consolas" panose="020B0609020204030204" pitchFamily="49" charset="0"/>
+              </a:rPr>
+              <a:t>"</a:t>
+            </a:r>
+            <a:r>
+              <a:rPr lang="tr-TR" sz="1300" b="0" dirty="0">
+                <a:solidFill>
+                  <a:srgbClr val="A31515"/>
+                </a:solidFill>
+                <a:effectLst/>
+                <a:latin typeface="Consolas" panose="020B0609020204030204" pitchFamily="49" charset="0"/>
+              </a:rPr>
+              <a:t>Merhaba Dünya!"</a:t>
+            </a:r>
+            <a:r>
+              <a:rPr lang="tr-TR" sz="1300" b="0" dirty="0">
+                <a:solidFill>
+                  <a:srgbClr val="000000"/>
+                </a:solidFill>
+                <a:effectLst/>
+                <a:latin typeface="Consolas" panose="020B0609020204030204" pitchFamily="49" charset="0"/>
+              </a:rPr>
+              <a:t>);</a:t>
+            </a:r>
+          </a:p>
+          <a:p>
+            <a:pPr>
+              <a:lnSpc>
+                <a:spcPct val="113095"/>
+              </a:lnSpc>
+              <a:buNone/>
+            </a:pPr>
+            <a:r>
+              <a:rPr lang="tr-TR" sz="1300" b="0" dirty="0">
+                <a:solidFill>
+                  <a:srgbClr val="000000"/>
+                </a:solidFill>
+                <a:effectLst/>
+                <a:latin typeface="Consolas" panose="020B0609020204030204" pitchFamily="49" charset="0"/>
+              </a:rPr>
+              <a:t>      </a:t>
+            </a:r>
+            <a:r>
+              <a:rPr lang="tr-TR" sz="1300" b="0" dirty="0" err="1">
+                <a:solidFill>
+                  <a:srgbClr val="001080"/>
+                </a:solidFill>
+                <a:effectLst/>
+                <a:latin typeface="Consolas" panose="020B0609020204030204" pitchFamily="49" charset="0"/>
+              </a:rPr>
+              <a:t>System</a:t>
+            </a:r>
+            <a:r>
+              <a:rPr lang="tr-TR" sz="1300" b="0" dirty="0" err="1">
+                <a:solidFill>
+                  <a:srgbClr val="000000"/>
+                </a:solidFill>
+                <a:effectLst/>
+                <a:latin typeface="Consolas" panose="020B0609020204030204" pitchFamily="49" charset="0"/>
+              </a:rPr>
+              <a:t>.</a:t>
+            </a:r>
+            <a:r>
+              <a:rPr lang="tr-TR" sz="1300" b="0" dirty="0" err="1">
+                <a:solidFill>
+                  <a:srgbClr val="001080"/>
+                </a:solidFill>
+                <a:effectLst/>
+                <a:latin typeface="Consolas" panose="020B0609020204030204" pitchFamily="49" charset="0"/>
+              </a:rPr>
+              <a:t>out</a:t>
+            </a:r>
+            <a:r>
+              <a:rPr lang="tr-TR" sz="1300" b="0" dirty="0" err="1">
+                <a:solidFill>
+                  <a:srgbClr val="000000"/>
+                </a:solidFill>
+                <a:effectLst/>
+                <a:latin typeface="Consolas" panose="020B0609020204030204" pitchFamily="49" charset="0"/>
+              </a:rPr>
+              <a:t>.</a:t>
+            </a:r>
+            <a:r>
+              <a:rPr lang="tr-TR" sz="1300" b="0" dirty="0" err="1">
+                <a:solidFill>
+                  <a:srgbClr val="795E26"/>
+                </a:solidFill>
+                <a:effectLst/>
+                <a:latin typeface="Consolas" panose="020B0609020204030204" pitchFamily="49" charset="0"/>
+              </a:rPr>
+              <a:t>println</a:t>
+            </a:r>
+            <a:r>
+              <a:rPr lang="tr-TR" sz="1300" b="0" dirty="0">
+                <a:solidFill>
+                  <a:srgbClr val="000000"/>
+                </a:solidFill>
+                <a:effectLst/>
+                <a:latin typeface="Consolas" panose="020B0609020204030204" pitchFamily="49" charset="0"/>
+              </a:rPr>
+              <a:t>(</a:t>
+            </a:r>
+            <a:r>
+              <a:rPr lang="tr-TR" sz="1300" b="0" dirty="0">
+                <a:solidFill>
+                  <a:srgbClr val="A31515"/>
+                </a:solidFill>
+                <a:effectLst/>
+                <a:latin typeface="Consolas" panose="020B0609020204030204" pitchFamily="49" charset="0"/>
+              </a:rPr>
+              <a:t>"Merhaba!"</a:t>
+            </a:r>
+            <a:r>
+              <a:rPr lang="tr-TR" sz="1300" b="0" dirty="0">
+                <a:solidFill>
+                  <a:srgbClr val="000000"/>
+                </a:solidFill>
+                <a:effectLst/>
+                <a:latin typeface="Consolas" panose="020B0609020204030204" pitchFamily="49" charset="0"/>
+              </a:rPr>
+              <a:t>);</a:t>
+            </a:r>
+          </a:p>
+          <a:p>
+            <a:pPr>
+              <a:lnSpc>
+                <a:spcPct val="113095"/>
+              </a:lnSpc>
+              <a:buNone/>
+            </a:pPr>
+            <a:r>
+              <a:rPr lang="tr-TR" sz="1300" b="0" dirty="0">
+                <a:solidFill>
+                  <a:srgbClr val="000000"/>
+                </a:solidFill>
+                <a:effectLst/>
+                <a:latin typeface="Consolas" panose="020B0609020204030204" pitchFamily="49" charset="0"/>
+              </a:rPr>
+              <a:t>      </a:t>
+            </a:r>
+            <a:r>
+              <a:rPr lang="tr-TR" sz="1300" b="0" dirty="0" err="1">
+                <a:solidFill>
+                  <a:srgbClr val="001080"/>
+                </a:solidFill>
+                <a:effectLst/>
+                <a:latin typeface="Consolas" panose="020B0609020204030204" pitchFamily="49" charset="0"/>
+              </a:rPr>
+              <a:t>System</a:t>
+            </a:r>
+            <a:r>
+              <a:rPr lang="tr-TR" sz="1300" b="0" dirty="0" err="1">
+                <a:solidFill>
+                  <a:srgbClr val="000000"/>
+                </a:solidFill>
+                <a:effectLst/>
+                <a:latin typeface="Consolas" panose="020B0609020204030204" pitchFamily="49" charset="0"/>
+              </a:rPr>
+              <a:t>.</a:t>
+            </a:r>
+            <a:r>
+              <a:rPr lang="tr-TR" sz="1300" b="0" dirty="0" err="1">
+                <a:solidFill>
+                  <a:srgbClr val="001080"/>
+                </a:solidFill>
+                <a:effectLst/>
+                <a:latin typeface="Consolas" panose="020B0609020204030204" pitchFamily="49" charset="0"/>
+              </a:rPr>
+              <a:t>out</a:t>
+            </a:r>
+            <a:r>
+              <a:rPr lang="tr-TR" sz="1300" b="0" dirty="0" err="1">
+                <a:solidFill>
+                  <a:srgbClr val="000000"/>
+                </a:solidFill>
+                <a:effectLst/>
+                <a:latin typeface="Consolas" panose="020B0609020204030204" pitchFamily="49" charset="0"/>
+              </a:rPr>
+              <a:t>.</a:t>
+            </a:r>
+            <a:r>
+              <a:rPr lang="tr-TR" sz="1300" b="0" dirty="0" err="1">
+                <a:solidFill>
+                  <a:srgbClr val="795E26"/>
+                </a:solidFill>
+                <a:effectLst/>
+                <a:latin typeface="Consolas" panose="020B0609020204030204" pitchFamily="49" charset="0"/>
+              </a:rPr>
+              <a:t>println</a:t>
+            </a:r>
+            <a:r>
+              <a:rPr lang="tr-TR" sz="1300" b="0" dirty="0">
+                <a:solidFill>
+                  <a:srgbClr val="000000"/>
+                </a:solidFill>
+                <a:effectLst/>
+                <a:latin typeface="Consolas" panose="020B0609020204030204" pitchFamily="49" charset="0"/>
+              </a:rPr>
+              <a:t>(</a:t>
+            </a:r>
+            <a:r>
+              <a:rPr lang="tr-TR" sz="1300" b="0" dirty="0">
+                <a:solidFill>
+                  <a:srgbClr val="A31515"/>
+                </a:solidFill>
+                <a:effectLst/>
+                <a:latin typeface="Consolas" panose="020B0609020204030204" pitchFamily="49" charset="0"/>
+              </a:rPr>
+              <a:t>"Merhabalar!"</a:t>
+            </a:r>
+            <a:r>
+              <a:rPr lang="tr-TR" sz="1300" b="0" dirty="0">
+                <a:solidFill>
+                  <a:srgbClr val="000000"/>
+                </a:solidFill>
+                <a:effectLst/>
+                <a:latin typeface="Consolas" panose="020B0609020204030204" pitchFamily="49" charset="0"/>
+              </a:rPr>
+              <a:t>);</a:t>
+            </a:r>
+          </a:p>
+          <a:p>
+            <a:pPr>
+              <a:lnSpc>
+                <a:spcPct val="113095"/>
+              </a:lnSpc>
+              <a:buNone/>
+            </a:pPr>
+            <a:r>
+              <a:rPr lang="tr-TR" sz="1300" b="0" dirty="0">
+                <a:solidFill>
+                  <a:srgbClr val="000000"/>
+                </a:solidFill>
+                <a:effectLst/>
+                <a:latin typeface="Consolas" panose="020B0609020204030204" pitchFamily="49" charset="0"/>
+              </a:rPr>
+              <a:t>    }</a:t>
+            </a:r>
+          </a:p>
+          <a:p>
+            <a:pPr>
+              <a:lnSpc>
+                <a:spcPct val="113095"/>
+              </a:lnSpc>
+              <a:buNone/>
+            </a:pPr>
+            <a:r>
+              <a:rPr lang="tr-TR" sz="1300" b="0" dirty="0">
+                <a:solidFill>
+                  <a:srgbClr val="000000"/>
+                </a:solidFill>
+                <a:effectLst/>
+                <a:latin typeface="Consolas" panose="020B0609020204030204" pitchFamily="49" charset="0"/>
+              </a:rPr>
+              <a:t>}</a:t>
+            </a:r>
+          </a:p>
+        </p:txBody>
+      </p:sp>
+      <p:sp>
+        <p:nvSpPr>
+          <p:cNvPr id="3" name="Veri Yer Tutucusu 2">
+            <a:extLst>
+              <a:ext uri="{FF2B5EF4-FFF2-40B4-BE49-F238E27FC236}">
+                <a16:creationId xmlns:a16="http://schemas.microsoft.com/office/drawing/2014/main" id="{C6FFB745-6D38-36AB-1489-A95553CF451E}"/>
+              </a:ext>
+            </a:extLst>
+          </p:cNvPr>
+          <p:cNvSpPr>
+            <a:spLocks noGrp="1"/>
+          </p:cNvSpPr>
+          <p:nvPr>
+            <p:ph type="dt" sz="half" idx="10"/>
+          </p:nvPr>
+        </p:nvSpPr>
+        <p:spPr/>
+        <p:txBody>
+          <a:bodyPr/>
+          <a:lstStyle/>
+          <a:p>
+            <a:fld id="{4CCF6595-5809-4331-A82F-8ECD7B658D5D}" type="datetime1">
+              <a:rPr lang="tr-TR" smtClean="0"/>
+              <a:t>11.10.2026</a:t>
+            </a:fld>
+            <a:endParaRPr lang="tr-TR"/>
+          </a:p>
+        </p:txBody>
+      </p:sp>
+      <p:sp>
+        <p:nvSpPr>
+          <p:cNvPr id="7" name="Alt Bilgi Yer Tutucusu 6">
+            <a:extLst>
+              <a:ext uri="{FF2B5EF4-FFF2-40B4-BE49-F238E27FC236}">
+                <a16:creationId xmlns:a16="http://schemas.microsoft.com/office/drawing/2014/main" id="{9591F2F2-6954-505C-1C5C-CF711C441970}"/>
+              </a:ext>
+            </a:extLst>
+          </p:cNvPr>
+          <p:cNvSpPr>
+            <a:spLocks noGrp="1"/>
+          </p:cNvSpPr>
+          <p:nvPr>
+            <p:ph type="ftr" sz="quarter" idx="11"/>
+          </p:nvPr>
+        </p:nvSpPr>
+        <p:spPr/>
+        <p:txBody>
+          <a:bodyPr/>
+          <a:lstStyle/>
+          <a:p>
+            <a:r>
+              <a:rPr lang="tr-TR"/>
+              <a:t>Copyright: Harun Altay</a:t>
+            </a:r>
+          </a:p>
+        </p:txBody>
+      </p:sp>
+      <p:sp>
+        <p:nvSpPr>
+          <p:cNvPr id="8" name="Slayt Numarası Yer Tutucusu 7">
+            <a:extLst>
+              <a:ext uri="{FF2B5EF4-FFF2-40B4-BE49-F238E27FC236}">
+                <a16:creationId xmlns:a16="http://schemas.microsoft.com/office/drawing/2014/main" id="{11682571-E38E-FAA4-E6F1-5E6BDB0579A3}"/>
+              </a:ext>
+            </a:extLst>
+          </p:cNvPr>
+          <p:cNvSpPr>
+            <a:spLocks noGrp="1"/>
+          </p:cNvSpPr>
+          <p:nvPr>
+            <p:ph type="sldNum" sz="quarter" idx="12"/>
+          </p:nvPr>
+        </p:nvSpPr>
+        <p:spPr/>
+        <p:txBody>
+          <a:bodyPr/>
+          <a:lstStyle/>
+          <a:p>
+            <a:fld id="{556A583B-49D3-4431-A76E-53060577655C}" type="slidenum">
+              <a:rPr lang="tr-TR" smtClean="0"/>
+              <a:t>30</a:t>
+            </a:fld>
+            <a:endParaRPr lang="tr-TR"/>
+          </a:p>
+        </p:txBody>
+      </p:sp>
+    </p:spTree>
+    <p:extLst>
+      <p:ext uri="{BB962C8B-B14F-4D97-AF65-F5344CB8AC3E}">
+        <p14:creationId xmlns:p14="http://schemas.microsoft.com/office/powerpoint/2010/main" val="609196615"/>
+      </p:ext>
+    </p:extLst>
+  </p:cSld>
+  <p:clrMapOvr>
+    <a:masterClrMapping/>
+  </p:clrMapOvr>
+</p:sld>
+</file>
+
+<file path=ppt/slides/slide31.xml><?xml version="1.0" encoding="utf-8"?>
+<p:sld xmlns:a="http://schemas.openxmlformats.org/drawingml/2006/main" xmlns:r="http://schemas.openxmlformats.org/officeDocument/2006/relationships" xmlns:p="http://schemas.openxmlformats.org/presentationml/2006/main">
+  <p:cSld>
+    <p:spTree>
+      <p:nvGrpSpPr>
+        <p:cNvPr id="1" name="">
+          <a:extLst>
+            <a:ext uri="{FF2B5EF4-FFF2-40B4-BE49-F238E27FC236}">
               <a16:creationId xmlns:a16="http://schemas.microsoft.com/office/drawing/2014/main" id="{984043D2-B1D9-1F21-AE31-F9856978EF3A}"/>
             </a:ext>
           </a:extLst>
@@ -14955,7 +15293,7 @@
           <a:p>
             <a:fld id="{556A583B-49D3-4431-A76E-53060577655C}" type="slidenum">
               <a:rPr lang="tr-TR" smtClean="0"/>
-              <a:t>30</a:t>
+              <a:t>31</a:t>
             </a:fld>
             <a:endParaRPr lang="tr-TR"/>
           </a:p>
@@ -14974,7 +15312,7 @@
 </p:sld>
 </file>
 
-<file path=ppt/slides/slide31.xml><?xml version="1.0" encoding="utf-8"?>
+<file path=ppt/slides/slide32.xml><?xml version="1.0" encoding="utf-8"?>
 <p:sld xmlns:a="http://schemas.openxmlformats.org/drawingml/2006/main" xmlns:r="http://schemas.openxmlformats.org/officeDocument/2006/relationships" xmlns:p="http://schemas.openxmlformats.org/presentationml/2006/main">
   <p:cSld>
     <p:spTree>
@@ -16364,7 +16702,7 @@
           <a:p>
             <a:fld id="{556A583B-49D3-4431-A76E-53060577655C}" type="slidenum">
               <a:rPr lang="tr-TR" smtClean="0"/>
-              <a:t>31</a:t>
+              <a:t>32</a:t>
             </a:fld>
             <a:endParaRPr lang="tr-TR"/>
           </a:p>
@@ -16383,7 +16721,7 @@
 </p:sld>
 </file>
 
-<file path=ppt/slides/slide32.xml><?xml version="1.0" encoding="utf-8"?>
+<file path=ppt/slides/slide33.xml><?xml version="1.0" encoding="utf-8"?>
 <p:sld xmlns:a="http://schemas.openxmlformats.org/drawingml/2006/main" xmlns:r="http://schemas.openxmlformats.org/officeDocument/2006/relationships" xmlns:p="http://schemas.openxmlformats.org/presentationml/2006/main">
   <p:cSld>
     <p:spTree>
@@ -16557,7 +16895,7 @@
           <a:p>
             <a:fld id="{556A583B-49D3-4431-A76E-53060577655C}" type="slidenum">
               <a:rPr lang="tr-TR" smtClean="0"/>
-              <a:t>32</a:t>
+              <a:t>33</a:t>
             </a:fld>
             <a:endParaRPr lang="tr-TR"/>
           </a:p>
@@ -16576,7 +16914,7 @@
 </p:sld>
 </file>
 
-<file path=ppt/slides/slide33.xml><?xml version="1.0" encoding="utf-8"?>
+<file path=ppt/slides/slide34.xml><?xml version="1.0" encoding="utf-8"?>
 <p:sld xmlns:a="http://schemas.openxmlformats.org/drawingml/2006/main" xmlns:r="http://schemas.openxmlformats.org/officeDocument/2006/relationships" xmlns:p="http://schemas.openxmlformats.org/presentationml/2006/main">
   <p:cSld>
     <p:spTree>
@@ -16928,7 +17266,7 @@
           <a:p>
             <a:fld id="{556A583B-49D3-4431-A76E-53060577655C}" type="slidenum">
               <a:rPr lang="tr-TR" smtClean="0"/>
-              <a:t>33</a:t>
+              <a:t>34</a:t>
             </a:fld>
             <a:endParaRPr lang="tr-TR"/>
           </a:p>
@@ -16947,7 +17285,7 @@
 </p:sld>
 </file>
 
-<file path=ppt/slides/slide34.xml><?xml version="1.0" encoding="utf-8"?>
+<file path=ppt/slides/slide35.xml><?xml version="1.0" encoding="utf-8"?>
 <p:sld xmlns:a="http://schemas.openxmlformats.org/drawingml/2006/main" xmlns:r="http://schemas.openxmlformats.org/officeDocument/2006/relationships" xmlns:p="http://schemas.openxmlformats.org/presentationml/2006/main">
   <p:cSld>
     <p:spTree>
@@ -17219,7 +17557,7 @@
           <a:p>
             <a:fld id="{556A583B-49D3-4431-A76E-53060577655C}" type="slidenum">
               <a:rPr lang="tr-TR" smtClean="0"/>
-              <a:t>34</a:t>
+              <a:t>35</a:t>
             </a:fld>
             <a:endParaRPr lang="tr-TR"/>
           </a:p>
@@ -17238,7 +17576,7 @@
 </p:sld>
 </file>
 
-<file path=ppt/slides/slide35.xml><?xml version="1.0" encoding="utf-8"?>
+<file path=ppt/slides/slide36.xml><?xml version="1.0" encoding="utf-8"?>
 <p:sld xmlns:a="http://schemas.openxmlformats.org/drawingml/2006/main" xmlns:r="http://schemas.openxmlformats.org/officeDocument/2006/relationships" xmlns:p="http://schemas.openxmlformats.org/presentationml/2006/main">
   <p:cSld>
     <p:spTree>
@@ -17854,7 +18192,7 @@
           <a:p>
             <a:fld id="{556A583B-49D3-4431-A76E-53060577655C}" type="slidenum">
               <a:rPr lang="tr-TR" smtClean="0"/>
-              <a:t>35</a:t>
+              <a:t>36</a:t>
             </a:fld>
             <a:endParaRPr lang="tr-TR"/>
           </a:p>
@@ -17873,7 +18211,7 @@
 </p:sld>
 </file>
 
-<file path=ppt/slides/slide36.xml><?xml version="1.0" encoding="utf-8"?>
+<file path=ppt/slides/slide37.xml><?xml version="1.0" encoding="utf-8"?>
 <p:sld xmlns:a="http://schemas.openxmlformats.org/drawingml/2006/main" xmlns:r="http://schemas.openxmlformats.org/officeDocument/2006/relationships" xmlns:p="http://schemas.openxmlformats.org/presentationml/2006/main">
   <p:cSld>
     <p:spTree>
@@ -18487,7 +18825,7 @@
           <a:p>
             <a:fld id="{556A583B-49D3-4431-A76E-53060577655C}" type="slidenum">
               <a:rPr lang="tr-TR" smtClean="0"/>
-              <a:t>36</a:t>
+              <a:t>37</a:t>
             </a:fld>
             <a:endParaRPr lang="tr-TR"/>
           </a:p>
@@ -18506,7 +18844,7 @@
 </p:sld>
 </file>
 
-<file path=ppt/slides/slide37.xml><?xml version="1.0" encoding="utf-8"?>
+<file path=ppt/slides/slide38.xml><?xml version="1.0" encoding="utf-8"?>
 <p:sld xmlns:a="http://schemas.openxmlformats.org/drawingml/2006/main" xmlns:r="http://schemas.openxmlformats.org/officeDocument/2006/relationships" xmlns:p="http://schemas.openxmlformats.org/presentationml/2006/main">
   <p:cSld>
     <p:spTree>
@@ -19093,7 +19431,7 @@
           <a:p>
             <a:fld id="{556A583B-49D3-4431-A76E-53060577655C}" type="slidenum">
               <a:rPr lang="tr-TR" smtClean="0"/>
-              <a:t>37</a:t>
+              <a:t>38</a:t>
             </a:fld>
             <a:endParaRPr lang="tr-TR"/>
           </a:p>
@@ -19112,7 +19450,7 @@
 </p:sld>
 </file>
 
-<file path=ppt/slides/slide38.xml><?xml version="1.0" encoding="utf-8"?>
+<file path=ppt/slides/slide39.xml><?xml version="1.0" encoding="utf-8"?>
 <p:sld xmlns:a="http://schemas.openxmlformats.org/drawingml/2006/main" xmlns:r="http://schemas.openxmlformats.org/officeDocument/2006/relationships" xmlns:p="http://schemas.openxmlformats.org/presentationml/2006/main">
   <p:cSld>
     <p:spTree>
@@ -19203,7 +19541,7 @@
         </p:spPr>
         <p:txBody>
           <a:bodyPr>
-            <a:normAutofit fontScale="85000" lnSpcReduction="20000"/>
+            <a:normAutofit fontScale="77500" lnSpcReduction="20000"/>
           </a:bodyPr>
           <a:lstStyle/>
           <a:p>
@@ -19224,18 +19562,21 @@
             </a:r>
           </a:p>
           <a:p>
-            <a:r>
-              <a:rPr lang="tr-TR" dirty="0">
+            <a:endParaRPr lang="tr-TR" dirty="0"/>
+          </a:p>
+          <a:p>
+            <a:r>
+              <a:rPr lang="tr-TR" sz="3800" dirty="0">
                 <a:hlinkClick r:id="rId2"/>
               </a:rPr>
               <a:t>https://www.w3schools.com/</a:t>
             </a:r>
-            <a:endParaRPr lang="tr-TR" dirty="0"/>
+            <a:endParaRPr lang="tr-TR" sz="3800" dirty="0"/>
           </a:p>
           <a:p>
             <a:pPr lvl="2"/>
             <a:r>
-              <a:rPr lang="tr-TR" sz="1800" dirty="0">
+              <a:rPr lang="tr-TR" sz="2100" dirty="0">
                 <a:hlinkClick r:id="rId3"/>
               </a:rPr>
               <a:t>https://www.w3schools.com/python/</a:t>
@@ -19244,7 +19585,7 @@
           <a:p>
             <a:pPr lvl="2"/>
             <a:r>
-              <a:rPr lang="tr-TR" sz="1800" dirty="0">
+              <a:rPr lang="tr-TR" sz="2100" dirty="0">
                 <a:hlinkClick r:id="rId3"/>
               </a:rPr>
               <a:t>https://www.w3schools.com/java/</a:t>
@@ -19253,31 +19594,31 @@
           <a:p>
             <a:pPr lvl="2"/>
             <a:r>
-              <a:rPr lang="tr-TR" sz="1800" dirty="0">
+              <a:rPr lang="tr-TR" sz="2100" dirty="0">
                 <a:hlinkClick r:id="rId3"/>
               </a:rPr>
               <a:t>https://www.w3schools.com/cs/</a:t>
             </a:r>
-            <a:endParaRPr lang="tr-TR" sz="1800" dirty="0"/>
+            <a:endParaRPr lang="tr-TR" sz="2100" dirty="0"/>
           </a:p>
           <a:p>
             <a:pPr lvl="2"/>
             <a:r>
-              <a:rPr lang="tr-TR" dirty="0">
+              <a:rPr lang="tr-TR" sz="2400" dirty="0">
                 <a:hlinkClick r:id="rId4"/>
               </a:rPr>
               <a:t>www.w3schools.com</a:t>
             </a:r>
             <a:r>
-              <a:rPr lang="tr-TR" dirty="0"/>
+              <a:rPr lang="tr-TR" sz="2400" dirty="0"/>
               <a:t> ‘da </a:t>
             </a:r>
             <a:r>
-              <a:rPr lang="tr-TR" dirty="0" err="1"/>
+              <a:rPr lang="tr-TR" sz="2400" dirty="0" err="1"/>
               <a:t>compiler</a:t>
             </a:r>
             <a:r>
-              <a:rPr lang="tr-TR" dirty="0"/>
+              <a:rPr lang="tr-TR" sz="2400" dirty="0"/>
               <a:t> de var</a:t>
             </a:r>
           </a:p>
@@ -19427,7 +19768,7 @@
           <a:p>
             <a:fld id="{556A583B-49D3-4431-A76E-53060577655C}" type="slidenum">
               <a:rPr lang="tr-TR" smtClean="0"/>
-              <a:t>38</a:t>
+              <a:t>39</a:t>
             </a:fld>
             <a:endParaRPr lang="tr-TR"/>
           </a:p>
@@ -19437,219 +19778,6 @@
     <p:extLst>
       <p:ext uri="{BB962C8B-B14F-4D97-AF65-F5344CB8AC3E}">
         <p14:creationId xmlns:p14="http://schemas.microsoft.com/office/powerpoint/2010/main" val="559583435"/>
-      </p:ext>
-    </p:extLst>
-  </p:cSld>
-  <p:clrMapOvr>
-    <a:masterClrMapping/>
-  </p:clrMapOvr>
-</p:sld>
-</file>
-
-<file path=ppt/slides/slide39.xml><?xml version="1.0" encoding="utf-8"?>
-<p:sld xmlns:a="http://schemas.openxmlformats.org/drawingml/2006/main" xmlns:r="http://schemas.openxmlformats.org/officeDocument/2006/relationships" xmlns:p="http://schemas.openxmlformats.org/presentationml/2006/main">
-  <p:cSld>
-    <p:spTree>
-      <p:nvGrpSpPr>
-        <p:cNvPr id="1" name="">
-          <a:extLst>
-            <a:ext uri="{FF2B5EF4-FFF2-40B4-BE49-F238E27FC236}">
-              <a16:creationId xmlns:a16="http://schemas.microsoft.com/office/drawing/2014/main" id="{77791264-6D96-06DD-43A3-0665E7D2586C}"/>
-            </a:ext>
-          </a:extLst>
-        </p:cNvPr>
-        <p:cNvGrpSpPr/>
-        <p:nvPr/>
-      </p:nvGrpSpPr>
-      <p:grpSpPr>
-        <a:xfrm>
-          <a:off x="0" y="0"/>
-          <a:ext cx="0" cy="0"/>
-          <a:chOff x="0" y="0"/>
-          <a:chExt cx="0" cy="0"/>
-        </a:xfrm>
-      </p:grpSpPr>
-      <p:sp>
-        <p:nvSpPr>
-          <p:cNvPr id="2" name="Başlık 1">
-            <a:extLst>
-              <a:ext uri="{FF2B5EF4-FFF2-40B4-BE49-F238E27FC236}">
-                <a16:creationId xmlns:a16="http://schemas.microsoft.com/office/drawing/2014/main" id="{B6ABDC2E-5728-ADBB-99A2-B289F8FEC9DA}"/>
-              </a:ext>
-            </a:extLst>
-          </p:cNvPr>
-          <p:cNvSpPr>
-            <a:spLocks noGrp="1"/>
-          </p:cNvSpPr>
-          <p:nvPr>
-            <p:ph type="title"/>
-          </p:nvPr>
-        </p:nvSpPr>
-        <p:spPr>
-          <a:xfrm>
-            <a:off x="838200" y="365126"/>
-            <a:ext cx="4122420" cy="726256"/>
-          </a:xfrm>
-        </p:spPr>
-        <p:txBody>
-          <a:bodyPr>
-            <a:normAutofit/>
-          </a:bodyPr>
-          <a:lstStyle/>
-          <a:p>
-            <a:r>
-              <a:rPr lang="tr-TR" sz="3600" dirty="0" err="1"/>
-              <a:t>Tutorial’ler</a:t>
-            </a:r>
-            <a:r>
-              <a:rPr lang="tr-TR" sz="3600" dirty="0"/>
-              <a:t> (Türkçe)</a:t>
-            </a:r>
-          </a:p>
-        </p:txBody>
-      </p:sp>
-      <p:sp>
-        <p:nvSpPr>
-          <p:cNvPr id="3" name="İçerik Yer Tutucusu 2">
-            <a:extLst>
-              <a:ext uri="{FF2B5EF4-FFF2-40B4-BE49-F238E27FC236}">
-                <a16:creationId xmlns:a16="http://schemas.microsoft.com/office/drawing/2014/main" id="{5B555407-4CFA-CE6F-D7BA-4CB71CDCA560}"/>
-              </a:ext>
-            </a:extLst>
-          </p:cNvPr>
-          <p:cNvSpPr>
-            <a:spLocks noGrp="1"/>
-          </p:cNvSpPr>
-          <p:nvPr>
-            <p:ph idx="1"/>
-          </p:nvPr>
-        </p:nvSpPr>
-        <p:spPr>
-          <a:xfrm>
-            <a:off x="838200" y="1091382"/>
-            <a:ext cx="6427839" cy="5220928"/>
-          </a:xfrm>
-        </p:spPr>
-        <p:txBody>
-          <a:bodyPr>
-            <a:normAutofit/>
-          </a:bodyPr>
-          <a:lstStyle/>
-          <a:p>
-            <a:endParaRPr lang="tr-TR" dirty="0"/>
-          </a:p>
-          <a:p>
-            <a:r>
-              <a:rPr lang="tr-TR" sz="2400" dirty="0"/>
-              <a:t>Google ara: </a:t>
-            </a:r>
-            <a:r>
-              <a:rPr lang="tr-TR" sz="2400" dirty="0" err="1"/>
-              <a:t>Tutorial</a:t>
-            </a:r>
-            <a:r>
-              <a:rPr lang="tr-TR" sz="2400" dirty="0"/>
-              <a:t> Python Java C# Türkçe</a:t>
-            </a:r>
-          </a:p>
-          <a:p>
-            <a:endParaRPr lang="tr-TR" sz="2400" dirty="0"/>
-          </a:p>
-          <a:p>
-            <a:endParaRPr lang="tr-TR" sz="2400" dirty="0"/>
-          </a:p>
-        </p:txBody>
-      </p:sp>
-      <p:sp>
-        <p:nvSpPr>
-          <p:cNvPr id="4" name="Veri Yer Tutucusu 3">
-            <a:extLst>
-              <a:ext uri="{FF2B5EF4-FFF2-40B4-BE49-F238E27FC236}">
-                <a16:creationId xmlns:a16="http://schemas.microsoft.com/office/drawing/2014/main" id="{CAFFA528-0D1A-DCDB-3730-5E18CE2EC31A}"/>
-              </a:ext>
-            </a:extLst>
-          </p:cNvPr>
-          <p:cNvSpPr>
-            <a:spLocks noGrp="1"/>
-          </p:cNvSpPr>
-          <p:nvPr>
-            <p:ph type="dt" sz="half" idx="10"/>
-          </p:nvPr>
-        </p:nvSpPr>
-        <p:spPr/>
-        <p:txBody>
-          <a:bodyPr/>
-          <a:lstStyle/>
-          <a:p>
-            <a:fld id="{C8538EAB-DF79-497D-BA70-2B74B6C10086}" type="datetime1">
-              <a:rPr lang="tr-TR" smtClean="0"/>
-              <a:t>11.10.2026</a:t>
-            </a:fld>
-            <a:endParaRPr lang="tr-TR"/>
-          </a:p>
-        </p:txBody>
-      </p:sp>
-      <p:sp>
-        <p:nvSpPr>
-          <p:cNvPr id="5" name="Alt Bilgi Yer Tutucusu 4">
-            <a:extLst>
-              <a:ext uri="{FF2B5EF4-FFF2-40B4-BE49-F238E27FC236}">
-                <a16:creationId xmlns:a16="http://schemas.microsoft.com/office/drawing/2014/main" id="{BC54326A-90F2-4D2D-69A8-1BD71CA1F06F}"/>
-              </a:ext>
-            </a:extLst>
-          </p:cNvPr>
-          <p:cNvSpPr>
-            <a:spLocks noGrp="1"/>
-          </p:cNvSpPr>
-          <p:nvPr>
-            <p:ph type="ftr" sz="quarter" idx="11"/>
-          </p:nvPr>
-        </p:nvSpPr>
-        <p:spPr/>
-        <p:txBody>
-          <a:bodyPr/>
-          <a:lstStyle/>
-          <a:p>
-            <a:r>
-              <a:rPr lang="tr-TR"/>
-              <a:t>Copyright: Harun Altay</a:t>
-            </a:r>
-          </a:p>
-        </p:txBody>
-      </p:sp>
-      <p:sp>
-        <p:nvSpPr>
-          <p:cNvPr id="6" name="Slayt Numarası Yer Tutucusu 5">
-            <a:extLst>
-              <a:ext uri="{FF2B5EF4-FFF2-40B4-BE49-F238E27FC236}">
-                <a16:creationId xmlns:a16="http://schemas.microsoft.com/office/drawing/2014/main" id="{4FECCD5D-0984-F866-AC3A-A1B0D65F7B6E}"/>
-              </a:ext>
-            </a:extLst>
-          </p:cNvPr>
-          <p:cNvSpPr>
-            <a:spLocks noGrp="1"/>
-          </p:cNvSpPr>
-          <p:nvPr>
-            <p:ph type="sldNum" sz="quarter" idx="12"/>
-          </p:nvPr>
-        </p:nvSpPr>
-        <p:spPr/>
-        <p:txBody>
-          <a:bodyPr/>
-          <a:lstStyle/>
-          <a:p>
-            <a:fld id="{556A583B-49D3-4431-A76E-53060577655C}" type="slidenum">
-              <a:rPr lang="tr-TR" smtClean="0"/>
-              <a:t>39</a:t>
-            </a:fld>
-            <a:endParaRPr lang="tr-TR"/>
-          </a:p>
-        </p:txBody>
-      </p:sp>
-    </p:spTree>
-    <p:extLst>
-      <p:ext uri="{BB962C8B-B14F-4D97-AF65-F5344CB8AC3E}">
-        <p14:creationId xmlns:p14="http://schemas.microsoft.com/office/powerpoint/2010/main" val="2243516129"/>
       </p:ext>
     </p:extLst>
   </p:cSld>
@@ -19865,6 +19993,219 @@
         <p:cNvPr id="1" name="">
           <a:extLst>
             <a:ext uri="{FF2B5EF4-FFF2-40B4-BE49-F238E27FC236}">
+              <a16:creationId xmlns:a16="http://schemas.microsoft.com/office/drawing/2014/main" id="{77791264-6D96-06DD-43A3-0665E7D2586C}"/>
+            </a:ext>
+          </a:extLst>
+        </p:cNvPr>
+        <p:cNvGrpSpPr/>
+        <p:nvPr/>
+      </p:nvGrpSpPr>
+      <p:grpSpPr>
+        <a:xfrm>
+          <a:off x="0" y="0"/>
+          <a:ext cx="0" cy="0"/>
+          <a:chOff x="0" y="0"/>
+          <a:chExt cx="0" cy="0"/>
+        </a:xfrm>
+      </p:grpSpPr>
+      <p:sp>
+        <p:nvSpPr>
+          <p:cNvPr id="2" name="Başlık 1">
+            <a:extLst>
+              <a:ext uri="{FF2B5EF4-FFF2-40B4-BE49-F238E27FC236}">
+                <a16:creationId xmlns:a16="http://schemas.microsoft.com/office/drawing/2014/main" id="{B6ABDC2E-5728-ADBB-99A2-B289F8FEC9DA}"/>
+              </a:ext>
+            </a:extLst>
+          </p:cNvPr>
+          <p:cNvSpPr>
+            <a:spLocks noGrp="1"/>
+          </p:cNvSpPr>
+          <p:nvPr>
+            <p:ph type="title"/>
+          </p:nvPr>
+        </p:nvSpPr>
+        <p:spPr>
+          <a:xfrm>
+            <a:off x="838200" y="365126"/>
+            <a:ext cx="4122420" cy="726256"/>
+          </a:xfrm>
+        </p:spPr>
+        <p:txBody>
+          <a:bodyPr>
+            <a:normAutofit/>
+          </a:bodyPr>
+          <a:lstStyle/>
+          <a:p>
+            <a:r>
+              <a:rPr lang="tr-TR" sz="3600" dirty="0" err="1"/>
+              <a:t>Tutorial’ler</a:t>
+            </a:r>
+            <a:r>
+              <a:rPr lang="tr-TR" sz="3600" dirty="0"/>
+              <a:t> (Türkçe)</a:t>
+            </a:r>
+          </a:p>
+        </p:txBody>
+      </p:sp>
+      <p:sp>
+        <p:nvSpPr>
+          <p:cNvPr id="3" name="İçerik Yer Tutucusu 2">
+            <a:extLst>
+              <a:ext uri="{FF2B5EF4-FFF2-40B4-BE49-F238E27FC236}">
+                <a16:creationId xmlns:a16="http://schemas.microsoft.com/office/drawing/2014/main" id="{5B555407-4CFA-CE6F-D7BA-4CB71CDCA560}"/>
+              </a:ext>
+            </a:extLst>
+          </p:cNvPr>
+          <p:cNvSpPr>
+            <a:spLocks noGrp="1"/>
+          </p:cNvSpPr>
+          <p:nvPr>
+            <p:ph idx="1"/>
+          </p:nvPr>
+        </p:nvSpPr>
+        <p:spPr>
+          <a:xfrm>
+            <a:off x="838200" y="1091382"/>
+            <a:ext cx="6427839" cy="5220928"/>
+          </a:xfrm>
+        </p:spPr>
+        <p:txBody>
+          <a:bodyPr>
+            <a:normAutofit/>
+          </a:bodyPr>
+          <a:lstStyle/>
+          <a:p>
+            <a:endParaRPr lang="tr-TR" dirty="0"/>
+          </a:p>
+          <a:p>
+            <a:r>
+              <a:rPr lang="tr-TR" sz="2400" dirty="0"/>
+              <a:t>Google ara: </a:t>
+            </a:r>
+            <a:r>
+              <a:rPr lang="tr-TR" sz="2400" dirty="0" err="1"/>
+              <a:t>Tutorial</a:t>
+            </a:r>
+            <a:r>
+              <a:rPr lang="tr-TR" sz="2400" dirty="0"/>
+              <a:t> Python Java C# Türkçe</a:t>
+            </a:r>
+          </a:p>
+          <a:p>
+            <a:endParaRPr lang="tr-TR" sz="2400" dirty="0"/>
+          </a:p>
+          <a:p>
+            <a:endParaRPr lang="tr-TR" sz="2400" dirty="0"/>
+          </a:p>
+        </p:txBody>
+      </p:sp>
+      <p:sp>
+        <p:nvSpPr>
+          <p:cNvPr id="4" name="Veri Yer Tutucusu 3">
+            <a:extLst>
+              <a:ext uri="{FF2B5EF4-FFF2-40B4-BE49-F238E27FC236}">
+                <a16:creationId xmlns:a16="http://schemas.microsoft.com/office/drawing/2014/main" id="{CAFFA528-0D1A-DCDB-3730-5E18CE2EC31A}"/>
+              </a:ext>
+            </a:extLst>
+          </p:cNvPr>
+          <p:cNvSpPr>
+            <a:spLocks noGrp="1"/>
+          </p:cNvSpPr>
+          <p:nvPr>
+            <p:ph type="dt" sz="half" idx="10"/>
+          </p:nvPr>
+        </p:nvSpPr>
+        <p:spPr/>
+        <p:txBody>
+          <a:bodyPr/>
+          <a:lstStyle/>
+          <a:p>
+            <a:fld id="{C8538EAB-DF79-497D-BA70-2B74B6C10086}" type="datetime1">
+              <a:rPr lang="tr-TR" smtClean="0"/>
+              <a:t>11.10.2026</a:t>
+            </a:fld>
+            <a:endParaRPr lang="tr-TR"/>
+          </a:p>
+        </p:txBody>
+      </p:sp>
+      <p:sp>
+        <p:nvSpPr>
+          <p:cNvPr id="5" name="Alt Bilgi Yer Tutucusu 4">
+            <a:extLst>
+              <a:ext uri="{FF2B5EF4-FFF2-40B4-BE49-F238E27FC236}">
+                <a16:creationId xmlns:a16="http://schemas.microsoft.com/office/drawing/2014/main" id="{BC54326A-90F2-4D2D-69A8-1BD71CA1F06F}"/>
+              </a:ext>
+            </a:extLst>
+          </p:cNvPr>
+          <p:cNvSpPr>
+            <a:spLocks noGrp="1"/>
+          </p:cNvSpPr>
+          <p:nvPr>
+            <p:ph type="ftr" sz="quarter" idx="11"/>
+          </p:nvPr>
+        </p:nvSpPr>
+        <p:spPr/>
+        <p:txBody>
+          <a:bodyPr/>
+          <a:lstStyle/>
+          <a:p>
+            <a:r>
+              <a:rPr lang="tr-TR"/>
+              <a:t>Copyright: Harun Altay</a:t>
+            </a:r>
+          </a:p>
+        </p:txBody>
+      </p:sp>
+      <p:sp>
+        <p:nvSpPr>
+          <p:cNvPr id="6" name="Slayt Numarası Yer Tutucusu 5">
+            <a:extLst>
+              <a:ext uri="{FF2B5EF4-FFF2-40B4-BE49-F238E27FC236}">
+                <a16:creationId xmlns:a16="http://schemas.microsoft.com/office/drawing/2014/main" id="{4FECCD5D-0984-F866-AC3A-A1B0D65F7B6E}"/>
+              </a:ext>
+            </a:extLst>
+          </p:cNvPr>
+          <p:cNvSpPr>
+            <a:spLocks noGrp="1"/>
+          </p:cNvSpPr>
+          <p:nvPr>
+            <p:ph type="sldNum" sz="quarter" idx="12"/>
+          </p:nvPr>
+        </p:nvSpPr>
+        <p:spPr/>
+        <p:txBody>
+          <a:bodyPr/>
+          <a:lstStyle/>
+          <a:p>
+            <a:fld id="{556A583B-49D3-4431-A76E-53060577655C}" type="slidenum">
+              <a:rPr lang="tr-TR" smtClean="0"/>
+              <a:t>40</a:t>
+            </a:fld>
+            <a:endParaRPr lang="tr-TR"/>
+          </a:p>
+        </p:txBody>
+      </p:sp>
+    </p:spTree>
+    <p:extLst>
+      <p:ext uri="{BB962C8B-B14F-4D97-AF65-F5344CB8AC3E}">
+        <p14:creationId xmlns:p14="http://schemas.microsoft.com/office/powerpoint/2010/main" val="2243516129"/>
+      </p:ext>
+    </p:extLst>
+  </p:cSld>
+  <p:clrMapOvr>
+    <a:masterClrMapping/>
+  </p:clrMapOvr>
+</p:sld>
+</file>
+
+<file path=ppt/slides/slide41.xml><?xml version="1.0" encoding="utf-8"?>
+<p:sld xmlns:a="http://schemas.openxmlformats.org/drawingml/2006/main" xmlns:r="http://schemas.openxmlformats.org/officeDocument/2006/relationships" xmlns:p="http://schemas.openxmlformats.org/presentationml/2006/main">
+  <p:cSld>
+    <p:spTree>
+      <p:nvGrpSpPr>
+        <p:cNvPr id="1" name="">
+          <a:extLst>
+            <a:ext uri="{FF2B5EF4-FFF2-40B4-BE49-F238E27FC236}">
               <a16:creationId xmlns:a16="http://schemas.microsoft.com/office/drawing/2014/main" id="{F7E7B57B-9300-E57C-66AD-6C908B08CB98}"/>
             </a:ext>
           </a:extLst>
@@ -20086,7 +20427,7 @@
           <a:p>
             <a:fld id="{556A583B-49D3-4431-A76E-53060577655C}" type="slidenum">
               <a:rPr lang="tr-TR" smtClean="0"/>
-              <a:t>40</a:t>
+              <a:t>41</a:t>
             </a:fld>
             <a:endParaRPr lang="tr-TR"/>
           </a:p>
@@ -20105,7 +20446,7 @@
 </p:sld>
 </file>
 
-<file path=ppt/slides/slide41.xml><?xml version="1.0" encoding="utf-8"?>
+<file path=ppt/slides/slide42.xml><?xml version="1.0" encoding="utf-8"?>
 <p:sld xmlns:a="http://schemas.openxmlformats.org/drawingml/2006/main" xmlns:r="http://schemas.openxmlformats.org/officeDocument/2006/relationships" xmlns:p="http://schemas.openxmlformats.org/presentationml/2006/main">
   <p:cSld>
     <p:spTree>
@@ -22288,7 +22629,7 @@
           <a:p>
             <a:fld id="{556A583B-49D3-4431-A76E-53060577655C}" type="slidenum">
               <a:rPr lang="tr-TR" smtClean="0"/>
-              <a:t>41</a:t>
+              <a:t>42</a:t>
             </a:fld>
             <a:endParaRPr lang="tr-TR"/>
           </a:p>
@@ -22307,7 +22648,7 @@
 </p:sld>
 </file>
 
-<file path=ppt/slides/slide42.xml><?xml version="1.0" encoding="utf-8"?>
+<file path=ppt/slides/slide43.xml><?xml version="1.0" encoding="utf-8"?>
 <p:sld xmlns:a="http://schemas.openxmlformats.org/drawingml/2006/main" xmlns:r="http://schemas.openxmlformats.org/officeDocument/2006/relationships" xmlns:p="http://schemas.openxmlformats.org/presentationml/2006/main">
   <p:cSld>
     <p:spTree>
@@ -24554,7 +24895,7 @@
           <a:p>
             <a:fld id="{556A583B-49D3-4431-A76E-53060577655C}" type="slidenum">
               <a:rPr lang="tr-TR" smtClean="0"/>
-              <a:t>42</a:t>
+              <a:t>43</a:t>
             </a:fld>
             <a:endParaRPr lang="tr-TR"/>
           </a:p>
@@ -24573,7 +24914,7 @@
 </p:sld>
 </file>
 
-<file path=ppt/slides/slide43.xml><?xml version="1.0" encoding="utf-8"?>
+<file path=ppt/slides/slide44.xml><?xml version="1.0" encoding="utf-8"?>
 <p:sld xmlns:a="http://schemas.openxmlformats.org/drawingml/2006/main" xmlns:r="http://schemas.openxmlformats.org/officeDocument/2006/relationships" xmlns:p="http://schemas.openxmlformats.org/presentationml/2006/main">
   <p:cSld>
     <p:spTree>
@@ -25759,7 +26100,7 @@
           <a:p>
             <a:fld id="{556A583B-49D3-4431-A76E-53060577655C}" type="slidenum">
               <a:rPr lang="tr-TR" smtClean="0"/>
-              <a:t>43</a:t>
+              <a:t>44</a:t>
             </a:fld>
             <a:endParaRPr lang="tr-TR"/>
           </a:p>
@@ -25778,7 +26119,7 @@
 </p:sld>
 </file>
 
-<file path=ppt/slides/slide44.xml><?xml version="1.0" encoding="utf-8"?>
+<file path=ppt/slides/slide45.xml><?xml version="1.0" encoding="utf-8"?>
 <p:sld xmlns:a="http://schemas.openxmlformats.org/drawingml/2006/main" xmlns:r="http://schemas.openxmlformats.org/officeDocument/2006/relationships" xmlns:p="http://schemas.openxmlformats.org/presentationml/2006/main">
   <p:cSld>
     <p:spTree>
@@ -26952,7 +27293,7 @@
           <a:p>
             <a:fld id="{556A583B-49D3-4431-A76E-53060577655C}" type="slidenum">
               <a:rPr lang="tr-TR" smtClean="0"/>
-              <a:t>44</a:t>
+              <a:t>45</a:t>
             </a:fld>
             <a:endParaRPr lang="tr-TR"/>
           </a:p>
@@ -26971,7 +27312,7 @@
 </p:sld>
 </file>
 
-<file path=ppt/slides/slide45.xml><?xml version="1.0" encoding="utf-8"?>
+<file path=ppt/slides/slide46.xml><?xml version="1.0" encoding="utf-8"?>
 <p:sld xmlns:a="http://schemas.openxmlformats.org/drawingml/2006/main" xmlns:r="http://schemas.openxmlformats.org/officeDocument/2006/relationships" xmlns:p="http://schemas.openxmlformats.org/presentationml/2006/main">
   <p:cSld>
     <p:spTree>
@@ -28471,7 +28812,7 @@
           <a:p>
             <a:fld id="{556A583B-49D3-4431-A76E-53060577655C}" type="slidenum">
               <a:rPr lang="tr-TR" smtClean="0"/>
-              <a:t>45</a:t>
+              <a:t>46</a:t>
             </a:fld>
             <a:endParaRPr lang="tr-TR"/>
           </a:p>
@@ -28490,7 +28831,7 @@
 </p:sld>
 </file>
 
-<file path=ppt/slides/slide46.xml><?xml version="1.0" encoding="utf-8"?>
+<file path=ppt/slides/slide47.xml><?xml version="1.0" encoding="utf-8"?>
 <p:sld xmlns:a="http://schemas.openxmlformats.org/drawingml/2006/main" xmlns:r="http://schemas.openxmlformats.org/officeDocument/2006/relationships" xmlns:p="http://schemas.openxmlformats.org/presentationml/2006/main">
   <p:cSld>
     <p:spTree>
@@ -30080,7 +30421,7 @@
           <a:p>
             <a:fld id="{556A583B-49D3-4431-A76E-53060577655C}" type="slidenum">
               <a:rPr lang="tr-TR" smtClean="0"/>
-              <a:t>46</a:t>
+              <a:t>47</a:t>
             </a:fld>
             <a:endParaRPr lang="tr-TR"/>
           </a:p>
@@ -30099,7 +30440,7 @@
 </p:sld>
 </file>
 
-<file path=ppt/slides/slide47.xml><?xml version="1.0" encoding="utf-8"?>
+<file path=ppt/slides/slide48.xml><?xml version="1.0" encoding="utf-8"?>
 <p:sld xmlns:a="http://schemas.openxmlformats.org/drawingml/2006/main" xmlns:r="http://schemas.openxmlformats.org/officeDocument/2006/relationships" xmlns:p="http://schemas.openxmlformats.org/presentationml/2006/main">
   <p:cSld>
     <p:spTree>
@@ -30254,7 +30595,7 @@
           <a:p>
             <a:fld id="{556A583B-49D3-4431-A76E-53060577655C}" type="slidenum">
               <a:rPr lang="tr-TR" smtClean="0"/>
-              <a:t>47</a:t>
+              <a:t>48</a:t>
             </a:fld>
             <a:endParaRPr lang="tr-TR"/>
           </a:p>
@@ -30273,7 +30614,7 @@
 </p:sld>
 </file>
 
-<file path=ppt/slides/slide48.xml><?xml version="1.0" encoding="utf-8"?>
+<file path=ppt/slides/slide49.xml><?xml version="1.0" encoding="utf-8"?>
 <p:sld xmlns:a="http://schemas.openxmlformats.org/drawingml/2006/main" xmlns:r="http://schemas.openxmlformats.org/officeDocument/2006/relationships" xmlns:p="http://schemas.openxmlformats.org/presentationml/2006/main">
   <p:cSld>
     <p:spTree>
@@ -30434,7 +30775,7 @@
           <a:p>
             <a:fld id="{556A583B-49D3-4431-A76E-53060577655C}" type="slidenum">
               <a:rPr lang="tr-TR" smtClean="0"/>
-              <a:t>48</a:t>
+              <a:t>49</a:t>
             </a:fld>
             <a:endParaRPr lang="tr-TR"/>
           </a:p>
@@ -30444,194 +30785,6 @@
     <p:extLst>
       <p:ext uri="{BB962C8B-B14F-4D97-AF65-F5344CB8AC3E}">
         <p14:creationId xmlns:p14="http://schemas.microsoft.com/office/powerpoint/2010/main" val="3144457111"/>
-      </p:ext>
-    </p:extLst>
-  </p:cSld>
-  <p:clrMapOvr>
-    <a:masterClrMapping/>
-  </p:clrMapOvr>
-</p:sld>
-</file>
-
-<file path=ppt/slides/slide49.xml><?xml version="1.0" encoding="utf-8"?>
-<p:sld xmlns:a="http://schemas.openxmlformats.org/drawingml/2006/main" xmlns:r="http://schemas.openxmlformats.org/officeDocument/2006/relationships" xmlns:p="http://schemas.openxmlformats.org/presentationml/2006/main">
-  <p:cSld>
-    <p:spTree>
-      <p:nvGrpSpPr>
-        <p:cNvPr id="1" name="">
-          <a:extLst>
-            <a:ext uri="{FF2B5EF4-FFF2-40B4-BE49-F238E27FC236}">
-              <a16:creationId xmlns:a16="http://schemas.microsoft.com/office/drawing/2014/main" id="{A4A484BF-5943-6A32-2605-0709320CFEA7}"/>
-            </a:ext>
-          </a:extLst>
-        </p:cNvPr>
-        <p:cNvGrpSpPr/>
-        <p:nvPr/>
-      </p:nvGrpSpPr>
-      <p:grpSpPr>
-        <a:xfrm>
-          <a:off x="0" y="0"/>
-          <a:ext cx="0" cy="0"/>
-          <a:chOff x="0" y="0"/>
-          <a:chExt cx="0" cy="0"/>
-        </a:xfrm>
-      </p:grpSpPr>
-      <p:sp>
-        <p:nvSpPr>
-          <p:cNvPr id="2" name="Başlık 1">
-            <a:extLst>
-              <a:ext uri="{FF2B5EF4-FFF2-40B4-BE49-F238E27FC236}">
-                <a16:creationId xmlns:a16="http://schemas.microsoft.com/office/drawing/2014/main" id="{525B8D8A-DFA0-8272-8BD7-D06B0865A0F5}"/>
-              </a:ext>
-            </a:extLst>
-          </p:cNvPr>
-          <p:cNvSpPr>
-            <a:spLocks noGrp="1"/>
-          </p:cNvSpPr>
-          <p:nvPr>
-            <p:ph type="title"/>
-          </p:nvPr>
-        </p:nvSpPr>
-        <p:spPr/>
-        <p:txBody>
-          <a:bodyPr>
-            <a:normAutofit/>
-          </a:bodyPr>
-          <a:lstStyle/>
-          <a:p>
-            <a:r>
-              <a:rPr lang="tr-TR" sz="2800" dirty="0"/>
-              <a:t>Kod: 5 ile tam bölünen ama 3 ün katı olmayan sayılar (</a:t>
-            </a:r>
-            <a:r>
-              <a:rPr lang="tr-TR" sz="2800" dirty="0" err="1"/>
-              <a:t>fizz-buzz</a:t>
-            </a:r>
-            <a:r>
-              <a:rPr lang="tr-TR" sz="2800" dirty="0"/>
-              <a:t>)</a:t>
-            </a:r>
-          </a:p>
-        </p:txBody>
-      </p:sp>
-      <p:sp>
-        <p:nvSpPr>
-          <p:cNvPr id="3" name="İçerik Yer Tutucusu 2">
-            <a:extLst>
-              <a:ext uri="{FF2B5EF4-FFF2-40B4-BE49-F238E27FC236}">
-                <a16:creationId xmlns:a16="http://schemas.microsoft.com/office/drawing/2014/main" id="{55DEF994-6D09-43FB-6841-99DEF3EBD4B4}"/>
-              </a:ext>
-            </a:extLst>
-          </p:cNvPr>
-          <p:cNvSpPr>
-            <a:spLocks noGrp="1"/>
-          </p:cNvSpPr>
-          <p:nvPr>
-            <p:ph idx="1"/>
-          </p:nvPr>
-        </p:nvSpPr>
-        <p:spPr/>
-        <p:txBody>
-          <a:bodyPr/>
-          <a:lstStyle/>
-          <a:p>
-            <a:r>
-              <a:rPr lang="tr-TR" dirty="0"/>
-              <a:t>Çamoğlu 3, 144</a:t>
-            </a:r>
-          </a:p>
-        </p:txBody>
-      </p:sp>
-      <p:sp>
-        <p:nvSpPr>
-          <p:cNvPr id="4" name="Veri Yer Tutucusu 3">
-            <a:extLst>
-              <a:ext uri="{FF2B5EF4-FFF2-40B4-BE49-F238E27FC236}">
-                <a16:creationId xmlns:a16="http://schemas.microsoft.com/office/drawing/2014/main" id="{D7BF5873-D8A4-67C7-4221-7DC6EAEA298C}"/>
-              </a:ext>
-            </a:extLst>
-          </p:cNvPr>
-          <p:cNvSpPr>
-            <a:spLocks noGrp="1"/>
-          </p:cNvSpPr>
-          <p:nvPr>
-            <p:ph type="dt" sz="half" idx="10"/>
-          </p:nvPr>
-        </p:nvSpPr>
-        <p:spPr/>
-        <p:txBody>
-          <a:bodyPr/>
-          <a:lstStyle/>
-          <a:p>
-            <a:fld id="{E5A72F27-F128-4B68-926B-C496DC38618F}" type="datetime1">
-              <a:rPr lang="tr-TR" smtClean="0"/>
-              <a:t>11.10.2026</a:t>
-            </a:fld>
-            <a:endParaRPr lang="tr-TR"/>
-          </a:p>
-        </p:txBody>
-      </p:sp>
-      <p:sp>
-        <p:nvSpPr>
-          <p:cNvPr id="5" name="Alt Bilgi Yer Tutucusu 4">
-            <a:extLst>
-              <a:ext uri="{FF2B5EF4-FFF2-40B4-BE49-F238E27FC236}">
-                <a16:creationId xmlns:a16="http://schemas.microsoft.com/office/drawing/2014/main" id="{96A87BDD-8075-84B5-DCDB-2DFB79E718E2}"/>
-              </a:ext>
-            </a:extLst>
-          </p:cNvPr>
-          <p:cNvSpPr>
-            <a:spLocks noGrp="1"/>
-          </p:cNvSpPr>
-          <p:nvPr>
-            <p:ph type="ftr" sz="quarter" idx="11"/>
-          </p:nvPr>
-        </p:nvSpPr>
-        <p:spPr/>
-        <p:txBody>
-          <a:bodyPr/>
-          <a:lstStyle/>
-          <a:p>
-            <a:r>
-              <a:rPr lang="tr-TR"/>
-              <a:t>Copyright: Harun Altay</a:t>
-            </a:r>
-          </a:p>
-        </p:txBody>
-      </p:sp>
-      <p:sp>
-        <p:nvSpPr>
-          <p:cNvPr id="6" name="Slayt Numarası Yer Tutucusu 5">
-            <a:extLst>
-              <a:ext uri="{FF2B5EF4-FFF2-40B4-BE49-F238E27FC236}">
-                <a16:creationId xmlns:a16="http://schemas.microsoft.com/office/drawing/2014/main" id="{76B6371E-D351-EDEA-D0F7-8A8019A2A795}"/>
-              </a:ext>
-            </a:extLst>
-          </p:cNvPr>
-          <p:cNvSpPr>
-            <a:spLocks noGrp="1"/>
-          </p:cNvSpPr>
-          <p:nvPr>
-            <p:ph type="sldNum" sz="quarter" idx="12"/>
-          </p:nvPr>
-        </p:nvSpPr>
-        <p:spPr/>
-        <p:txBody>
-          <a:bodyPr/>
-          <a:lstStyle/>
-          <a:p>
-            <a:fld id="{556A583B-49D3-4431-A76E-53060577655C}" type="slidenum">
-              <a:rPr lang="tr-TR" smtClean="0"/>
-              <a:t>49</a:t>
-            </a:fld>
-            <a:endParaRPr lang="tr-TR"/>
-          </a:p>
-        </p:txBody>
-      </p:sp>
-    </p:spTree>
-    <p:extLst>
-      <p:ext uri="{BB962C8B-B14F-4D97-AF65-F5344CB8AC3E}">
-        <p14:creationId xmlns:p14="http://schemas.microsoft.com/office/powerpoint/2010/main" val="454016312"/>
       </p:ext>
     </p:extLst>
   </p:cSld>
@@ -30847,6 +31000,194 @@
         <p:cNvPr id="1" name="">
           <a:extLst>
             <a:ext uri="{FF2B5EF4-FFF2-40B4-BE49-F238E27FC236}">
+              <a16:creationId xmlns:a16="http://schemas.microsoft.com/office/drawing/2014/main" id="{A4A484BF-5943-6A32-2605-0709320CFEA7}"/>
+            </a:ext>
+          </a:extLst>
+        </p:cNvPr>
+        <p:cNvGrpSpPr/>
+        <p:nvPr/>
+      </p:nvGrpSpPr>
+      <p:grpSpPr>
+        <a:xfrm>
+          <a:off x="0" y="0"/>
+          <a:ext cx="0" cy="0"/>
+          <a:chOff x="0" y="0"/>
+          <a:chExt cx="0" cy="0"/>
+        </a:xfrm>
+      </p:grpSpPr>
+      <p:sp>
+        <p:nvSpPr>
+          <p:cNvPr id="2" name="Başlık 1">
+            <a:extLst>
+              <a:ext uri="{FF2B5EF4-FFF2-40B4-BE49-F238E27FC236}">
+                <a16:creationId xmlns:a16="http://schemas.microsoft.com/office/drawing/2014/main" id="{525B8D8A-DFA0-8272-8BD7-D06B0865A0F5}"/>
+              </a:ext>
+            </a:extLst>
+          </p:cNvPr>
+          <p:cNvSpPr>
+            <a:spLocks noGrp="1"/>
+          </p:cNvSpPr>
+          <p:nvPr>
+            <p:ph type="title"/>
+          </p:nvPr>
+        </p:nvSpPr>
+        <p:spPr/>
+        <p:txBody>
+          <a:bodyPr>
+            <a:normAutofit/>
+          </a:bodyPr>
+          <a:lstStyle/>
+          <a:p>
+            <a:r>
+              <a:rPr lang="tr-TR" sz="2800" dirty="0"/>
+              <a:t>Kod: 5 ile tam bölünen ama 3 ün katı olmayan sayılar (</a:t>
+            </a:r>
+            <a:r>
+              <a:rPr lang="tr-TR" sz="2800" dirty="0" err="1"/>
+              <a:t>fizz-buzz</a:t>
+            </a:r>
+            <a:r>
+              <a:rPr lang="tr-TR" sz="2800" dirty="0"/>
+              <a:t>)</a:t>
+            </a:r>
+          </a:p>
+        </p:txBody>
+      </p:sp>
+      <p:sp>
+        <p:nvSpPr>
+          <p:cNvPr id="3" name="İçerik Yer Tutucusu 2">
+            <a:extLst>
+              <a:ext uri="{FF2B5EF4-FFF2-40B4-BE49-F238E27FC236}">
+                <a16:creationId xmlns:a16="http://schemas.microsoft.com/office/drawing/2014/main" id="{55DEF994-6D09-43FB-6841-99DEF3EBD4B4}"/>
+              </a:ext>
+            </a:extLst>
+          </p:cNvPr>
+          <p:cNvSpPr>
+            <a:spLocks noGrp="1"/>
+          </p:cNvSpPr>
+          <p:nvPr>
+            <p:ph idx="1"/>
+          </p:nvPr>
+        </p:nvSpPr>
+        <p:spPr/>
+        <p:txBody>
+          <a:bodyPr/>
+          <a:lstStyle/>
+          <a:p>
+            <a:r>
+              <a:rPr lang="tr-TR" dirty="0"/>
+              <a:t>Çamoğlu 3, 144</a:t>
+            </a:r>
+          </a:p>
+        </p:txBody>
+      </p:sp>
+      <p:sp>
+        <p:nvSpPr>
+          <p:cNvPr id="4" name="Veri Yer Tutucusu 3">
+            <a:extLst>
+              <a:ext uri="{FF2B5EF4-FFF2-40B4-BE49-F238E27FC236}">
+                <a16:creationId xmlns:a16="http://schemas.microsoft.com/office/drawing/2014/main" id="{D7BF5873-D8A4-67C7-4221-7DC6EAEA298C}"/>
+              </a:ext>
+            </a:extLst>
+          </p:cNvPr>
+          <p:cNvSpPr>
+            <a:spLocks noGrp="1"/>
+          </p:cNvSpPr>
+          <p:nvPr>
+            <p:ph type="dt" sz="half" idx="10"/>
+          </p:nvPr>
+        </p:nvSpPr>
+        <p:spPr/>
+        <p:txBody>
+          <a:bodyPr/>
+          <a:lstStyle/>
+          <a:p>
+            <a:fld id="{E5A72F27-F128-4B68-926B-C496DC38618F}" type="datetime1">
+              <a:rPr lang="tr-TR" smtClean="0"/>
+              <a:t>11.10.2026</a:t>
+            </a:fld>
+            <a:endParaRPr lang="tr-TR"/>
+          </a:p>
+        </p:txBody>
+      </p:sp>
+      <p:sp>
+        <p:nvSpPr>
+          <p:cNvPr id="5" name="Alt Bilgi Yer Tutucusu 4">
+            <a:extLst>
+              <a:ext uri="{FF2B5EF4-FFF2-40B4-BE49-F238E27FC236}">
+                <a16:creationId xmlns:a16="http://schemas.microsoft.com/office/drawing/2014/main" id="{96A87BDD-8075-84B5-DCDB-2DFB79E718E2}"/>
+              </a:ext>
+            </a:extLst>
+          </p:cNvPr>
+          <p:cNvSpPr>
+            <a:spLocks noGrp="1"/>
+          </p:cNvSpPr>
+          <p:nvPr>
+            <p:ph type="ftr" sz="quarter" idx="11"/>
+          </p:nvPr>
+        </p:nvSpPr>
+        <p:spPr/>
+        <p:txBody>
+          <a:bodyPr/>
+          <a:lstStyle/>
+          <a:p>
+            <a:r>
+              <a:rPr lang="tr-TR"/>
+              <a:t>Copyright: Harun Altay</a:t>
+            </a:r>
+          </a:p>
+        </p:txBody>
+      </p:sp>
+      <p:sp>
+        <p:nvSpPr>
+          <p:cNvPr id="6" name="Slayt Numarası Yer Tutucusu 5">
+            <a:extLst>
+              <a:ext uri="{FF2B5EF4-FFF2-40B4-BE49-F238E27FC236}">
+                <a16:creationId xmlns:a16="http://schemas.microsoft.com/office/drawing/2014/main" id="{76B6371E-D351-EDEA-D0F7-8A8019A2A795}"/>
+              </a:ext>
+            </a:extLst>
+          </p:cNvPr>
+          <p:cNvSpPr>
+            <a:spLocks noGrp="1"/>
+          </p:cNvSpPr>
+          <p:nvPr>
+            <p:ph type="sldNum" sz="quarter" idx="12"/>
+          </p:nvPr>
+        </p:nvSpPr>
+        <p:spPr/>
+        <p:txBody>
+          <a:bodyPr/>
+          <a:lstStyle/>
+          <a:p>
+            <a:fld id="{556A583B-49D3-4431-A76E-53060577655C}" type="slidenum">
+              <a:rPr lang="tr-TR" smtClean="0"/>
+              <a:t>50</a:t>
+            </a:fld>
+            <a:endParaRPr lang="tr-TR"/>
+          </a:p>
+        </p:txBody>
+      </p:sp>
+    </p:spTree>
+    <p:extLst>
+      <p:ext uri="{BB962C8B-B14F-4D97-AF65-F5344CB8AC3E}">
+        <p14:creationId xmlns:p14="http://schemas.microsoft.com/office/powerpoint/2010/main" val="454016312"/>
+      </p:ext>
+    </p:extLst>
+  </p:cSld>
+  <p:clrMapOvr>
+    <a:masterClrMapping/>
+  </p:clrMapOvr>
+</p:sld>
+</file>
+
+<file path=ppt/slides/slide51.xml><?xml version="1.0" encoding="utf-8"?>
+<p:sld xmlns:a="http://schemas.openxmlformats.org/drawingml/2006/main" xmlns:r="http://schemas.openxmlformats.org/officeDocument/2006/relationships" xmlns:p="http://schemas.openxmlformats.org/presentationml/2006/main">
+  <p:cSld>
+    <p:spTree>
+      <p:nvGrpSpPr>
+        <p:cNvPr id="1" name="">
+          <a:extLst>
+            <a:ext uri="{FF2B5EF4-FFF2-40B4-BE49-F238E27FC236}">
               <a16:creationId xmlns:a16="http://schemas.microsoft.com/office/drawing/2014/main" id="{CED4DE73-23B7-95E8-F432-04B974A3FB8C}"/>
             </a:ext>
           </a:extLst>
@@ -31000,7 +31341,7 @@
           <a:p>
             <a:fld id="{556A583B-49D3-4431-A76E-53060577655C}" type="slidenum">
               <a:rPr lang="tr-TR" smtClean="0"/>
-              <a:t>50</a:t>
+              <a:t>51</a:t>
             </a:fld>
             <a:endParaRPr lang="tr-TR"/>
           </a:p>
@@ -31019,7 +31360,7 @@
 </p:sld>
 </file>
 
-<file path=ppt/slides/slide51.xml><?xml version="1.0" encoding="utf-8"?>
+<file path=ppt/slides/slide52.xml><?xml version="1.0" encoding="utf-8"?>
 <p:sld xmlns:a="http://schemas.openxmlformats.org/drawingml/2006/main" xmlns:r="http://schemas.openxmlformats.org/officeDocument/2006/relationships" xmlns:p="http://schemas.openxmlformats.org/presentationml/2006/main">
   <p:cSld>
     <p:spTree>
@@ -31180,7 +31521,7 @@
           <a:p>
             <a:fld id="{556A583B-49D3-4431-A76E-53060577655C}" type="slidenum">
               <a:rPr lang="tr-TR" smtClean="0"/>
-              <a:t>51</a:t>
+              <a:t>52</a:t>
             </a:fld>
             <a:endParaRPr lang="tr-TR"/>
           </a:p>
@@ -31199,7 +31540,7 @@
 </p:sld>
 </file>
 
-<file path=ppt/slides/slide52.xml><?xml version="1.0" encoding="utf-8"?>
+<file path=ppt/slides/slide53.xml><?xml version="1.0" encoding="utf-8"?>
 <p:sld xmlns:a="http://schemas.openxmlformats.org/drawingml/2006/main" xmlns:r="http://schemas.openxmlformats.org/officeDocument/2006/relationships" xmlns:p="http://schemas.openxmlformats.org/presentationml/2006/main">
   <p:cSld>
     <p:spTree>
@@ -31360,7 +31701,7 @@
           <a:p>
             <a:fld id="{556A583B-49D3-4431-A76E-53060577655C}" type="slidenum">
               <a:rPr lang="tr-TR" smtClean="0"/>
-              <a:t>52</a:t>
+              <a:t>53</a:t>
             </a:fld>
             <a:endParaRPr lang="tr-TR"/>
           </a:p>
@@ -31379,7 +31720,7 @@
 </p:sld>
 </file>
 
-<file path=ppt/slides/slide53.xml><?xml version="1.0" encoding="utf-8"?>
+<file path=ppt/slides/slide54.xml><?xml version="1.0" encoding="utf-8"?>
 <p:sld xmlns:a="http://schemas.openxmlformats.org/drawingml/2006/main" xmlns:r="http://schemas.openxmlformats.org/officeDocument/2006/relationships" xmlns:p="http://schemas.openxmlformats.org/presentationml/2006/main">
   <p:cSld>
     <p:spTree>
@@ -31540,7 +31881,7 @@
           <a:p>
             <a:fld id="{556A583B-49D3-4431-A76E-53060577655C}" type="slidenum">
               <a:rPr lang="tr-TR" smtClean="0"/>
-              <a:t>53</a:t>
+              <a:t>54</a:t>
             </a:fld>
             <a:endParaRPr lang="tr-TR"/>
           </a:p>
@@ -31559,7 +31900,7 @@
 </p:sld>
 </file>
 
-<file path=ppt/slides/slide54.xml><?xml version="1.0" encoding="utf-8"?>
+<file path=ppt/slides/slide55.xml><?xml version="1.0" encoding="utf-8"?>
 <p:sld xmlns:a="http://schemas.openxmlformats.org/drawingml/2006/main" xmlns:r="http://schemas.openxmlformats.org/officeDocument/2006/relationships" xmlns:p="http://schemas.openxmlformats.org/presentationml/2006/main">
   <p:cSld>
     <p:spTree>
@@ -31720,7 +32061,7 @@
           <a:p>
             <a:fld id="{556A583B-49D3-4431-A76E-53060577655C}" type="slidenum">
               <a:rPr lang="tr-TR" smtClean="0"/>
-              <a:t>54</a:t>
+              <a:t>55</a:t>
             </a:fld>
             <a:endParaRPr lang="tr-TR"/>
           </a:p>
@@ -31739,7 +32080,7 @@
 </p:sld>
 </file>
 
-<file path=ppt/slides/slide55.xml><?xml version="1.0" encoding="utf-8"?>
+<file path=ppt/slides/slide56.xml><?xml version="1.0" encoding="utf-8"?>
 <p:sld xmlns:a="http://schemas.openxmlformats.org/drawingml/2006/main" xmlns:r="http://schemas.openxmlformats.org/officeDocument/2006/relationships" xmlns:p="http://schemas.openxmlformats.org/presentationml/2006/main">
   <p:cSld>
     <p:spTree>
@@ -31908,7 +32249,7 @@
           <a:p>
             <a:fld id="{556A583B-49D3-4431-A76E-53060577655C}" type="slidenum">
               <a:rPr lang="tr-TR" smtClean="0"/>
-              <a:t>55</a:t>
+              <a:t>56</a:t>
             </a:fld>
             <a:endParaRPr lang="tr-TR"/>
           </a:p>
@@ -31927,7 +32268,7 @@
 </p:sld>
 </file>
 
-<file path=ppt/slides/slide56.xml><?xml version="1.0" encoding="utf-8"?>
+<file path=ppt/slides/slide57.xml><?xml version="1.0" encoding="utf-8"?>
 <p:sld xmlns:a="http://schemas.openxmlformats.org/drawingml/2006/main" xmlns:r="http://schemas.openxmlformats.org/officeDocument/2006/relationships" xmlns:p="http://schemas.openxmlformats.org/presentationml/2006/main">
   <p:cSld>
     <p:spTree>
@@ -32088,7 +32429,7 @@
           <a:p>
             <a:fld id="{556A583B-49D3-4431-A76E-53060577655C}" type="slidenum">
               <a:rPr lang="tr-TR" smtClean="0"/>
-              <a:t>56</a:t>
+              <a:t>57</a:t>
             </a:fld>
             <a:endParaRPr lang="tr-TR"/>
           </a:p>
@@ -32107,7 +32448,7 @@
 </p:sld>
 </file>
 
-<file path=ppt/slides/slide57.xml><?xml version="1.0" encoding="utf-8"?>
+<file path=ppt/slides/slide58.xml><?xml version="1.0" encoding="utf-8"?>
 <p:sld xmlns:a="http://schemas.openxmlformats.org/drawingml/2006/main" xmlns:r="http://schemas.openxmlformats.org/officeDocument/2006/relationships" xmlns:p="http://schemas.openxmlformats.org/presentationml/2006/main">
   <p:cSld>
     <p:spTree>
@@ -32365,7 +32706,7 @@
           <a:p>
             <a:fld id="{556A583B-49D3-4431-A76E-53060577655C}" type="slidenum">
               <a:rPr lang="tr-TR" smtClean="0"/>
-              <a:t>57</a:t>
+              <a:t>58</a:t>
             </a:fld>
             <a:endParaRPr lang="tr-TR"/>
           </a:p>
@@ -32384,7 +32725,7 @@
 </p:sld>
 </file>
 
-<file path=ppt/slides/slide58.xml><?xml version="1.0" encoding="utf-8"?>
+<file path=ppt/slides/slide59.xml><?xml version="1.0" encoding="utf-8"?>
 <p:sld xmlns:a="http://schemas.openxmlformats.org/drawingml/2006/main" xmlns:r="http://schemas.openxmlformats.org/officeDocument/2006/relationships" xmlns:p="http://schemas.openxmlformats.org/presentationml/2006/main">
   <p:cSld>
     <p:spTree>
@@ -32560,7 +32901,7 @@
           <a:p>
             <a:fld id="{556A583B-49D3-4431-A76E-53060577655C}" type="slidenum">
               <a:rPr lang="tr-TR" smtClean="0"/>
-              <a:t>58</a:t>
+              <a:t>59</a:t>
             </a:fld>
             <a:endParaRPr lang="tr-TR"/>
           </a:p>
@@ -32570,168 +32911,6 @@
     <p:extLst>
       <p:ext uri="{BB962C8B-B14F-4D97-AF65-F5344CB8AC3E}">
         <p14:creationId xmlns:p14="http://schemas.microsoft.com/office/powerpoint/2010/main" val="588949760"/>
-      </p:ext>
-    </p:extLst>
-  </p:cSld>
-  <p:clrMapOvr>
-    <a:masterClrMapping/>
-  </p:clrMapOvr>
-</p:sld>
-</file>
-
-<file path=ppt/slides/slide59.xml><?xml version="1.0" encoding="utf-8"?>
-<p:sld xmlns:a="http://schemas.openxmlformats.org/drawingml/2006/main" xmlns:r="http://schemas.openxmlformats.org/officeDocument/2006/relationships" xmlns:p="http://schemas.openxmlformats.org/presentationml/2006/main">
-  <p:cSld>
-    <p:spTree>
-      <p:nvGrpSpPr>
-        <p:cNvPr id="1" name="">
-          <a:extLst>
-            <a:ext uri="{FF2B5EF4-FFF2-40B4-BE49-F238E27FC236}">
-              <a16:creationId xmlns:a16="http://schemas.microsoft.com/office/drawing/2014/main" id="{C09E59DB-CE48-E2B8-E091-54AF135A95F9}"/>
-            </a:ext>
-          </a:extLst>
-        </p:cNvPr>
-        <p:cNvGrpSpPr/>
-        <p:nvPr/>
-      </p:nvGrpSpPr>
-      <p:grpSpPr>
-        <a:xfrm>
-          <a:off x="0" y="0"/>
-          <a:ext cx="0" cy="0"/>
-          <a:chOff x="0" y="0"/>
-          <a:chExt cx="0" cy="0"/>
-        </a:xfrm>
-      </p:grpSpPr>
-      <p:sp>
-        <p:nvSpPr>
-          <p:cNvPr id="3" name="İçerik Yer Tutucusu 2">
-            <a:extLst>
-              <a:ext uri="{FF2B5EF4-FFF2-40B4-BE49-F238E27FC236}">
-                <a16:creationId xmlns:a16="http://schemas.microsoft.com/office/drawing/2014/main" id="{455E2F0B-990D-0648-DBCD-66353CCDFBAE}"/>
-              </a:ext>
-            </a:extLst>
-          </p:cNvPr>
-          <p:cNvSpPr>
-            <a:spLocks noGrp="1"/>
-          </p:cNvSpPr>
-          <p:nvPr>
-            <p:ph idx="1"/>
-          </p:nvPr>
-        </p:nvSpPr>
-        <p:spPr>
-          <a:xfrm>
-            <a:off x="730045" y="2408902"/>
-            <a:ext cx="10515600" cy="1455175"/>
-          </a:xfrm>
-        </p:spPr>
-        <p:txBody>
-          <a:bodyPr>
-            <a:normAutofit/>
-          </a:bodyPr>
-          <a:lstStyle/>
-          <a:p>
-            <a:pPr algn="ctr"/>
-            <a:r>
-              <a:rPr lang="tr-TR" sz="4800" dirty="0"/>
-              <a:t>Sabırla izlediğiniz için teşekkür ederiz!</a:t>
-            </a:r>
-          </a:p>
-          <a:p>
-            <a:pPr algn="ctr"/>
-            <a:endParaRPr lang="tr-TR" sz="4800" dirty="0"/>
-          </a:p>
-        </p:txBody>
-      </p:sp>
-      <p:sp>
-        <p:nvSpPr>
-          <p:cNvPr id="2" name="Veri Yer Tutucusu 1">
-            <a:extLst>
-              <a:ext uri="{FF2B5EF4-FFF2-40B4-BE49-F238E27FC236}">
-                <a16:creationId xmlns:a16="http://schemas.microsoft.com/office/drawing/2014/main" id="{A6E549C8-520A-BFFF-F177-BEE5CBFBFE91}"/>
-              </a:ext>
-            </a:extLst>
-          </p:cNvPr>
-          <p:cNvSpPr>
-            <a:spLocks noGrp="1"/>
-          </p:cNvSpPr>
-          <p:nvPr>
-            <p:ph type="dt" sz="half" idx="10"/>
-          </p:nvPr>
-        </p:nvSpPr>
-        <p:spPr/>
-        <p:txBody>
-          <a:bodyPr/>
-          <a:lstStyle/>
-          <a:p>
-            <a:fld id="{C143AAC5-8CDF-4095-BD1F-1322883AC1B0}" type="datetime1">
-              <a:rPr lang="tr-TR" smtClean="0"/>
-              <a:t>11.10.2026</a:t>
-            </a:fld>
-            <a:endParaRPr lang="tr-TR"/>
-          </a:p>
-        </p:txBody>
-      </p:sp>
-      <p:sp>
-        <p:nvSpPr>
-          <p:cNvPr id="4" name="Alt Bilgi Yer Tutucusu 3">
-            <a:extLst>
-              <a:ext uri="{FF2B5EF4-FFF2-40B4-BE49-F238E27FC236}">
-                <a16:creationId xmlns:a16="http://schemas.microsoft.com/office/drawing/2014/main" id="{564434AA-A919-0D9B-6D5D-D31D224A71D2}"/>
-              </a:ext>
-            </a:extLst>
-          </p:cNvPr>
-          <p:cNvSpPr>
-            <a:spLocks noGrp="1"/>
-          </p:cNvSpPr>
-          <p:nvPr>
-            <p:ph type="ftr" sz="quarter" idx="11"/>
-          </p:nvPr>
-        </p:nvSpPr>
-        <p:spPr/>
-        <p:txBody>
-          <a:bodyPr/>
-          <a:lstStyle/>
-          <a:p>
-            <a:r>
-              <a:rPr lang="tr-TR"/>
-              <a:t>Copyright: Harun Altay</a:t>
-            </a:r>
-          </a:p>
-        </p:txBody>
-      </p:sp>
-      <p:sp>
-        <p:nvSpPr>
-          <p:cNvPr id="5" name="Slayt Numarası Yer Tutucusu 4">
-            <a:extLst>
-              <a:ext uri="{FF2B5EF4-FFF2-40B4-BE49-F238E27FC236}">
-                <a16:creationId xmlns:a16="http://schemas.microsoft.com/office/drawing/2014/main" id="{F5C13B5C-6512-5FF2-90EF-8AE7B8B9FDAB}"/>
-              </a:ext>
-            </a:extLst>
-          </p:cNvPr>
-          <p:cNvSpPr>
-            <a:spLocks noGrp="1"/>
-          </p:cNvSpPr>
-          <p:nvPr>
-            <p:ph type="sldNum" sz="quarter" idx="12"/>
-          </p:nvPr>
-        </p:nvSpPr>
-        <p:spPr/>
-        <p:txBody>
-          <a:bodyPr/>
-          <a:lstStyle/>
-          <a:p>
-            <a:fld id="{556A583B-49D3-4431-A76E-53060577655C}" type="slidenum">
-              <a:rPr lang="tr-TR" smtClean="0"/>
-              <a:t>59</a:t>
-            </a:fld>
-            <a:endParaRPr lang="tr-TR"/>
-          </a:p>
-        </p:txBody>
-      </p:sp>
-    </p:spTree>
-    <p:extLst>
-      <p:ext uri="{BB962C8B-B14F-4D97-AF65-F5344CB8AC3E}">
-        <p14:creationId xmlns:p14="http://schemas.microsoft.com/office/powerpoint/2010/main" val="2531446554"/>
       </p:ext>
     </p:extLst>
   </p:cSld>
@@ -32919,6 +33098,168 @@
     <p:extLst>
       <p:ext uri="{BB962C8B-B14F-4D97-AF65-F5344CB8AC3E}">
         <p14:creationId xmlns:p14="http://schemas.microsoft.com/office/powerpoint/2010/main" val="2985869403"/>
+      </p:ext>
+    </p:extLst>
+  </p:cSld>
+  <p:clrMapOvr>
+    <a:masterClrMapping/>
+  </p:clrMapOvr>
+</p:sld>
+</file>
+
+<file path=ppt/slides/slide60.xml><?xml version="1.0" encoding="utf-8"?>
+<p:sld xmlns:a="http://schemas.openxmlformats.org/drawingml/2006/main" xmlns:r="http://schemas.openxmlformats.org/officeDocument/2006/relationships" xmlns:p="http://schemas.openxmlformats.org/presentationml/2006/main">
+  <p:cSld>
+    <p:spTree>
+      <p:nvGrpSpPr>
+        <p:cNvPr id="1" name="">
+          <a:extLst>
+            <a:ext uri="{FF2B5EF4-FFF2-40B4-BE49-F238E27FC236}">
+              <a16:creationId xmlns:a16="http://schemas.microsoft.com/office/drawing/2014/main" id="{C09E59DB-CE48-E2B8-E091-54AF135A95F9}"/>
+            </a:ext>
+          </a:extLst>
+        </p:cNvPr>
+        <p:cNvGrpSpPr/>
+        <p:nvPr/>
+      </p:nvGrpSpPr>
+      <p:grpSpPr>
+        <a:xfrm>
+          <a:off x="0" y="0"/>
+          <a:ext cx="0" cy="0"/>
+          <a:chOff x="0" y="0"/>
+          <a:chExt cx="0" cy="0"/>
+        </a:xfrm>
+      </p:grpSpPr>
+      <p:sp>
+        <p:nvSpPr>
+          <p:cNvPr id="3" name="İçerik Yer Tutucusu 2">
+            <a:extLst>
+              <a:ext uri="{FF2B5EF4-FFF2-40B4-BE49-F238E27FC236}">
+                <a16:creationId xmlns:a16="http://schemas.microsoft.com/office/drawing/2014/main" id="{455E2F0B-990D-0648-DBCD-66353CCDFBAE}"/>
+              </a:ext>
+            </a:extLst>
+          </p:cNvPr>
+          <p:cNvSpPr>
+            <a:spLocks noGrp="1"/>
+          </p:cNvSpPr>
+          <p:nvPr>
+            <p:ph idx="1"/>
+          </p:nvPr>
+        </p:nvSpPr>
+        <p:spPr>
+          <a:xfrm>
+            <a:off x="730045" y="2408902"/>
+            <a:ext cx="10515600" cy="1455175"/>
+          </a:xfrm>
+        </p:spPr>
+        <p:txBody>
+          <a:bodyPr>
+            <a:normAutofit/>
+          </a:bodyPr>
+          <a:lstStyle/>
+          <a:p>
+            <a:pPr algn="ctr"/>
+            <a:r>
+              <a:rPr lang="tr-TR" sz="4800" dirty="0"/>
+              <a:t>Sabırla izlediğiniz için teşekkür ederiz!</a:t>
+            </a:r>
+          </a:p>
+          <a:p>
+            <a:pPr algn="ctr"/>
+            <a:endParaRPr lang="tr-TR" sz="4800" dirty="0"/>
+          </a:p>
+        </p:txBody>
+      </p:sp>
+      <p:sp>
+        <p:nvSpPr>
+          <p:cNvPr id="2" name="Veri Yer Tutucusu 1">
+            <a:extLst>
+              <a:ext uri="{FF2B5EF4-FFF2-40B4-BE49-F238E27FC236}">
+                <a16:creationId xmlns:a16="http://schemas.microsoft.com/office/drawing/2014/main" id="{A6E549C8-520A-BFFF-F177-BEE5CBFBFE91}"/>
+              </a:ext>
+            </a:extLst>
+          </p:cNvPr>
+          <p:cNvSpPr>
+            <a:spLocks noGrp="1"/>
+          </p:cNvSpPr>
+          <p:nvPr>
+            <p:ph type="dt" sz="half" idx="10"/>
+          </p:nvPr>
+        </p:nvSpPr>
+        <p:spPr/>
+        <p:txBody>
+          <a:bodyPr/>
+          <a:lstStyle/>
+          <a:p>
+            <a:fld id="{C143AAC5-8CDF-4095-BD1F-1322883AC1B0}" type="datetime1">
+              <a:rPr lang="tr-TR" smtClean="0"/>
+              <a:t>11.10.2026</a:t>
+            </a:fld>
+            <a:endParaRPr lang="tr-TR"/>
+          </a:p>
+        </p:txBody>
+      </p:sp>
+      <p:sp>
+        <p:nvSpPr>
+          <p:cNvPr id="4" name="Alt Bilgi Yer Tutucusu 3">
+            <a:extLst>
+              <a:ext uri="{FF2B5EF4-FFF2-40B4-BE49-F238E27FC236}">
+                <a16:creationId xmlns:a16="http://schemas.microsoft.com/office/drawing/2014/main" id="{564434AA-A919-0D9B-6D5D-D31D224A71D2}"/>
+              </a:ext>
+            </a:extLst>
+          </p:cNvPr>
+          <p:cNvSpPr>
+            <a:spLocks noGrp="1"/>
+          </p:cNvSpPr>
+          <p:nvPr>
+            <p:ph type="ftr" sz="quarter" idx="11"/>
+          </p:nvPr>
+        </p:nvSpPr>
+        <p:spPr/>
+        <p:txBody>
+          <a:bodyPr/>
+          <a:lstStyle/>
+          <a:p>
+            <a:r>
+              <a:rPr lang="tr-TR"/>
+              <a:t>Copyright: Harun Altay</a:t>
+            </a:r>
+          </a:p>
+        </p:txBody>
+      </p:sp>
+      <p:sp>
+        <p:nvSpPr>
+          <p:cNvPr id="5" name="Slayt Numarası Yer Tutucusu 4">
+            <a:extLst>
+              <a:ext uri="{FF2B5EF4-FFF2-40B4-BE49-F238E27FC236}">
+                <a16:creationId xmlns:a16="http://schemas.microsoft.com/office/drawing/2014/main" id="{F5C13B5C-6512-5FF2-90EF-8AE7B8B9FDAB}"/>
+              </a:ext>
+            </a:extLst>
+          </p:cNvPr>
+          <p:cNvSpPr>
+            <a:spLocks noGrp="1"/>
+          </p:cNvSpPr>
+          <p:nvPr>
+            <p:ph type="sldNum" sz="quarter" idx="12"/>
+          </p:nvPr>
+        </p:nvSpPr>
+        <p:spPr/>
+        <p:txBody>
+          <a:bodyPr/>
+          <a:lstStyle/>
+          <a:p>
+            <a:fld id="{556A583B-49D3-4431-A76E-53060577655C}" type="slidenum">
+              <a:rPr lang="tr-TR" smtClean="0"/>
+              <a:t>60</a:t>
+            </a:fld>
+            <a:endParaRPr lang="tr-TR"/>
+          </a:p>
+        </p:txBody>
+      </p:sp>
+    </p:spTree>
+    <p:extLst>
+      <p:ext uri="{BB962C8B-B14F-4D97-AF65-F5344CB8AC3E}">
+        <p14:creationId xmlns:p14="http://schemas.microsoft.com/office/powerpoint/2010/main" val="2531446554"/>
       </p:ext>
     </p:extLst>
   </p:cSld>

--- a/prog-diller/yazilim-sunum/Yazilim-Programlama-Dilleri-Giris.pptx
+++ b/prog-diller/yazilim-sunum/Yazilim-Programlama-Dilleri-Giris.pptx
@@ -6364,7 +6364,31 @@
           <a:p>
             <a:r>
               <a:rPr lang="tr-TR" dirty="0"/>
-              <a:t>MOOC, </a:t>
+              <a:t>MOOC</a:t>
+            </a:r>
+            <a:r>
+              <a:rPr lang="tr-TR" sz="2200" dirty="0"/>
+              <a:t> (</a:t>
+            </a:r>
+            <a:r>
+              <a:rPr lang="tr-TR" sz="2200" dirty="0" err="1"/>
+              <a:t>Massive</a:t>
+            </a:r>
+            <a:r>
+              <a:rPr lang="tr-TR" sz="2200" dirty="0"/>
+              <a:t> </a:t>
+            </a:r>
+            <a:r>
+              <a:rPr lang="tr-TR" sz="2200"/>
+              <a:t>Open Online </a:t>
+            </a:r>
+            <a:r>
+              <a:rPr lang="tr-TR" sz="2200" dirty="0"/>
+              <a:t>Course)</a:t>
+            </a:r>
+            <a:r>
+              <a:rPr lang="tr-TR" dirty="0"/>
+              <a:t>, </a:t>
             </a:r>
           </a:p>
           <a:p>
@@ -6630,7 +6654,7 @@
         </p:spPr>
         <p:txBody>
           <a:bodyPr>
-            <a:normAutofit fontScale="62500" lnSpcReduction="20000"/>
+            <a:normAutofit fontScale="70000" lnSpcReduction="20000"/>
           </a:bodyPr>
           <a:lstStyle/>
           <a:p>
@@ -6736,27 +6760,7 @@
             </a:r>
             <a:r>
               <a:rPr lang="en-US" dirty="0"/>
-              <a:t>"I want to understand which programming </a:t>
-            </a:r>
-            <a:endParaRPr lang="tr-TR" dirty="0"/>
-          </a:p>
-          <a:p>
-            <a:pPr marL="0" indent="0">
-              <a:buNone/>
-            </a:pPr>
-            <a:r>
-              <a:rPr lang="en-US" dirty="0"/>
-              <a:t>languages are commonly used in different industries </a:t>
-            </a:r>
-            <a:endParaRPr lang="tr-TR" dirty="0"/>
-          </a:p>
-          <a:p>
-            <a:pPr marL="0" indent="0">
-              <a:buNone/>
-            </a:pPr>
-            <a:r>
-              <a:rPr lang="en-US" dirty="0"/>
-              <a:t>and application areas."</a:t>
+              <a:t>"I want to understand which programming languages are commonly used in different industries and application areas."</a:t>
             </a:r>
           </a:p>
           <a:p>
@@ -6798,18 +6802,8 @@
               <a:t>alanlarda</a:t>
             </a:r>
             <a:r>
-              <a:rPr lang="en-US" dirty="0"/>
-              <a:t>, </a:t>
-            </a:r>
-            <a:endParaRPr lang="tr-TR" dirty="0"/>
-          </a:p>
-          <a:p>
-            <a:pPr marL="0" indent="0">
-              <a:buNone/>
-            </a:pPr>
-            <a:r>
-              <a:rPr lang="en-US" dirty="0"/>
-              <a:t>hangi </a:t>
+              <a:rPr lang="en-US"/>
+              <a:t>, hangi </a:t>
             </a:r>
             <a:r>
               <a:rPr lang="en-US" dirty="0" err="1"/>
